--- a/docs/slides/aitd1_week1_groupwork.pptx
+++ b/docs/slides/aitd1_week1_groupwork.pptx
@@ -3247,7 +3247,7 @@
                 </a:solidFill>
                 <a:latin typeface="Noto Sans JP"/>
               </a:rPr>
-              <a:t>班番号：</a:t>
+              <a:t>グループ番号：</a:t>
             </a:r>
           </a:p>
         </p:txBody>

--- a/docs/slides/aitd1_week1_groupwork.pptx
+++ b/docs/slides/aitd1_week1_groupwork.pptx
@@ -8,8 +8,6 @@
     <p:sldId id="256" r:id="rId7"/>
     <p:sldId id="257" r:id="rId8"/>
     <p:sldId id="258" r:id="rId9"/>
-    <p:sldId id="259" r:id="rId10"/>
-    <p:sldId id="260" r:id="rId11"/>
   </p:sldIdLst>
   <p:sldSz cx="12192119" cy="6858000" type="screen4x3"/>
   <p:notesSz cx="6858000" cy="9144000"/>
@@ -3100,8 +3098,8 @@
         </p:nvSpPr>
         <p:spPr>
           <a:xfrm>
-            <a:off x="720000" y="1260000"/>
-            <a:ext cx="10800000" cy="720000"/>
+            <a:off x="360000" y="180000"/>
+            <a:ext cx="11448000" cy="468000"/>
           </a:xfrm>
           <a:prstGeom prst="rect">
             <a:avLst/>
@@ -3116,13 +3114,13 @@
           <a:p>
             <a:pPr algn="l"/>
             <a:r>
-              <a:rPr sz="2000" b="0">
-                <a:solidFill>
-                  <a:srgbClr val="555555"/>
-                </a:solidFill>
-                <a:latin typeface="Noto Sans JP"/>
-              </a:rPr>
-              <a:t>人工知能(AI)テクノロジデザインⅠ　第1回</a:t>
+              <a:rPr sz="2200" b="1">
+                <a:solidFill>
+                  <a:srgbClr val="222222"/>
+                </a:solidFill>
+                <a:latin typeface="Noto Sans JP"/>
+              </a:rPr>
+              <a:t>GW1-1　AIの3つのアプローチ ― 表を完成させる（10分）</a:t>
             </a:r>
           </a:p>
         </p:txBody>
@@ -3135,8 +3133,8 @@
         </p:nvSpPr>
         <p:spPr>
           <a:xfrm>
-            <a:off x="720000" y="1872000"/>
-            <a:ext cx="10800000" cy="900000"/>
+            <a:off x="360000" y="630000"/>
+            <a:ext cx="11448000" cy="324000"/>
           </a:xfrm>
           <a:prstGeom prst="rect">
             <a:avLst/>
@@ -3151,72 +3149,37 @@
           <a:p>
             <a:pPr algn="l"/>
             <a:r>
-              <a:rPr sz="3400" b="1">
-                <a:solidFill>
-                  <a:srgbClr val="222222"/>
-                </a:solidFill>
-                <a:latin typeface="Noto Sans JP"/>
-              </a:rPr>
-              <a:t>グループワーク　穴埋めスライド</a:t>
-            </a:r>
-          </a:p>
-        </p:txBody>
-      </p:sp>
-      <p:sp>
-        <p:nvSpPr>
-          <p:cNvPr id="4" name="TextBox 3"/>
-          <p:cNvSpPr txBox="1"/>
-          <p:nvPr/>
-        </p:nvSpPr>
-        <p:spPr>
-          <a:xfrm>
-            <a:off x="720000" y="2880000"/>
-            <a:ext cx="10800000" cy="432000"/>
+              <a:rPr sz="1200" b="0">
+                <a:solidFill>
+                  <a:srgbClr val="555555"/>
+                </a:solidFill>
+                <a:latin typeface="Noto Sans JP"/>
+              </a:rPr>
+              <a:t>「どこに注目するか（特徴量）」と「どう判定するか（判定ルール）」を，人が作るのか，データから学習するのか．右のチップを表に貼り，空欄を埋める．</a:t>
+            </a:r>
+          </a:p>
+        </p:txBody>
+      </p:sp>
+      <p:sp>
+        <p:nvSpPr>
+          <p:cNvPr id="4" name="Rectangle 3"/>
+          <p:cNvSpPr/>
+          <p:nvPr/>
+        </p:nvSpPr>
+        <p:spPr>
+          <a:xfrm>
+            <a:off x="360000" y="1152000"/>
+            <a:ext cx="1872000" cy="576000"/>
           </a:xfrm>
           <a:prstGeom prst="rect">
             <a:avLst/>
           </a:prstGeom>
-          <a:noFill/>
-        </p:spPr>
-        <p:txBody>
-          <a:bodyPr wrap="square" anchor="t" lIns="54000" rIns="54000" tIns="18000" bIns="18000">
-            <a:spAutoFit/>
-          </a:bodyPr>
-          <a:lstStyle/>
-          <a:p>
-            <a:pPr algn="l"/>
-            <a:r>
-              <a:rPr sz="1600" b="0">
-                <a:solidFill>
-                  <a:srgbClr val="555555"/>
-                </a:solidFill>
-                <a:latin typeface="Noto Sans JP"/>
-              </a:rPr>
-              <a:t>GW1 AIは何を学習するのか ／ GW2 ディープラーニングプログラミングの流れ</a:t>
-            </a:r>
-          </a:p>
-        </p:txBody>
-      </p:sp>
-      <p:sp>
-        <p:nvSpPr>
-          <p:cNvPr id="5" name="Rounded Rectangle 4"/>
-          <p:cNvSpPr/>
-          <p:nvPr/>
-        </p:nvSpPr>
-        <p:spPr>
-          <a:xfrm>
-            <a:off x="720000" y="3780000"/>
-            <a:ext cx="2160000" cy="503999"/>
-          </a:xfrm>
-          <a:prstGeom prst="roundRect">
-            <a:avLst/>
-          </a:prstGeom>
-          <a:solidFill>
-            <a:srgbClr val="FFF9C4"/>
+          <a:solidFill>
+            <a:srgbClr val="ECEE67"/>
           </a:solidFill>
           <a:ln w="15875">
             <a:solidFill>
-              <a:srgbClr val="F9A825"/>
+              <a:srgbClr val="888888"/>
             </a:solidFill>
           </a:ln>
           <a:effectLst/>
@@ -3239,39 +3202,39 @@
           <a:bodyPr rtlCol="0" anchor="ctr" wrap="square" lIns="54000" rIns="54000"/>
           <a:lstStyle/>
           <a:p>
-            <a:pPr algn="l"/>
-            <a:r>
-              <a:rPr sz="1400" b="0">
-                <a:solidFill>
-                  <a:srgbClr val="222222"/>
-                </a:solidFill>
-                <a:latin typeface="Noto Sans JP"/>
-              </a:rPr>
-              <a:t>グループ番号：</a:t>
-            </a:r>
-          </a:p>
-        </p:txBody>
-      </p:sp>
-      <p:sp>
-        <p:nvSpPr>
-          <p:cNvPr id="6" name="Rounded Rectangle 5"/>
+            <a:pPr algn="ctr"/>
+            <a:r>
+              <a:rPr sz="1200" b="1">
+                <a:solidFill>
+                  <a:srgbClr val="222222"/>
+                </a:solidFill>
+                <a:latin typeface="Noto Sans JP"/>
+              </a:rPr>
+              <a:t>アプローチ</a:t>
+            </a:r>
+          </a:p>
+        </p:txBody>
+      </p:sp>
+      <p:sp>
+        <p:nvSpPr>
+          <p:cNvPr id="5" name="Rectangle 4"/>
           <p:cNvSpPr/>
           <p:nvPr/>
         </p:nvSpPr>
         <p:spPr>
           <a:xfrm>
-            <a:off x="3060000" y="3780000"/>
-            <a:ext cx="8424000" cy="503999"/>
-          </a:xfrm>
-          <a:prstGeom prst="roundRect">
-            <a:avLst/>
-          </a:prstGeom>
-          <a:solidFill>
-            <a:srgbClr val="FFF9C4"/>
+            <a:off x="2232000" y="1152000"/>
+            <a:ext cx="2015999" cy="576000"/>
+          </a:xfrm>
+          <a:prstGeom prst="rect">
+            <a:avLst/>
+          </a:prstGeom>
+          <a:solidFill>
+            <a:srgbClr val="ECEE67"/>
           </a:solidFill>
           <a:ln w="15875">
             <a:solidFill>
-              <a:srgbClr val="F9A825"/>
+              <a:srgbClr val="888888"/>
             </a:solidFill>
           </a:ln>
           <a:effectLst/>
@@ -3294,7 +3257,306 @@
           <a:bodyPr rtlCol="0" anchor="ctr" wrap="square" lIns="54000" rIns="54000"/>
           <a:lstStyle/>
           <a:p>
-            <a:pPr algn="l"/>
+            <a:pPr algn="ctr"/>
+            <a:r>
+              <a:rPr sz="1200" b="1">
+                <a:solidFill>
+                  <a:srgbClr val="222222"/>
+                </a:solidFill>
+                <a:latin typeface="Noto Sans JP"/>
+              </a:rPr>
+              <a:t>主な時期</a:t>
+            </a:r>
+          </a:p>
+        </p:txBody>
+      </p:sp>
+      <p:sp>
+        <p:nvSpPr>
+          <p:cNvPr id="6" name="Rectangle 5"/>
+          <p:cNvSpPr/>
+          <p:nvPr/>
+        </p:nvSpPr>
+        <p:spPr>
+          <a:xfrm>
+            <a:off x="4248000" y="1152000"/>
+            <a:ext cx="1944000" cy="576000"/>
+          </a:xfrm>
+          <a:prstGeom prst="rect">
+            <a:avLst/>
+          </a:prstGeom>
+          <a:solidFill>
+            <a:srgbClr val="ECEE67"/>
+          </a:solidFill>
+          <a:ln w="15875">
+            <a:solidFill>
+              <a:srgbClr val="888888"/>
+            </a:solidFill>
+          </a:ln>
+          <a:effectLst/>
+        </p:spPr>
+        <p:style>
+          <a:lnRef idx="1">
+            <a:schemeClr val="accent1"/>
+          </a:lnRef>
+          <a:fillRef idx="3">
+            <a:schemeClr val="accent1"/>
+          </a:fillRef>
+          <a:effectRef idx="2">
+            <a:schemeClr val="accent1"/>
+          </a:effectRef>
+          <a:fontRef idx="minor">
+            <a:schemeClr val="lt1"/>
+          </a:fontRef>
+        </p:style>
+        <p:txBody>
+          <a:bodyPr rtlCol="0" anchor="ctr" wrap="square" lIns="54000" rIns="54000"/>
+          <a:lstStyle/>
+          <a:p>
+            <a:pPr algn="ctr"/>
+            <a:r>
+              <a:rPr sz="1200" b="1">
+                <a:solidFill>
+                  <a:srgbClr val="222222"/>
+                </a:solidFill>
+                <a:latin typeface="Noto Sans JP"/>
+              </a:rPr>
+              <a:t>特徴量</a:t>
+            </a:r>
+          </a:p>
+          <a:p>
+            <a:pPr algn="ctr"/>
+            <a:r>
+              <a:rPr sz="1200" b="1">
+                <a:solidFill>
+                  <a:srgbClr val="222222"/>
+                </a:solidFill>
+                <a:latin typeface="Noto Sans JP"/>
+              </a:rPr>
+              <a:t>（どこに注目するか）</a:t>
+            </a:r>
+          </a:p>
+        </p:txBody>
+      </p:sp>
+      <p:sp>
+        <p:nvSpPr>
+          <p:cNvPr id="7" name="Rectangle 6"/>
+          <p:cNvSpPr/>
+          <p:nvPr/>
+        </p:nvSpPr>
+        <p:spPr>
+          <a:xfrm>
+            <a:off x="6192000" y="1152000"/>
+            <a:ext cx="1944000" cy="576000"/>
+          </a:xfrm>
+          <a:prstGeom prst="rect">
+            <a:avLst/>
+          </a:prstGeom>
+          <a:solidFill>
+            <a:srgbClr val="ECEE67"/>
+          </a:solidFill>
+          <a:ln w="15875">
+            <a:solidFill>
+              <a:srgbClr val="888888"/>
+            </a:solidFill>
+          </a:ln>
+          <a:effectLst/>
+        </p:spPr>
+        <p:style>
+          <a:lnRef idx="1">
+            <a:schemeClr val="accent1"/>
+          </a:lnRef>
+          <a:fillRef idx="3">
+            <a:schemeClr val="accent1"/>
+          </a:fillRef>
+          <a:effectRef idx="2">
+            <a:schemeClr val="accent1"/>
+          </a:effectRef>
+          <a:fontRef idx="minor">
+            <a:schemeClr val="lt1"/>
+          </a:fontRef>
+        </p:style>
+        <p:txBody>
+          <a:bodyPr rtlCol="0" anchor="ctr" wrap="square" lIns="54000" rIns="54000"/>
+          <a:lstStyle/>
+          <a:p>
+            <a:pPr algn="ctr"/>
+            <a:r>
+              <a:rPr sz="1200" b="1">
+                <a:solidFill>
+                  <a:srgbClr val="222222"/>
+                </a:solidFill>
+                <a:latin typeface="Noto Sans JP"/>
+              </a:rPr>
+              <a:t>判定ルール</a:t>
+            </a:r>
+          </a:p>
+          <a:p>
+            <a:pPr algn="ctr"/>
+            <a:r>
+              <a:rPr sz="1200" b="1">
+                <a:solidFill>
+                  <a:srgbClr val="222222"/>
+                </a:solidFill>
+                <a:latin typeface="Noto Sans JP"/>
+              </a:rPr>
+              <a:t>（どう判定するか）</a:t>
+            </a:r>
+          </a:p>
+        </p:txBody>
+      </p:sp>
+      <p:sp>
+        <p:nvSpPr>
+          <p:cNvPr id="8" name="Rectangle 7"/>
+          <p:cNvSpPr/>
+          <p:nvPr/>
+        </p:nvSpPr>
+        <p:spPr>
+          <a:xfrm>
+            <a:off x="8136000" y="1152000"/>
+            <a:ext cx="2160000" cy="576000"/>
+          </a:xfrm>
+          <a:prstGeom prst="rect">
+            <a:avLst/>
+          </a:prstGeom>
+          <a:solidFill>
+            <a:srgbClr val="ECEE67"/>
+          </a:solidFill>
+          <a:ln w="15875">
+            <a:solidFill>
+              <a:srgbClr val="888888"/>
+            </a:solidFill>
+          </a:ln>
+          <a:effectLst/>
+        </p:spPr>
+        <p:style>
+          <a:lnRef idx="1">
+            <a:schemeClr val="accent1"/>
+          </a:lnRef>
+          <a:fillRef idx="3">
+            <a:schemeClr val="accent1"/>
+          </a:fillRef>
+          <a:effectRef idx="2">
+            <a:schemeClr val="accent1"/>
+          </a:effectRef>
+          <a:fontRef idx="minor">
+            <a:schemeClr val="lt1"/>
+          </a:fontRef>
+        </p:style>
+        <p:txBody>
+          <a:bodyPr rtlCol="0" anchor="ctr" wrap="square" lIns="54000" rIns="54000"/>
+          <a:lstStyle/>
+          <a:p>
+            <a:pPr algn="ctr"/>
+            <a:r>
+              <a:rPr sz="1200" b="1">
+                <a:solidFill>
+                  <a:srgbClr val="222222"/>
+                </a:solidFill>
+                <a:latin typeface="Noto Sans JP"/>
+              </a:rPr>
+              <a:t>代表的な手法</a:t>
+            </a:r>
+          </a:p>
+        </p:txBody>
+      </p:sp>
+      <p:sp>
+        <p:nvSpPr>
+          <p:cNvPr id="9" name="Rectangle 8"/>
+          <p:cNvSpPr/>
+          <p:nvPr/>
+        </p:nvSpPr>
+        <p:spPr>
+          <a:xfrm>
+            <a:off x="360000" y="1728000"/>
+            <a:ext cx="1872000" cy="936000"/>
+          </a:xfrm>
+          <a:prstGeom prst="rect">
+            <a:avLst/>
+          </a:prstGeom>
+          <a:solidFill>
+            <a:srgbClr val="FFFFFF"/>
+          </a:solidFill>
+          <a:ln w="15875">
+            <a:solidFill>
+              <a:srgbClr val="888888"/>
+            </a:solidFill>
+          </a:ln>
+          <a:effectLst/>
+        </p:spPr>
+        <p:style>
+          <a:lnRef idx="1">
+            <a:schemeClr val="accent1"/>
+          </a:lnRef>
+          <a:fillRef idx="3">
+            <a:schemeClr val="accent1"/>
+          </a:fillRef>
+          <a:effectRef idx="2">
+            <a:schemeClr val="accent1"/>
+          </a:effectRef>
+          <a:fontRef idx="minor">
+            <a:schemeClr val="lt1"/>
+          </a:fontRef>
+        </p:style>
+        <p:txBody>
+          <a:bodyPr rtlCol="0" anchor="ctr" wrap="square" lIns="54000" rIns="54000"/>
+          <a:lstStyle/>
+          <a:p>
+            <a:pPr algn="ctr"/>
+            <a:r>
+              <a:rPr sz="1200" b="1">
+                <a:solidFill>
+                  <a:srgbClr val="222222"/>
+                </a:solidFill>
+                <a:latin typeface="Noto Sans JP"/>
+              </a:rPr>
+              <a:t>ルールベース</a:t>
+            </a:r>
+          </a:p>
+        </p:txBody>
+      </p:sp>
+      <p:sp>
+        <p:nvSpPr>
+          <p:cNvPr id="10" name="Rectangle 9"/>
+          <p:cNvSpPr/>
+          <p:nvPr/>
+        </p:nvSpPr>
+        <p:spPr>
+          <a:xfrm>
+            <a:off x="2232000" y="1728000"/>
+            <a:ext cx="2015999" cy="936000"/>
+          </a:xfrm>
+          <a:prstGeom prst="rect">
+            <a:avLst/>
+          </a:prstGeom>
+          <a:solidFill>
+            <a:srgbClr val="FFF9C4"/>
+          </a:solidFill>
+          <a:ln w="15875">
+            <a:solidFill>
+              <a:srgbClr val="888888"/>
+            </a:solidFill>
+          </a:ln>
+          <a:effectLst/>
+        </p:spPr>
+        <p:style>
+          <a:lnRef idx="1">
+            <a:schemeClr val="accent1"/>
+          </a:lnRef>
+          <a:fillRef idx="3">
+            <a:schemeClr val="accent1"/>
+          </a:fillRef>
+          <a:effectRef idx="2">
+            <a:schemeClr val="accent1"/>
+          </a:effectRef>
+          <a:fontRef idx="minor">
+            <a:schemeClr val="lt1"/>
+          </a:fontRef>
+        </p:style>
+        <p:txBody>
+          <a:bodyPr rtlCol="0" anchor="ctr" wrap="square" lIns="54000" rIns="54000"/>
+          <a:lstStyle/>
+          <a:p>
+            <a:pPr algn="ctr"/>
             <a:r>
               <a:rPr sz="1200" b="0">
                 <a:solidFill>
@@ -3302,21 +3564,760 @@
                 </a:solidFill>
                 <a:latin typeface="Noto Sans JP"/>
               </a:rPr>
-              <a:t>メンバー（役割）：implementer　／ verifier　／ recorder　／ presenter</a:t>
-            </a:r>
-          </a:p>
-        </p:txBody>
-      </p:sp>
-      <p:sp>
-        <p:nvSpPr>
-          <p:cNvPr id="7" name="TextBox 6"/>
+              <a:t/>
+            </a:r>
+          </a:p>
+        </p:txBody>
+      </p:sp>
+      <p:sp>
+        <p:nvSpPr>
+          <p:cNvPr id="11" name="Rectangle 10"/>
+          <p:cNvSpPr/>
+          <p:nvPr/>
+        </p:nvSpPr>
+        <p:spPr>
+          <a:xfrm>
+            <a:off x="4248000" y="1728000"/>
+            <a:ext cx="1944000" cy="936000"/>
+          </a:xfrm>
+          <a:prstGeom prst="rect">
+            <a:avLst/>
+          </a:prstGeom>
+          <a:solidFill>
+            <a:srgbClr val="FFF9C4"/>
+          </a:solidFill>
+          <a:ln w="15875">
+            <a:solidFill>
+              <a:srgbClr val="888888"/>
+            </a:solidFill>
+          </a:ln>
+          <a:effectLst/>
+        </p:spPr>
+        <p:style>
+          <a:lnRef idx="1">
+            <a:schemeClr val="accent1"/>
+          </a:lnRef>
+          <a:fillRef idx="3">
+            <a:schemeClr val="accent1"/>
+          </a:fillRef>
+          <a:effectRef idx="2">
+            <a:schemeClr val="accent1"/>
+          </a:effectRef>
+          <a:fontRef idx="minor">
+            <a:schemeClr val="lt1"/>
+          </a:fontRef>
+        </p:style>
+        <p:txBody>
+          <a:bodyPr rtlCol="0" anchor="ctr" wrap="square" lIns="54000" rIns="54000"/>
+          <a:lstStyle/>
+          <a:p>
+            <a:pPr algn="ctr"/>
+            <a:r>
+              <a:rPr sz="1200" b="0">
+                <a:solidFill>
+                  <a:srgbClr val="222222"/>
+                </a:solidFill>
+                <a:latin typeface="Noto Sans JP"/>
+              </a:rPr>
+              <a:t/>
+            </a:r>
+          </a:p>
+        </p:txBody>
+      </p:sp>
+      <p:sp>
+        <p:nvSpPr>
+          <p:cNvPr id="12" name="Rectangle 11"/>
+          <p:cNvSpPr/>
+          <p:nvPr/>
+        </p:nvSpPr>
+        <p:spPr>
+          <a:xfrm>
+            <a:off x="6192000" y="1728000"/>
+            <a:ext cx="1944000" cy="936000"/>
+          </a:xfrm>
+          <a:prstGeom prst="rect">
+            <a:avLst/>
+          </a:prstGeom>
+          <a:solidFill>
+            <a:srgbClr val="FFF9C4"/>
+          </a:solidFill>
+          <a:ln w="15875">
+            <a:solidFill>
+              <a:srgbClr val="888888"/>
+            </a:solidFill>
+          </a:ln>
+          <a:effectLst/>
+        </p:spPr>
+        <p:style>
+          <a:lnRef idx="1">
+            <a:schemeClr val="accent1"/>
+          </a:lnRef>
+          <a:fillRef idx="3">
+            <a:schemeClr val="accent1"/>
+          </a:fillRef>
+          <a:effectRef idx="2">
+            <a:schemeClr val="accent1"/>
+          </a:effectRef>
+          <a:fontRef idx="minor">
+            <a:schemeClr val="lt1"/>
+          </a:fontRef>
+        </p:style>
+        <p:txBody>
+          <a:bodyPr rtlCol="0" anchor="ctr" wrap="square" lIns="54000" rIns="54000"/>
+          <a:lstStyle/>
+          <a:p>
+            <a:pPr algn="ctr"/>
+            <a:r>
+              <a:rPr sz="1200" b="0">
+                <a:solidFill>
+                  <a:srgbClr val="222222"/>
+                </a:solidFill>
+                <a:latin typeface="Noto Sans JP"/>
+              </a:rPr>
+              <a:t/>
+            </a:r>
+          </a:p>
+        </p:txBody>
+      </p:sp>
+      <p:sp>
+        <p:nvSpPr>
+          <p:cNvPr id="13" name="Rectangle 12"/>
+          <p:cNvSpPr/>
+          <p:nvPr/>
+        </p:nvSpPr>
+        <p:spPr>
+          <a:xfrm>
+            <a:off x="8136000" y="1728000"/>
+            <a:ext cx="2160000" cy="936000"/>
+          </a:xfrm>
+          <a:prstGeom prst="rect">
+            <a:avLst/>
+          </a:prstGeom>
+          <a:solidFill>
+            <a:srgbClr val="FFF9C4"/>
+          </a:solidFill>
+          <a:ln w="15875">
+            <a:solidFill>
+              <a:srgbClr val="888888"/>
+            </a:solidFill>
+          </a:ln>
+          <a:effectLst/>
+        </p:spPr>
+        <p:style>
+          <a:lnRef idx="1">
+            <a:schemeClr val="accent1"/>
+          </a:lnRef>
+          <a:fillRef idx="3">
+            <a:schemeClr val="accent1"/>
+          </a:fillRef>
+          <a:effectRef idx="2">
+            <a:schemeClr val="accent1"/>
+          </a:effectRef>
+          <a:fontRef idx="minor">
+            <a:schemeClr val="lt1"/>
+          </a:fontRef>
+        </p:style>
+        <p:txBody>
+          <a:bodyPr rtlCol="0" anchor="ctr" wrap="square" lIns="54000" rIns="54000"/>
+          <a:lstStyle/>
+          <a:p>
+            <a:pPr algn="ctr"/>
+            <a:r>
+              <a:rPr sz="1200" b="0">
+                <a:solidFill>
+                  <a:srgbClr val="222222"/>
+                </a:solidFill>
+                <a:latin typeface="Noto Sans JP"/>
+              </a:rPr>
+              <a:t/>
+            </a:r>
+          </a:p>
+        </p:txBody>
+      </p:sp>
+      <p:sp>
+        <p:nvSpPr>
+          <p:cNvPr id="14" name="Rectangle 13"/>
+          <p:cNvSpPr/>
+          <p:nvPr/>
+        </p:nvSpPr>
+        <p:spPr>
+          <a:xfrm>
+            <a:off x="360000" y="2664000"/>
+            <a:ext cx="1872000" cy="936000"/>
+          </a:xfrm>
+          <a:prstGeom prst="rect">
+            <a:avLst/>
+          </a:prstGeom>
+          <a:solidFill>
+            <a:srgbClr val="FFFFFF"/>
+          </a:solidFill>
+          <a:ln w="15875">
+            <a:solidFill>
+              <a:srgbClr val="888888"/>
+            </a:solidFill>
+          </a:ln>
+          <a:effectLst/>
+        </p:spPr>
+        <p:style>
+          <a:lnRef idx="1">
+            <a:schemeClr val="accent1"/>
+          </a:lnRef>
+          <a:fillRef idx="3">
+            <a:schemeClr val="accent1"/>
+          </a:fillRef>
+          <a:effectRef idx="2">
+            <a:schemeClr val="accent1"/>
+          </a:effectRef>
+          <a:fontRef idx="minor">
+            <a:schemeClr val="lt1"/>
+          </a:fontRef>
+        </p:style>
+        <p:txBody>
+          <a:bodyPr rtlCol="0" anchor="ctr" wrap="square" lIns="54000" rIns="54000"/>
+          <a:lstStyle/>
+          <a:p>
+            <a:pPr algn="ctr"/>
+            <a:r>
+              <a:rPr sz="1200" b="1">
+                <a:solidFill>
+                  <a:srgbClr val="222222"/>
+                </a:solidFill>
+                <a:latin typeface="Noto Sans JP"/>
+              </a:rPr>
+              <a:t>従来の機械学習</a:t>
+            </a:r>
+          </a:p>
+          <a:p>
+            <a:pPr algn="ctr"/>
+            <a:r>
+              <a:rPr sz="1200" b="1">
+                <a:solidFill>
+                  <a:srgbClr val="222222"/>
+                </a:solidFill>
+                <a:latin typeface="Noto Sans JP"/>
+              </a:rPr>
+              <a:t>（統計的機械学習）</a:t>
+            </a:r>
+          </a:p>
+        </p:txBody>
+      </p:sp>
+      <p:sp>
+        <p:nvSpPr>
+          <p:cNvPr id="15" name="Rectangle 14"/>
+          <p:cNvSpPr/>
+          <p:nvPr/>
+        </p:nvSpPr>
+        <p:spPr>
+          <a:xfrm>
+            <a:off x="2232000" y="2664000"/>
+            <a:ext cx="2015999" cy="936000"/>
+          </a:xfrm>
+          <a:prstGeom prst="rect">
+            <a:avLst/>
+          </a:prstGeom>
+          <a:solidFill>
+            <a:srgbClr val="FFF9C4"/>
+          </a:solidFill>
+          <a:ln w="15875">
+            <a:solidFill>
+              <a:srgbClr val="888888"/>
+            </a:solidFill>
+          </a:ln>
+          <a:effectLst/>
+        </p:spPr>
+        <p:style>
+          <a:lnRef idx="1">
+            <a:schemeClr val="accent1"/>
+          </a:lnRef>
+          <a:fillRef idx="3">
+            <a:schemeClr val="accent1"/>
+          </a:fillRef>
+          <a:effectRef idx="2">
+            <a:schemeClr val="accent1"/>
+          </a:effectRef>
+          <a:fontRef idx="minor">
+            <a:schemeClr val="lt1"/>
+          </a:fontRef>
+        </p:style>
+        <p:txBody>
+          <a:bodyPr rtlCol="0" anchor="ctr" wrap="square" lIns="54000" rIns="54000"/>
+          <a:lstStyle/>
+          <a:p>
+            <a:pPr algn="ctr"/>
+            <a:r>
+              <a:rPr sz="1200" b="0">
+                <a:solidFill>
+                  <a:srgbClr val="222222"/>
+                </a:solidFill>
+                <a:latin typeface="Noto Sans JP"/>
+              </a:rPr>
+              <a:t/>
+            </a:r>
+          </a:p>
+        </p:txBody>
+      </p:sp>
+      <p:sp>
+        <p:nvSpPr>
+          <p:cNvPr id="16" name="Rectangle 15"/>
+          <p:cNvSpPr/>
+          <p:nvPr/>
+        </p:nvSpPr>
+        <p:spPr>
+          <a:xfrm>
+            <a:off x="4248000" y="2664000"/>
+            <a:ext cx="1944000" cy="936000"/>
+          </a:xfrm>
+          <a:prstGeom prst="rect">
+            <a:avLst/>
+          </a:prstGeom>
+          <a:solidFill>
+            <a:srgbClr val="FFF9C4"/>
+          </a:solidFill>
+          <a:ln w="15875">
+            <a:solidFill>
+              <a:srgbClr val="888888"/>
+            </a:solidFill>
+          </a:ln>
+          <a:effectLst/>
+        </p:spPr>
+        <p:style>
+          <a:lnRef idx="1">
+            <a:schemeClr val="accent1"/>
+          </a:lnRef>
+          <a:fillRef idx="3">
+            <a:schemeClr val="accent1"/>
+          </a:fillRef>
+          <a:effectRef idx="2">
+            <a:schemeClr val="accent1"/>
+          </a:effectRef>
+          <a:fontRef idx="minor">
+            <a:schemeClr val="lt1"/>
+          </a:fontRef>
+        </p:style>
+        <p:txBody>
+          <a:bodyPr rtlCol="0" anchor="ctr" wrap="square" lIns="54000" rIns="54000"/>
+          <a:lstStyle/>
+          <a:p>
+            <a:pPr algn="ctr"/>
+            <a:r>
+              <a:rPr sz="1200" b="0">
+                <a:solidFill>
+                  <a:srgbClr val="222222"/>
+                </a:solidFill>
+                <a:latin typeface="Noto Sans JP"/>
+              </a:rPr>
+              <a:t/>
+            </a:r>
+          </a:p>
+        </p:txBody>
+      </p:sp>
+      <p:sp>
+        <p:nvSpPr>
+          <p:cNvPr id="17" name="Rectangle 16"/>
+          <p:cNvSpPr/>
+          <p:nvPr/>
+        </p:nvSpPr>
+        <p:spPr>
+          <a:xfrm>
+            <a:off x="6192000" y="2664000"/>
+            <a:ext cx="1944000" cy="936000"/>
+          </a:xfrm>
+          <a:prstGeom prst="rect">
+            <a:avLst/>
+          </a:prstGeom>
+          <a:solidFill>
+            <a:srgbClr val="FFF9C4"/>
+          </a:solidFill>
+          <a:ln w="15875">
+            <a:solidFill>
+              <a:srgbClr val="888888"/>
+            </a:solidFill>
+          </a:ln>
+          <a:effectLst/>
+        </p:spPr>
+        <p:style>
+          <a:lnRef idx="1">
+            <a:schemeClr val="accent1"/>
+          </a:lnRef>
+          <a:fillRef idx="3">
+            <a:schemeClr val="accent1"/>
+          </a:fillRef>
+          <a:effectRef idx="2">
+            <a:schemeClr val="accent1"/>
+          </a:effectRef>
+          <a:fontRef idx="minor">
+            <a:schemeClr val="lt1"/>
+          </a:fontRef>
+        </p:style>
+        <p:txBody>
+          <a:bodyPr rtlCol="0" anchor="ctr" wrap="square" lIns="54000" rIns="54000"/>
+          <a:lstStyle/>
+          <a:p>
+            <a:pPr algn="ctr"/>
+            <a:r>
+              <a:rPr sz="1200" b="0">
+                <a:solidFill>
+                  <a:srgbClr val="222222"/>
+                </a:solidFill>
+                <a:latin typeface="Noto Sans JP"/>
+              </a:rPr>
+              <a:t/>
+            </a:r>
+          </a:p>
+        </p:txBody>
+      </p:sp>
+      <p:sp>
+        <p:nvSpPr>
+          <p:cNvPr id="18" name="Rectangle 17"/>
+          <p:cNvSpPr/>
+          <p:nvPr/>
+        </p:nvSpPr>
+        <p:spPr>
+          <a:xfrm>
+            <a:off x="8136000" y="2664000"/>
+            <a:ext cx="2160000" cy="936000"/>
+          </a:xfrm>
+          <a:prstGeom prst="rect">
+            <a:avLst/>
+          </a:prstGeom>
+          <a:solidFill>
+            <a:srgbClr val="FFF9C4"/>
+          </a:solidFill>
+          <a:ln w="15875">
+            <a:solidFill>
+              <a:srgbClr val="888888"/>
+            </a:solidFill>
+          </a:ln>
+          <a:effectLst/>
+        </p:spPr>
+        <p:style>
+          <a:lnRef idx="1">
+            <a:schemeClr val="accent1"/>
+          </a:lnRef>
+          <a:fillRef idx="3">
+            <a:schemeClr val="accent1"/>
+          </a:fillRef>
+          <a:effectRef idx="2">
+            <a:schemeClr val="accent1"/>
+          </a:effectRef>
+          <a:fontRef idx="minor">
+            <a:schemeClr val="lt1"/>
+          </a:fontRef>
+        </p:style>
+        <p:txBody>
+          <a:bodyPr rtlCol="0" anchor="ctr" wrap="square" lIns="54000" rIns="54000"/>
+          <a:lstStyle/>
+          <a:p>
+            <a:pPr algn="ctr"/>
+            <a:r>
+              <a:rPr sz="1200" b="0">
+                <a:solidFill>
+                  <a:srgbClr val="222222"/>
+                </a:solidFill>
+                <a:latin typeface="Noto Sans JP"/>
+              </a:rPr>
+              <a:t/>
+            </a:r>
+          </a:p>
+        </p:txBody>
+      </p:sp>
+      <p:sp>
+        <p:nvSpPr>
+          <p:cNvPr id="19" name="Rectangle 18"/>
+          <p:cNvSpPr/>
+          <p:nvPr/>
+        </p:nvSpPr>
+        <p:spPr>
+          <a:xfrm>
+            <a:off x="360000" y="3600000"/>
+            <a:ext cx="1872000" cy="936000"/>
+          </a:xfrm>
+          <a:prstGeom prst="rect">
+            <a:avLst/>
+          </a:prstGeom>
+          <a:solidFill>
+            <a:srgbClr val="FFFFFF"/>
+          </a:solidFill>
+          <a:ln w="15875">
+            <a:solidFill>
+              <a:srgbClr val="888888"/>
+            </a:solidFill>
+          </a:ln>
+          <a:effectLst/>
+        </p:spPr>
+        <p:style>
+          <a:lnRef idx="1">
+            <a:schemeClr val="accent1"/>
+          </a:lnRef>
+          <a:fillRef idx="3">
+            <a:schemeClr val="accent1"/>
+          </a:fillRef>
+          <a:effectRef idx="2">
+            <a:schemeClr val="accent1"/>
+          </a:effectRef>
+          <a:fontRef idx="minor">
+            <a:schemeClr val="lt1"/>
+          </a:fontRef>
+        </p:style>
+        <p:txBody>
+          <a:bodyPr rtlCol="0" anchor="ctr" wrap="square" lIns="54000" rIns="54000"/>
+          <a:lstStyle/>
+          <a:p>
+            <a:pPr algn="ctr"/>
+            <a:r>
+              <a:rPr sz="1200" b="1">
+                <a:solidFill>
+                  <a:srgbClr val="222222"/>
+                </a:solidFill>
+                <a:latin typeface="Noto Sans JP"/>
+              </a:rPr>
+              <a:t>深層学習</a:t>
+            </a:r>
+          </a:p>
+          <a:p>
+            <a:pPr algn="ctr"/>
+            <a:r>
+              <a:rPr sz="1200" b="1">
+                <a:solidFill>
+                  <a:srgbClr val="222222"/>
+                </a:solidFill>
+                <a:latin typeface="Noto Sans JP"/>
+              </a:rPr>
+              <a:t>（深層ニューラルネットワーク）</a:t>
+            </a:r>
+          </a:p>
+        </p:txBody>
+      </p:sp>
+      <p:sp>
+        <p:nvSpPr>
+          <p:cNvPr id="20" name="Rectangle 19"/>
+          <p:cNvSpPr/>
+          <p:nvPr/>
+        </p:nvSpPr>
+        <p:spPr>
+          <a:xfrm>
+            <a:off x="2232000" y="3600000"/>
+            <a:ext cx="2015999" cy="936000"/>
+          </a:xfrm>
+          <a:prstGeom prst="rect">
+            <a:avLst/>
+          </a:prstGeom>
+          <a:solidFill>
+            <a:srgbClr val="FFF9C4"/>
+          </a:solidFill>
+          <a:ln w="15875">
+            <a:solidFill>
+              <a:srgbClr val="888888"/>
+            </a:solidFill>
+          </a:ln>
+          <a:effectLst/>
+        </p:spPr>
+        <p:style>
+          <a:lnRef idx="1">
+            <a:schemeClr val="accent1"/>
+          </a:lnRef>
+          <a:fillRef idx="3">
+            <a:schemeClr val="accent1"/>
+          </a:fillRef>
+          <a:effectRef idx="2">
+            <a:schemeClr val="accent1"/>
+          </a:effectRef>
+          <a:fontRef idx="minor">
+            <a:schemeClr val="lt1"/>
+          </a:fontRef>
+        </p:style>
+        <p:txBody>
+          <a:bodyPr rtlCol="0" anchor="ctr" wrap="square" lIns="54000" rIns="54000"/>
+          <a:lstStyle/>
+          <a:p>
+            <a:pPr algn="ctr"/>
+            <a:r>
+              <a:rPr sz="1200" b="0">
+                <a:solidFill>
+                  <a:srgbClr val="222222"/>
+                </a:solidFill>
+                <a:latin typeface="Noto Sans JP"/>
+              </a:rPr>
+              <a:t/>
+            </a:r>
+          </a:p>
+        </p:txBody>
+      </p:sp>
+      <p:sp>
+        <p:nvSpPr>
+          <p:cNvPr id="21" name="Rectangle 20"/>
+          <p:cNvSpPr/>
+          <p:nvPr/>
+        </p:nvSpPr>
+        <p:spPr>
+          <a:xfrm>
+            <a:off x="4248000" y="3600000"/>
+            <a:ext cx="1944000" cy="936000"/>
+          </a:xfrm>
+          <a:prstGeom prst="rect">
+            <a:avLst/>
+          </a:prstGeom>
+          <a:solidFill>
+            <a:srgbClr val="FFF9C4"/>
+          </a:solidFill>
+          <a:ln w="15875">
+            <a:solidFill>
+              <a:srgbClr val="888888"/>
+            </a:solidFill>
+          </a:ln>
+          <a:effectLst/>
+        </p:spPr>
+        <p:style>
+          <a:lnRef idx="1">
+            <a:schemeClr val="accent1"/>
+          </a:lnRef>
+          <a:fillRef idx="3">
+            <a:schemeClr val="accent1"/>
+          </a:fillRef>
+          <a:effectRef idx="2">
+            <a:schemeClr val="accent1"/>
+          </a:effectRef>
+          <a:fontRef idx="minor">
+            <a:schemeClr val="lt1"/>
+          </a:fontRef>
+        </p:style>
+        <p:txBody>
+          <a:bodyPr rtlCol="0" anchor="ctr" wrap="square" lIns="54000" rIns="54000"/>
+          <a:lstStyle/>
+          <a:p>
+            <a:pPr algn="ctr"/>
+            <a:r>
+              <a:rPr sz="1200" b="0">
+                <a:solidFill>
+                  <a:srgbClr val="222222"/>
+                </a:solidFill>
+                <a:latin typeface="Noto Sans JP"/>
+              </a:rPr>
+              <a:t/>
+            </a:r>
+          </a:p>
+        </p:txBody>
+      </p:sp>
+      <p:sp>
+        <p:nvSpPr>
+          <p:cNvPr id="22" name="Rectangle 21"/>
+          <p:cNvSpPr/>
+          <p:nvPr/>
+        </p:nvSpPr>
+        <p:spPr>
+          <a:xfrm>
+            <a:off x="6192000" y="3600000"/>
+            <a:ext cx="1944000" cy="936000"/>
+          </a:xfrm>
+          <a:prstGeom prst="rect">
+            <a:avLst/>
+          </a:prstGeom>
+          <a:solidFill>
+            <a:srgbClr val="FFF9C4"/>
+          </a:solidFill>
+          <a:ln w="15875">
+            <a:solidFill>
+              <a:srgbClr val="888888"/>
+            </a:solidFill>
+          </a:ln>
+          <a:effectLst/>
+        </p:spPr>
+        <p:style>
+          <a:lnRef idx="1">
+            <a:schemeClr val="accent1"/>
+          </a:lnRef>
+          <a:fillRef idx="3">
+            <a:schemeClr val="accent1"/>
+          </a:fillRef>
+          <a:effectRef idx="2">
+            <a:schemeClr val="accent1"/>
+          </a:effectRef>
+          <a:fontRef idx="minor">
+            <a:schemeClr val="lt1"/>
+          </a:fontRef>
+        </p:style>
+        <p:txBody>
+          <a:bodyPr rtlCol="0" anchor="ctr" wrap="square" lIns="54000" rIns="54000"/>
+          <a:lstStyle/>
+          <a:p>
+            <a:pPr algn="ctr"/>
+            <a:r>
+              <a:rPr sz="1200" b="0">
+                <a:solidFill>
+                  <a:srgbClr val="222222"/>
+                </a:solidFill>
+                <a:latin typeface="Noto Sans JP"/>
+              </a:rPr>
+              <a:t/>
+            </a:r>
+          </a:p>
+        </p:txBody>
+      </p:sp>
+      <p:sp>
+        <p:nvSpPr>
+          <p:cNvPr id="23" name="Rectangle 22"/>
+          <p:cNvSpPr/>
+          <p:nvPr/>
+        </p:nvSpPr>
+        <p:spPr>
+          <a:xfrm>
+            <a:off x="8136000" y="3600000"/>
+            <a:ext cx="2160000" cy="936000"/>
+          </a:xfrm>
+          <a:prstGeom prst="rect">
+            <a:avLst/>
+          </a:prstGeom>
+          <a:solidFill>
+            <a:srgbClr val="FFF9C4"/>
+          </a:solidFill>
+          <a:ln w="15875">
+            <a:solidFill>
+              <a:srgbClr val="888888"/>
+            </a:solidFill>
+          </a:ln>
+          <a:effectLst/>
+        </p:spPr>
+        <p:style>
+          <a:lnRef idx="1">
+            <a:schemeClr val="accent1"/>
+          </a:lnRef>
+          <a:fillRef idx="3">
+            <a:schemeClr val="accent1"/>
+          </a:fillRef>
+          <a:effectRef idx="2">
+            <a:schemeClr val="accent1"/>
+          </a:effectRef>
+          <a:fontRef idx="minor">
+            <a:schemeClr val="lt1"/>
+          </a:fontRef>
+        </p:style>
+        <p:txBody>
+          <a:bodyPr rtlCol="0" anchor="ctr" wrap="square" lIns="54000" rIns="54000"/>
+          <a:lstStyle/>
+          <a:p>
+            <a:pPr algn="ctr"/>
+            <a:r>
+              <a:rPr sz="1200" b="0">
+                <a:solidFill>
+                  <a:srgbClr val="222222"/>
+                </a:solidFill>
+                <a:latin typeface="Noto Sans JP"/>
+              </a:rPr>
+              <a:t/>
+            </a:r>
+          </a:p>
+        </p:txBody>
+      </p:sp>
+      <p:sp>
+        <p:nvSpPr>
+          <p:cNvPr id="24" name="TextBox 23"/>
           <p:cNvSpPr txBox="1"/>
           <p:nvPr/>
         </p:nvSpPr>
         <p:spPr>
           <a:xfrm>
-            <a:off x="720000" y="4536000"/>
-            <a:ext cx="10800000" cy="1080000"/>
+            <a:off x="360000" y="4572000"/>
+            <a:ext cx="9720000" cy="216000"/>
           </a:xfrm>
           <a:prstGeom prst="rect">
             <a:avLst/>
@@ -3331,39 +4332,27 @@
           <a:p>
             <a:pPr algn="l"/>
             <a:r>
-              <a:rPr sz="1300" b="0">
+              <a:rPr sz="900" b="0">
                 <a:solidFill>
                   <a:srgbClr val="555555"/>
                 </a:solidFill>
                 <a:latin typeface="Noto Sans JP"/>
               </a:rPr>
-              <a:t>使い方：黄色の欄を埋める．灰色・緑色のチップは表の欄へドラッグして貼る．</a:t>
-            </a:r>
-          </a:p>
-          <a:p>
-            <a:pPr algn="l"/>
-            <a:r>
-              <a:rPr sz="1300" b="0">
-                <a:solidFill>
-                  <a:srgbClr val="555555"/>
-                </a:solidFill>
-                <a:latin typeface="Noto Sans JP"/>
-              </a:rPr>
-              <a:t>スライドの複製は presenter が行い，記録は recorder が担当する．答え合わせは最後のスライドにある（先に見ない）．</a:t>
-            </a:r>
-          </a:p>
-        </p:txBody>
-      </p:sp>
-      <p:sp>
-        <p:nvSpPr>
-          <p:cNvPr id="8" name="TextBox 7"/>
+              <a:t>※ 深層学習の行は，特徴量と判定ルールの 2 欄を 1 つとして考えてよい</a:t>
+            </a:r>
+          </a:p>
+        </p:txBody>
+      </p:sp>
+      <p:sp>
+        <p:nvSpPr>
+          <p:cNvPr id="25" name="TextBox 24"/>
           <p:cNvSpPr txBox="1"/>
           <p:nvPr/>
         </p:nvSpPr>
         <p:spPr>
           <a:xfrm>
-            <a:off x="360000" y="6516000"/>
-            <a:ext cx="11448000" cy="251999"/>
+            <a:off x="10368000" y="1152000"/>
+            <a:ext cx="1620000" cy="216000"/>
           </a:xfrm>
           <a:prstGeom prst="rect">
             <a:avLst/>
@@ -3378,13 +4367,547 @@
           <a:p>
             <a:pPr algn="l"/>
             <a:r>
+              <a:rPr sz="1000" b="1">
+                <a:solidFill>
+                  <a:srgbClr val="555555"/>
+                </a:solidFill>
+                <a:latin typeface="Noto Sans JP"/>
+              </a:rPr>
+              <a:t>チップ（ドラッグして貼る）</a:t>
+            </a:r>
+          </a:p>
+        </p:txBody>
+      </p:sp>
+      <p:sp>
+        <p:nvSpPr>
+          <p:cNvPr id="26" name="Rounded Rectangle 25"/>
+          <p:cNvSpPr/>
+          <p:nvPr/>
+        </p:nvSpPr>
+        <p:spPr>
+          <a:xfrm>
+            <a:off x="10368000" y="1440000"/>
+            <a:ext cx="1296000" cy="324000"/>
+          </a:xfrm>
+          <a:prstGeom prst="roundRect">
+            <a:avLst/>
+          </a:prstGeom>
+          <a:solidFill>
+            <a:srgbClr val="E0E0E0"/>
+          </a:solidFill>
+          <a:ln w="15875">
+            <a:solidFill>
+              <a:srgbClr val="888888"/>
+            </a:solidFill>
+          </a:ln>
+          <a:effectLst/>
+        </p:spPr>
+        <p:style>
+          <a:lnRef idx="1">
+            <a:schemeClr val="accent1"/>
+          </a:lnRef>
+          <a:fillRef idx="3">
+            <a:schemeClr val="accent1"/>
+          </a:fillRef>
+          <a:effectRef idx="2">
+            <a:schemeClr val="accent1"/>
+          </a:effectRef>
+          <a:fontRef idx="minor">
+            <a:schemeClr val="lt1"/>
+          </a:fontRef>
+        </p:style>
+        <p:txBody>
+          <a:bodyPr rtlCol="0" anchor="ctr" wrap="square" lIns="54000" rIns="54000"/>
+          <a:lstStyle/>
+          <a:p>
+            <a:pPr algn="ctr"/>
+            <a:r>
+              <a:rPr sz="1100" b="1">
+                <a:solidFill>
+                  <a:srgbClr val="222222"/>
+                </a:solidFill>
+                <a:latin typeface="Noto Sans JP"/>
+              </a:rPr>
+              <a:t>人が設計</a:t>
+            </a:r>
+          </a:p>
+        </p:txBody>
+      </p:sp>
+      <p:sp>
+        <p:nvSpPr>
+          <p:cNvPr id="27" name="Rounded Rectangle 26"/>
+          <p:cNvSpPr/>
+          <p:nvPr/>
+        </p:nvSpPr>
+        <p:spPr>
+          <a:xfrm>
+            <a:off x="10368000" y="1818000"/>
+            <a:ext cx="1296000" cy="324000"/>
+          </a:xfrm>
+          <a:prstGeom prst="roundRect">
+            <a:avLst/>
+          </a:prstGeom>
+          <a:solidFill>
+            <a:srgbClr val="E0E0E0"/>
+          </a:solidFill>
+          <a:ln w="15875">
+            <a:solidFill>
+              <a:srgbClr val="888888"/>
+            </a:solidFill>
+          </a:ln>
+          <a:effectLst/>
+        </p:spPr>
+        <p:style>
+          <a:lnRef idx="1">
+            <a:schemeClr val="accent1"/>
+          </a:lnRef>
+          <a:fillRef idx="3">
+            <a:schemeClr val="accent1"/>
+          </a:fillRef>
+          <a:effectRef idx="2">
+            <a:schemeClr val="accent1"/>
+          </a:effectRef>
+          <a:fontRef idx="minor">
+            <a:schemeClr val="lt1"/>
+          </a:fontRef>
+        </p:style>
+        <p:txBody>
+          <a:bodyPr rtlCol="0" anchor="ctr" wrap="square" lIns="54000" rIns="54000"/>
+          <a:lstStyle/>
+          <a:p>
+            <a:pPr algn="ctr"/>
+            <a:r>
+              <a:rPr sz="1100" b="1">
+                <a:solidFill>
+                  <a:srgbClr val="222222"/>
+                </a:solidFill>
+                <a:latin typeface="Noto Sans JP"/>
+              </a:rPr>
+              <a:t>人が設計</a:t>
+            </a:r>
+          </a:p>
+        </p:txBody>
+      </p:sp>
+      <p:sp>
+        <p:nvSpPr>
+          <p:cNvPr id="28" name="Rounded Rectangle 27"/>
+          <p:cNvSpPr/>
+          <p:nvPr/>
+        </p:nvSpPr>
+        <p:spPr>
+          <a:xfrm>
+            <a:off x="10368000" y="2196000"/>
+            <a:ext cx="1296000" cy="324000"/>
+          </a:xfrm>
+          <a:prstGeom prst="roundRect">
+            <a:avLst/>
+          </a:prstGeom>
+          <a:solidFill>
+            <a:srgbClr val="E0E0E0"/>
+          </a:solidFill>
+          <a:ln w="15875">
+            <a:solidFill>
+              <a:srgbClr val="888888"/>
+            </a:solidFill>
+          </a:ln>
+          <a:effectLst/>
+        </p:spPr>
+        <p:style>
+          <a:lnRef idx="1">
+            <a:schemeClr val="accent1"/>
+          </a:lnRef>
+          <a:fillRef idx="3">
+            <a:schemeClr val="accent1"/>
+          </a:fillRef>
+          <a:effectRef idx="2">
+            <a:schemeClr val="accent1"/>
+          </a:effectRef>
+          <a:fontRef idx="minor">
+            <a:schemeClr val="lt1"/>
+          </a:fontRef>
+        </p:style>
+        <p:txBody>
+          <a:bodyPr rtlCol="0" anchor="ctr" wrap="square" lIns="54000" rIns="54000"/>
+          <a:lstStyle/>
+          <a:p>
+            <a:pPr algn="ctr"/>
+            <a:r>
+              <a:rPr sz="1100" b="1">
+                <a:solidFill>
+                  <a:srgbClr val="222222"/>
+                </a:solidFill>
+                <a:latin typeface="Noto Sans JP"/>
+              </a:rPr>
+              <a:t>人が設計</a:t>
+            </a:r>
+          </a:p>
+        </p:txBody>
+      </p:sp>
+      <p:sp>
+        <p:nvSpPr>
+          <p:cNvPr id="29" name="Rounded Rectangle 28"/>
+          <p:cNvSpPr/>
+          <p:nvPr/>
+        </p:nvSpPr>
+        <p:spPr>
+          <a:xfrm>
+            <a:off x="10368000" y="2574000"/>
+            <a:ext cx="1296000" cy="324000"/>
+          </a:xfrm>
+          <a:prstGeom prst="roundRect">
+            <a:avLst/>
+          </a:prstGeom>
+          <a:solidFill>
+            <a:srgbClr val="E0E0E0"/>
+          </a:solidFill>
+          <a:ln w="15875">
+            <a:solidFill>
+              <a:srgbClr val="888888"/>
+            </a:solidFill>
+          </a:ln>
+          <a:effectLst/>
+        </p:spPr>
+        <p:style>
+          <a:lnRef idx="1">
+            <a:schemeClr val="accent1"/>
+          </a:lnRef>
+          <a:fillRef idx="3">
+            <a:schemeClr val="accent1"/>
+          </a:fillRef>
+          <a:effectRef idx="2">
+            <a:schemeClr val="accent1"/>
+          </a:effectRef>
+          <a:fontRef idx="minor">
+            <a:schemeClr val="lt1"/>
+          </a:fontRef>
+        </p:style>
+        <p:txBody>
+          <a:bodyPr rtlCol="0" anchor="ctr" wrap="square" lIns="54000" rIns="54000"/>
+          <a:lstStyle/>
+          <a:p>
+            <a:pPr algn="ctr"/>
+            <a:r>
+              <a:rPr sz="1100" b="1">
+                <a:solidFill>
+                  <a:srgbClr val="222222"/>
+                </a:solidFill>
+                <a:latin typeface="Noto Sans JP"/>
+              </a:rPr>
+              <a:t>人が設計</a:t>
+            </a:r>
+          </a:p>
+        </p:txBody>
+      </p:sp>
+      <p:sp>
+        <p:nvSpPr>
+          <p:cNvPr id="30" name="Rounded Rectangle 29"/>
+          <p:cNvSpPr/>
+          <p:nvPr/>
+        </p:nvSpPr>
+        <p:spPr>
+          <a:xfrm>
+            <a:off x="10368000" y="3060000"/>
+            <a:ext cx="1296000" cy="324000"/>
+          </a:xfrm>
+          <a:prstGeom prst="roundRect">
+            <a:avLst/>
+          </a:prstGeom>
+          <a:solidFill>
+            <a:srgbClr val="D9EAD3"/>
+          </a:solidFill>
+          <a:ln w="15875">
+            <a:solidFill>
+              <a:srgbClr val="6AA84F"/>
+            </a:solidFill>
+          </a:ln>
+          <a:effectLst/>
+        </p:spPr>
+        <p:style>
+          <a:lnRef idx="1">
+            <a:schemeClr val="accent1"/>
+          </a:lnRef>
+          <a:fillRef idx="3">
+            <a:schemeClr val="accent1"/>
+          </a:fillRef>
+          <a:effectRef idx="2">
+            <a:schemeClr val="accent1"/>
+          </a:effectRef>
+          <a:fontRef idx="minor">
+            <a:schemeClr val="lt1"/>
+          </a:fontRef>
+        </p:style>
+        <p:txBody>
+          <a:bodyPr rtlCol="0" anchor="ctr" wrap="square" lIns="54000" rIns="54000"/>
+          <a:lstStyle/>
+          <a:p>
+            <a:pPr algn="ctr"/>
+            <a:r>
+              <a:rPr sz="1100" b="1">
+                <a:solidFill>
+                  <a:srgbClr val="222222"/>
+                </a:solidFill>
+                <a:latin typeface="Noto Sans JP"/>
+              </a:rPr>
+              <a:t>データから学習</a:t>
+            </a:r>
+          </a:p>
+        </p:txBody>
+      </p:sp>
+      <p:sp>
+        <p:nvSpPr>
+          <p:cNvPr id="31" name="Rounded Rectangle 30"/>
+          <p:cNvSpPr/>
+          <p:nvPr/>
+        </p:nvSpPr>
+        <p:spPr>
+          <a:xfrm>
+            <a:off x="10368000" y="3438000"/>
+            <a:ext cx="1296000" cy="324000"/>
+          </a:xfrm>
+          <a:prstGeom prst="roundRect">
+            <a:avLst/>
+          </a:prstGeom>
+          <a:solidFill>
+            <a:srgbClr val="D9EAD3"/>
+          </a:solidFill>
+          <a:ln w="15875">
+            <a:solidFill>
+              <a:srgbClr val="6AA84F"/>
+            </a:solidFill>
+          </a:ln>
+          <a:effectLst/>
+        </p:spPr>
+        <p:style>
+          <a:lnRef idx="1">
+            <a:schemeClr val="accent1"/>
+          </a:lnRef>
+          <a:fillRef idx="3">
+            <a:schemeClr val="accent1"/>
+          </a:fillRef>
+          <a:effectRef idx="2">
+            <a:schemeClr val="accent1"/>
+          </a:effectRef>
+          <a:fontRef idx="minor">
+            <a:schemeClr val="lt1"/>
+          </a:fontRef>
+        </p:style>
+        <p:txBody>
+          <a:bodyPr rtlCol="0" anchor="ctr" wrap="square" lIns="54000" rIns="54000"/>
+          <a:lstStyle/>
+          <a:p>
+            <a:pPr algn="ctr"/>
+            <a:r>
+              <a:rPr sz="1100" b="1">
+                <a:solidFill>
+                  <a:srgbClr val="222222"/>
+                </a:solidFill>
+                <a:latin typeface="Noto Sans JP"/>
+              </a:rPr>
+              <a:t>データから学習</a:t>
+            </a:r>
+          </a:p>
+        </p:txBody>
+      </p:sp>
+      <p:sp>
+        <p:nvSpPr>
+          <p:cNvPr id="32" name="Rounded Rectangle 31"/>
+          <p:cNvSpPr/>
+          <p:nvPr/>
+        </p:nvSpPr>
+        <p:spPr>
+          <a:xfrm>
+            <a:off x="10368000" y="3816000"/>
+            <a:ext cx="1296000" cy="324000"/>
+          </a:xfrm>
+          <a:prstGeom prst="roundRect">
+            <a:avLst/>
+          </a:prstGeom>
+          <a:solidFill>
+            <a:srgbClr val="D9EAD3"/>
+          </a:solidFill>
+          <a:ln w="15875">
+            <a:solidFill>
+              <a:srgbClr val="6AA84F"/>
+            </a:solidFill>
+          </a:ln>
+          <a:effectLst/>
+        </p:spPr>
+        <p:style>
+          <a:lnRef idx="1">
+            <a:schemeClr val="accent1"/>
+          </a:lnRef>
+          <a:fillRef idx="3">
+            <a:schemeClr val="accent1"/>
+          </a:fillRef>
+          <a:effectRef idx="2">
+            <a:schemeClr val="accent1"/>
+          </a:effectRef>
+          <a:fontRef idx="minor">
+            <a:schemeClr val="lt1"/>
+          </a:fontRef>
+        </p:style>
+        <p:txBody>
+          <a:bodyPr rtlCol="0" anchor="ctr" wrap="square" lIns="54000" rIns="54000"/>
+          <a:lstStyle/>
+          <a:p>
+            <a:pPr algn="ctr"/>
+            <a:r>
+              <a:rPr sz="1100" b="1">
+                <a:solidFill>
+                  <a:srgbClr val="222222"/>
+                </a:solidFill>
+                <a:latin typeface="Noto Sans JP"/>
+              </a:rPr>
+              <a:t>データから学習</a:t>
+            </a:r>
+          </a:p>
+        </p:txBody>
+      </p:sp>
+      <p:sp>
+        <p:nvSpPr>
+          <p:cNvPr id="33" name="Rounded Rectangle 32"/>
+          <p:cNvSpPr/>
+          <p:nvPr/>
+        </p:nvSpPr>
+        <p:spPr>
+          <a:xfrm>
+            <a:off x="10368000" y="4194000"/>
+            <a:ext cx="1296000" cy="324000"/>
+          </a:xfrm>
+          <a:prstGeom prst="roundRect">
+            <a:avLst/>
+          </a:prstGeom>
+          <a:solidFill>
+            <a:srgbClr val="D9EAD3"/>
+          </a:solidFill>
+          <a:ln w="15875">
+            <a:solidFill>
+              <a:srgbClr val="6AA84F"/>
+            </a:solidFill>
+          </a:ln>
+          <a:effectLst/>
+        </p:spPr>
+        <p:style>
+          <a:lnRef idx="1">
+            <a:schemeClr val="accent1"/>
+          </a:lnRef>
+          <a:fillRef idx="3">
+            <a:schemeClr val="accent1"/>
+          </a:fillRef>
+          <a:effectRef idx="2">
+            <a:schemeClr val="accent1"/>
+          </a:effectRef>
+          <a:fontRef idx="minor">
+            <a:schemeClr val="lt1"/>
+          </a:fontRef>
+        </p:style>
+        <p:txBody>
+          <a:bodyPr rtlCol="0" anchor="ctr" wrap="square" lIns="54000" rIns="54000"/>
+          <a:lstStyle/>
+          <a:p>
+            <a:pPr algn="ctr"/>
+            <a:r>
+              <a:rPr sz="1100" b="1">
+                <a:solidFill>
+                  <a:srgbClr val="222222"/>
+                </a:solidFill>
+                <a:latin typeface="Noto Sans JP"/>
+              </a:rPr>
+              <a:t>データから学習</a:t>
+            </a:r>
+          </a:p>
+        </p:txBody>
+      </p:sp>
+      <p:sp>
+        <p:nvSpPr>
+          <p:cNvPr id="34" name="TextBox 33"/>
+          <p:cNvSpPr txBox="1"/>
+          <p:nvPr/>
+        </p:nvSpPr>
+        <p:spPr>
+          <a:xfrm>
+            <a:off x="360000" y="5400000"/>
+            <a:ext cx="9720000" cy="1080000"/>
+          </a:xfrm>
+          <a:prstGeom prst="rect">
+            <a:avLst/>
+          </a:prstGeom>
+          <a:noFill/>
+        </p:spPr>
+        <p:txBody>
+          <a:bodyPr wrap="square" anchor="t" lIns="54000" rIns="54000" tIns="18000" bIns="18000">
+            <a:spAutoFit/>
+          </a:bodyPr>
+          <a:lstStyle/>
+          <a:p>
+            <a:pPr algn="l"/>
+            <a:r>
+              <a:rPr sz="1200" b="0">
+                <a:solidFill>
+                  <a:srgbClr val="222222"/>
+                </a:solidFill>
+                <a:latin typeface="Noto Sans JP"/>
+              </a:rPr>
+              <a:t>問い　(1) 「人が設計」から「データから学習」へ移ったのは，表のどの欄が先か．</a:t>
+            </a:r>
+          </a:p>
+          <a:p>
+            <a:pPr algn="l"/>
+            <a:r>
+              <a:rPr sz="1200" b="0">
+                <a:solidFill>
+                  <a:srgbClr val="222222"/>
+                </a:solidFill>
+                <a:latin typeface="Noto Sans JP"/>
+              </a:rPr>
+              <a:t>　　　(2) 深層学習でも人が決めているものは何か（3つ）．</a:t>
+            </a:r>
+          </a:p>
+          <a:p>
+            <a:pPr algn="l"/>
+            <a:r>
+              <a:rPr sz="1200" b="0">
+                <a:solidFill>
+                  <a:srgbClr val="222222"/>
+                </a:solidFill>
+                <a:latin typeface="Noto Sans JP"/>
+              </a:rPr>
+              <a:t>　　　(3) 3つのアプローチは置き換わったのか，使い分けられているのか．身近な例を1つ挙げる．</a:t>
+            </a:r>
+          </a:p>
+        </p:txBody>
+      </p:sp>
+      <p:sp>
+        <p:nvSpPr>
+          <p:cNvPr id="35" name="TextBox 34"/>
+          <p:cNvSpPr txBox="1"/>
+          <p:nvPr/>
+        </p:nvSpPr>
+        <p:spPr>
+          <a:xfrm>
+            <a:off x="360000" y="6516000"/>
+            <a:ext cx="11448000" cy="251999"/>
+          </a:xfrm>
+          <a:prstGeom prst="rect">
+            <a:avLst/>
+          </a:prstGeom>
+          <a:noFill/>
+        </p:spPr>
+        <p:txBody>
+          <a:bodyPr wrap="square" anchor="t" lIns="54000" rIns="54000" tIns="18000" bIns="18000">
+            <a:spAutoFit/>
+          </a:bodyPr>
+          <a:lstStyle/>
+          <a:p>
+            <a:pPr algn="l"/>
+            <a:r>
               <a:rPr sz="900" b="0">
                 <a:solidFill>
                   <a:srgbClr val="555555"/>
                 </a:solidFill>
                 <a:latin typeface="Noto Sans JP"/>
               </a:rPr>
-              <a:t>武蔵野大学データサイエンス学部　中村亮太　2026年度</a:t>
+              <a:t>GW1-1　記録：完成した表のスクリーンショットをグループで共有する</a:t>
             </a:r>
           </a:p>
         </p:txBody>
@@ -3437,7 +4960,7 @@
                 </a:solidFill>
                 <a:latin typeface="Noto Sans JP"/>
               </a:rPr>
-              <a:t>GW1-1　AIの3つのアプローチ ― 表を完成させる（10分）</a:t>
+              <a:t>GW2-1　プログラミングの流れ ― カードを3つのフェーズに並べる（10分）</a:t>
             </a:r>
           </a:p>
         </p:txBody>
@@ -3472,7 +4995,7 @@
                 </a:solidFill>
                 <a:latin typeface="Noto Sans JP"/>
               </a:rPr>
-              <a:t>「どこに注目するか（特徴量）」と「どう判定するか（判定ルール）」を，人が作るのか，データから学習するのか．右のチップを表に貼り，空欄を埋める．</a:t>
+              <a:t>下の12枚のカードを，正しい順に上の枠へドラッグする．番号は書いていない．並べたあと，各フェーズの見出しも埋める．</a:t>
             </a:r>
           </a:p>
         </p:txBody>
@@ -3485,14 +5008,14 @@
         </p:nvSpPr>
         <p:spPr>
           <a:xfrm>
-            <a:off x="360000" y="1152000"/>
-            <a:ext cx="1872000" cy="576000"/>
+            <a:off x="360000" y="1080000"/>
+            <a:ext cx="3456000" cy="396000"/>
           </a:xfrm>
           <a:prstGeom prst="rect">
             <a:avLst/>
           </a:prstGeom>
           <a:solidFill>
-            <a:srgbClr val="ECEE67"/>
+            <a:srgbClr val="FFFFFF"/>
           </a:solidFill>
           <a:ln w="15875">
             <a:solidFill>
@@ -3521,33 +5044,257 @@
           <a:p>
             <a:pPr algn="ctr"/>
             <a:r>
-              <a:rPr sz="1200" b="1">
-                <a:solidFill>
-                  <a:srgbClr val="222222"/>
-                </a:solidFill>
-                <a:latin typeface="Noto Sans JP"/>
-              </a:rPr>
-              <a:t>アプローチ</a:t>
-            </a:r>
-          </a:p>
-        </p:txBody>
-      </p:sp>
-      <p:sp>
-        <p:nvSpPr>
-          <p:cNvPr id="5" name="Rectangle 4"/>
+              <a:rPr sz="1300" b="1">
+                <a:solidFill>
+                  <a:srgbClr val="222222"/>
+                </a:solidFill>
+                <a:latin typeface="Noto Sans JP"/>
+              </a:rPr>
+              <a:t>データ準備フェーズ</a:t>
+            </a:r>
+          </a:p>
+        </p:txBody>
+      </p:sp>
+      <p:sp>
+        <p:nvSpPr>
+          <p:cNvPr id="5" name="Rounded Rectangle 4"/>
           <p:cNvSpPr/>
           <p:nvPr/>
         </p:nvSpPr>
         <p:spPr>
           <a:xfrm>
-            <a:off x="2232000" y="1152000"/>
-            <a:ext cx="2015999" cy="576000"/>
+            <a:off x="360000" y="1548000"/>
+            <a:ext cx="3456000" cy="468000"/>
+          </a:xfrm>
+          <a:prstGeom prst="roundRect">
+            <a:avLst/>
+          </a:prstGeom>
+          <a:solidFill>
+            <a:srgbClr val="FFF9C4"/>
+          </a:solidFill>
+          <a:ln w="15875">
+            <a:solidFill>
+              <a:srgbClr val="F9A825"/>
+            </a:solidFill>
+            <a:prstDash val="dash"/>
+          </a:ln>
+          <a:effectLst/>
+        </p:spPr>
+        <p:style>
+          <a:lnRef idx="1">
+            <a:schemeClr val="accent1"/>
+          </a:lnRef>
+          <a:fillRef idx="3">
+            <a:schemeClr val="accent1"/>
+          </a:fillRef>
+          <a:effectRef idx="2">
+            <a:schemeClr val="accent1"/>
+          </a:effectRef>
+          <a:fontRef idx="minor">
+            <a:schemeClr val="lt1"/>
+          </a:fontRef>
+        </p:style>
+        <p:txBody>
+          <a:bodyPr rtlCol="0" anchor="ctr" wrap="square" lIns="54000" rIns="54000"/>
+          <a:lstStyle/>
+          <a:p>
+            <a:pPr algn="ctr"/>
+            <a:r>
+              <a:rPr sz="1200" b="0">
+                <a:solidFill>
+                  <a:srgbClr val="222222"/>
+                </a:solidFill>
+                <a:latin typeface="Noto Sans JP"/>
+              </a:rPr>
+              <a:t/>
+            </a:r>
+          </a:p>
+        </p:txBody>
+      </p:sp>
+      <p:sp>
+        <p:nvSpPr>
+          <p:cNvPr id="6" name="Rounded Rectangle 5"/>
+          <p:cNvSpPr/>
+          <p:nvPr/>
+        </p:nvSpPr>
+        <p:spPr>
+          <a:xfrm>
+            <a:off x="360000" y="2106000"/>
+            <a:ext cx="3456000" cy="468000"/>
+          </a:xfrm>
+          <a:prstGeom prst="roundRect">
+            <a:avLst/>
+          </a:prstGeom>
+          <a:solidFill>
+            <a:srgbClr val="FFF9C4"/>
+          </a:solidFill>
+          <a:ln w="15875">
+            <a:solidFill>
+              <a:srgbClr val="F9A825"/>
+            </a:solidFill>
+            <a:prstDash val="dash"/>
+          </a:ln>
+          <a:effectLst/>
+        </p:spPr>
+        <p:style>
+          <a:lnRef idx="1">
+            <a:schemeClr val="accent1"/>
+          </a:lnRef>
+          <a:fillRef idx="3">
+            <a:schemeClr val="accent1"/>
+          </a:fillRef>
+          <a:effectRef idx="2">
+            <a:schemeClr val="accent1"/>
+          </a:effectRef>
+          <a:fontRef idx="minor">
+            <a:schemeClr val="lt1"/>
+          </a:fontRef>
+        </p:style>
+        <p:txBody>
+          <a:bodyPr rtlCol="0" anchor="ctr" wrap="square" lIns="54000" rIns="54000"/>
+          <a:lstStyle/>
+          <a:p>
+            <a:pPr algn="ctr"/>
+            <a:r>
+              <a:rPr sz="1200" b="0">
+                <a:solidFill>
+                  <a:srgbClr val="222222"/>
+                </a:solidFill>
+                <a:latin typeface="Noto Sans JP"/>
+              </a:rPr>
+              <a:t/>
+            </a:r>
+          </a:p>
+        </p:txBody>
+      </p:sp>
+      <p:sp>
+        <p:nvSpPr>
+          <p:cNvPr id="7" name="Rounded Rectangle 6"/>
+          <p:cNvSpPr/>
+          <p:nvPr/>
+        </p:nvSpPr>
+        <p:spPr>
+          <a:xfrm>
+            <a:off x="360000" y="2664000"/>
+            <a:ext cx="3456000" cy="468000"/>
+          </a:xfrm>
+          <a:prstGeom prst="roundRect">
+            <a:avLst/>
+          </a:prstGeom>
+          <a:solidFill>
+            <a:srgbClr val="FFF9C4"/>
+          </a:solidFill>
+          <a:ln w="15875">
+            <a:solidFill>
+              <a:srgbClr val="F9A825"/>
+            </a:solidFill>
+            <a:prstDash val="dash"/>
+          </a:ln>
+          <a:effectLst/>
+        </p:spPr>
+        <p:style>
+          <a:lnRef idx="1">
+            <a:schemeClr val="accent1"/>
+          </a:lnRef>
+          <a:fillRef idx="3">
+            <a:schemeClr val="accent1"/>
+          </a:fillRef>
+          <a:effectRef idx="2">
+            <a:schemeClr val="accent1"/>
+          </a:effectRef>
+          <a:fontRef idx="minor">
+            <a:schemeClr val="lt1"/>
+          </a:fontRef>
+        </p:style>
+        <p:txBody>
+          <a:bodyPr rtlCol="0" anchor="ctr" wrap="square" lIns="54000" rIns="54000"/>
+          <a:lstStyle/>
+          <a:p>
+            <a:pPr algn="ctr"/>
+            <a:r>
+              <a:rPr sz="1200" b="0">
+                <a:solidFill>
+                  <a:srgbClr val="222222"/>
+                </a:solidFill>
+                <a:latin typeface="Noto Sans JP"/>
+              </a:rPr>
+              <a:t/>
+            </a:r>
+          </a:p>
+        </p:txBody>
+      </p:sp>
+      <p:sp>
+        <p:nvSpPr>
+          <p:cNvPr id="8" name="Rounded Rectangle 7"/>
+          <p:cNvSpPr/>
+          <p:nvPr/>
+        </p:nvSpPr>
+        <p:spPr>
+          <a:xfrm>
+            <a:off x="360000" y="3221999"/>
+            <a:ext cx="3456000" cy="468000"/>
+          </a:xfrm>
+          <a:prstGeom prst="roundRect">
+            <a:avLst/>
+          </a:prstGeom>
+          <a:solidFill>
+            <a:srgbClr val="FFF9C4"/>
+          </a:solidFill>
+          <a:ln w="15875">
+            <a:solidFill>
+              <a:srgbClr val="F9A825"/>
+            </a:solidFill>
+            <a:prstDash val="dash"/>
+          </a:ln>
+          <a:effectLst/>
+        </p:spPr>
+        <p:style>
+          <a:lnRef idx="1">
+            <a:schemeClr val="accent1"/>
+          </a:lnRef>
+          <a:fillRef idx="3">
+            <a:schemeClr val="accent1"/>
+          </a:fillRef>
+          <a:effectRef idx="2">
+            <a:schemeClr val="accent1"/>
+          </a:effectRef>
+          <a:fontRef idx="minor">
+            <a:schemeClr val="lt1"/>
+          </a:fontRef>
+        </p:style>
+        <p:txBody>
+          <a:bodyPr rtlCol="0" anchor="ctr" wrap="square" lIns="54000" rIns="54000"/>
+          <a:lstStyle/>
+          <a:p>
+            <a:pPr algn="ctr"/>
+            <a:r>
+              <a:rPr sz="1200" b="0">
+                <a:solidFill>
+                  <a:srgbClr val="222222"/>
+                </a:solidFill>
+                <a:latin typeface="Noto Sans JP"/>
+              </a:rPr>
+              <a:t/>
+            </a:r>
+          </a:p>
+        </p:txBody>
+      </p:sp>
+      <p:sp>
+        <p:nvSpPr>
+          <p:cNvPr id="9" name="Rectangle 8"/>
+          <p:cNvSpPr/>
+          <p:nvPr/>
+        </p:nvSpPr>
+        <p:spPr>
+          <a:xfrm>
+            <a:off x="4356000" y="1080000"/>
+            <a:ext cx="3456000" cy="396000"/>
           </a:xfrm>
           <a:prstGeom prst="rect">
             <a:avLst/>
           </a:prstGeom>
           <a:solidFill>
-            <a:srgbClr val="ECEE67"/>
+            <a:srgbClr val="FFFFFF"/>
           </a:solidFill>
           <a:ln w="15875">
             <a:solidFill>
@@ -3576,33 +5323,313 @@
           <a:p>
             <a:pPr algn="ctr"/>
             <a:r>
-              <a:rPr sz="1200" b="1">
-                <a:solidFill>
-                  <a:srgbClr val="222222"/>
-                </a:solidFill>
-                <a:latin typeface="Noto Sans JP"/>
-              </a:rPr>
-              <a:t>主な時期</a:t>
-            </a:r>
-          </a:p>
-        </p:txBody>
-      </p:sp>
-      <p:sp>
-        <p:nvSpPr>
-          <p:cNvPr id="6" name="Rectangle 5"/>
+              <a:rPr sz="1300" b="1">
+                <a:solidFill>
+                  <a:srgbClr val="222222"/>
+                </a:solidFill>
+                <a:latin typeface="Noto Sans JP"/>
+              </a:rPr>
+              <a:t>学習設定フェーズ</a:t>
+            </a:r>
+          </a:p>
+        </p:txBody>
+      </p:sp>
+      <p:sp>
+        <p:nvSpPr>
+          <p:cNvPr id="10" name="Rounded Rectangle 9"/>
           <p:cNvSpPr/>
           <p:nvPr/>
         </p:nvSpPr>
         <p:spPr>
           <a:xfrm>
-            <a:off x="4248000" y="1152000"/>
-            <a:ext cx="1944000" cy="576000"/>
+            <a:off x="4356000" y="1548000"/>
+            <a:ext cx="3456000" cy="468000"/>
+          </a:xfrm>
+          <a:prstGeom prst="roundRect">
+            <a:avLst/>
+          </a:prstGeom>
+          <a:solidFill>
+            <a:srgbClr val="FFF9C4"/>
+          </a:solidFill>
+          <a:ln w="15875">
+            <a:solidFill>
+              <a:srgbClr val="F9A825"/>
+            </a:solidFill>
+            <a:prstDash val="dash"/>
+          </a:ln>
+          <a:effectLst/>
+        </p:spPr>
+        <p:style>
+          <a:lnRef idx="1">
+            <a:schemeClr val="accent1"/>
+          </a:lnRef>
+          <a:fillRef idx="3">
+            <a:schemeClr val="accent1"/>
+          </a:fillRef>
+          <a:effectRef idx="2">
+            <a:schemeClr val="accent1"/>
+          </a:effectRef>
+          <a:fontRef idx="minor">
+            <a:schemeClr val="lt1"/>
+          </a:fontRef>
+        </p:style>
+        <p:txBody>
+          <a:bodyPr rtlCol="0" anchor="ctr" wrap="square" lIns="54000" rIns="54000"/>
+          <a:lstStyle/>
+          <a:p>
+            <a:pPr algn="ctr"/>
+            <a:r>
+              <a:rPr sz="1200" b="0">
+                <a:solidFill>
+                  <a:srgbClr val="222222"/>
+                </a:solidFill>
+                <a:latin typeface="Noto Sans JP"/>
+              </a:rPr>
+              <a:t/>
+            </a:r>
+          </a:p>
+        </p:txBody>
+      </p:sp>
+      <p:sp>
+        <p:nvSpPr>
+          <p:cNvPr id="11" name="Rounded Rectangle 10"/>
+          <p:cNvSpPr/>
+          <p:nvPr/>
+        </p:nvSpPr>
+        <p:spPr>
+          <a:xfrm>
+            <a:off x="4356000" y="2106000"/>
+            <a:ext cx="3456000" cy="468000"/>
+          </a:xfrm>
+          <a:prstGeom prst="roundRect">
+            <a:avLst/>
+          </a:prstGeom>
+          <a:solidFill>
+            <a:srgbClr val="FFF9C4"/>
+          </a:solidFill>
+          <a:ln w="15875">
+            <a:solidFill>
+              <a:srgbClr val="F9A825"/>
+            </a:solidFill>
+            <a:prstDash val="dash"/>
+          </a:ln>
+          <a:effectLst/>
+        </p:spPr>
+        <p:style>
+          <a:lnRef idx="1">
+            <a:schemeClr val="accent1"/>
+          </a:lnRef>
+          <a:fillRef idx="3">
+            <a:schemeClr val="accent1"/>
+          </a:fillRef>
+          <a:effectRef idx="2">
+            <a:schemeClr val="accent1"/>
+          </a:effectRef>
+          <a:fontRef idx="minor">
+            <a:schemeClr val="lt1"/>
+          </a:fontRef>
+        </p:style>
+        <p:txBody>
+          <a:bodyPr rtlCol="0" anchor="ctr" wrap="square" lIns="54000" rIns="54000"/>
+          <a:lstStyle/>
+          <a:p>
+            <a:pPr algn="ctr"/>
+            <a:r>
+              <a:rPr sz="1200" b="0">
+                <a:solidFill>
+                  <a:srgbClr val="222222"/>
+                </a:solidFill>
+                <a:latin typeface="Noto Sans JP"/>
+              </a:rPr>
+              <a:t/>
+            </a:r>
+          </a:p>
+        </p:txBody>
+      </p:sp>
+      <p:sp>
+        <p:nvSpPr>
+          <p:cNvPr id="12" name="Rounded Rectangle 11"/>
+          <p:cNvSpPr/>
+          <p:nvPr/>
+        </p:nvSpPr>
+        <p:spPr>
+          <a:xfrm>
+            <a:off x="4356000" y="2664000"/>
+            <a:ext cx="3456000" cy="468000"/>
+          </a:xfrm>
+          <a:prstGeom prst="roundRect">
+            <a:avLst/>
+          </a:prstGeom>
+          <a:solidFill>
+            <a:srgbClr val="FFF9C4"/>
+          </a:solidFill>
+          <a:ln w="15875">
+            <a:solidFill>
+              <a:srgbClr val="F9A825"/>
+            </a:solidFill>
+            <a:prstDash val="dash"/>
+          </a:ln>
+          <a:effectLst/>
+        </p:spPr>
+        <p:style>
+          <a:lnRef idx="1">
+            <a:schemeClr val="accent1"/>
+          </a:lnRef>
+          <a:fillRef idx="3">
+            <a:schemeClr val="accent1"/>
+          </a:fillRef>
+          <a:effectRef idx="2">
+            <a:schemeClr val="accent1"/>
+          </a:effectRef>
+          <a:fontRef idx="minor">
+            <a:schemeClr val="lt1"/>
+          </a:fontRef>
+        </p:style>
+        <p:txBody>
+          <a:bodyPr rtlCol="0" anchor="ctr" wrap="square" lIns="54000" rIns="54000"/>
+          <a:lstStyle/>
+          <a:p>
+            <a:pPr algn="ctr"/>
+            <a:r>
+              <a:rPr sz="1200" b="0">
+                <a:solidFill>
+                  <a:srgbClr val="222222"/>
+                </a:solidFill>
+                <a:latin typeface="Noto Sans JP"/>
+              </a:rPr>
+              <a:t/>
+            </a:r>
+          </a:p>
+        </p:txBody>
+      </p:sp>
+      <p:sp>
+        <p:nvSpPr>
+          <p:cNvPr id="13" name="Rounded Rectangle 12"/>
+          <p:cNvSpPr/>
+          <p:nvPr/>
+        </p:nvSpPr>
+        <p:spPr>
+          <a:xfrm>
+            <a:off x="4356000" y="3221999"/>
+            <a:ext cx="3456000" cy="468000"/>
+          </a:xfrm>
+          <a:prstGeom prst="roundRect">
+            <a:avLst/>
+          </a:prstGeom>
+          <a:solidFill>
+            <a:srgbClr val="FFF9C4"/>
+          </a:solidFill>
+          <a:ln w="15875">
+            <a:solidFill>
+              <a:srgbClr val="F9A825"/>
+            </a:solidFill>
+            <a:prstDash val="dash"/>
+          </a:ln>
+          <a:effectLst/>
+        </p:spPr>
+        <p:style>
+          <a:lnRef idx="1">
+            <a:schemeClr val="accent1"/>
+          </a:lnRef>
+          <a:fillRef idx="3">
+            <a:schemeClr val="accent1"/>
+          </a:fillRef>
+          <a:effectRef idx="2">
+            <a:schemeClr val="accent1"/>
+          </a:effectRef>
+          <a:fontRef idx="minor">
+            <a:schemeClr val="lt1"/>
+          </a:fontRef>
+        </p:style>
+        <p:txBody>
+          <a:bodyPr rtlCol="0" anchor="ctr" wrap="square" lIns="54000" rIns="54000"/>
+          <a:lstStyle/>
+          <a:p>
+            <a:pPr algn="ctr"/>
+            <a:r>
+              <a:rPr sz="1200" b="0">
+                <a:solidFill>
+                  <a:srgbClr val="222222"/>
+                </a:solidFill>
+                <a:latin typeface="Noto Sans JP"/>
+              </a:rPr>
+              <a:t/>
+            </a:r>
+          </a:p>
+        </p:txBody>
+      </p:sp>
+      <p:sp>
+        <p:nvSpPr>
+          <p:cNvPr id="14" name="Rounded Rectangle 13"/>
+          <p:cNvSpPr/>
+          <p:nvPr/>
+        </p:nvSpPr>
+        <p:spPr>
+          <a:xfrm>
+            <a:off x="4356000" y="3780000"/>
+            <a:ext cx="3456000" cy="468000"/>
+          </a:xfrm>
+          <a:prstGeom prst="roundRect">
+            <a:avLst/>
+          </a:prstGeom>
+          <a:solidFill>
+            <a:srgbClr val="FFF9C4"/>
+          </a:solidFill>
+          <a:ln w="15875">
+            <a:solidFill>
+              <a:srgbClr val="F9A825"/>
+            </a:solidFill>
+            <a:prstDash val="dash"/>
+          </a:ln>
+          <a:effectLst/>
+        </p:spPr>
+        <p:style>
+          <a:lnRef idx="1">
+            <a:schemeClr val="accent1"/>
+          </a:lnRef>
+          <a:fillRef idx="3">
+            <a:schemeClr val="accent1"/>
+          </a:fillRef>
+          <a:effectRef idx="2">
+            <a:schemeClr val="accent1"/>
+          </a:effectRef>
+          <a:fontRef idx="minor">
+            <a:schemeClr val="lt1"/>
+          </a:fontRef>
+        </p:style>
+        <p:txBody>
+          <a:bodyPr rtlCol="0" anchor="ctr" wrap="square" lIns="54000" rIns="54000"/>
+          <a:lstStyle/>
+          <a:p>
+            <a:pPr algn="ctr"/>
+            <a:r>
+              <a:rPr sz="1200" b="0">
+                <a:solidFill>
+                  <a:srgbClr val="222222"/>
+                </a:solidFill>
+                <a:latin typeface="Noto Sans JP"/>
+              </a:rPr>
+              <a:t/>
+            </a:r>
+          </a:p>
+        </p:txBody>
+      </p:sp>
+      <p:sp>
+        <p:nvSpPr>
+          <p:cNvPr id="15" name="Rectangle 14"/>
+          <p:cNvSpPr/>
+          <p:nvPr/>
+        </p:nvSpPr>
+        <p:spPr>
+          <a:xfrm>
+            <a:off x="8352000" y="1080000"/>
+            <a:ext cx="3456000" cy="396000"/>
           </a:xfrm>
           <a:prstGeom prst="rect">
             <a:avLst/>
           </a:prstGeom>
           <a:solidFill>
-            <a:srgbClr val="ECEE67"/>
+            <a:srgbClr val="FFFFFF"/>
           </a:solidFill>
           <a:ln w="15875">
             <a:solidFill>
@@ -3631,50 +5658,39 @@
           <a:p>
             <a:pPr algn="ctr"/>
             <a:r>
-              <a:rPr sz="1200" b="1">
-                <a:solidFill>
-                  <a:srgbClr val="222222"/>
-                </a:solidFill>
-                <a:latin typeface="Noto Sans JP"/>
-              </a:rPr>
-              <a:t>特徴量</a:t>
-            </a:r>
-          </a:p>
-          <a:p>
-            <a:pPr algn="ctr"/>
-            <a:r>
-              <a:rPr sz="1200" b="1">
-                <a:solidFill>
-                  <a:srgbClr val="222222"/>
-                </a:solidFill>
-                <a:latin typeface="Noto Sans JP"/>
-              </a:rPr>
-              <a:t>（どこに注目するか）</a:t>
-            </a:r>
-          </a:p>
-        </p:txBody>
-      </p:sp>
-      <p:sp>
-        <p:nvSpPr>
-          <p:cNvPr id="7" name="Rectangle 6"/>
+              <a:rPr sz="1300" b="1">
+                <a:solidFill>
+                  <a:srgbClr val="222222"/>
+                </a:solidFill>
+                <a:latin typeface="Noto Sans JP"/>
+              </a:rPr>
+              <a:t>学習，評価フェーズ</a:t>
+            </a:r>
+          </a:p>
+        </p:txBody>
+      </p:sp>
+      <p:sp>
+        <p:nvSpPr>
+          <p:cNvPr id="16" name="Rounded Rectangle 15"/>
           <p:cNvSpPr/>
           <p:nvPr/>
         </p:nvSpPr>
         <p:spPr>
           <a:xfrm>
-            <a:off x="6192000" y="1152000"/>
-            <a:ext cx="1944000" cy="576000"/>
-          </a:xfrm>
-          <a:prstGeom prst="rect">
-            <a:avLst/>
-          </a:prstGeom>
-          <a:solidFill>
-            <a:srgbClr val="ECEE67"/>
+            <a:off x="8352000" y="1548000"/>
+            <a:ext cx="3456000" cy="468000"/>
+          </a:xfrm>
+          <a:prstGeom prst="roundRect">
+            <a:avLst/>
+          </a:prstGeom>
+          <a:solidFill>
+            <a:srgbClr val="FFF9C4"/>
           </a:solidFill>
           <a:ln w="15875">
             <a:solidFill>
-              <a:srgbClr val="888888"/>
+              <a:srgbClr val="F9A825"/>
             </a:solidFill>
+            <a:prstDash val="dash"/>
           </a:ln>
           <a:effectLst/>
         </p:spPr>
@@ -3698,50 +5714,39 @@
           <a:p>
             <a:pPr algn="ctr"/>
             <a:r>
-              <a:rPr sz="1200" b="1">
-                <a:solidFill>
-                  <a:srgbClr val="222222"/>
-                </a:solidFill>
-                <a:latin typeface="Noto Sans JP"/>
-              </a:rPr>
-              <a:t>判定ルール</a:t>
-            </a:r>
-          </a:p>
-          <a:p>
-            <a:pPr algn="ctr"/>
-            <a:r>
-              <a:rPr sz="1200" b="1">
-                <a:solidFill>
-                  <a:srgbClr val="222222"/>
-                </a:solidFill>
-                <a:latin typeface="Noto Sans JP"/>
-              </a:rPr>
-              <a:t>（どう判定するか）</a:t>
-            </a:r>
-          </a:p>
-        </p:txBody>
-      </p:sp>
-      <p:sp>
-        <p:nvSpPr>
-          <p:cNvPr id="8" name="Rectangle 7"/>
+              <a:rPr sz="1200" b="0">
+                <a:solidFill>
+                  <a:srgbClr val="222222"/>
+                </a:solidFill>
+                <a:latin typeface="Noto Sans JP"/>
+              </a:rPr>
+              <a:t/>
+            </a:r>
+          </a:p>
+        </p:txBody>
+      </p:sp>
+      <p:sp>
+        <p:nvSpPr>
+          <p:cNvPr id="17" name="Rounded Rectangle 16"/>
           <p:cNvSpPr/>
           <p:nvPr/>
         </p:nvSpPr>
         <p:spPr>
           <a:xfrm>
-            <a:off x="8136000" y="1152000"/>
-            <a:ext cx="2160000" cy="576000"/>
-          </a:xfrm>
-          <a:prstGeom prst="rect">
-            <a:avLst/>
-          </a:prstGeom>
-          <a:solidFill>
-            <a:srgbClr val="ECEE67"/>
+            <a:off x="8352000" y="2106000"/>
+            <a:ext cx="3456000" cy="468000"/>
+          </a:xfrm>
+          <a:prstGeom prst="roundRect">
+            <a:avLst/>
+          </a:prstGeom>
+          <a:solidFill>
+            <a:srgbClr val="FFF9C4"/>
           </a:solidFill>
           <a:ln w="15875">
             <a:solidFill>
-              <a:srgbClr val="888888"/>
+              <a:srgbClr val="F9A825"/>
             </a:solidFill>
+            <a:prstDash val="dash"/>
           </a:ln>
           <a:effectLst/>
         </p:spPr>
@@ -3765,38 +5770,39 @@
           <a:p>
             <a:pPr algn="ctr"/>
             <a:r>
-              <a:rPr sz="1200" b="1">
-                <a:solidFill>
-                  <a:srgbClr val="222222"/>
-                </a:solidFill>
-                <a:latin typeface="Noto Sans JP"/>
-              </a:rPr>
-              <a:t>代表的な手法</a:t>
-            </a:r>
-          </a:p>
-        </p:txBody>
-      </p:sp>
-      <p:sp>
-        <p:nvSpPr>
-          <p:cNvPr id="9" name="Rectangle 8"/>
+              <a:rPr sz="1200" b="0">
+                <a:solidFill>
+                  <a:srgbClr val="222222"/>
+                </a:solidFill>
+                <a:latin typeface="Noto Sans JP"/>
+              </a:rPr>
+              <a:t/>
+            </a:r>
+          </a:p>
+        </p:txBody>
+      </p:sp>
+      <p:sp>
+        <p:nvSpPr>
+          <p:cNvPr id="18" name="Rounded Rectangle 17"/>
           <p:cNvSpPr/>
           <p:nvPr/>
         </p:nvSpPr>
         <p:spPr>
           <a:xfrm>
-            <a:off x="360000" y="1728000"/>
-            <a:ext cx="1872000" cy="936000"/>
-          </a:xfrm>
-          <a:prstGeom prst="rect">
-            <a:avLst/>
-          </a:prstGeom>
-          <a:solidFill>
-            <a:srgbClr val="FFFFFF"/>
+            <a:off x="8352000" y="2664000"/>
+            <a:ext cx="3456000" cy="468000"/>
+          </a:xfrm>
+          <a:prstGeom prst="roundRect">
+            <a:avLst/>
+          </a:prstGeom>
+          <a:solidFill>
+            <a:srgbClr val="FFF9C4"/>
           </a:solidFill>
           <a:ln w="15875">
             <a:solidFill>
-              <a:srgbClr val="888888"/>
+              <a:srgbClr val="F9A825"/>
             </a:solidFill>
+            <a:prstDash val="dash"/>
           </a:ln>
           <a:effectLst/>
         </p:spPr>
@@ -3820,37 +5826,37 @@
           <a:p>
             <a:pPr algn="ctr"/>
             <a:r>
-              <a:rPr sz="1200" b="1">
-                <a:solidFill>
-                  <a:srgbClr val="222222"/>
-                </a:solidFill>
-                <a:latin typeface="Noto Sans JP"/>
-              </a:rPr>
-              <a:t>ルールベース</a:t>
-            </a:r>
-          </a:p>
-        </p:txBody>
-      </p:sp>
-      <p:sp>
-        <p:nvSpPr>
-          <p:cNvPr id="10" name="Rectangle 9"/>
+              <a:rPr sz="1200" b="0">
+                <a:solidFill>
+                  <a:srgbClr val="222222"/>
+                </a:solidFill>
+                <a:latin typeface="Noto Sans JP"/>
+              </a:rPr>
+              <a:t/>
+            </a:r>
+          </a:p>
+        </p:txBody>
+      </p:sp>
+      <p:sp>
+        <p:nvSpPr>
+          <p:cNvPr id="19" name="Rounded Rectangle 18"/>
           <p:cNvSpPr/>
           <p:nvPr/>
         </p:nvSpPr>
         <p:spPr>
           <a:xfrm>
-            <a:off x="2232000" y="1728000"/>
-            <a:ext cx="2015999" cy="936000"/>
-          </a:xfrm>
-          <a:prstGeom prst="rect">
-            <a:avLst/>
-          </a:prstGeom>
-          <a:solidFill>
-            <a:srgbClr val="FFF9C4"/>
+            <a:off x="360000" y="4536000"/>
+            <a:ext cx="1835999" cy="468000"/>
+          </a:xfrm>
+          <a:prstGeom prst="roundRect">
+            <a:avLst/>
+          </a:prstGeom>
+          <a:solidFill>
+            <a:srgbClr val="FFFFFF"/>
           </a:solidFill>
           <a:ln w="15875">
             <a:solidFill>
-              <a:srgbClr val="888888"/>
+              <a:srgbClr val="222222"/>
             </a:solidFill>
           </a:ln>
           <a:effectLst/>
@@ -3875,37 +5881,37 @@
           <a:p>
             <a:pPr algn="ctr"/>
             <a:r>
-              <a:rPr sz="1200" b="0">
-                <a:solidFill>
-                  <a:srgbClr val="222222"/>
-                </a:solidFill>
-                <a:latin typeface="Noto Sans JP"/>
-              </a:rPr>
-              <a:t/>
-            </a:r>
-          </a:p>
-        </p:txBody>
-      </p:sp>
-      <p:sp>
-        <p:nvSpPr>
-          <p:cNvPr id="11" name="Rectangle 10"/>
+              <a:rPr sz="1100" b="1">
+                <a:solidFill>
+                  <a:srgbClr val="222222"/>
+                </a:solidFill>
+                <a:latin typeface="Noto Sans JP"/>
+              </a:rPr>
+              <a:t>損失関数の定義</a:t>
+            </a:r>
+          </a:p>
+        </p:txBody>
+      </p:sp>
+      <p:sp>
+        <p:nvSpPr>
+          <p:cNvPr id="20" name="Rounded Rectangle 19"/>
           <p:cNvSpPr/>
           <p:nvPr/>
         </p:nvSpPr>
         <p:spPr>
           <a:xfrm>
-            <a:off x="4248000" y="1728000"/>
-            <a:ext cx="1944000" cy="936000"/>
-          </a:xfrm>
-          <a:prstGeom prst="rect">
-            <a:avLst/>
-          </a:prstGeom>
-          <a:solidFill>
-            <a:srgbClr val="FFF9C4"/>
+            <a:off x="2304000" y="4536000"/>
+            <a:ext cx="1835999" cy="468000"/>
+          </a:xfrm>
+          <a:prstGeom prst="roundRect">
+            <a:avLst/>
+          </a:prstGeom>
+          <a:solidFill>
+            <a:srgbClr val="FFFFFF"/>
           </a:solidFill>
           <a:ln w="15875">
             <a:solidFill>
-              <a:srgbClr val="888888"/>
+              <a:srgbClr val="222222"/>
             </a:solidFill>
           </a:ln>
           <a:effectLst/>
@@ -3930,37 +5936,37 @@
           <a:p>
             <a:pPr algn="ctr"/>
             <a:r>
-              <a:rPr sz="1200" b="0">
-                <a:solidFill>
-                  <a:srgbClr val="222222"/>
-                </a:solidFill>
-                <a:latin typeface="Noto Sans JP"/>
-              </a:rPr>
-              <a:t/>
-            </a:r>
-          </a:p>
-        </p:txBody>
-      </p:sp>
-      <p:sp>
-        <p:nvSpPr>
-          <p:cNvPr id="12" name="Rectangle 11"/>
+              <a:rPr sz="1100" b="1">
+                <a:solidFill>
+                  <a:srgbClr val="222222"/>
+                </a:solidFill>
+                <a:latin typeface="Noto Sans JP"/>
+              </a:rPr>
+              <a:t>ライブラリのインポート</a:t>
+            </a:r>
+          </a:p>
+        </p:txBody>
+      </p:sp>
+      <p:sp>
+        <p:nvSpPr>
+          <p:cNvPr id="21" name="Rounded Rectangle 20"/>
           <p:cNvSpPr/>
           <p:nvPr/>
         </p:nvSpPr>
         <p:spPr>
           <a:xfrm>
-            <a:off x="6192000" y="1728000"/>
-            <a:ext cx="1944000" cy="936000"/>
-          </a:xfrm>
-          <a:prstGeom prst="rect">
-            <a:avLst/>
-          </a:prstGeom>
-          <a:solidFill>
-            <a:srgbClr val="FFF9C4"/>
+            <a:off x="4248000" y="4536000"/>
+            <a:ext cx="1835999" cy="468000"/>
+          </a:xfrm>
+          <a:prstGeom prst="roundRect">
+            <a:avLst/>
+          </a:prstGeom>
+          <a:solidFill>
+            <a:srgbClr val="FFFFFF"/>
           </a:solidFill>
           <a:ln w="15875">
             <a:solidFill>
-              <a:srgbClr val="888888"/>
+              <a:srgbClr val="222222"/>
             </a:solidFill>
           </a:ln>
           <a:effectLst/>
@@ -3985,37 +5991,37 @@
           <a:p>
             <a:pPr algn="ctr"/>
             <a:r>
-              <a:rPr sz="1200" b="0">
-                <a:solidFill>
-                  <a:srgbClr val="222222"/>
-                </a:solidFill>
-                <a:latin typeface="Noto Sans JP"/>
-              </a:rPr>
-              <a:t/>
-            </a:r>
-          </a:p>
-        </p:txBody>
-      </p:sp>
-      <p:sp>
-        <p:nvSpPr>
-          <p:cNvPr id="13" name="Rectangle 12"/>
+              <a:rPr sz="1100" b="1">
+                <a:solidFill>
+                  <a:srgbClr val="222222"/>
+                </a:solidFill>
+                <a:latin typeface="Noto Sans JP"/>
+              </a:rPr>
+              <a:t>モデル学習＆検証</a:t>
+            </a:r>
+          </a:p>
+        </p:txBody>
+      </p:sp>
+      <p:sp>
+        <p:nvSpPr>
+          <p:cNvPr id="22" name="Rounded Rectangle 21"/>
           <p:cNvSpPr/>
           <p:nvPr/>
         </p:nvSpPr>
         <p:spPr>
           <a:xfrm>
-            <a:off x="8136000" y="1728000"/>
-            <a:ext cx="2160000" cy="936000"/>
-          </a:xfrm>
-          <a:prstGeom prst="rect">
-            <a:avLst/>
-          </a:prstGeom>
-          <a:solidFill>
-            <a:srgbClr val="FFF9C4"/>
+            <a:off x="6192000" y="4536000"/>
+            <a:ext cx="1835999" cy="468000"/>
+          </a:xfrm>
+          <a:prstGeom prst="roundRect">
+            <a:avLst/>
+          </a:prstGeom>
+          <a:solidFill>
+            <a:srgbClr val="FFFFFF"/>
           </a:solidFill>
           <a:ln w="15875">
             <a:solidFill>
-              <a:srgbClr val="888888"/>
+              <a:srgbClr val="222222"/>
             </a:solidFill>
           </a:ln>
           <a:effectLst/>
@@ -4040,29 +6046,29 @@
           <a:p>
             <a:pPr algn="ctr"/>
             <a:r>
-              <a:rPr sz="1200" b="0">
-                <a:solidFill>
-                  <a:srgbClr val="222222"/>
-                </a:solidFill>
-                <a:latin typeface="Noto Sans JP"/>
-              </a:rPr>
-              <a:t/>
-            </a:r>
-          </a:p>
-        </p:txBody>
-      </p:sp>
-      <p:sp>
-        <p:nvSpPr>
-          <p:cNvPr id="14" name="Rectangle 13"/>
+              <a:rPr sz="1100" b="1">
+                <a:solidFill>
+                  <a:srgbClr val="222222"/>
+                </a:solidFill>
+                <a:latin typeface="Noto Sans JP"/>
+              </a:rPr>
+              <a:t>デバイスの設定</a:t>
+            </a:r>
+          </a:p>
+        </p:txBody>
+      </p:sp>
+      <p:sp>
+        <p:nvSpPr>
+          <p:cNvPr id="23" name="Rounded Rectangle 22"/>
           <p:cNvSpPr/>
           <p:nvPr/>
         </p:nvSpPr>
         <p:spPr>
           <a:xfrm>
-            <a:off x="360000" y="2664000"/>
-            <a:ext cx="1872000" cy="936000"/>
-          </a:xfrm>
-          <a:prstGeom prst="rect">
+            <a:off x="8136000" y="4536000"/>
+            <a:ext cx="1835999" cy="468000"/>
+          </a:xfrm>
+          <a:prstGeom prst="roundRect">
             <a:avLst/>
           </a:prstGeom>
           <a:solidFill>
@@ -4070,7 +6076,7 @@
           </a:solidFill>
           <a:ln w="15875">
             <a:solidFill>
-              <a:srgbClr val="888888"/>
+              <a:srgbClr val="222222"/>
             </a:solidFill>
           </a:ln>
           <a:effectLst/>
@@ -4095,49 +6101,37 @@
           <a:p>
             <a:pPr algn="ctr"/>
             <a:r>
-              <a:rPr sz="1200" b="1">
-                <a:solidFill>
-                  <a:srgbClr val="222222"/>
-                </a:solidFill>
-                <a:latin typeface="Noto Sans JP"/>
-              </a:rPr>
-              <a:t>従来の機械学習</a:t>
-            </a:r>
-          </a:p>
-          <a:p>
-            <a:pPr algn="ctr"/>
-            <a:r>
-              <a:rPr sz="1200" b="1">
-                <a:solidFill>
-                  <a:srgbClr val="222222"/>
-                </a:solidFill>
-                <a:latin typeface="Noto Sans JP"/>
-              </a:rPr>
-              <a:t>（統計的機械学習）</a:t>
-            </a:r>
-          </a:p>
-        </p:txBody>
-      </p:sp>
-      <p:sp>
-        <p:nvSpPr>
-          <p:cNvPr id="15" name="Rectangle 14"/>
+              <a:rPr sz="1100" b="1">
+                <a:solidFill>
+                  <a:srgbClr val="222222"/>
+                </a:solidFill>
+                <a:latin typeface="Noto Sans JP"/>
+              </a:rPr>
+              <a:t>データセットの準備</a:t>
+            </a:r>
+          </a:p>
+        </p:txBody>
+      </p:sp>
+      <p:sp>
+        <p:nvSpPr>
+          <p:cNvPr id="24" name="Rounded Rectangle 23"/>
           <p:cNvSpPr/>
           <p:nvPr/>
         </p:nvSpPr>
         <p:spPr>
           <a:xfrm>
-            <a:off x="2232000" y="2664000"/>
-            <a:ext cx="2015999" cy="936000"/>
-          </a:xfrm>
-          <a:prstGeom prst="rect">
-            <a:avLst/>
-          </a:prstGeom>
-          <a:solidFill>
-            <a:srgbClr val="FFF9C4"/>
+            <a:off x="10080000" y="4536000"/>
+            <a:ext cx="1835999" cy="468000"/>
+          </a:xfrm>
+          <a:prstGeom prst="roundRect">
+            <a:avLst/>
+          </a:prstGeom>
+          <a:solidFill>
+            <a:srgbClr val="FFFFFF"/>
           </a:solidFill>
           <a:ln w="15875">
             <a:solidFill>
-              <a:srgbClr val="888888"/>
+              <a:srgbClr val="222222"/>
             </a:solidFill>
           </a:ln>
           <a:effectLst/>
@@ -4162,37 +6156,37 @@
           <a:p>
             <a:pPr algn="ctr"/>
             <a:r>
-              <a:rPr sz="1200" b="0">
-                <a:solidFill>
-                  <a:srgbClr val="222222"/>
-                </a:solidFill>
-                <a:latin typeface="Noto Sans JP"/>
-              </a:rPr>
-              <a:t/>
-            </a:r>
-          </a:p>
-        </p:txBody>
-      </p:sp>
-      <p:sp>
-        <p:nvSpPr>
-          <p:cNvPr id="16" name="Rectangle 15"/>
+              <a:rPr sz="1100" b="1">
+                <a:solidFill>
+                  <a:srgbClr val="222222"/>
+                </a:solidFill>
+                <a:latin typeface="Noto Sans JP"/>
+              </a:rPr>
+              <a:t>モデル性能評価</a:t>
+            </a:r>
+          </a:p>
+        </p:txBody>
+      </p:sp>
+      <p:sp>
+        <p:nvSpPr>
+          <p:cNvPr id="25" name="Rounded Rectangle 24"/>
           <p:cNvSpPr/>
           <p:nvPr/>
         </p:nvSpPr>
         <p:spPr>
           <a:xfrm>
-            <a:off x="4248000" y="2664000"/>
-            <a:ext cx="1944000" cy="936000"/>
-          </a:xfrm>
-          <a:prstGeom prst="rect">
-            <a:avLst/>
-          </a:prstGeom>
-          <a:solidFill>
-            <a:srgbClr val="FFF9C4"/>
+            <a:off x="360000" y="5112000"/>
+            <a:ext cx="1835999" cy="468000"/>
+          </a:xfrm>
+          <a:prstGeom prst="roundRect">
+            <a:avLst/>
+          </a:prstGeom>
+          <a:solidFill>
+            <a:srgbClr val="FFFFFF"/>
           </a:solidFill>
           <a:ln w="15875">
             <a:solidFill>
-              <a:srgbClr val="888888"/>
+              <a:srgbClr val="222222"/>
             </a:solidFill>
           </a:ln>
           <a:effectLst/>
@@ -4217,37 +6211,37 @@
           <a:p>
             <a:pPr algn="ctr"/>
             <a:r>
-              <a:rPr sz="1200" b="0">
-                <a:solidFill>
-                  <a:srgbClr val="222222"/>
-                </a:solidFill>
-                <a:latin typeface="Noto Sans JP"/>
-              </a:rPr>
-              <a:t/>
-            </a:r>
-          </a:p>
-        </p:txBody>
-      </p:sp>
-      <p:sp>
-        <p:nvSpPr>
-          <p:cNvPr id="17" name="Rectangle 16"/>
+              <a:rPr sz="1100" b="1">
+                <a:solidFill>
+                  <a:srgbClr val="222222"/>
+                </a:solidFill>
+                <a:latin typeface="Noto Sans JP"/>
+              </a:rPr>
+              <a:t>ネットワークの定義</a:t>
+            </a:r>
+          </a:p>
+        </p:txBody>
+      </p:sp>
+      <p:sp>
+        <p:nvSpPr>
+          <p:cNvPr id="26" name="Rounded Rectangle 25"/>
           <p:cNvSpPr/>
           <p:nvPr/>
         </p:nvSpPr>
         <p:spPr>
           <a:xfrm>
-            <a:off x="6192000" y="2664000"/>
-            <a:ext cx="1944000" cy="936000"/>
-          </a:xfrm>
-          <a:prstGeom prst="rect">
-            <a:avLst/>
-          </a:prstGeom>
-          <a:solidFill>
-            <a:srgbClr val="FFF9C4"/>
+            <a:off x="2304000" y="5112000"/>
+            <a:ext cx="1835999" cy="468000"/>
+          </a:xfrm>
+          <a:prstGeom prst="roundRect">
+            <a:avLst/>
+          </a:prstGeom>
+          <a:solidFill>
+            <a:srgbClr val="FFFFFF"/>
           </a:solidFill>
           <a:ln w="15875">
             <a:solidFill>
-              <a:srgbClr val="888888"/>
+              <a:srgbClr val="222222"/>
             </a:solidFill>
           </a:ln>
           <a:effectLst/>
@@ -4272,37 +6266,37 @@
           <a:p>
             <a:pPr algn="ctr"/>
             <a:r>
-              <a:rPr sz="1200" b="0">
-                <a:solidFill>
-                  <a:srgbClr val="222222"/>
-                </a:solidFill>
-                <a:latin typeface="Noto Sans JP"/>
-              </a:rPr>
-              <a:t/>
-            </a:r>
-          </a:p>
-        </p:txBody>
-      </p:sp>
-      <p:sp>
-        <p:nvSpPr>
-          <p:cNvPr id="18" name="Rectangle 17"/>
+              <a:rPr sz="1100" b="1">
+                <a:solidFill>
+                  <a:srgbClr val="222222"/>
+                </a:solidFill>
+                <a:latin typeface="Noto Sans JP"/>
+              </a:rPr>
+              <a:t>データの前処理</a:t>
+            </a:r>
+          </a:p>
+        </p:txBody>
+      </p:sp>
+      <p:sp>
+        <p:nvSpPr>
+          <p:cNvPr id="27" name="Rounded Rectangle 26"/>
           <p:cNvSpPr/>
           <p:nvPr/>
         </p:nvSpPr>
         <p:spPr>
           <a:xfrm>
-            <a:off x="8136000" y="2664000"/>
-            <a:ext cx="2160000" cy="936000"/>
-          </a:xfrm>
-          <a:prstGeom prst="rect">
-            <a:avLst/>
-          </a:prstGeom>
-          <a:solidFill>
-            <a:srgbClr val="FFF9C4"/>
+            <a:off x="4248000" y="5112000"/>
+            <a:ext cx="1835999" cy="468000"/>
+          </a:xfrm>
+          <a:prstGeom prst="roundRect">
+            <a:avLst/>
+          </a:prstGeom>
+          <a:solidFill>
+            <a:srgbClr val="FFFFFF"/>
           </a:solidFill>
           <a:ln w="15875">
             <a:solidFill>
-              <a:srgbClr val="888888"/>
+              <a:srgbClr val="222222"/>
             </a:solidFill>
           </a:ln>
           <a:effectLst/>
@@ -4327,29 +6321,29 @@
           <a:p>
             <a:pPr algn="ctr"/>
             <a:r>
-              <a:rPr sz="1200" b="0">
-                <a:solidFill>
-                  <a:srgbClr val="222222"/>
-                </a:solidFill>
-                <a:latin typeface="Noto Sans JP"/>
-              </a:rPr>
-              <a:t/>
-            </a:r>
-          </a:p>
-        </p:txBody>
-      </p:sp>
-      <p:sp>
-        <p:nvSpPr>
-          <p:cNvPr id="19" name="Rectangle 18"/>
+              <a:rPr sz="1100" b="1">
+                <a:solidFill>
+                  <a:srgbClr val="222222"/>
+                </a:solidFill>
+                <a:latin typeface="Noto Sans JP"/>
+              </a:rPr>
+              <a:t>学習結果の可視化</a:t>
+            </a:r>
+          </a:p>
+        </p:txBody>
+      </p:sp>
+      <p:sp>
+        <p:nvSpPr>
+          <p:cNvPr id="28" name="Rounded Rectangle 27"/>
           <p:cNvSpPr/>
           <p:nvPr/>
         </p:nvSpPr>
         <p:spPr>
           <a:xfrm>
-            <a:off x="360000" y="3600000"/>
-            <a:ext cx="1872000" cy="936000"/>
-          </a:xfrm>
-          <a:prstGeom prst="rect">
+            <a:off x="6192000" y="5112000"/>
+            <a:ext cx="1835999" cy="468000"/>
+          </a:xfrm>
+          <a:prstGeom prst="roundRect">
             <a:avLst/>
           </a:prstGeom>
           <a:solidFill>
@@ -4357,7 +6351,7 @@
           </a:solidFill>
           <a:ln w="15875">
             <a:solidFill>
-              <a:srgbClr val="888888"/>
+              <a:srgbClr val="222222"/>
             </a:solidFill>
           </a:ln>
           <a:effectLst/>
@@ -4382,49 +6376,37 @@
           <a:p>
             <a:pPr algn="ctr"/>
             <a:r>
-              <a:rPr sz="1200" b="1">
-                <a:solidFill>
-                  <a:srgbClr val="222222"/>
-                </a:solidFill>
-                <a:latin typeface="Noto Sans JP"/>
-              </a:rPr>
-              <a:t>深層学習</a:t>
-            </a:r>
-          </a:p>
-          <a:p>
-            <a:pPr algn="ctr"/>
-            <a:r>
-              <a:rPr sz="1200" b="1">
-                <a:solidFill>
-                  <a:srgbClr val="222222"/>
-                </a:solidFill>
-                <a:latin typeface="Noto Sans JP"/>
-              </a:rPr>
-              <a:t>（深層ニューラルネットワーク）</a:t>
-            </a:r>
-          </a:p>
-        </p:txBody>
-      </p:sp>
-      <p:sp>
-        <p:nvSpPr>
-          <p:cNvPr id="20" name="Rectangle 19"/>
+              <a:rPr sz="1100" b="1">
+                <a:solidFill>
+                  <a:srgbClr val="222222"/>
+                </a:solidFill>
+                <a:latin typeface="Noto Sans JP"/>
+              </a:rPr>
+              <a:t>最適化関数の定義</a:t>
+            </a:r>
+          </a:p>
+        </p:txBody>
+      </p:sp>
+      <p:sp>
+        <p:nvSpPr>
+          <p:cNvPr id="29" name="Rounded Rectangle 28"/>
           <p:cNvSpPr/>
           <p:nvPr/>
         </p:nvSpPr>
         <p:spPr>
           <a:xfrm>
-            <a:off x="2232000" y="3600000"/>
-            <a:ext cx="2015999" cy="936000"/>
-          </a:xfrm>
-          <a:prstGeom prst="rect">
-            <a:avLst/>
-          </a:prstGeom>
-          <a:solidFill>
-            <a:srgbClr val="FFF9C4"/>
+            <a:off x="8136000" y="5112000"/>
+            <a:ext cx="1835999" cy="468000"/>
+          </a:xfrm>
+          <a:prstGeom prst="roundRect">
+            <a:avLst/>
+          </a:prstGeom>
+          <a:solidFill>
+            <a:srgbClr val="FFFFFF"/>
           </a:solidFill>
           <a:ln w="15875">
             <a:solidFill>
-              <a:srgbClr val="888888"/>
+              <a:srgbClr val="222222"/>
             </a:solidFill>
           </a:ln>
           <a:effectLst/>
@@ -4449,37 +6431,37 @@
           <a:p>
             <a:pPr algn="ctr"/>
             <a:r>
-              <a:rPr sz="1200" b="0">
-                <a:solidFill>
-                  <a:srgbClr val="222222"/>
-                </a:solidFill>
-                <a:latin typeface="Noto Sans JP"/>
-              </a:rPr>
-              <a:t/>
-            </a:r>
-          </a:p>
-        </p:txBody>
-      </p:sp>
-      <p:sp>
-        <p:nvSpPr>
-          <p:cNvPr id="21" name="Rectangle 20"/>
+              <a:rPr sz="1100" b="1">
+                <a:solidFill>
+                  <a:srgbClr val="222222"/>
+                </a:solidFill>
+                <a:latin typeface="Noto Sans JP"/>
+              </a:rPr>
+              <a:t>データローダの作成</a:t>
+            </a:r>
+          </a:p>
+        </p:txBody>
+      </p:sp>
+      <p:sp>
+        <p:nvSpPr>
+          <p:cNvPr id="30" name="Rounded Rectangle 29"/>
           <p:cNvSpPr/>
           <p:nvPr/>
         </p:nvSpPr>
         <p:spPr>
           <a:xfrm>
-            <a:off x="4248000" y="3600000"/>
-            <a:ext cx="1944000" cy="936000"/>
-          </a:xfrm>
-          <a:prstGeom prst="rect">
-            <a:avLst/>
-          </a:prstGeom>
-          <a:solidFill>
-            <a:srgbClr val="FFF9C4"/>
+            <a:off x="10080000" y="5112000"/>
+            <a:ext cx="1835999" cy="468000"/>
+          </a:xfrm>
+          <a:prstGeom prst="roundRect">
+            <a:avLst/>
+          </a:prstGeom>
+          <a:solidFill>
+            <a:srgbClr val="FFFFFF"/>
           </a:solidFill>
           <a:ln w="15875">
             <a:solidFill>
-              <a:srgbClr val="888888"/>
+              <a:srgbClr val="222222"/>
             </a:solidFill>
           </a:ln>
           <a:effectLst/>
@@ -4504,137 +6486,27 @@
           <a:p>
             <a:pPr algn="ctr"/>
             <a:r>
-              <a:rPr sz="1200" b="0">
-                <a:solidFill>
-                  <a:srgbClr val="222222"/>
-                </a:solidFill>
-                <a:latin typeface="Noto Sans JP"/>
-              </a:rPr>
-              <a:t/>
-            </a:r>
-          </a:p>
-        </p:txBody>
-      </p:sp>
-      <p:sp>
-        <p:nvSpPr>
-          <p:cNvPr id="22" name="Rectangle 21"/>
-          <p:cNvSpPr/>
-          <p:nvPr/>
-        </p:nvSpPr>
-        <p:spPr>
-          <a:xfrm>
-            <a:off x="6192000" y="3600000"/>
-            <a:ext cx="1944000" cy="936000"/>
-          </a:xfrm>
-          <a:prstGeom prst="rect">
-            <a:avLst/>
-          </a:prstGeom>
-          <a:solidFill>
-            <a:srgbClr val="FFF9C4"/>
-          </a:solidFill>
-          <a:ln w="15875">
-            <a:solidFill>
-              <a:srgbClr val="888888"/>
-            </a:solidFill>
-          </a:ln>
-          <a:effectLst/>
-        </p:spPr>
-        <p:style>
-          <a:lnRef idx="1">
-            <a:schemeClr val="accent1"/>
-          </a:lnRef>
-          <a:fillRef idx="3">
-            <a:schemeClr val="accent1"/>
-          </a:fillRef>
-          <a:effectRef idx="2">
-            <a:schemeClr val="accent1"/>
-          </a:effectRef>
-          <a:fontRef idx="minor">
-            <a:schemeClr val="lt1"/>
-          </a:fontRef>
-        </p:style>
-        <p:txBody>
-          <a:bodyPr rtlCol="0" anchor="ctr" wrap="square" lIns="54000" rIns="54000"/>
-          <a:lstStyle/>
-          <a:p>
-            <a:pPr algn="ctr"/>
-            <a:r>
-              <a:rPr sz="1200" b="0">
-                <a:solidFill>
-                  <a:srgbClr val="222222"/>
-                </a:solidFill>
-                <a:latin typeface="Noto Sans JP"/>
-              </a:rPr>
-              <a:t/>
-            </a:r>
-          </a:p>
-        </p:txBody>
-      </p:sp>
-      <p:sp>
-        <p:nvSpPr>
-          <p:cNvPr id="23" name="Rectangle 22"/>
-          <p:cNvSpPr/>
-          <p:nvPr/>
-        </p:nvSpPr>
-        <p:spPr>
-          <a:xfrm>
-            <a:off x="8136000" y="3600000"/>
-            <a:ext cx="2160000" cy="936000"/>
-          </a:xfrm>
-          <a:prstGeom prst="rect">
-            <a:avLst/>
-          </a:prstGeom>
-          <a:solidFill>
-            <a:srgbClr val="FFF9C4"/>
-          </a:solidFill>
-          <a:ln w="15875">
-            <a:solidFill>
-              <a:srgbClr val="888888"/>
-            </a:solidFill>
-          </a:ln>
-          <a:effectLst/>
-        </p:spPr>
-        <p:style>
-          <a:lnRef idx="1">
-            <a:schemeClr val="accent1"/>
-          </a:lnRef>
-          <a:fillRef idx="3">
-            <a:schemeClr val="accent1"/>
-          </a:fillRef>
-          <a:effectRef idx="2">
-            <a:schemeClr val="accent1"/>
-          </a:effectRef>
-          <a:fontRef idx="minor">
-            <a:schemeClr val="lt1"/>
-          </a:fontRef>
-        </p:style>
-        <p:txBody>
-          <a:bodyPr rtlCol="0" anchor="ctr" wrap="square" lIns="54000" rIns="54000"/>
-          <a:lstStyle/>
-          <a:p>
-            <a:pPr algn="ctr"/>
-            <a:r>
-              <a:rPr sz="1200" b="0">
-                <a:solidFill>
-                  <a:srgbClr val="222222"/>
-                </a:solidFill>
-                <a:latin typeface="Noto Sans JP"/>
-              </a:rPr>
-              <a:t/>
-            </a:r>
-          </a:p>
-        </p:txBody>
-      </p:sp>
-      <p:sp>
-        <p:nvSpPr>
-          <p:cNvPr id="24" name="TextBox 23"/>
+              <a:rPr sz="1100" b="1">
+                <a:solidFill>
+                  <a:srgbClr val="222222"/>
+                </a:solidFill>
+                <a:latin typeface="Noto Sans JP"/>
+              </a:rPr>
+              <a:t>入力データの形状確認</a:t>
+            </a:r>
+          </a:p>
+        </p:txBody>
+      </p:sp>
+      <p:sp>
+        <p:nvSpPr>
+          <p:cNvPr id="31" name="TextBox 30"/>
           <p:cNvSpPr txBox="1"/>
           <p:nvPr/>
         </p:nvSpPr>
         <p:spPr>
           <a:xfrm>
-            <a:off x="360000" y="4572000"/>
-            <a:ext cx="9720000" cy="216000"/>
+            <a:off x="360000" y="5760000"/>
+            <a:ext cx="11448000" cy="648000"/>
           </a:xfrm>
           <a:prstGeom prst="rect">
             <a:avLst/>
@@ -4649,27 +6521,39 @@
           <a:p>
             <a:pPr algn="l"/>
             <a:r>
-              <a:rPr sz="900" b="0">
-                <a:solidFill>
-                  <a:srgbClr val="555555"/>
-                </a:solidFill>
-                <a:latin typeface="Noto Sans JP"/>
-              </a:rPr>
-              <a:t>※ 深層学習の行は，特徴量と判定ルールの 2 欄を 1 つとして考えてよい</a:t>
-            </a:r>
-          </a:p>
-        </p:txBody>
-      </p:sp>
-      <p:sp>
-        <p:nvSpPr>
-          <p:cNvPr id="25" name="TextBox 24"/>
+              <a:rPr sz="1200" b="0">
+                <a:solidFill>
+                  <a:srgbClr val="222222"/>
+                </a:solidFill>
+                <a:latin typeface="Noto Sans JP"/>
+              </a:rPr>
+              <a:t>問い　(1) 「学習」が始まるのは何番目のカードからか．それより前は何をしているか．</a:t>
+            </a:r>
+          </a:p>
+          <a:p>
+            <a:pPr algn="l"/>
+            <a:r>
+              <a:rPr sz="1200" b="0">
+                <a:solidFill>
+                  <a:srgbClr val="222222"/>
+                </a:solidFill>
+                <a:latin typeface="Noto Sans JP"/>
+              </a:rPr>
+              <a:t>　　　(2) データが画像からテキストに変わったとき，差し替えるカードはどれか．</a:t>
+            </a:r>
+          </a:p>
+        </p:txBody>
+      </p:sp>
+      <p:sp>
+        <p:nvSpPr>
+          <p:cNvPr id="32" name="TextBox 31"/>
           <p:cNvSpPr txBox="1"/>
           <p:nvPr/>
         </p:nvSpPr>
         <p:spPr>
           <a:xfrm>
-            <a:off x="10368000" y="1152000"/>
-            <a:ext cx="1620000" cy="216000"/>
+            <a:off x="360000" y="6516000"/>
+            <a:ext cx="11448000" cy="251999"/>
           </a:xfrm>
           <a:prstGeom prst="rect">
             <a:avLst/>
@@ -4684,547 +6568,13 @@
           <a:p>
             <a:pPr algn="l"/>
             <a:r>
-              <a:rPr sz="1000" b="1">
+              <a:rPr sz="900" b="0">
                 <a:solidFill>
                   <a:srgbClr val="555555"/>
                 </a:solidFill>
                 <a:latin typeface="Noto Sans JP"/>
               </a:rPr>
-              <a:t>チップ（ドラッグして貼る）</a:t>
-            </a:r>
-          </a:p>
-        </p:txBody>
-      </p:sp>
-      <p:sp>
-        <p:nvSpPr>
-          <p:cNvPr id="26" name="Rounded Rectangle 25"/>
-          <p:cNvSpPr/>
-          <p:nvPr/>
-        </p:nvSpPr>
-        <p:spPr>
-          <a:xfrm>
-            <a:off x="10368000" y="1440000"/>
-            <a:ext cx="1296000" cy="324000"/>
-          </a:xfrm>
-          <a:prstGeom prst="roundRect">
-            <a:avLst/>
-          </a:prstGeom>
-          <a:solidFill>
-            <a:srgbClr val="E0E0E0"/>
-          </a:solidFill>
-          <a:ln w="15875">
-            <a:solidFill>
-              <a:srgbClr val="888888"/>
-            </a:solidFill>
-          </a:ln>
-          <a:effectLst/>
-        </p:spPr>
-        <p:style>
-          <a:lnRef idx="1">
-            <a:schemeClr val="accent1"/>
-          </a:lnRef>
-          <a:fillRef idx="3">
-            <a:schemeClr val="accent1"/>
-          </a:fillRef>
-          <a:effectRef idx="2">
-            <a:schemeClr val="accent1"/>
-          </a:effectRef>
-          <a:fontRef idx="minor">
-            <a:schemeClr val="lt1"/>
-          </a:fontRef>
-        </p:style>
-        <p:txBody>
-          <a:bodyPr rtlCol="0" anchor="ctr" wrap="square" lIns="54000" rIns="54000"/>
-          <a:lstStyle/>
-          <a:p>
-            <a:pPr algn="ctr"/>
-            <a:r>
-              <a:rPr sz="1100" b="1">
-                <a:solidFill>
-                  <a:srgbClr val="222222"/>
-                </a:solidFill>
-                <a:latin typeface="Noto Sans JP"/>
-              </a:rPr>
-              <a:t>人が設計</a:t>
-            </a:r>
-          </a:p>
-        </p:txBody>
-      </p:sp>
-      <p:sp>
-        <p:nvSpPr>
-          <p:cNvPr id="27" name="Rounded Rectangle 26"/>
-          <p:cNvSpPr/>
-          <p:nvPr/>
-        </p:nvSpPr>
-        <p:spPr>
-          <a:xfrm>
-            <a:off x="10368000" y="1818000"/>
-            <a:ext cx="1296000" cy="324000"/>
-          </a:xfrm>
-          <a:prstGeom prst="roundRect">
-            <a:avLst/>
-          </a:prstGeom>
-          <a:solidFill>
-            <a:srgbClr val="E0E0E0"/>
-          </a:solidFill>
-          <a:ln w="15875">
-            <a:solidFill>
-              <a:srgbClr val="888888"/>
-            </a:solidFill>
-          </a:ln>
-          <a:effectLst/>
-        </p:spPr>
-        <p:style>
-          <a:lnRef idx="1">
-            <a:schemeClr val="accent1"/>
-          </a:lnRef>
-          <a:fillRef idx="3">
-            <a:schemeClr val="accent1"/>
-          </a:fillRef>
-          <a:effectRef idx="2">
-            <a:schemeClr val="accent1"/>
-          </a:effectRef>
-          <a:fontRef idx="minor">
-            <a:schemeClr val="lt1"/>
-          </a:fontRef>
-        </p:style>
-        <p:txBody>
-          <a:bodyPr rtlCol="0" anchor="ctr" wrap="square" lIns="54000" rIns="54000"/>
-          <a:lstStyle/>
-          <a:p>
-            <a:pPr algn="ctr"/>
-            <a:r>
-              <a:rPr sz="1100" b="1">
-                <a:solidFill>
-                  <a:srgbClr val="222222"/>
-                </a:solidFill>
-                <a:latin typeface="Noto Sans JP"/>
-              </a:rPr>
-              <a:t>人が設計</a:t>
-            </a:r>
-          </a:p>
-        </p:txBody>
-      </p:sp>
-      <p:sp>
-        <p:nvSpPr>
-          <p:cNvPr id="28" name="Rounded Rectangle 27"/>
-          <p:cNvSpPr/>
-          <p:nvPr/>
-        </p:nvSpPr>
-        <p:spPr>
-          <a:xfrm>
-            <a:off x="10368000" y="2196000"/>
-            <a:ext cx="1296000" cy="324000"/>
-          </a:xfrm>
-          <a:prstGeom prst="roundRect">
-            <a:avLst/>
-          </a:prstGeom>
-          <a:solidFill>
-            <a:srgbClr val="E0E0E0"/>
-          </a:solidFill>
-          <a:ln w="15875">
-            <a:solidFill>
-              <a:srgbClr val="888888"/>
-            </a:solidFill>
-          </a:ln>
-          <a:effectLst/>
-        </p:spPr>
-        <p:style>
-          <a:lnRef idx="1">
-            <a:schemeClr val="accent1"/>
-          </a:lnRef>
-          <a:fillRef idx="3">
-            <a:schemeClr val="accent1"/>
-          </a:fillRef>
-          <a:effectRef idx="2">
-            <a:schemeClr val="accent1"/>
-          </a:effectRef>
-          <a:fontRef idx="minor">
-            <a:schemeClr val="lt1"/>
-          </a:fontRef>
-        </p:style>
-        <p:txBody>
-          <a:bodyPr rtlCol="0" anchor="ctr" wrap="square" lIns="54000" rIns="54000"/>
-          <a:lstStyle/>
-          <a:p>
-            <a:pPr algn="ctr"/>
-            <a:r>
-              <a:rPr sz="1100" b="1">
-                <a:solidFill>
-                  <a:srgbClr val="222222"/>
-                </a:solidFill>
-                <a:latin typeface="Noto Sans JP"/>
-              </a:rPr>
-              <a:t>人が設計</a:t>
-            </a:r>
-          </a:p>
-        </p:txBody>
-      </p:sp>
-      <p:sp>
-        <p:nvSpPr>
-          <p:cNvPr id="29" name="Rounded Rectangle 28"/>
-          <p:cNvSpPr/>
-          <p:nvPr/>
-        </p:nvSpPr>
-        <p:spPr>
-          <a:xfrm>
-            <a:off x="10368000" y="2574000"/>
-            <a:ext cx="1296000" cy="324000"/>
-          </a:xfrm>
-          <a:prstGeom prst="roundRect">
-            <a:avLst/>
-          </a:prstGeom>
-          <a:solidFill>
-            <a:srgbClr val="E0E0E0"/>
-          </a:solidFill>
-          <a:ln w="15875">
-            <a:solidFill>
-              <a:srgbClr val="888888"/>
-            </a:solidFill>
-          </a:ln>
-          <a:effectLst/>
-        </p:spPr>
-        <p:style>
-          <a:lnRef idx="1">
-            <a:schemeClr val="accent1"/>
-          </a:lnRef>
-          <a:fillRef idx="3">
-            <a:schemeClr val="accent1"/>
-          </a:fillRef>
-          <a:effectRef idx="2">
-            <a:schemeClr val="accent1"/>
-          </a:effectRef>
-          <a:fontRef idx="minor">
-            <a:schemeClr val="lt1"/>
-          </a:fontRef>
-        </p:style>
-        <p:txBody>
-          <a:bodyPr rtlCol="0" anchor="ctr" wrap="square" lIns="54000" rIns="54000"/>
-          <a:lstStyle/>
-          <a:p>
-            <a:pPr algn="ctr"/>
-            <a:r>
-              <a:rPr sz="1100" b="1">
-                <a:solidFill>
-                  <a:srgbClr val="222222"/>
-                </a:solidFill>
-                <a:latin typeface="Noto Sans JP"/>
-              </a:rPr>
-              <a:t>人が設計</a:t>
-            </a:r>
-          </a:p>
-        </p:txBody>
-      </p:sp>
-      <p:sp>
-        <p:nvSpPr>
-          <p:cNvPr id="30" name="Rounded Rectangle 29"/>
-          <p:cNvSpPr/>
-          <p:nvPr/>
-        </p:nvSpPr>
-        <p:spPr>
-          <a:xfrm>
-            <a:off x="10368000" y="3060000"/>
-            <a:ext cx="1296000" cy="324000"/>
-          </a:xfrm>
-          <a:prstGeom prst="roundRect">
-            <a:avLst/>
-          </a:prstGeom>
-          <a:solidFill>
-            <a:srgbClr val="D9EAD3"/>
-          </a:solidFill>
-          <a:ln w="15875">
-            <a:solidFill>
-              <a:srgbClr val="6AA84F"/>
-            </a:solidFill>
-          </a:ln>
-          <a:effectLst/>
-        </p:spPr>
-        <p:style>
-          <a:lnRef idx="1">
-            <a:schemeClr val="accent1"/>
-          </a:lnRef>
-          <a:fillRef idx="3">
-            <a:schemeClr val="accent1"/>
-          </a:fillRef>
-          <a:effectRef idx="2">
-            <a:schemeClr val="accent1"/>
-          </a:effectRef>
-          <a:fontRef idx="minor">
-            <a:schemeClr val="lt1"/>
-          </a:fontRef>
-        </p:style>
-        <p:txBody>
-          <a:bodyPr rtlCol="0" anchor="ctr" wrap="square" lIns="54000" rIns="54000"/>
-          <a:lstStyle/>
-          <a:p>
-            <a:pPr algn="ctr"/>
-            <a:r>
-              <a:rPr sz="1100" b="1">
-                <a:solidFill>
-                  <a:srgbClr val="222222"/>
-                </a:solidFill>
-                <a:latin typeface="Noto Sans JP"/>
-              </a:rPr>
-              <a:t>データから学習</a:t>
-            </a:r>
-          </a:p>
-        </p:txBody>
-      </p:sp>
-      <p:sp>
-        <p:nvSpPr>
-          <p:cNvPr id="31" name="Rounded Rectangle 30"/>
-          <p:cNvSpPr/>
-          <p:nvPr/>
-        </p:nvSpPr>
-        <p:spPr>
-          <a:xfrm>
-            <a:off x="10368000" y="3438000"/>
-            <a:ext cx="1296000" cy="324000"/>
-          </a:xfrm>
-          <a:prstGeom prst="roundRect">
-            <a:avLst/>
-          </a:prstGeom>
-          <a:solidFill>
-            <a:srgbClr val="D9EAD3"/>
-          </a:solidFill>
-          <a:ln w="15875">
-            <a:solidFill>
-              <a:srgbClr val="6AA84F"/>
-            </a:solidFill>
-          </a:ln>
-          <a:effectLst/>
-        </p:spPr>
-        <p:style>
-          <a:lnRef idx="1">
-            <a:schemeClr val="accent1"/>
-          </a:lnRef>
-          <a:fillRef idx="3">
-            <a:schemeClr val="accent1"/>
-          </a:fillRef>
-          <a:effectRef idx="2">
-            <a:schemeClr val="accent1"/>
-          </a:effectRef>
-          <a:fontRef idx="minor">
-            <a:schemeClr val="lt1"/>
-          </a:fontRef>
-        </p:style>
-        <p:txBody>
-          <a:bodyPr rtlCol="0" anchor="ctr" wrap="square" lIns="54000" rIns="54000"/>
-          <a:lstStyle/>
-          <a:p>
-            <a:pPr algn="ctr"/>
-            <a:r>
-              <a:rPr sz="1100" b="1">
-                <a:solidFill>
-                  <a:srgbClr val="222222"/>
-                </a:solidFill>
-                <a:latin typeface="Noto Sans JP"/>
-              </a:rPr>
-              <a:t>データから学習</a:t>
-            </a:r>
-          </a:p>
-        </p:txBody>
-      </p:sp>
-      <p:sp>
-        <p:nvSpPr>
-          <p:cNvPr id="32" name="Rounded Rectangle 31"/>
-          <p:cNvSpPr/>
-          <p:nvPr/>
-        </p:nvSpPr>
-        <p:spPr>
-          <a:xfrm>
-            <a:off x="10368000" y="3816000"/>
-            <a:ext cx="1296000" cy="324000"/>
-          </a:xfrm>
-          <a:prstGeom prst="roundRect">
-            <a:avLst/>
-          </a:prstGeom>
-          <a:solidFill>
-            <a:srgbClr val="D9EAD3"/>
-          </a:solidFill>
-          <a:ln w="15875">
-            <a:solidFill>
-              <a:srgbClr val="6AA84F"/>
-            </a:solidFill>
-          </a:ln>
-          <a:effectLst/>
-        </p:spPr>
-        <p:style>
-          <a:lnRef idx="1">
-            <a:schemeClr val="accent1"/>
-          </a:lnRef>
-          <a:fillRef idx="3">
-            <a:schemeClr val="accent1"/>
-          </a:fillRef>
-          <a:effectRef idx="2">
-            <a:schemeClr val="accent1"/>
-          </a:effectRef>
-          <a:fontRef idx="minor">
-            <a:schemeClr val="lt1"/>
-          </a:fontRef>
-        </p:style>
-        <p:txBody>
-          <a:bodyPr rtlCol="0" anchor="ctr" wrap="square" lIns="54000" rIns="54000"/>
-          <a:lstStyle/>
-          <a:p>
-            <a:pPr algn="ctr"/>
-            <a:r>
-              <a:rPr sz="1100" b="1">
-                <a:solidFill>
-                  <a:srgbClr val="222222"/>
-                </a:solidFill>
-                <a:latin typeface="Noto Sans JP"/>
-              </a:rPr>
-              <a:t>データから学習</a:t>
-            </a:r>
-          </a:p>
-        </p:txBody>
-      </p:sp>
-      <p:sp>
-        <p:nvSpPr>
-          <p:cNvPr id="33" name="Rounded Rectangle 32"/>
-          <p:cNvSpPr/>
-          <p:nvPr/>
-        </p:nvSpPr>
-        <p:spPr>
-          <a:xfrm>
-            <a:off x="10368000" y="4194000"/>
-            <a:ext cx="1296000" cy="324000"/>
-          </a:xfrm>
-          <a:prstGeom prst="roundRect">
-            <a:avLst/>
-          </a:prstGeom>
-          <a:solidFill>
-            <a:srgbClr val="D9EAD3"/>
-          </a:solidFill>
-          <a:ln w="15875">
-            <a:solidFill>
-              <a:srgbClr val="6AA84F"/>
-            </a:solidFill>
-          </a:ln>
-          <a:effectLst/>
-        </p:spPr>
-        <p:style>
-          <a:lnRef idx="1">
-            <a:schemeClr val="accent1"/>
-          </a:lnRef>
-          <a:fillRef idx="3">
-            <a:schemeClr val="accent1"/>
-          </a:fillRef>
-          <a:effectRef idx="2">
-            <a:schemeClr val="accent1"/>
-          </a:effectRef>
-          <a:fontRef idx="minor">
-            <a:schemeClr val="lt1"/>
-          </a:fontRef>
-        </p:style>
-        <p:txBody>
-          <a:bodyPr rtlCol="0" anchor="ctr" wrap="square" lIns="54000" rIns="54000"/>
-          <a:lstStyle/>
-          <a:p>
-            <a:pPr algn="ctr"/>
-            <a:r>
-              <a:rPr sz="1100" b="1">
-                <a:solidFill>
-                  <a:srgbClr val="222222"/>
-                </a:solidFill>
-                <a:latin typeface="Noto Sans JP"/>
-              </a:rPr>
-              <a:t>データから学習</a:t>
-            </a:r>
-          </a:p>
-        </p:txBody>
-      </p:sp>
-      <p:sp>
-        <p:nvSpPr>
-          <p:cNvPr id="34" name="TextBox 33"/>
-          <p:cNvSpPr txBox="1"/>
-          <p:nvPr/>
-        </p:nvSpPr>
-        <p:spPr>
-          <a:xfrm>
-            <a:off x="360000" y="5400000"/>
-            <a:ext cx="9720000" cy="1080000"/>
-          </a:xfrm>
-          <a:prstGeom prst="rect">
-            <a:avLst/>
-          </a:prstGeom>
-          <a:noFill/>
-        </p:spPr>
-        <p:txBody>
-          <a:bodyPr wrap="square" anchor="t" lIns="54000" rIns="54000" tIns="18000" bIns="18000">
-            <a:spAutoFit/>
-          </a:bodyPr>
-          <a:lstStyle/>
-          <a:p>
-            <a:pPr algn="l"/>
-            <a:r>
-              <a:rPr sz="1200" b="0">
-                <a:solidFill>
-                  <a:srgbClr val="222222"/>
-                </a:solidFill>
-                <a:latin typeface="Noto Sans JP"/>
-              </a:rPr>
-              <a:t>問い　(1) 「人が設計」から「データから学習」へ移ったのは，表のどの欄が先か．</a:t>
-            </a:r>
-          </a:p>
-          <a:p>
-            <a:pPr algn="l"/>
-            <a:r>
-              <a:rPr sz="1200" b="0">
-                <a:solidFill>
-                  <a:srgbClr val="222222"/>
-                </a:solidFill>
-                <a:latin typeface="Noto Sans JP"/>
-              </a:rPr>
-              <a:t>　　　(2) 深層学習でも人が決めているものは何か（3つ）．</a:t>
-            </a:r>
-          </a:p>
-          <a:p>
-            <a:pPr algn="l"/>
-            <a:r>
-              <a:rPr sz="1200" b="0">
-                <a:solidFill>
-                  <a:srgbClr val="222222"/>
-                </a:solidFill>
-                <a:latin typeface="Noto Sans JP"/>
-              </a:rPr>
-              <a:t>　　　(3) 3つのアプローチは置き換わったのか，使い分けられているのか．身近な例を1つ挙げる．</a:t>
-            </a:r>
-          </a:p>
-        </p:txBody>
-      </p:sp>
-      <p:sp>
-        <p:nvSpPr>
-          <p:cNvPr id="35" name="TextBox 34"/>
-          <p:cNvSpPr txBox="1"/>
-          <p:nvPr/>
-        </p:nvSpPr>
-        <p:spPr>
-          <a:xfrm>
-            <a:off x="360000" y="6516000"/>
-            <a:ext cx="11448000" cy="251999"/>
-          </a:xfrm>
-          <a:prstGeom prst="rect">
-            <a:avLst/>
-          </a:prstGeom>
-          <a:noFill/>
-        </p:spPr>
-        <p:txBody>
-          <a:bodyPr wrap="square" anchor="t" lIns="54000" rIns="54000" tIns="18000" bIns="18000">
-            <a:spAutoFit/>
-          </a:bodyPr>
-          <a:lstStyle/>
-          <a:p>
-            <a:pPr algn="l"/>
-            <a:r>
-              <a:rPr sz="900" b="0">
-                <a:solidFill>
-                  <a:srgbClr val="555555"/>
-                </a:solidFill>
-                <a:latin typeface="Noto Sans JP"/>
-              </a:rPr>
-              <a:t>GW1-1　記録：recorder が完成した表のスクリーンショットを失敗記録に貼る</a:t>
+              <a:t>GW2-1　教科書 2.3 節のコードテンプレート①〜⑫に対応する．並べ終えたら番号を書き込む</a:t>
             </a:r>
           </a:p>
         </p:txBody>
@@ -5277,7 +6627,7 @@
                 </a:solidFill>
                 <a:latin typeface="Noto Sans JP"/>
               </a:rPr>
-              <a:t>GW1-2　画像分類の例で考える ― この写真をどう判定するか（10分）</a:t>
+              <a:t>GW2-2　入力データはどんなテンソルになるか（5分）</a:t>
             </a:r>
           </a:p>
         </p:txBody>
@@ -5312,86 +6662,27 @@
                 </a:solidFill>
                 <a:latin typeface="Noto Sans JP"/>
               </a:rPr>
-              <a:t>3つのアプローチそれぞれで，「何を見て」「どう決めるか」を自分たちの言葉で書く．右端にはそのやり方の弱点を書く．</a:t>
-            </a:r>
-          </a:p>
-        </p:txBody>
-      </p:sp>
-      <p:pic>
-        <p:nvPicPr>
-          <p:cNvPr id="4" name="Picture 3" descr="owl.jpg"/>
-          <p:cNvPicPr>
-            <a:picLocks noChangeAspect="1"/>
-          </p:cNvPicPr>
-          <p:nvPr/>
-        </p:nvPicPr>
-        <p:blipFill>
-          <a:blip r:embed="rId2"/>
-          <a:stretch>
-            <a:fillRect/>
-          </a:stretch>
-        </p:blipFill>
-        <p:spPr>
-          <a:xfrm>
-            <a:off x="360000" y="1440000"/>
-            <a:ext cx="2250000" cy="3240000"/>
+              <a:t>前処理とテンソルの形状から，右の候補を選んで左の「入力データ」の列に書く（ドラッグしてもよい）．どんなデータも「前処理で数値化 → テンソル → ディープラーニングモデル → 出力」の同じ流れに乗る．</a:t>
+            </a:r>
+          </a:p>
+        </p:txBody>
+      </p:sp>
+      <p:sp>
+        <p:nvSpPr>
+          <p:cNvPr id="4" name="Rectangle 3"/>
+          <p:cNvSpPr/>
+          <p:nvPr/>
+        </p:nvSpPr>
+        <p:spPr>
+          <a:xfrm>
+            <a:off x="360000" y="1152000"/>
+            <a:ext cx="2160000" cy="396000"/>
           </a:xfrm>
           <a:prstGeom prst="rect">
             <a:avLst/>
           </a:prstGeom>
-        </p:spPr>
-      </p:pic>
-      <p:sp>
-        <p:nvSpPr>
-          <p:cNvPr id="5" name="TextBox 4"/>
-          <p:cNvSpPr txBox="1"/>
-          <p:nvPr/>
-        </p:nvSpPr>
-        <p:spPr>
-          <a:xfrm>
-            <a:off x="360000" y="4752000"/>
-            <a:ext cx="2340000" cy="360000"/>
-          </a:xfrm>
-          <a:prstGeom prst="rect">
-            <a:avLst/>
-          </a:prstGeom>
-          <a:noFill/>
-        </p:spPr>
-        <p:txBody>
-          <a:bodyPr wrap="square" anchor="t" lIns="54000" rIns="54000" tIns="18000" bIns="18000">
-            <a:spAutoFit/>
-          </a:bodyPr>
-          <a:lstStyle/>
-          <a:p>
-            <a:pPr algn="ctr"/>
-            <a:r>
-              <a:rPr sz="1100" b="0">
-                <a:solidFill>
-                  <a:srgbClr val="555555"/>
-                </a:solidFill>
-                <a:latin typeface="Noto Sans JP"/>
-              </a:rPr>
-              <a:t>入力データ（フクロウの写真）</a:t>
-            </a:r>
-          </a:p>
-        </p:txBody>
-      </p:sp>
-      <p:sp>
-        <p:nvSpPr>
-          <p:cNvPr id="6" name="Rounded Rectangle 5"/>
-          <p:cNvSpPr/>
-          <p:nvPr/>
-        </p:nvSpPr>
-        <p:spPr>
-          <a:xfrm>
-            <a:off x="2880000" y="1224000"/>
-            <a:ext cx="1872000" cy="1368000"/>
-          </a:xfrm>
-          <a:prstGeom prst="roundRect">
-            <a:avLst/>
-          </a:prstGeom>
-          <a:solidFill>
-            <a:srgbClr val="FFFFFF"/>
+          <a:solidFill>
+            <a:srgbClr val="ECEE67"/>
           </a:solidFill>
           <a:ln w="15875">
             <a:solidFill>
@@ -5418,59 +6709,35 @@
           <a:bodyPr rtlCol="0" anchor="ctr" wrap="square" lIns="54000" rIns="54000"/>
           <a:lstStyle/>
           <a:p>
-            <a:pPr algn="l"/>
-            <a:r>
-              <a:rPr sz="1100" b="0">
-                <a:solidFill>
-                  <a:srgbClr val="222222"/>
-                </a:solidFill>
-                <a:latin typeface="Noto Sans JP"/>
-              </a:rPr>
-              <a:t>ルールベース</a:t>
-            </a:r>
-          </a:p>
-          <a:p>
-            <a:pPr algn="l"/>
-            <a:r>
-              <a:rPr sz="1100" b="0">
-                <a:solidFill>
-                  <a:srgbClr val="222222"/>
-                </a:solidFill>
-                <a:latin typeface="Noto Sans JP"/>
-              </a:rPr>
-              <a:t/>
-            </a:r>
-          </a:p>
-          <a:p>
-            <a:pPr algn="l"/>
-            <a:r>
-              <a:rPr sz="1100" b="0">
-                <a:solidFill>
-                  <a:srgbClr val="222222"/>
-                </a:solidFill>
-                <a:latin typeface="Noto Sans JP"/>
-              </a:rPr>
-              <a:t>人が特徴量と判定ルールを記述する</a:t>
-            </a:r>
-          </a:p>
-        </p:txBody>
-      </p:sp>
-      <p:sp>
-        <p:nvSpPr>
-          <p:cNvPr id="7" name="Rounded Rectangle 6"/>
+            <a:pPr algn="ctr"/>
+            <a:r>
+              <a:rPr sz="1200" b="1">
+                <a:solidFill>
+                  <a:srgbClr val="222222"/>
+                </a:solidFill>
+                <a:latin typeface="Noto Sans JP"/>
+              </a:rPr>
+              <a:t>入力データ</a:t>
+            </a:r>
+          </a:p>
+        </p:txBody>
+      </p:sp>
+      <p:sp>
+        <p:nvSpPr>
+          <p:cNvPr id="5" name="Rectangle 4"/>
           <p:cNvSpPr/>
           <p:nvPr/>
         </p:nvSpPr>
         <p:spPr>
           <a:xfrm>
-            <a:off x="4896000" y="1224000"/>
-            <a:ext cx="4140000" cy="1368000"/>
-          </a:xfrm>
-          <a:prstGeom prst="roundRect">
-            <a:avLst/>
-          </a:prstGeom>
-          <a:solidFill>
-            <a:srgbClr val="E0E0E0"/>
+            <a:off x="2520000" y="1152000"/>
+            <a:ext cx="3240000" cy="396000"/>
+          </a:xfrm>
+          <a:prstGeom prst="rect">
+            <a:avLst/>
+          </a:prstGeom>
+          <a:solidFill>
+            <a:srgbClr val="ECEE67"/>
           </a:solidFill>
           <a:ln w="15875">
             <a:solidFill>
@@ -5497,126 +6764,35 @@
           <a:bodyPr rtlCol="0" anchor="ctr" wrap="square" lIns="54000" rIns="54000"/>
           <a:lstStyle/>
           <a:p>
-            <a:pPr algn="l"/>
-            <a:r>
-              <a:rPr sz="1100" b="0">
-                <a:solidFill>
-                  <a:srgbClr val="222222"/>
-                </a:solidFill>
-                <a:latin typeface="Noto Sans JP"/>
-              </a:rPr>
-              <a:t>if-then ルールを書く：</a:t>
-            </a:r>
-          </a:p>
-          <a:p>
-            <a:pPr algn="l"/>
-            <a:r>
-              <a:rPr sz="1100" b="0">
-                <a:solidFill>
-                  <a:srgbClr val="222222"/>
-                </a:solidFill>
-                <a:latin typeface="Noto Sans JP"/>
-              </a:rPr>
-              <a:t>「＿＿＿＿」かつ「＿＿＿＿」→ フクロウ</a:t>
-            </a:r>
-          </a:p>
-        </p:txBody>
-      </p:sp>
-      <p:sp>
-        <p:nvSpPr>
-          <p:cNvPr id="8" name="Rounded Rectangle 7"/>
+            <a:pPr algn="ctr"/>
+            <a:r>
+              <a:rPr sz="1200" b="1">
+                <a:solidFill>
+                  <a:srgbClr val="222222"/>
+                </a:solidFill>
+                <a:latin typeface="Noto Sans JP"/>
+              </a:rPr>
+              <a:t>前処理（数値化）</a:t>
+            </a:r>
+          </a:p>
+        </p:txBody>
+      </p:sp>
+      <p:sp>
+        <p:nvSpPr>
+          <p:cNvPr id="6" name="Rectangle 5"/>
           <p:cNvSpPr/>
           <p:nvPr/>
         </p:nvSpPr>
         <p:spPr>
           <a:xfrm>
-            <a:off x="9180000" y="1224000"/>
-            <a:ext cx="2628000" cy="1368000"/>
-          </a:xfrm>
-          <a:prstGeom prst="roundRect">
-            <a:avLst/>
-          </a:prstGeom>
-          <a:solidFill>
-            <a:srgbClr val="FFF9C4"/>
-          </a:solidFill>
-          <a:ln w="15875">
-            <a:solidFill>
-              <a:srgbClr val="F9A825"/>
-            </a:solidFill>
-          </a:ln>
-          <a:effectLst/>
-        </p:spPr>
-        <p:style>
-          <a:lnRef idx="1">
-            <a:schemeClr val="accent1"/>
-          </a:lnRef>
-          <a:fillRef idx="3">
-            <a:schemeClr val="accent1"/>
-          </a:fillRef>
-          <a:effectRef idx="2">
-            <a:schemeClr val="accent1"/>
-          </a:effectRef>
-          <a:fontRef idx="minor">
-            <a:schemeClr val="lt1"/>
-          </a:fontRef>
-        </p:style>
-        <p:txBody>
-          <a:bodyPr rtlCol="0" anchor="ctr" wrap="square" lIns="54000" rIns="54000"/>
-          <a:lstStyle/>
-          <a:p>
-            <a:pPr algn="l"/>
-            <a:r>
-              <a:rPr sz="1100" b="0">
-                <a:solidFill>
-                  <a:srgbClr val="222222"/>
-                </a:solidFill>
-                <a:latin typeface="Noto Sans JP"/>
-              </a:rPr>
-              <a:t>弱点：</a:t>
-            </a:r>
-          </a:p>
-          <a:p>
-            <a:pPr algn="l"/>
-            <a:r>
-              <a:rPr sz="1100" b="0">
-                <a:solidFill>
-                  <a:srgbClr val="222222"/>
-                </a:solidFill>
-                <a:latin typeface="Noto Sans JP"/>
-              </a:rPr>
-              <a:t/>
-            </a:r>
-          </a:p>
-          <a:p>
-            <a:pPr algn="l"/>
-            <a:r>
-              <a:rPr sz="1100" b="0">
-                <a:solidFill>
-                  <a:srgbClr val="222222"/>
-                </a:solidFill>
-                <a:latin typeface="Noto Sans JP"/>
-              </a:rPr>
-              <a:t/>
-            </a:r>
-          </a:p>
-        </p:txBody>
-      </p:sp>
-      <p:sp>
-        <p:nvSpPr>
-          <p:cNvPr id="9" name="Rounded Rectangle 8"/>
-          <p:cNvSpPr/>
-          <p:nvPr/>
-        </p:nvSpPr>
-        <p:spPr>
-          <a:xfrm>
-            <a:off x="2880000" y="2880000"/>
-            <a:ext cx="1872000" cy="1368000"/>
-          </a:xfrm>
-          <a:prstGeom prst="roundRect">
-            <a:avLst/>
-          </a:prstGeom>
-          <a:solidFill>
-            <a:srgbClr val="FFFFFF"/>
+            <a:off x="5760000" y="1152000"/>
+            <a:ext cx="3600000" cy="396000"/>
+          </a:xfrm>
+          <a:prstGeom prst="rect">
+            <a:avLst/>
+          </a:prstGeom>
+          <a:solidFill>
+            <a:srgbClr val="ECEE67"/>
           </a:solidFill>
           <a:ln w="15875">
             <a:solidFill>
@@ -5643,59 +6819,35 @@
           <a:bodyPr rtlCol="0" anchor="ctr" wrap="square" lIns="54000" rIns="54000"/>
           <a:lstStyle/>
           <a:p>
-            <a:pPr algn="l"/>
-            <a:r>
-              <a:rPr sz="1100" b="0">
-                <a:solidFill>
-                  <a:srgbClr val="222222"/>
-                </a:solidFill>
-                <a:latin typeface="Noto Sans JP"/>
-              </a:rPr>
-              <a:t>従来の機械学習</a:t>
-            </a:r>
-          </a:p>
-          <a:p>
-            <a:pPr algn="l"/>
-            <a:r>
-              <a:rPr sz="1100" b="0">
-                <a:solidFill>
-                  <a:srgbClr val="222222"/>
-                </a:solidFill>
-                <a:latin typeface="Noto Sans JP"/>
-              </a:rPr>
-              <a:t/>
-            </a:r>
-          </a:p>
-          <a:p>
-            <a:pPr algn="l"/>
-            <a:r>
-              <a:rPr sz="1100" b="0">
-                <a:solidFill>
-                  <a:srgbClr val="222222"/>
-                </a:solidFill>
-                <a:latin typeface="Noto Sans JP"/>
-              </a:rPr>
-              <a:t>特徴量は人が設計，分類器はデータから学習</a:t>
-            </a:r>
-          </a:p>
-        </p:txBody>
-      </p:sp>
-      <p:sp>
-        <p:nvSpPr>
-          <p:cNvPr id="10" name="Rounded Rectangle 9"/>
+            <a:pPr algn="ctr"/>
+            <a:r>
+              <a:rPr sz="1200" b="1">
+                <a:solidFill>
+                  <a:srgbClr val="222222"/>
+                </a:solidFill>
+                <a:latin typeface="Noto Sans JP"/>
+              </a:rPr>
+              <a:t>テンソルの形状（例）</a:t>
+            </a:r>
+          </a:p>
+        </p:txBody>
+      </p:sp>
+      <p:sp>
+        <p:nvSpPr>
+          <p:cNvPr id="7" name="Rectangle 6"/>
           <p:cNvSpPr/>
           <p:nvPr/>
         </p:nvSpPr>
         <p:spPr>
           <a:xfrm>
-            <a:off x="4896000" y="2880000"/>
-            <a:ext cx="2015999" cy="1368000"/>
-          </a:xfrm>
-          <a:prstGeom prst="roundRect">
-            <a:avLst/>
-          </a:prstGeom>
-          <a:solidFill>
-            <a:srgbClr val="E0E0E0"/>
+            <a:off x="360000" y="1548000"/>
+            <a:ext cx="2160000" cy="396000"/>
+          </a:xfrm>
+          <a:prstGeom prst="rect">
+            <a:avLst/>
+          </a:prstGeom>
+          <a:solidFill>
+            <a:srgbClr val="FFF9C4"/>
           </a:solidFill>
           <a:ln w="15875">
             <a:solidFill>
@@ -5722,21 +6874,9 @@
           <a:bodyPr rtlCol="0" anchor="ctr" wrap="square" lIns="54000" rIns="54000"/>
           <a:lstStyle/>
           <a:p>
-            <a:pPr algn="l"/>
-            <a:r>
-              <a:rPr sz="1100" b="0">
-                <a:solidFill>
-                  <a:srgbClr val="222222"/>
-                </a:solidFill>
-                <a:latin typeface="Noto Sans JP"/>
-              </a:rPr>
-              <a:t>特徴量（人が設計）：</a:t>
-            </a:r>
-          </a:p>
-          <a:p>
-            <a:pPr algn="l"/>
-            <a:r>
-              <a:rPr sz="1100" b="0">
+            <a:pPr algn="ctr"/>
+            <a:r>
+              <a:rPr sz="1200" b="0">
                 <a:solidFill>
                   <a:srgbClr val="222222"/>
                 </a:solidFill>
@@ -5745,190 +6885,20 @@
               <a:t/>
             </a:r>
           </a:p>
-          <a:p>
-            <a:pPr algn="l"/>
-            <a:r>
-              <a:rPr sz="1100" b="0">
-                <a:solidFill>
-                  <a:srgbClr val="222222"/>
-                </a:solidFill>
-                <a:latin typeface="Noto Sans JP"/>
-              </a:rPr>
-              <a:t/>
-            </a:r>
-          </a:p>
-        </p:txBody>
-      </p:sp>
-      <p:sp>
-        <p:nvSpPr>
-          <p:cNvPr id="11" name="Rounded Rectangle 10"/>
+        </p:txBody>
+      </p:sp>
+      <p:sp>
+        <p:nvSpPr>
+          <p:cNvPr id="8" name="Rectangle 7"/>
           <p:cNvSpPr/>
           <p:nvPr/>
         </p:nvSpPr>
         <p:spPr>
           <a:xfrm>
-            <a:off x="7020000" y="2880000"/>
-            <a:ext cx="2015999" cy="1368000"/>
-          </a:xfrm>
-          <a:prstGeom prst="roundRect">
-            <a:avLst/>
-          </a:prstGeom>
-          <a:solidFill>
-            <a:srgbClr val="D9EAD3"/>
-          </a:solidFill>
-          <a:ln w="15875">
-            <a:solidFill>
-              <a:srgbClr val="6AA84F"/>
-            </a:solidFill>
-          </a:ln>
-          <a:effectLst/>
-        </p:spPr>
-        <p:style>
-          <a:lnRef idx="1">
-            <a:schemeClr val="accent1"/>
-          </a:lnRef>
-          <a:fillRef idx="3">
-            <a:schemeClr val="accent1"/>
-          </a:fillRef>
-          <a:effectRef idx="2">
-            <a:schemeClr val="accent1"/>
-          </a:effectRef>
-          <a:fontRef idx="minor">
-            <a:schemeClr val="lt1"/>
-          </a:fontRef>
-        </p:style>
-        <p:txBody>
-          <a:bodyPr rtlCol="0" anchor="ctr" wrap="square" lIns="54000" rIns="54000"/>
-          <a:lstStyle/>
-          <a:p>
-            <a:pPr algn="l"/>
-            <a:r>
-              <a:rPr sz="1100" b="0">
-                <a:solidFill>
-                  <a:srgbClr val="222222"/>
-                </a:solidFill>
-                <a:latin typeface="Noto Sans JP"/>
-              </a:rPr>
-              <a:t>分類器（データから学習）：</a:t>
-            </a:r>
-          </a:p>
-          <a:p>
-            <a:pPr algn="l"/>
-            <a:r>
-              <a:rPr sz="1100" b="0">
-                <a:solidFill>
-                  <a:srgbClr val="222222"/>
-                </a:solidFill>
-                <a:latin typeface="Noto Sans JP"/>
-              </a:rPr>
-              <a:t/>
-            </a:r>
-          </a:p>
-          <a:p>
-            <a:pPr algn="l"/>
-            <a:r>
-              <a:rPr sz="1100" b="0">
-                <a:solidFill>
-                  <a:srgbClr val="222222"/>
-                </a:solidFill>
-                <a:latin typeface="Noto Sans JP"/>
-              </a:rPr>
-              <a:t/>
-            </a:r>
-          </a:p>
-        </p:txBody>
-      </p:sp>
-      <p:sp>
-        <p:nvSpPr>
-          <p:cNvPr id="12" name="Rounded Rectangle 11"/>
-          <p:cNvSpPr/>
-          <p:nvPr/>
-        </p:nvSpPr>
-        <p:spPr>
-          <a:xfrm>
-            <a:off x="9180000" y="2880000"/>
-            <a:ext cx="2628000" cy="1368000"/>
-          </a:xfrm>
-          <a:prstGeom prst="roundRect">
-            <a:avLst/>
-          </a:prstGeom>
-          <a:solidFill>
-            <a:srgbClr val="FFF9C4"/>
-          </a:solidFill>
-          <a:ln w="15875">
-            <a:solidFill>
-              <a:srgbClr val="F9A825"/>
-            </a:solidFill>
-          </a:ln>
-          <a:effectLst/>
-        </p:spPr>
-        <p:style>
-          <a:lnRef idx="1">
-            <a:schemeClr val="accent1"/>
-          </a:lnRef>
-          <a:fillRef idx="3">
-            <a:schemeClr val="accent1"/>
-          </a:fillRef>
-          <a:effectRef idx="2">
-            <a:schemeClr val="accent1"/>
-          </a:effectRef>
-          <a:fontRef idx="minor">
-            <a:schemeClr val="lt1"/>
-          </a:fontRef>
-        </p:style>
-        <p:txBody>
-          <a:bodyPr rtlCol="0" anchor="ctr" wrap="square" lIns="54000" rIns="54000"/>
-          <a:lstStyle/>
-          <a:p>
-            <a:pPr algn="l"/>
-            <a:r>
-              <a:rPr sz="1100" b="0">
-                <a:solidFill>
-                  <a:srgbClr val="222222"/>
-                </a:solidFill>
-                <a:latin typeface="Noto Sans JP"/>
-              </a:rPr>
-              <a:t>弱点：</a:t>
-            </a:r>
-          </a:p>
-          <a:p>
-            <a:pPr algn="l"/>
-            <a:r>
-              <a:rPr sz="1100" b="0">
-                <a:solidFill>
-                  <a:srgbClr val="222222"/>
-                </a:solidFill>
-                <a:latin typeface="Noto Sans JP"/>
-              </a:rPr>
-              <a:t/>
-            </a:r>
-          </a:p>
-          <a:p>
-            <a:pPr algn="l"/>
-            <a:r>
-              <a:rPr sz="1100" b="0">
-                <a:solidFill>
-                  <a:srgbClr val="222222"/>
-                </a:solidFill>
-                <a:latin typeface="Noto Sans JP"/>
-              </a:rPr>
-              <a:t/>
-            </a:r>
-          </a:p>
-        </p:txBody>
-      </p:sp>
-      <p:sp>
-        <p:nvSpPr>
-          <p:cNvPr id="13" name="Rounded Rectangle 12"/>
-          <p:cNvSpPr/>
-          <p:nvPr/>
-        </p:nvSpPr>
-        <p:spPr>
-          <a:xfrm>
-            <a:off x="2880000" y="4536000"/>
-            <a:ext cx="1872000" cy="1368000"/>
-          </a:xfrm>
-          <a:prstGeom prst="roundRect">
+            <a:off x="2520000" y="1548000"/>
+            <a:ext cx="3240000" cy="396000"/>
+          </a:xfrm>
+          <a:prstGeom prst="rect">
             <a:avLst/>
           </a:prstGeom>
           <a:solidFill>
@@ -5959,334 +6929,29 @@
           <a:bodyPr rtlCol="0" anchor="ctr" wrap="square" lIns="54000" rIns="54000"/>
           <a:lstStyle/>
           <a:p>
-            <a:pPr algn="l"/>
-            <a:r>
-              <a:rPr sz="1100" b="0">
-                <a:solidFill>
-                  <a:srgbClr val="222222"/>
-                </a:solidFill>
-                <a:latin typeface="Noto Sans JP"/>
-              </a:rPr>
-              <a:t>深層学習</a:t>
-            </a:r>
-          </a:p>
-          <a:p>
-            <a:pPr algn="l"/>
-            <a:r>
-              <a:rPr sz="1100" b="0">
-                <a:solidFill>
-                  <a:srgbClr val="222222"/>
-                </a:solidFill>
-                <a:latin typeface="Noto Sans JP"/>
-              </a:rPr>
-              <a:t/>
-            </a:r>
-          </a:p>
-          <a:p>
-            <a:pPr algn="l"/>
-            <a:r>
-              <a:rPr sz="1100" b="0">
-                <a:solidFill>
-                  <a:srgbClr val="222222"/>
-                </a:solidFill>
-                <a:latin typeface="Noto Sans JP"/>
-              </a:rPr>
-              <a:t>特徴量の抽出と分類をまとめて学習</a:t>
-            </a:r>
-          </a:p>
-        </p:txBody>
-      </p:sp>
-      <p:sp>
-        <p:nvSpPr>
-          <p:cNvPr id="14" name="Rounded Rectangle 13"/>
+            <a:pPr algn="ctr"/>
+            <a:r>
+              <a:rPr sz="1000" b="0">
+                <a:solidFill>
+                  <a:srgbClr val="222222"/>
+                </a:solidFill>
+                <a:latin typeface="Noto Sans JP"/>
+              </a:rPr>
+              <a:t>欠損処理・標準化</a:t>
+            </a:r>
+          </a:p>
+        </p:txBody>
+      </p:sp>
+      <p:sp>
+        <p:nvSpPr>
+          <p:cNvPr id="9" name="Rectangle 8"/>
           <p:cNvSpPr/>
           <p:nvPr/>
         </p:nvSpPr>
         <p:spPr>
           <a:xfrm>
-            <a:off x="4896000" y="4536000"/>
-            <a:ext cx="4140000" cy="1368000"/>
-          </a:xfrm>
-          <a:prstGeom prst="roundRect">
-            <a:avLst/>
-          </a:prstGeom>
-          <a:solidFill>
-            <a:srgbClr val="D9EAD3"/>
-          </a:solidFill>
-          <a:ln w="15875">
-            <a:solidFill>
-              <a:srgbClr val="6AA84F"/>
-            </a:solidFill>
-          </a:ln>
-          <a:effectLst/>
-        </p:spPr>
-        <p:style>
-          <a:lnRef idx="1">
-            <a:schemeClr val="accent1"/>
-          </a:lnRef>
-          <a:fillRef idx="3">
-            <a:schemeClr val="accent1"/>
-          </a:fillRef>
-          <a:effectRef idx="2">
-            <a:schemeClr val="accent1"/>
-          </a:effectRef>
-          <a:fontRef idx="minor">
-            <a:schemeClr val="lt1"/>
-          </a:fontRef>
-        </p:style>
-        <p:txBody>
-          <a:bodyPr rtlCol="0" anchor="ctr" wrap="square" lIns="54000" rIns="54000"/>
-          <a:lstStyle/>
-          <a:p>
-            <a:pPr algn="l"/>
-            <a:r>
-              <a:rPr sz="1100" b="0">
-                <a:solidFill>
-                  <a:srgbClr val="222222"/>
-                </a:solidFill>
-                <a:latin typeface="Noto Sans JP"/>
-              </a:rPr>
-              <a:t>何を学習するか：</a:t>
-            </a:r>
-          </a:p>
-          <a:p>
-            <a:pPr algn="l"/>
-            <a:r>
-              <a:rPr sz="1100" b="0">
-                <a:solidFill>
-                  <a:srgbClr val="222222"/>
-                </a:solidFill>
-                <a:latin typeface="Noto Sans JP"/>
-              </a:rPr>
-              <a:t/>
-            </a:r>
-          </a:p>
-          <a:p>
-            <a:pPr algn="l"/>
-            <a:r>
-              <a:rPr sz="1100" b="0">
-                <a:solidFill>
-                  <a:srgbClr val="222222"/>
-                </a:solidFill>
-                <a:latin typeface="Noto Sans JP"/>
-              </a:rPr>
-              <a:t/>
-            </a:r>
-          </a:p>
-        </p:txBody>
-      </p:sp>
-      <p:sp>
-        <p:nvSpPr>
-          <p:cNvPr id="15" name="Rounded Rectangle 14"/>
-          <p:cNvSpPr/>
-          <p:nvPr/>
-        </p:nvSpPr>
-        <p:spPr>
-          <a:xfrm>
-            <a:off x="9180000" y="4536000"/>
-            <a:ext cx="2628000" cy="1368000"/>
-          </a:xfrm>
-          <a:prstGeom prst="roundRect">
-            <a:avLst/>
-          </a:prstGeom>
-          <a:solidFill>
-            <a:srgbClr val="FFF9C4"/>
-          </a:solidFill>
-          <a:ln w="15875">
-            <a:solidFill>
-              <a:srgbClr val="F9A825"/>
-            </a:solidFill>
-          </a:ln>
-          <a:effectLst/>
-        </p:spPr>
-        <p:style>
-          <a:lnRef idx="1">
-            <a:schemeClr val="accent1"/>
-          </a:lnRef>
-          <a:fillRef idx="3">
-            <a:schemeClr val="accent1"/>
-          </a:fillRef>
-          <a:effectRef idx="2">
-            <a:schemeClr val="accent1"/>
-          </a:effectRef>
-          <a:fontRef idx="minor">
-            <a:schemeClr val="lt1"/>
-          </a:fontRef>
-        </p:style>
-        <p:txBody>
-          <a:bodyPr rtlCol="0" anchor="ctr" wrap="square" lIns="54000" rIns="54000"/>
-          <a:lstStyle/>
-          <a:p>
-            <a:pPr algn="l"/>
-            <a:r>
-              <a:rPr sz="1100" b="0">
-                <a:solidFill>
-                  <a:srgbClr val="222222"/>
-                </a:solidFill>
-                <a:latin typeface="Noto Sans JP"/>
-              </a:rPr>
-              <a:t>弱点：</a:t>
-            </a:r>
-          </a:p>
-          <a:p>
-            <a:pPr algn="l"/>
-            <a:r>
-              <a:rPr sz="1100" b="0">
-                <a:solidFill>
-                  <a:srgbClr val="222222"/>
-                </a:solidFill>
-                <a:latin typeface="Noto Sans JP"/>
-              </a:rPr>
-              <a:t/>
-            </a:r>
-          </a:p>
-          <a:p>
-            <a:pPr algn="l"/>
-            <a:r>
-              <a:rPr sz="1100" b="0">
-                <a:solidFill>
-                  <a:srgbClr val="222222"/>
-                </a:solidFill>
-                <a:latin typeface="Noto Sans JP"/>
-              </a:rPr>
-              <a:t/>
-            </a:r>
-          </a:p>
-        </p:txBody>
-      </p:sp>
-      <p:sp>
-        <p:nvSpPr>
-          <p:cNvPr id="16" name="TextBox 15"/>
-          <p:cNvSpPr txBox="1"/>
-          <p:nvPr/>
-        </p:nvSpPr>
-        <p:spPr>
-          <a:xfrm>
-            <a:off x="360000" y="6516000"/>
-            <a:ext cx="11448000" cy="251999"/>
-          </a:xfrm>
-          <a:prstGeom prst="rect">
-            <a:avLst/>
-          </a:prstGeom>
-          <a:noFill/>
-        </p:spPr>
-        <p:txBody>
-          <a:bodyPr wrap="square" anchor="t" lIns="54000" rIns="54000" tIns="18000" bIns="18000">
-            <a:spAutoFit/>
-          </a:bodyPr>
-          <a:lstStyle/>
-          <a:p>
-            <a:pPr algn="l"/>
-            <a:r>
-              <a:rPr sz="900" b="0">
-                <a:solidFill>
-                  <a:srgbClr val="555555"/>
-                </a:solidFill>
-                <a:latin typeface="Noto Sans JP"/>
-              </a:rPr>
-              <a:t>GW1-2　ヒント：ルールの想定外の入力／特徴量の設計に左右される／大量のデータと計算資源が必要，のどれがどこに入るか</a:t>
-            </a:r>
-          </a:p>
-        </p:txBody>
-      </p:sp>
-    </p:spTree>
-  </p:cSld>
-  <p:clrMapOvr>
-    <a:masterClrMapping/>
-  </p:clrMapOvr>
-</p:sld>
-</file>
-
-<file path=ppt/slides/slide4.xml><?xml version="1.0" encoding="utf-8"?>
-<p:sld xmlns:a="http://schemas.openxmlformats.org/drawingml/2006/main" xmlns:p="http://schemas.openxmlformats.org/presentationml/2006/main" xmlns:r="http://schemas.openxmlformats.org/officeDocument/2006/relationships">
-  <p:cSld>
-    <p:spTree>
-      <p:nvGrpSpPr>
-        <p:cNvPr id="1" name=""/>
-        <p:cNvGrpSpPr/>
-        <p:nvPr/>
-      </p:nvGrpSpPr>
-      <p:grpSpPr/>
-      <p:sp>
-        <p:nvSpPr>
-          <p:cNvPr id="2" name="TextBox 1"/>
-          <p:cNvSpPr txBox="1"/>
-          <p:nvPr/>
-        </p:nvSpPr>
-        <p:spPr>
-          <a:xfrm>
-            <a:off x="360000" y="180000"/>
-            <a:ext cx="11448000" cy="468000"/>
-          </a:xfrm>
-          <a:prstGeom prst="rect">
-            <a:avLst/>
-          </a:prstGeom>
-          <a:noFill/>
-        </p:spPr>
-        <p:txBody>
-          <a:bodyPr wrap="square" anchor="t" lIns="54000" rIns="54000" tIns="18000" bIns="18000">
-            <a:spAutoFit/>
-          </a:bodyPr>
-          <a:lstStyle/>
-          <a:p>
-            <a:pPr algn="l"/>
-            <a:r>
-              <a:rPr sz="2200" b="1">
-                <a:solidFill>
-                  <a:srgbClr val="222222"/>
-                </a:solidFill>
-                <a:latin typeface="Noto Sans JP"/>
-              </a:rPr>
-              <a:t>GW2-1　プログラミングの流れ ― カードを3つのフェーズに並べる（10分）</a:t>
-            </a:r>
-          </a:p>
-        </p:txBody>
-      </p:sp>
-      <p:sp>
-        <p:nvSpPr>
-          <p:cNvPr id="3" name="TextBox 2"/>
-          <p:cNvSpPr txBox="1"/>
-          <p:nvPr/>
-        </p:nvSpPr>
-        <p:spPr>
-          <a:xfrm>
-            <a:off x="360000" y="630000"/>
-            <a:ext cx="11448000" cy="324000"/>
-          </a:xfrm>
-          <a:prstGeom prst="rect">
-            <a:avLst/>
-          </a:prstGeom>
-          <a:noFill/>
-        </p:spPr>
-        <p:txBody>
-          <a:bodyPr wrap="square" anchor="t" lIns="54000" rIns="54000" tIns="18000" bIns="18000">
-            <a:spAutoFit/>
-          </a:bodyPr>
-          <a:lstStyle/>
-          <a:p>
-            <a:pPr algn="l"/>
-            <a:r>
-              <a:rPr sz="1200" b="0">
-                <a:solidFill>
-                  <a:srgbClr val="555555"/>
-                </a:solidFill>
-                <a:latin typeface="Noto Sans JP"/>
-              </a:rPr>
-              <a:t>下の12枚のカードを，正しい順に上の枠へドラッグする．番号は書いていない．並べたあと，各フェーズの見出しも埋める．</a:t>
-            </a:r>
-          </a:p>
-        </p:txBody>
-      </p:sp>
-      <p:sp>
-        <p:nvSpPr>
-          <p:cNvPr id="4" name="Rectangle 3"/>
-          <p:cNvSpPr/>
-          <p:nvPr/>
-        </p:nvSpPr>
-        <p:spPr>
-          <a:xfrm>
-            <a:off x="360000" y="1080000"/>
-            <a:ext cx="3456000" cy="396000"/>
+            <a:off x="5760000" y="1548000"/>
+            <a:ext cx="3600000" cy="396000"/>
           </a:xfrm>
           <a:prstGeom prst="rect">
             <a:avLst/>
@@ -6321,257 +6986,33 @@
           <a:p>
             <a:pPr algn="ctr"/>
             <a:r>
-              <a:rPr sz="1300" b="1">
-                <a:solidFill>
-                  <a:srgbClr val="222222"/>
-                </a:solidFill>
-                <a:latin typeface="Noto Sans JP"/>
-              </a:rPr>
-              <a:t>データ準備フェーズ</a:t>
-            </a:r>
-          </a:p>
-        </p:txBody>
-      </p:sp>
-      <p:sp>
-        <p:nvSpPr>
-          <p:cNvPr id="5" name="Rounded Rectangle 4"/>
+              <a:rPr sz="1000" b="0">
+                <a:solidFill>
+                  <a:srgbClr val="222222"/>
+                </a:solidFill>
+                <a:latin typeface="Noto Sans JP"/>
+              </a:rPr>
+              <a:t>(N, 特徴量数)</a:t>
+            </a:r>
+          </a:p>
+        </p:txBody>
+      </p:sp>
+      <p:sp>
+        <p:nvSpPr>
+          <p:cNvPr id="10" name="Rectangle 9"/>
           <p:cNvSpPr/>
           <p:nvPr/>
         </p:nvSpPr>
         <p:spPr>
           <a:xfrm>
-            <a:off x="360000" y="1548000"/>
-            <a:ext cx="3456000" cy="468000"/>
-          </a:xfrm>
-          <a:prstGeom prst="roundRect">
+            <a:off x="360000" y="1944000"/>
+            <a:ext cx="2160000" cy="396000"/>
+          </a:xfrm>
+          <a:prstGeom prst="rect">
             <a:avLst/>
           </a:prstGeom>
           <a:solidFill>
             <a:srgbClr val="FFF9C4"/>
-          </a:solidFill>
-          <a:ln w="15875">
-            <a:solidFill>
-              <a:srgbClr val="F9A825"/>
-            </a:solidFill>
-            <a:prstDash val="dash"/>
-          </a:ln>
-          <a:effectLst/>
-        </p:spPr>
-        <p:style>
-          <a:lnRef idx="1">
-            <a:schemeClr val="accent1"/>
-          </a:lnRef>
-          <a:fillRef idx="3">
-            <a:schemeClr val="accent1"/>
-          </a:fillRef>
-          <a:effectRef idx="2">
-            <a:schemeClr val="accent1"/>
-          </a:effectRef>
-          <a:fontRef idx="minor">
-            <a:schemeClr val="lt1"/>
-          </a:fontRef>
-        </p:style>
-        <p:txBody>
-          <a:bodyPr rtlCol="0" anchor="ctr" wrap="square" lIns="54000" rIns="54000"/>
-          <a:lstStyle/>
-          <a:p>
-            <a:pPr algn="ctr"/>
-            <a:r>
-              <a:rPr sz="1200" b="0">
-                <a:solidFill>
-                  <a:srgbClr val="222222"/>
-                </a:solidFill>
-                <a:latin typeface="Noto Sans JP"/>
-              </a:rPr>
-              <a:t/>
-            </a:r>
-          </a:p>
-        </p:txBody>
-      </p:sp>
-      <p:sp>
-        <p:nvSpPr>
-          <p:cNvPr id="6" name="Rounded Rectangle 5"/>
-          <p:cNvSpPr/>
-          <p:nvPr/>
-        </p:nvSpPr>
-        <p:spPr>
-          <a:xfrm>
-            <a:off x="360000" y="2106000"/>
-            <a:ext cx="3456000" cy="468000"/>
-          </a:xfrm>
-          <a:prstGeom prst="roundRect">
-            <a:avLst/>
-          </a:prstGeom>
-          <a:solidFill>
-            <a:srgbClr val="FFF9C4"/>
-          </a:solidFill>
-          <a:ln w="15875">
-            <a:solidFill>
-              <a:srgbClr val="F9A825"/>
-            </a:solidFill>
-            <a:prstDash val="dash"/>
-          </a:ln>
-          <a:effectLst/>
-        </p:spPr>
-        <p:style>
-          <a:lnRef idx="1">
-            <a:schemeClr val="accent1"/>
-          </a:lnRef>
-          <a:fillRef idx="3">
-            <a:schemeClr val="accent1"/>
-          </a:fillRef>
-          <a:effectRef idx="2">
-            <a:schemeClr val="accent1"/>
-          </a:effectRef>
-          <a:fontRef idx="minor">
-            <a:schemeClr val="lt1"/>
-          </a:fontRef>
-        </p:style>
-        <p:txBody>
-          <a:bodyPr rtlCol="0" anchor="ctr" wrap="square" lIns="54000" rIns="54000"/>
-          <a:lstStyle/>
-          <a:p>
-            <a:pPr algn="ctr"/>
-            <a:r>
-              <a:rPr sz="1200" b="0">
-                <a:solidFill>
-                  <a:srgbClr val="222222"/>
-                </a:solidFill>
-                <a:latin typeface="Noto Sans JP"/>
-              </a:rPr>
-              <a:t/>
-            </a:r>
-          </a:p>
-        </p:txBody>
-      </p:sp>
-      <p:sp>
-        <p:nvSpPr>
-          <p:cNvPr id="7" name="Rounded Rectangle 6"/>
-          <p:cNvSpPr/>
-          <p:nvPr/>
-        </p:nvSpPr>
-        <p:spPr>
-          <a:xfrm>
-            <a:off x="360000" y="2664000"/>
-            <a:ext cx="3456000" cy="468000"/>
-          </a:xfrm>
-          <a:prstGeom prst="roundRect">
-            <a:avLst/>
-          </a:prstGeom>
-          <a:solidFill>
-            <a:srgbClr val="FFF9C4"/>
-          </a:solidFill>
-          <a:ln w="15875">
-            <a:solidFill>
-              <a:srgbClr val="F9A825"/>
-            </a:solidFill>
-            <a:prstDash val="dash"/>
-          </a:ln>
-          <a:effectLst/>
-        </p:spPr>
-        <p:style>
-          <a:lnRef idx="1">
-            <a:schemeClr val="accent1"/>
-          </a:lnRef>
-          <a:fillRef idx="3">
-            <a:schemeClr val="accent1"/>
-          </a:fillRef>
-          <a:effectRef idx="2">
-            <a:schemeClr val="accent1"/>
-          </a:effectRef>
-          <a:fontRef idx="minor">
-            <a:schemeClr val="lt1"/>
-          </a:fontRef>
-        </p:style>
-        <p:txBody>
-          <a:bodyPr rtlCol="0" anchor="ctr" wrap="square" lIns="54000" rIns="54000"/>
-          <a:lstStyle/>
-          <a:p>
-            <a:pPr algn="ctr"/>
-            <a:r>
-              <a:rPr sz="1200" b="0">
-                <a:solidFill>
-                  <a:srgbClr val="222222"/>
-                </a:solidFill>
-                <a:latin typeface="Noto Sans JP"/>
-              </a:rPr>
-              <a:t/>
-            </a:r>
-          </a:p>
-        </p:txBody>
-      </p:sp>
-      <p:sp>
-        <p:nvSpPr>
-          <p:cNvPr id="8" name="Rounded Rectangle 7"/>
-          <p:cNvSpPr/>
-          <p:nvPr/>
-        </p:nvSpPr>
-        <p:spPr>
-          <a:xfrm>
-            <a:off x="360000" y="3221999"/>
-            <a:ext cx="3456000" cy="468000"/>
-          </a:xfrm>
-          <a:prstGeom prst="roundRect">
-            <a:avLst/>
-          </a:prstGeom>
-          <a:solidFill>
-            <a:srgbClr val="FFF9C4"/>
-          </a:solidFill>
-          <a:ln w="15875">
-            <a:solidFill>
-              <a:srgbClr val="F9A825"/>
-            </a:solidFill>
-            <a:prstDash val="dash"/>
-          </a:ln>
-          <a:effectLst/>
-        </p:spPr>
-        <p:style>
-          <a:lnRef idx="1">
-            <a:schemeClr val="accent1"/>
-          </a:lnRef>
-          <a:fillRef idx="3">
-            <a:schemeClr val="accent1"/>
-          </a:fillRef>
-          <a:effectRef idx="2">
-            <a:schemeClr val="accent1"/>
-          </a:effectRef>
-          <a:fontRef idx="minor">
-            <a:schemeClr val="lt1"/>
-          </a:fontRef>
-        </p:style>
-        <p:txBody>
-          <a:bodyPr rtlCol="0" anchor="ctr" wrap="square" lIns="54000" rIns="54000"/>
-          <a:lstStyle/>
-          <a:p>
-            <a:pPr algn="ctr"/>
-            <a:r>
-              <a:rPr sz="1200" b="0">
-                <a:solidFill>
-                  <a:srgbClr val="222222"/>
-                </a:solidFill>
-                <a:latin typeface="Noto Sans JP"/>
-              </a:rPr>
-              <a:t/>
-            </a:r>
-          </a:p>
-        </p:txBody>
-      </p:sp>
-      <p:sp>
-        <p:nvSpPr>
-          <p:cNvPr id="9" name="Rectangle 8"/>
-          <p:cNvSpPr/>
-          <p:nvPr/>
-        </p:nvSpPr>
-        <p:spPr>
-          <a:xfrm>
-            <a:off x="4356000" y="1080000"/>
-            <a:ext cx="3456000" cy="396000"/>
-          </a:xfrm>
-          <a:prstGeom prst="rect">
-            <a:avLst/>
-          </a:prstGeom>
-          <a:solidFill>
-            <a:srgbClr val="FFFFFF"/>
           </a:solidFill>
           <a:ln w="15875">
             <a:solidFill>
@@ -6600,307 +7041,27 @@
           <a:p>
             <a:pPr algn="ctr"/>
             <a:r>
-              <a:rPr sz="1300" b="1">
-                <a:solidFill>
-                  <a:srgbClr val="222222"/>
-                </a:solidFill>
-                <a:latin typeface="Noto Sans JP"/>
-              </a:rPr>
-              <a:t>学習設定フェーズ</a:t>
-            </a:r>
-          </a:p>
-        </p:txBody>
-      </p:sp>
-      <p:sp>
-        <p:nvSpPr>
-          <p:cNvPr id="10" name="Rounded Rectangle 9"/>
+              <a:rPr sz="1200" b="0">
+                <a:solidFill>
+                  <a:srgbClr val="222222"/>
+                </a:solidFill>
+                <a:latin typeface="Noto Sans JP"/>
+              </a:rPr>
+              <a:t/>
+            </a:r>
+          </a:p>
+        </p:txBody>
+      </p:sp>
+      <p:sp>
+        <p:nvSpPr>
+          <p:cNvPr id="11" name="Rectangle 10"/>
           <p:cNvSpPr/>
           <p:nvPr/>
         </p:nvSpPr>
         <p:spPr>
           <a:xfrm>
-            <a:off x="4356000" y="1548000"/>
-            <a:ext cx="3456000" cy="468000"/>
-          </a:xfrm>
-          <a:prstGeom prst="roundRect">
-            <a:avLst/>
-          </a:prstGeom>
-          <a:solidFill>
-            <a:srgbClr val="FFF9C4"/>
-          </a:solidFill>
-          <a:ln w="15875">
-            <a:solidFill>
-              <a:srgbClr val="F9A825"/>
-            </a:solidFill>
-            <a:prstDash val="dash"/>
-          </a:ln>
-          <a:effectLst/>
-        </p:spPr>
-        <p:style>
-          <a:lnRef idx="1">
-            <a:schemeClr val="accent1"/>
-          </a:lnRef>
-          <a:fillRef idx="3">
-            <a:schemeClr val="accent1"/>
-          </a:fillRef>
-          <a:effectRef idx="2">
-            <a:schemeClr val="accent1"/>
-          </a:effectRef>
-          <a:fontRef idx="minor">
-            <a:schemeClr val="lt1"/>
-          </a:fontRef>
-        </p:style>
-        <p:txBody>
-          <a:bodyPr rtlCol="0" anchor="ctr" wrap="square" lIns="54000" rIns="54000"/>
-          <a:lstStyle/>
-          <a:p>
-            <a:pPr algn="ctr"/>
-            <a:r>
-              <a:rPr sz="1200" b="0">
-                <a:solidFill>
-                  <a:srgbClr val="222222"/>
-                </a:solidFill>
-                <a:latin typeface="Noto Sans JP"/>
-              </a:rPr>
-              <a:t/>
-            </a:r>
-          </a:p>
-        </p:txBody>
-      </p:sp>
-      <p:sp>
-        <p:nvSpPr>
-          <p:cNvPr id="11" name="Rounded Rectangle 10"/>
-          <p:cNvSpPr/>
-          <p:nvPr/>
-        </p:nvSpPr>
-        <p:spPr>
-          <a:xfrm>
-            <a:off x="4356000" y="2106000"/>
-            <a:ext cx="3456000" cy="468000"/>
-          </a:xfrm>
-          <a:prstGeom prst="roundRect">
-            <a:avLst/>
-          </a:prstGeom>
-          <a:solidFill>
-            <a:srgbClr val="FFF9C4"/>
-          </a:solidFill>
-          <a:ln w="15875">
-            <a:solidFill>
-              <a:srgbClr val="F9A825"/>
-            </a:solidFill>
-            <a:prstDash val="dash"/>
-          </a:ln>
-          <a:effectLst/>
-        </p:spPr>
-        <p:style>
-          <a:lnRef idx="1">
-            <a:schemeClr val="accent1"/>
-          </a:lnRef>
-          <a:fillRef idx="3">
-            <a:schemeClr val="accent1"/>
-          </a:fillRef>
-          <a:effectRef idx="2">
-            <a:schemeClr val="accent1"/>
-          </a:effectRef>
-          <a:fontRef idx="minor">
-            <a:schemeClr val="lt1"/>
-          </a:fontRef>
-        </p:style>
-        <p:txBody>
-          <a:bodyPr rtlCol="0" anchor="ctr" wrap="square" lIns="54000" rIns="54000"/>
-          <a:lstStyle/>
-          <a:p>
-            <a:pPr algn="ctr"/>
-            <a:r>
-              <a:rPr sz="1200" b="0">
-                <a:solidFill>
-                  <a:srgbClr val="222222"/>
-                </a:solidFill>
-                <a:latin typeface="Noto Sans JP"/>
-              </a:rPr>
-              <a:t/>
-            </a:r>
-          </a:p>
-        </p:txBody>
-      </p:sp>
-      <p:sp>
-        <p:nvSpPr>
-          <p:cNvPr id="12" name="Rounded Rectangle 11"/>
-          <p:cNvSpPr/>
-          <p:nvPr/>
-        </p:nvSpPr>
-        <p:spPr>
-          <a:xfrm>
-            <a:off x="4356000" y="2664000"/>
-            <a:ext cx="3456000" cy="468000"/>
-          </a:xfrm>
-          <a:prstGeom prst="roundRect">
-            <a:avLst/>
-          </a:prstGeom>
-          <a:solidFill>
-            <a:srgbClr val="FFF9C4"/>
-          </a:solidFill>
-          <a:ln w="15875">
-            <a:solidFill>
-              <a:srgbClr val="F9A825"/>
-            </a:solidFill>
-            <a:prstDash val="dash"/>
-          </a:ln>
-          <a:effectLst/>
-        </p:spPr>
-        <p:style>
-          <a:lnRef idx="1">
-            <a:schemeClr val="accent1"/>
-          </a:lnRef>
-          <a:fillRef idx="3">
-            <a:schemeClr val="accent1"/>
-          </a:fillRef>
-          <a:effectRef idx="2">
-            <a:schemeClr val="accent1"/>
-          </a:effectRef>
-          <a:fontRef idx="minor">
-            <a:schemeClr val="lt1"/>
-          </a:fontRef>
-        </p:style>
-        <p:txBody>
-          <a:bodyPr rtlCol="0" anchor="ctr" wrap="square" lIns="54000" rIns="54000"/>
-          <a:lstStyle/>
-          <a:p>
-            <a:pPr algn="ctr"/>
-            <a:r>
-              <a:rPr sz="1200" b="0">
-                <a:solidFill>
-                  <a:srgbClr val="222222"/>
-                </a:solidFill>
-                <a:latin typeface="Noto Sans JP"/>
-              </a:rPr>
-              <a:t/>
-            </a:r>
-          </a:p>
-        </p:txBody>
-      </p:sp>
-      <p:sp>
-        <p:nvSpPr>
-          <p:cNvPr id="13" name="Rounded Rectangle 12"/>
-          <p:cNvSpPr/>
-          <p:nvPr/>
-        </p:nvSpPr>
-        <p:spPr>
-          <a:xfrm>
-            <a:off x="4356000" y="3221999"/>
-            <a:ext cx="3456000" cy="468000"/>
-          </a:xfrm>
-          <a:prstGeom prst="roundRect">
-            <a:avLst/>
-          </a:prstGeom>
-          <a:solidFill>
-            <a:srgbClr val="FFF9C4"/>
-          </a:solidFill>
-          <a:ln w="15875">
-            <a:solidFill>
-              <a:srgbClr val="F9A825"/>
-            </a:solidFill>
-            <a:prstDash val="dash"/>
-          </a:ln>
-          <a:effectLst/>
-        </p:spPr>
-        <p:style>
-          <a:lnRef idx="1">
-            <a:schemeClr val="accent1"/>
-          </a:lnRef>
-          <a:fillRef idx="3">
-            <a:schemeClr val="accent1"/>
-          </a:fillRef>
-          <a:effectRef idx="2">
-            <a:schemeClr val="accent1"/>
-          </a:effectRef>
-          <a:fontRef idx="minor">
-            <a:schemeClr val="lt1"/>
-          </a:fontRef>
-        </p:style>
-        <p:txBody>
-          <a:bodyPr rtlCol="0" anchor="ctr" wrap="square" lIns="54000" rIns="54000"/>
-          <a:lstStyle/>
-          <a:p>
-            <a:pPr algn="ctr"/>
-            <a:r>
-              <a:rPr sz="1200" b="0">
-                <a:solidFill>
-                  <a:srgbClr val="222222"/>
-                </a:solidFill>
-                <a:latin typeface="Noto Sans JP"/>
-              </a:rPr>
-              <a:t/>
-            </a:r>
-          </a:p>
-        </p:txBody>
-      </p:sp>
-      <p:sp>
-        <p:nvSpPr>
-          <p:cNvPr id="14" name="Rounded Rectangle 13"/>
-          <p:cNvSpPr/>
-          <p:nvPr/>
-        </p:nvSpPr>
-        <p:spPr>
-          <a:xfrm>
-            <a:off x="4356000" y="3780000"/>
-            <a:ext cx="3456000" cy="468000"/>
-          </a:xfrm>
-          <a:prstGeom prst="roundRect">
-            <a:avLst/>
-          </a:prstGeom>
-          <a:solidFill>
-            <a:srgbClr val="FFF9C4"/>
-          </a:solidFill>
-          <a:ln w="15875">
-            <a:solidFill>
-              <a:srgbClr val="F9A825"/>
-            </a:solidFill>
-            <a:prstDash val="dash"/>
-          </a:ln>
-          <a:effectLst/>
-        </p:spPr>
-        <p:style>
-          <a:lnRef idx="1">
-            <a:schemeClr val="accent1"/>
-          </a:lnRef>
-          <a:fillRef idx="3">
-            <a:schemeClr val="accent1"/>
-          </a:fillRef>
-          <a:effectRef idx="2">
-            <a:schemeClr val="accent1"/>
-          </a:effectRef>
-          <a:fontRef idx="minor">
-            <a:schemeClr val="lt1"/>
-          </a:fontRef>
-        </p:style>
-        <p:txBody>
-          <a:bodyPr rtlCol="0" anchor="ctr" wrap="square" lIns="54000" rIns="54000"/>
-          <a:lstStyle/>
-          <a:p>
-            <a:pPr algn="ctr"/>
-            <a:r>
-              <a:rPr sz="1200" b="0">
-                <a:solidFill>
-                  <a:srgbClr val="222222"/>
-                </a:solidFill>
-                <a:latin typeface="Noto Sans JP"/>
-              </a:rPr>
-              <a:t/>
-            </a:r>
-          </a:p>
-        </p:txBody>
-      </p:sp>
-      <p:sp>
-        <p:nvSpPr>
-          <p:cNvPr id="15" name="Rectangle 14"/>
-          <p:cNvSpPr/>
-          <p:nvPr/>
-        </p:nvSpPr>
-        <p:spPr>
-          <a:xfrm>
-            <a:off x="8352000" y="1080000"/>
-            <a:ext cx="3456000" cy="396000"/>
+            <a:off x="2520000" y="1944000"/>
+            <a:ext cx="3240000" cy="396000"/>
           </a:xfrm>
           <a:prstGeom prst="rect">
             <a:avLst/>
@@ -6935,1031 +7096,33 @@
           <a:p>
             <a:pPr algn="ctr"/>
             <a:r>
-              <a:rPr sz="1300" b="1">
-                <a:solidFill>
-                  <a:srgbClr val="222222"/>
-                </a:solidFill>
-                <a:latin typeface="Noto Sans JP"/>
-              </a:rPr>
-              <a:t>学習，評価フェーズ</a:t>
-            </a:r>
-          </a:p>
-        </p:txBody>
-      </p:sp>
-      <p:sp>
-        <p:nvSpPr>
-          <p:cNvPr id="16" name="Rounded Rectangle 15"/>
+              <a:rPr sz="1000" b="0">
+                <a:solidFill>
+                  <a:srgbClr val="222222"/>
+                </a:solidFill>
+                <a:latin typeface="Noto Sans JP"/>
+              </a:rPr>
+              <a:t>トークン化→ID列→埋め込み</a:t>
+            </a:r>
+          </a:p>
+        </p:txBody>
+      </p:sp>
+      <p:sp>
+        <p:nvSpPr>
+          <p:cNvPr id="12" name="Rectangle 11"/>
           <p:cNvSpPr/>
           <p:nvPr/>
         </p:nvSpPr>
         <p:spPr>
           <a:xfrm>
-            <a:off x="8352000" y="1548000"/>
-            <a:ext cx="3456000" cy="468000"/>
-          </a:xfrm>
-          <a:prstGeom prst="roundRect">
-            <a:avLst/>
-          </a:prstGeom>
-          <a:solidFill>
-            <a:srgbClr val="FFF9C4"/>
-          </a:solidFill>
-          <a:ln w="15875">
-            <a:solidFill>
-              <a:srgbClr val="F9A825"/>
-            </a:solidFill>
-            <a:prstDash val="dash"/>
-          </a:ln>
-          <a:effectLst/>
-        </p:spPr>
-        <p:style>
-          <a:lnRef idx="1">
-            <a:schemeClr val="accent1"/>
-          </a:lnRef>
-          <a:fillRef idx="3">
-            <a:schemeClr val="accent1"/>
-          </a:fillRef>
-          <a:effectRef idx="2">
-            <a:schemeClr val="accent1"/>
-          </a:effectRef>
-          <a:fontRef idx="minor">
-            <a:schemeClr val="lt1"/>
-          </a:fontRef>
-        </p:style>
-        <p:txBody>
-          <a:bodyPr rtlCol="0" anchor="ctr" wrap="square" lIns="54000" rIns="54000"/>
-          <a:lstStyle/>
-          <a:p>
-            <a:pPr algn="ctr"/>
-            <a:r>
-              <a:rPr sz="1200" b="0">
-                <a:solidFill>
-                  <a:srgbClr val="222222"/>
-                </a:solidFill>
-                <a:latin typeface="Noto Sans JP"/>
-              </a:rPr>
-              <a:t/>
-            </a:r>
-          </a:p>
-        </p:txBody>
-      </p:sp>
-      <p:sp>
-        <p:nvSpPr>
-          <p:cNvPr id="17" name="Rounded Rectangle 16"/>
-          <p:cNvSpPr/>
-          <p:nvPr/>
-        </p:nvSpPr>
-        <p:spPr>
-          <a:xfrm>
-            <a:off x="8352000" y="2106000"/>
-            <a:ext cx="3456000" cy="468000"/>
-          </a:xfrm>
-          <a:prstGeom prst="roundRect">
-            <a:avLst/>
-          </a:prstGeom>
-          <a:solidFill>
-            <a:srgbClr val="FFF9C4"/>
-          </a:solidFill>
-          <a:ln w="15875">
-            <a:solidFill>
-              <a:srgbClr val="F9A825"/>
-            </a:solidFill>
-            <a:prstDash val="dash"/>
-          </a:ln>
-          <a:effectLst/>
-        </p:spPr>
-        <p:style>
-          <a:lnRef idx="1">
-            <a:schemeClr val="accent1"/>
-          </a:lnRef>
-          <a:fillRef idx="3">
-            <a:schemeClr val="accent1"/>
-          </a:fillRef>
-          <a:effectRef idx="2">
-            <a:schemeClr val="accent1"/>
-          </a:effectRef>
-          <a:fontRef idx="minor">
-            <a:schemeClr val="lt1"/>
-          </a:fontRef>
-        </p:style>
-        <p:txBody>
-          <a:bodyPr rtlCol="0" anchor="ctr" wrap="square" lIns="54000" rIns="54000"/>
-          <a:lstStyle/>
-          <a:p>
-            <a:pPr algn="ctr"/>
-            <a:r>
-              <a:rPr sz="1200" b="0">
-                <a:solidFill>
-                  <a:srgbClr val="222222"/>
-                </a:solidFill>
-                <a:latin typeface="Noto Sans JP"/>
-              </a:rPr>
-              <a:t/>
-            </a:r>
-          </a:p>
-        </p:txBody>
-      </p:sp>
-      <p:sp>
-        <p:nvSpPr>
-          <p:cNvPr id="18" name="Rounded Rectangle 17"/>
-          <p:cNvSpPr/>
-          <p:nvPr/>
-        </p:nvSpPr>
-        <p:spPr>
-          <a:xfrm>
-            <a:off x="8352000" y="2664000"/>
-            <a:ext cx="3456000" cy="468000"/>
-          </a:xfrm>
-          <a:prstGeom prst="roundRect">
-            <a:avLst/>
-          </a:prstGeom>
-          <a:solidFill>
-            <a:srgbClr val="FFF9C4"/>
-          </a:solidFill>
-          <a:ln w="15875">
-            <a:solidFill>
-              <a:srgbClr val="F9A825"/>
-            </a:solidFill>
-            <a:prstDash val="dash"/>
-          </a:ln>
-          <a:effectLst/>
-        </p:spPr>
-        <p:style>
-          <a:lnRef idx="1">
-            <a:schemeClr val="accent1"/>
-          </a:lnRef>
-          <a:fillRef idx="3">
-            <a:schemeClr val="accent1"/>
-          </a:fillRef>
-          <a:effectRef idx="2">
-            <a:schemeClr val="accent1"/>
-          </a:effectRef>
-          <a:fontRef idx="minor">
-            <a:schemeClr val="lt1"/>
-          </a:fontRef>
-        </p:style>
-        <p:txBody>
-          <a:bodyPr rtlCol="0" anchor="ctr" wrap="square" lIns="54000" rIns="54000"/>
-          <a:lstStyle/>
-          <a:p>
-            <a:pPr algn="ctr"/>
-            <a:r>
-              <a:rPr sz="1200" b="0">
-                <a:solidFill>
-                  <a:srgbClr val="222222"/>
-                </a:solidFill>
-                <a:latin typeface="Noto Sans JP"/>
-              </a:rPr>
-              <a:t/>
-            </a:r>
-          </a:p>
-        </p:txBody>
-      </p:sp>
-      <p:sp>
-        <p:nvSpPr>
-          <p:cNvPr id="19" name="Rounded Rectangle 18"/>
-          <p:cNvSpPr/>
-          <p:nvPr/>
-        </p:nvSpPr>
-        <p:spPr>
-          <a:xfrm>
-            <a:off x="360000" y="4536000"/>
-            <a:ext cx="1835999" cy="468000"/>
-          </a:xfrm>
-          <a:prstGeom prst="roundRect">
+            <a:off x="5760000" y="1944000"/>
+            <a:ext cx="3600000" cy="396000"/>
+          </a:xfrm>
+          <a:prstGeom prst="rect">
             <a:avLst/>
           </a:prstGeom>
           <a:solidFill>
             <a:srgbClr val="FFFFFF"/>
-          </a:solidFill>
-          <a:ln w="15875">
-            <a:solidFill>
-              <a:srgbClr val="222222"/>
-            </a:solidFill>
-          </a:ln>
-          <a:effectLst/>
-        </p:spPr>
-        <p:style>
-          <a:lnRef idx="1">
-            <a:schemeClr val="accent1"/>
-          </a:lnRef>
-          <a:fillRef idx="3">
-            <a:schemeClr val="accent1"/>
-          </a:fillRef>
-          <a:effectRef idx="2">
-            <a:schemeClr val="accent1"/>
-          </a:effectRef>
-          <a:fontRef idx="minor">
-            <a:schemeClr val="lt1"/>
-          </a:fontRef>
-        </p:style>
-        <p:txBody>
-          <a:bodyPr rtlCol="0" anchor="ctr" wrap="square" lIns="54000" rIns="54000"/>
-          <a:lstStyle/>
-          <a:p>
-            <a:pPr algn="ctr"/>
-            <a:r>
-              <a:rPr sz="1100" b="1">
-                <a:solidFill>
-                  <a:srgbClr val="222222"/>
-                </a:solidFill>
-                <a:latin typeface="Noto Sans JP"/>
-              </a:rPr>
-              <a:t>損失関数の定義</a:t>
-            </a:r>
-          </a:p>
-        </p:txBody>
-      </p:sp>
-      <p:sp>
-        <p:nvSpPr>
-          <p:cNvPr id="20" name="Rounded Rectangle 19"/>
-          <p:cNvSpPr/>
-          <p:nvPr/>
-        </p:nvSpPr>
-        <p:spPr>
-          <a:xfrm>
-            <a:off x="2304000" y="4536000"/>
-            <a:ext cx="1835999" cy="468000"/>
-          </a:xfrm>
-          <a:prstGeom prst="roundRect">
-            <a:avLst/>
-          </a:prstGeom>
-          <a:solidFill>
-            <a:srgbClr val="FFFFFF"/>
-          </a:solidFill>
-          <a:ln w="15875">
-            <a:solidFill>
-              <a:srgbClr val="222222"/>
-            </a:solidFill>
-          </a:ln>
-          <a:effectLst/>
-        </p:spPr>
-        <p:style>
-          <a:lnRef idx="1">
-            <a:schemeClr val="accent1"/>
-          </a:lnRef>
-          <a:fillRef idx="3">
-            <a:schemeClr val="accent1"/>
-          </a:fillRef>
-          <a:effectRef idx="2">
-            <a:schemeClr val="accent1"/>
-          </a:effectRef>
-          <a:fontRef idx="minor">
-            <a:schemeClr val="lt1"/>
-          </a:fontRef>
-        </p:style>
-        <p:txBody>
-          <a:bodyPr rtlCol="0" anchor="ctr" wrap="square" lIns="54000" rIns="54000"/>
-          <a:lstStyle/>
-          <a:p>
-            <a:pPr algn="ctr"/>
-            <a:r>
-              <a:rPr sz="1100" b="1">
-                <a:solidFill>
-                  <a:srgbClr val="222222"/>
-                </a:solidFill>
-                <a:latin typeface="Noto Sans JP"/>
-              </a:rPr>
-              <a:t>ライブラリのインポート</a:t>
-            </a:r>
-          </a:p>
-        </p:txBody>
-      </p:sp>
-      <p:sp>
-        <p:nvSpPr>
-          <p:cNvPr id="21" name="Rounded Rectangle 20"/>
-          <p:cNvSpPr/>
-          <p:nvPr/>
-        </p:nvSpPr>
-        <p:spPr>
-          <a:xfrm>
-            <a:off x="4248000" y="4536000"/>
-            <a:ext cx="1835999" cy="468000"/>
-          </a:xfrm>
-          <a:prstGeom prst="roundRect">
-            <a:avLst/>
-          </a:prstGeom>
-          <a:solidFill>
-            <a:srgbClr val="FFFFFF"/>
-          </a:solidFill>
-          <a:ln w="15875">
-            <a:solidFill>
-              <a:srgbClr val="222222"/>
-            </a:solidFill>
-          </a:ln>
-          <a:effectLst/>
-        </p:spPr>
-        <p:style>
-          <a:lnRef idx="1">
-            <a:schemeClr val="accent1"/>
-          </a:lnRef>
-          <a:fillRef idx="3">
-            <a:schemeClr val="accent1"/>
-          </a:fillRef>
-          <a:effectRef idx="2">
-            <a:schemeClr val="accent1"/>
-          </a:effectRef>
-          <a:fontRef idx="minor">
-            <a:schemeClr val="lt1"/>
-          </a:fontRef>
-        </p:style>
-        <p:txBody>
-          <a:bodyPr rtlCol="0" anchor="ctr" wrap="square" lIns="54000" rIns="54000"/>
-          <a:lstStyle/>
-          <a:p>
-            <a:pPr algn="ctr"/>
-            <a:r>
-              <a:rPr sz="1100" b="1">
-                <a:solidFill>
-                  <a:srgbClr val="222222"/>
-                </a:solidFill>
-                <a:latin typeface="Noto Sans JP"/>
-              </a:rPr>
-              <a:t>モデル学習＆検証</a:t>
-            </a:r>
-          </a:p>
-        </p:txBody>
-      </p:sp>
-      <p:sp>
-        <p:nvSpPr>
-          <p:cNvPr id="22" name="Rounded Rectangle 21"/>
-          <p:cNvSpPr/>
-          <p:nvPr/>
-        </p:nvSpPr>
-        <p:spPr>
-          <a:xfrm>
-            <a:off x="6192000" y="4536000"/>
-            <a:ext cx="1835999" cy="468000"/>
-          </a:xfrm>
-          <a:prstGeom prst="roundRect">
-            <a:avLst/>
-          </a:prstGeom>
-          <a:solidFill>
-            <a:srgbClr val="FFFFFF"/>
-          </a:solidFill>
-          <a:ln w="15875">
-            <a:solidFill>
-              <a:srgbClr val="222222"/>
-            </a:solidFill>
-          </a:ln>
-          <a:effectLst/>
-        </p:spPr>
-        <p:style>
-          <a:lnRef idx="1">
-            <a:schemeClr val="accent1"/>
-          </a:lnRef>
-          <a:fillRef idx="3">
-            <a:schemeClr val="accent1"/>
-          </a:fillRef>
-          <a:effectRef idx="2">
-            <a:schemeClr val="accent1"/>
-          </a:effectRef>
-          <a:fontRef idx="minor">
-            <a:schemeClr val="lt1"/>
-          </a:fontRef>
-        </p:style>
-        <p:txBody>
-          <a:bodyPr rtlCol="0" anchor="ctr" wrap="square" lIns="54000" rIns="54000"/>
-          <a:lstStyle/>
-          <a:p>
-            <a:pPr algn="ctr"/>
-            <a:r>
-              <a:rPr sz="1100" b="1">
-                <a:solidFill>
-                  <a:srgbClr val="222222"/>
-                </a:solidFill>
-                <a:latin typeface="Noto Sans JP"/>
-              </a:rPr>
-              <a:t>デバイスの設定</a:t>
-            </a:r>
-          </a:p>
-        </p:txBody>
-      </p:sp>
-      <p:sp>
-        <p:nvSpPr>
-          <p:cNvPr id="23" name="Rounded Rectangle 22"/>
-          <p:cNvSpPr/>
-          <p:nvPr/>
-        </p:nvSpPr>
-        <p:spPr>
-          <a:xfrm>
-            <a:off x="8136000" y="4536000"/>
-            <a:ext cx="1835999" cy="468000"/>
-          </a:xfrm>
-          <a:prstGeom prst="roundRect">
-            <a:avLst/>
-          </a:prstGeom>
-          <a:solidFill>
-            <a:srgbClr val="FFFFFF"/>
-          </a:solidFill>
-          <a:ln w="15875">
-            <a:solidFill>
-              <a:srgbClr val="222222"/>
-            </a:solidFill>
-          </a:ln>
-          <a:effectLst/>
-        </p:spPr>
-        <p:style>
-          <a:lnRef idx="1">
-            <a:schemeClr val="accent1"/>
-          </a:lnRef>
-          <a:fillRef idx="3">
-            <a:schemeClr val="accent1"/>
-          </a:fillRef>
-          <a:effectRef idx="2">
-            <a:schemeClr val="accent1"/>
-          </a:effectRef>
-          <a:fontRef idx="minor">
-            <a:schemeClr val="lt1"/>
-          </a:fontRef>
-        </p:style>
-        <p:txBody>
-          <a:bodyPr rtlCol="0" anchor="ctr" wrap="square" lIns="54000" rIns="54000"/>
-          <a:lstStyle/>
-          <a:p>
-            <a:pPr algn="ctr"/>
-            <a:r>
-              <a:rPr sz="1100" b="1">
-                <a:solidFill>
-                  <a:srgbClr val="222222"/>
-                </a:solidFill>
-                <a:latin typeface="Noto Sans JP"/>
-              </a:rPr>
-              <a:t>データセットの準備</a:t>
-            </a:r>
-          </a:p>
-        </p:txBody>
-      </p:sp>
-      <p:sp>
-        <p:nvSpPr>
-          <p:cNvPr id="24" name="Rounded Rectangle 23"/>
-          <p:cNvSpPr/>
-          <p:nvPr/>
-        </p:nvSpPr>
-        <p:spPr>
-          <a:xfrm>
-            <a:off x="10080000" y="4536000"/>
-            <a:ext cx="1835999" cy="468000"/>
-          </a:xfrm>
-          <a:prstGeom prst="roundRect">
-            <a:avLst/>
-          </a:prstGeom>
-          <a:solidFill>
-            <a:srgbClr val="FFFFFF"/>
-          </a:solidFill>
-          <a:ln w="15875">
-            <a:solidFill>
-              <a:srgbClr val="222222"/>
-            </a:solidFill>
-          </a:ln>
-          <a:effectLst/>
-        </p:spPr>
-        <p:style>
-          <a:lnRef idx="1">
-            <a:schemeClr val="accent1"/>
-          </a:lnRef>
-          <a:fillRef idx="3">
-            <a:schemeClr val="accent1"/>
-          </a:fillRef>
-          <a:effectRef idx="2">
-            <a:schemeClr val="accent1"/>
-          </a:effectRef>
-          <a:fontRef idx="minor">
-            <a:schemeClr val="lt1"/>
-          </a:fontRef>
-        </p:style>
-        <p:txBody>
-          <a:bodyPr rtlCol="0" anchor="ctr" wrap="square" lIns="54000" rIns="54000"/>
-          <a:lstStyle/>
-          <a:p>
-            <a:pPr algn="ctr"/>
-            <a:r>
-              <a:rPr sz="1100" b="1">
-                <a:solidFill>
-                  <a:srgbClr val="222222"/>
-                </a:solidFill>
-                <a:latin typeface="Noto Sans JP"/>
-              </a:rPr>
-              <a:t>モデル性能評価</a:t>
-            </a:r>
-          </a:p>
-        </p:txBody>
-      </p:sp>
-      <p:sp>
-        <p:nvSpPr>
-          <p:cNvPr id="25" name="Rounded Rectangle 24"/>
-          <p:cNvSpPr/>
-          <p:nvPr/>
-        </p:nvSpPr>
-        <p:spPr>
-          <a:xfrm>
-            <a:off x="360000" y="5112000"/>
-            <a:ext cx="1835999" cy="468000"/>
-          </a:xfrm>
-          <a:prstGeom prst="roundRect">
-            <a:avLst/>
-          </a:prstGeom>
-          <a:solidFill>
-            <a:srgbClr val="FFFFFF"/>
-          </a:solidFill>
-          <a:ln w="15875">
-            <a:solidFill>
-              <a:srgbClr val="222222"/>
-            </a:solidFill>
-          </a:ln>
-          <a:effectLst/>
-        </p:spPr>
-        <p:style>
-          <a:lnRef idx="1">
-            <a:schemeClr val="accent1"/>
-          </a:lnRef>
-          <a:fillRef idx="3">
-            <a:schemeClr val="accent1"/>
-          </a:fillRef>
-          <a:effectRef idx="2">
-            <a:schemeClr val="accent1"/>
-          </a:effectRef>
-          <a:fontRef idx="minor">
-            <a:schemeClr val="lt1"/>
-          </a:fontRef>
-        </p:style>
-        <p:txBody>
-          <a:bodyPr rtlCol="0" anchor="ctr" wrap="square" lIns="54000" rIns="54000"/>
-          <a:lstStyle/>
-          <a:p>
-            <a:pPr algn="ctr"/>
-            <a:r>
-              <a:rPr sz="1100" b="1">
-                <a:solidFill>
-                  <a:srgbClr val="222222"/>
-                </a:solidFill>
-                <a:latin typeface="Noto Sans JP"/>
-              </a:rPr>
-              <a:t>ネットワークの定義</a:t>
-            </a:r>
-          </a:p>
-        </p:txBody>
-      </p:sp>
-      <p:sp>
-        <p:nvSpPr>
-          <p:cNvPr id="26" name="Rounded Rectangle 25"/>
-          <p:cNvSpPr/>
-          <p:nvPr/>
-        </p:nvSpPr>
-        <p:spPr>
-          <a:xfrm>
-            <a:off x="2304000" y="5112000"/>
-            <a:ext cx="1835999" cy="468000"/>
-          </a:xfrm>
-          <a:prstGeom prst="roundRect">
-            <a:avLst/>
-          </a:prstGeom>
-          <a:solidFill>
-            <a:srgbClr val="FFFFFF"/>
-          </a:solidFill>
-          <a:ln w="15875">
-            <a:solidFill>
-              <a:srgbClr val="222222"/>
-            </a:solidFill>
-          </a:ln>
-          <a:effectLst/>
-        </p:spPr>
-        <p:style>
-          <a:lnRef idx="1">
-            <a:schemeClr val="accent1"/>
-          </a:lnRef>
-          <a:fillRef idx="3">
-            <a:schemeClr val="accent1"/>
-          </a:fillRef>
-          <a:effectRef idx="2">
-            <a:schemeClr val="accent1"/>
-          </a:effectRef>
-          <a:fontRef idx="minor">
-            <a:schemeClr val="lt1"/>
-          </a:fontRef>
-        </p:style>
-        <p:txBody>
-          <a:bodyPr rtlCol="0" anchor="ctr" wrap="square" lIns="54000" rIns="54000"/>
-          <a:lstStyle/>
-          <a:p>
-            <a:pPr algn="ctr"/>
-            <a:r>
-              <a:rPr sz="1100" b="1">
-                <a:solidFill>
-                  <a:srgbClr val="222222"/>
-                </a:solidFill>
-                <a:latin typeface="Noto Sans JP"/>
-              </a:rPr>
-              <a:t>データの前処理</a:t>
-            </a:r>
-          </a:p>
-        </p:txBody>
-      </p:sp>
-      <p:sp>
-        <p:nvSpPr>
-          <p:cNvPr id="27" name="Rounded Rectangle 26"/>
-          <p:cNvSpPr/>
-          <p:nvPr/>
-        </p:nvSpPr>
-        <p:spPr>
-          <a:xfrm>
-            <a:off x="4248000" y="5112000"/>
-            <a:ext cx="1835999" cy="468000"/>
-          </a:xfrm>
-          <a:prstGeom prst="roundRect">
-            <a:avLst/>
-          </a:prstGeom>
-          <a:solidFill>
-            <a:srgbClr val="FFFFFF"/>
-          </a:solidFill>
-          <a:ln w="15875">
-            <a:solidFill>
-              <a:srgbClr val="222222"/>
-            </a:solidFill>
-          </a:ln>
-          <a:effectLst/>
-        </p:spPr>
-        <p:style>
-          <a:lnRef idx="1">
-            <a:schemeClr val="accent1"/>
-          </a:lnRef>
-          <a:fillRef idx="3">
-            <a:schemeClr val="accent1"/>
-          </a:fillRef>
-          <a:effectRef idx="2">
-            <a:schemeClr val="accent1"/>
-          </a:effectRef>
-          <a:fontRef idx="minor">
-            <a:schemeClr val="lt1"/>
-          </a:fontRef>
-        </p:style>
-        <p:txBody>
-          <a:bodyPr rtlCol="0" anchor="ctr" wrap="square" lIns="54000" rIns="54000"/>
-          <a:lstStyle/>
-          <a:p>
-            <a:pPr algn="ctr"/>
-            <a:r>
-              <a:rPr sz="1100" b="1">
-                <a:solidFill>
-                  <a:srgbClr val="222222"/>
-                </a:solidFill>
-                <a:latin typeface="Noto Sans JP"/>
-              </a:rPr>
-              <a:t>学習結果の可視化</a:t>
-            </a:r>
-          </a:p>
-        </p:txBody>
-      </p:sp>
-      <p:sp>
-        <p:nvSpPr>
-          <p:cNvPr id="28" name="Rounded Rectangle 27"/>
-          <p:cNvSpPr/>
-          <p:nvPr/>
-        </p:nvSpPr>
-        <p:spPr>
-          <a:xfrm>
-            <a:off x="6192000" y="5112000"/>
-            <a:ext cx="1835999" cy="468000"/>
-          </a:xfrm>
-          <a:prstGeom prst="roundRect">
-            <a:avLst/>
-          </a:prstGeom>
-          <a:solidFill>
-            <a:srgbClr val="FFFFFF"/>
-          </a:solidFill>
-          <a:ln w="15875">
-            <a:solidFill>
-              <a:srgbClr val="222222"/>
-            </a:solidFill>
-          </a:ln>
-          <a:effectLst/>
-        </p:spPr>
-        <p:style>
-          <a:lnRef idx="1">
-            <a:schemeClr val="accent1"/>
-          </a:lnRef>
-          <a:fillRef idx="3">
-            <a:schemeClr val="accent1"/>
-          </a:fillRef>
-          <a:effectRef idx="2">
-            <a:schemeClr val="accent1"/>
-          </a:effectRef>
-          <a:fontRef idx="minor">
-            <a:schemeClr val="lt1"/>
-          </a:fontRef>
-        </p:style>
-        <p:txBody>
-          <a:bodyPr rtlCol="0" anchor="ctr" wrap="square" lIns="54000" rIns="54000"/>
-          <a:lstStyle/>
-          <a:p>
-            <a:pPr algn="ctr"/>
-            <a:r>
-              <a:rPr sz="1100" b="1">
-                <a:solidFill>
-                  <a:srgbClr val="222222"/>
-                </a:solidFill>
-                <a:latin typeface="Noto Sans JP"/>
-              </a:rPr>
-              <a:t>最適化関数の定義</a:t>
-            </a:r>
-          </a:p>
-        </p:txBody>
-      </p:sp>
-      <p:sp>
-        <p:nvSpPr>
-          <p:cNvPr id="29" name="Rounded Rectangle 28"/>
-          <p:cNvSpPr/>
-          <p:nvPr/>
-        </p:nvSpPr>
-        <p:spPr>
-          <a:xfrm>
-            <a:off x="8136000" y="5112000"/>
-            <a:ext cx="1835999" cy="468000"/>
-          </a:xfrm>
-          <a:prstGeom prst="roundRect">
-            <a:avLst/>
-          </a:prstGeom>
-          <a:solidFill>
-            <a:srgbClr val="FFFFFF"/>
-          </a:solidFill>
-          <a:ln w="15875">
-            <a:solidFill>
-              <a:srgbClr val="222222"/>
-            </a:solidFill>
-          </a:ln>
-          <a:effectLst/>
-        </p:spPr>
-        <p:style>
-          <a:lnRef idx="1">
-            <a:schemeClr val="accent1"/>
-          </a:lnRef>
-          <a:fillRef idx="3">
-            <a:schemeClr val="accent1"/>
-          </a:fillRef>
-          <a:effectRef idx="2">
-            <a:schemeClr val="accent1"/>
-          </a:effectRef>
-          <a:fontRef idx="minor">
-            <a:schemeClr val="lt1"/>
-          </a:fontRef>
-        </p:style>
-        <p:txBody>
-          <a:bodyPr rtlCol="0" anchor="ctr" wrap="square" lIns="54000" rIns="54000"/>
-          <a:lstStyle/>
-          <a:p>
-            <a:pPr algn="ctr"/>
-            <a:r>
-              <a:rPr sz="1100" b="1">
-                <a:solidFill>
-                  <a:srgbClr val="222222"/>
-                </a:solidFill>
-                <a:latin typeface="Noto Sans JP"/>
-              </a:rPr>
-              <a:t>データローダの作成</a:t>
-            </a:r>
-          </a:p>
-        </p:txBody>
-      </p:sp>
-      <p:sp>
-        <p:nvSpPr>
-          <p:cNvPr id="30" name="Rounded Rectangle 29"/>
-          <p:cNvSpPr/>
-          <p:nvPr/>
-        </p:nvSpPr>
-        <p:spPr>
-          <a:xfrm>
-            <a:off x="10080000" y="5112000"/>
-            <a:ext cx="1835999" cy="468000"/>
-          </a:xfrm>
-          <a:prstGeom prst="roundRect">
-            <a:avLst/>
-          </a:prstGeom>
-          <a:solidFill>
-            <a:srgbClr val="FFFFFF"/>
-          </a:solidFill>
-          <a:ln w="15875">
-            <a:solidFill>
-              <a:srgbClr val="222222"/>
-            </a:solidFill>
-          </a:ln>
-          <a:effectLst/>
-        </p:spPr>
-        <p:style>
-          <a:lnRef idx="1">
-            <a:schemeClr val="accent1"/>
-          </a:lnRef>
-          <a:fillRef idx="3">
-            <a:schemeClr val="accent1"/>
-          </a:fillRef>
-          <a:effectRef idx="2">
-            <a:schemeClr val="accent1"/>
-          </a:effectRef>
-          <a:fontRef idx="minor">
-            <a:schemeClr val="lt1"/>
-          </a:fontRef>
-        </p:style>
-        <p:txBody>
-          <a:bodyPr rtlCol="0" anchor="ctr" wrap="square" lIns="54000" rIns="54000"/>
-          <a:lstStyle/>
-          <a:p>
-            <a:pPr algn="ctr"/>
-            <a:r>
-              <a:rPr sz="1100" b="1">
-                <a:solidFill>
-                  <a:srgbClr val="222222"/>
-                </a:solidFill>
-                <a:latin typeface="Noto Sans JP"/>
-              </a:rPr>
-              <a:t>入力データの形状確認</a:t>
-            </a:r>
-          </a:p>
-        </p:txBody>
-      </p:sp>
-      <p:sp>
-        <p:nvSpPr>
-          <p:cNvPr id="31" name="TextBox 30"/>
-          <p:cNvSpPr txBox="1"/>
-          <p:nvPr/>
-        </p:nvSpPr>
-        <p:spPr>
-          <a:xfrm>
-            <a:off x="360000" y="5760000"/>
-            <a:ext cx="11448000" cy="648000"/>
-          </a:xfrm>
-          <a:prstGeom prst="rect">
-            <a:avLst/>
-          </a:prstGeom>
-          <a:noFill/>
-        </p:spPr>
-        <p:txBody>
-          <a:bodyPr wrap="square" anchor="t" lIns="54000" rIns="54000" tIns="18000" bIns="18000">
-            <a:spAutoFit/>
-          </a:bodyPr>
-          <a:lstStyle/>
-          <a:p>
-            <a:pPr algn="l"/>
-            <a:r>
-              <a:rPr sz="1200" b="0">
-                <a:solidFill>
-                  <a:srgbClr val="222222"/>
-                </a:solidFill>
-                <a:latin typeface="Noto Sans JP"/>
-              </a:rPr>
-              <a:t>問い　(1) 「学習」が始まるのは何番目のカードからか．それより前は何をしているか．</a:t>
-            </a:r>
-          </a:p>
-          <a:p>
-            <a:pPr algn="l"/>
-            <a:r>
-              <a:rPr sz="1200" b="0">
-                <a:solidFill>
-                  <a:srgbClr val="222222"/>
-                </a:solidFill>
-                <a:latin typeface="Noto Sans JP"/>
-              </a:rPr>
-              <a:t>　　　(2) データが画像からテキストに変わったとき，差し替えるカードはどれか．</a:t>
-            </a:r>
-          </a:p>
-        </p:txBody>
-      </p:sp>
-      <p:sp>
-        <p:nvSpPr>
-          <p:cNvPr id="32" name="TextBox 31"/>
-          <p:cNvSpPr txBox="1"/>
-          <p:nvPr/>
-        </p:nvSpPr>
-        <p:spPr>
-          <a:xfrm>
-            <a:off x="360000" y="6516000"/>
-            <a:ext cx="11448000" cy="251999"/>
-          </a:xfrm>
-          <a:prstGeom prst="rect">
-            <a:avLst/>
-          </a:prstGeom>
-          <a:noFill/>
-        </p:spPr>
-        <p:txBody>
-          <a:bodyPr wrap="square" anchor="t" lIns="54000" rIns="54000" tIns="18000" bIns="18000">
-            <a:spAutoFit/>
-          </a:bodyPr>
-          <a:lstStyle/>
-          <a:p>
-            <a:pPr algn="l"/>
-            <a:r>
-              <a:rPr sz="900" b="0">
-                <a:solidFill>
-                  <a:srgbClr val="555555"/>
-                </a:solidFill>
-                <a:latin typeface="Noto Sans JP"/>
-              </a:rPr>
-              <a:t>GW2-1　教科書 2.3 節のコードテンプレート①〜⑫に対応する．並べ終えたら番号を書き込む</a:t>
-            </a:r>
-          </a:p>
-        </p:txBody>
-      </p:sp>
-    </p:spTree>
-  </p:cSld>
-  <p:clrMapOvr>
-    <a:masterClrMapping/>
-  </p:clrMapOvr>
-</p:sld>
-</file>
-
-<file path=ppt/slides/slide5.xml><?xml version="1.0" encoding="utf-8"?>
-<p:sld xmlns:a="http://schemas.openxmlformats.org/drawingml/2006/main" xmlns:p="http://schemas.openxmlformats.org/presentationml/2006/main" xmlns:r="http://schemas.openxmlformats.org/officeDocument/2006/relationships">
-  <p:cSld>
-    <p:spTree>
-      <p:nvGrpSpPr>
-        <p:cNvPr id="1" name=""/>
-        <p:cNvGrpSpPr/>
-        <p:nvPr/>
-      </p:nvGrpSpPr>
-      <p:grpSpPr/>
-      <p:sp>
-        <p:nvSpPr>
-          <p:cNvPr id="2" name="TextBox 1"/>
-          <p:cNvSpPr txBox="1"/>
-          <p:nvPr/>
-        </p:nvSpPr>
-        <p:spPr>
-          <a:xfrm>
-            <a:off x="360000" y="180000"/>
-            <a:ext cx="11448000" cy="468000"/>
-          </a:xfrm>
-          <a:prstGeom prst="rect">
-            <a:avLst/>
-          </a:prstGeom>
-          <a:noFill/>
-        </p:spPr>
-        <p:txBody>
-          <a:bodyPr wrap="square" anchor="t" lIns="54000" rIns="54000" tIns="18000" bIns="18000">
-            <a:spAutoFit/>
-          </a:bodyPr>
-          <a:lstStyle/>
-          <a:p>
-            <a:pPr algn="l"/>
-            <a:r>
-              <a:rPr sz="2200" b="1">
-                <a:solidFill>
-                  <a:srgbClr val="222222"/>
-                </a:solidFill>
-                <a:latin typeface="Noto Sans JP"/>
-              </a:rPr>
-              <a:t>GW2-2　入力データはどんなテンソルになるか（5分）</a:t>
-            </a:r>
-          </a:p>
-        </p:txBody>
-      </p:sp>
-      <p:sp>
-        <p:nvSpPr>
-          <p:cNvPr id="3" name="TextBox 2"/>
-          <p:cNvSpPr txBox="1"/>
-          <p:nvPr/>
-        </p:nvSpPr>
-        <p:spPr>
-          <a:xfrm>
-            <a:off x="360000" y="630000"/>
-            <a:ext cx="11448000" cy="324000"/>
-          </a:xfrm>
-          <a:prstGeom prst="rect">
-            <a:avLst/>
-          </a:prstGeom>
-          <a:noFill/>
-        </p:spPr>
-        <p:txBody>
-          <a:bodyPr wrap="square" anchor="t" lIns="54000" rIns="54000" tIns="18000" bIns="18000">
-            <a:spAutoFit/>
-          </a:bodyPr>
-          <a:lstStyle/>
-          <a:p>
-            <a:pPr algn="l"/>
-            <a:r>
-              <a:rPr sz="1200" b="0">
-                <a:solidFill>
-                  <a:srgbClr val="555555"/>
-                </a:solidFill>
-                <a:latin typeface="Noto Sans JP"/>
-              </a:rPr>
-              <a:t>どんなデータも「前処理で数値化 → テンソル → ディープラーニングモデル → 出力」の同じ流れに乗る．今日扱う2つの行を必ず埋め，残りは分かる範囲で埋める．</a:t>
-            </a:r>
-          </a:p>
-        </p:txBody>
-      </p:sp>
-      <p:sp>
-        <p:nvSpPr>
-          <p:cNvPr id="4" name="Rectangle 3"/>
-          <p:cNvSpPr/>
-          <p:nvPr/>
-        </p:nvSpPr>
-        <p:spPr>
-          <a:xfrm>
-            <a:off x="360000" y="1152000"/>
-            <a:ext cx="2160000" cy="432000"/>
-          </a:xfrm>
-          <a:prstGeom prst="rect">
-            <a:avLst/>
-          </a:prstGeom>
-          <a:solidFill>
-            <a:srgbClr val="ECEE67"/>
           </a:solidFill>
           <a:ln w="15875">
             <a:solidFill>
@@ -7988,33 +7151,33 @@
           <a:p>
             <a:pPr algn="ctr"/>
             <a:r>
-              <a:rPr sz="1200" b="1">
-                <a:solidFill>
-                  <a:srgbClr val="222222"/>
-                </a:solidFill>
-                <a:latin typeface="Noto Sans JP"/>
-              </a:rPr>
-              <a:t>入力データ</a:t>
-            </a:r>
-          </a:p>
-        </p:txBody>
-      </p:sp>
-      <p:sp>
-        <p:nvSpPr>
-          <p:cNvPr id="5" name="Rectangle 4"/>
+              <a:rPr sz="1000" b="0">
+                <a:solidFill>
+                  <a:srgbClr val="222222"/>
+                </a:solidFill>
+                <a:latin typeface="Noto Sans JP"/>
+              </a:rPr>
+              <a:t>(N, トークン数, 埋め込み次元)</a:t>
+            </a:r>
+          </a:p>
+        </p:txBody>
+      </p:sp>
+      <p:sp>
+        <p:nvSpPr>
+          <p:cNvPr id="13" name="Rectangle 12"/>
           <p:cNvSpPr/>
           <p:nvPr/>
         </p:nvSpPr>
         <p:spPr>
           <a:xfrm>
-            <a:off x="2520000" y="1152000"/>
-            <a:ext cx="3600000" cy="432000"/>
+            <a:off x="360000" y="2340000"/>
+            <a:ext cx="2160000" cy="396000"/>
           </a:xfrm>
           <a:prstGeom prst="rect">
             <a:avLst/>
           </a:prstGeom>
           <a:solidFill>
-            <a:srgbClr val="ECEE67"/>
+            <a:srgbClr val="FFF9C4"/>
           </a:solidFill>
           <a:ln w="15875">
             <a:solidFill>
@@ -8043,33 +7206,33 @@
           <a:p>
             <a:pPr algn="ctr"/>
             <a:r>
-              <a:rPr sz="1200" b="1">
-                <a:solidFill>
-                  <a:srgbClr val="222222"/>
-                </a:solidFill>
-                <a:latin typeface="Noto Sans JP"/>
-              </a:rPr>
-              <a:t>前処理（数値化）</a:t>
-            </a:r>
-          </a:p>
-        </p:txBody>
-      </p:sp>
-      <p:sp>
-        <p:nvSpPr>
-          <p:cNvPr id="6" name="Rectangle 5"/>
+              <a:rPr sz="1200" b="0">
+                <a:solidFill>
+                  <a:srgbClr val="222222"/>
+                </a:solidFill>
+                <a:latin typeface="Noto Sans JP"/>
+              </a:rPr>
+              <a:t/>
+            </a:r>
+          </a:p>
+        </p:txBody>
+      </p:sp>
+      <p:sp>
+        <p:nvSpPr>
+          <p:cNvPr id="14" name="Rectangle 13"/>
           <p:cNvSpPr/>
           <p:nvPr/>
         </p:nvSpPr>
         <p:spPr>
           <a:xfrm>
-            <a:off x="6120000" y="1152000"/>
-            <a:ext cx="3240000" cy="432000"/>
+            <a:off x="2520000" y="2340000"/>
+            <a:ext cx="3240000" cy="396000"/>
           </a:xfrm>
           <a:prstGeom prst="rect">
             <a:avLst/>
           </a:prstGeom>
           <a:solidFill>
-            <a:srgbClr val="ECEE67"/>
+            <a:srgbClr val="FFFFFF"/>
           </a:solidFill>
           <a:ln w="15875">
             <a:solidFill>
@@ -8098,33 +7261,33 @@
           <a:p>
             <a:pPr algn="ctr"/>
             <a:r>
-              <a:rPr sz="1200" b="1">
-                <a:solidFill>
-                  <a:srgbClr val="222222"/>
-                </a:solidFill>
-                <a:latin typeface="Noto Sans JP"/>
-              </a:rPr>
-              <a:t>テンソルの形状（例）</a:t>
-            </a:r>
-          </a:p>
-        </p:txBody>
-      </p:sp>
-      <p:sp>
-        <p:nvSpPr>
-          <p:cNvPr id="7" name="Rectangle 6"/>
+              <a:rPr sz="1000" b="0">
+                <a:solidFill>
+                  <a:srgbClr val="222222"/>
+                </a:solidFill>
+                <a:latin typeface="Noto Sans JP"/>
+              </a:rPr>
+              <a:t>サンプリング／スペクトログラム化</a:t>
+            </a:r>
+          </a:p>
+        </p:txBody>
+      </p:sp>
+      <p:sp>
+        <p:nvSpPr>
+          <p:cNvPr id="15" name="Rectangle 14"/>
           <p:cNvSpPr/>
           <p:nvPr/>
         </p:nvSpPr>
         <p:spPr>
           <a:xfrm>
-            <a:off x="360000" y="1584000"/>
-            <a:ext cx="2160000" cy="576000"/>
+            <a:off x="5760000" y="2340000"/>
+            <a:ext cx="3600000" cy="396000"/>
           </a:xfrm>
           <a:prstGeom prst="rect">
             <a:avLst/>
           </a:prstGeom>
           <a:solidFill>
-            <a:srgbClr val="D9EAD3"/>
+            <a:srgbClr val="FFFFFF"/>
           </a:solidFill>
           <a:ln w="15875">
             <a:solidFill>
@@ -8153,27 +7316,27 @@
           <a:p>
             <a:pPr algn="ctr"/>
             <a:r>
-              <a:rPr sz="1100" b="1">
-                <a:solidFill>
-                  <a:srgbClr val="222222"/>
-                </a:solidFill>
-                <a:latin typeface="Noto Sans JP"/>
-              </a:rPr>
-              <a:t>画像（今日：FashionMNIST）</a:t>
-            </a:r>
-          </a:p>
-        </p:txBody>
-      </p:sp>
-      <p:sp>
-        <p:nvSpPr>
-          <p:cNvPr id="8" name="Rectangle 7"/>
+              <a:rPr sz="1000" b="0">
+                <a:solidFill>
+                  <a:srgbClr val="222222"/>
+                </a:solidFill>
+                <a:latin typeface="Noto Sans JP"/>
+              </a:rPr>
+              <a:t>(N, サンプル数) / (N, 1, 周波数, 時間)</a:t>
+            </a:r>
+          </a:p>
+        </p:txBody>
+      </p:sp>
+      <p:sp>
+        <p:nvSpPr>
+          <p:cNvPr id="16" name="Rectangle 15"/>
           <p:cNvSpPr/>
           <p:nvPr/>
         </p:nvSpPr>
         <p:spPr>
           <a:xfrm>
-            <a:off x="2520000" y="1584000"/>
-            <a:ext cx="3600000" cy="576000"/>
+            <a:off x="360000" y="2736000"/>
+            <a:ext cx="2160000" cy="396000"/>
           </a:xfrm>
           <a:prstGeom prst="rect">
             <a:avLst/>
@@ -8221,20 +7384,20 @@
       </p:sp>
       <p:sp>
         <p:nvSpPr>
-          <p:cNvPr id="9" name="Rectangle 8"/>
+          <p:cNvPr id="17" name="Rectangle 16"/>
           <p:cNvSpPr/>
           <p:nvPr/>
         </p:nvSpPr>
         <p:spPr>
           <a:xfrm>
-            <a:off x="6120000" y="1584000"/>
-            <a:ext cx="3240000" cy="576000"/>
+            <a:off x="2520000" y="2736000"/>
+            <a:ext cx="3240000" cy="396000"/>
           </a:xfrm>
           <a:prstGeom prst="rect">
             <a:avLst/>
           </a:prstGeom>
           <a:solidFill>
-            <a:srgbClr val="FFF9C4"/>
+            <a:srgbClr val="FFFFFF"/>
           </a:solidFill>
           <a:ln w="15875">
             <a:solidFill>
@@ -8263,33 +7426,33 @@
           <a:p>
             <a:pPr algn="ctr"/>
             <a:r>
-              <a:rPr sz="1200" b="0">
-                <a:solidFill>
-                  <a:srgbClr val="222222"/>
-                </a:solidFill>
-                <a:latin typeface="Noto Sans JP"/>
-              </a:rPr>
-              <a:t/>
-            </a:r>
-          </a:p>
-        </p:txBody>
-      </p:sp>
-      <p:sp>
-        <p:nvSpPr>
-          <p:cNvPr id="10" name="Rectangle 9"/>
+              <a:rPr sz="1000" b="0">
+                <a:solidFill>
+                  <a:srgbClr val="222222"/>
+                </a:solidFill>
+                <a:latin typeface="Noto Sans JP"/>
+              </a:rPr>
+              <a:t>画素値の正規化・リサイズ</a:t>
+            </a:r>
+          </a:p>
+        </p:txBody>
+      </p:sp>
+      <p:sp>
+        <p:nvSpPr>
+          <p:cNvPr id="18" name="Rectangle 17"/>
           <p:cNvSpPr/>
           <p:nvPr/>
         </p:nvSpPr>
         <p:spPr>
           <a:xfrm>
-            <a:off x="360000" y="2214000"/>
-            <a:ext cx="2160000" cy="576000"/>
+            <a:off x="5760000" y="2736000"/>
+            <a:ext cx="3600000" cy="396000"/>
           </a:xfrm>
           <a:prstGeom prst="rect">
             <a:avLst/>
           </a:prstGeom>
           <a:solidFill>
-            <a:srgbClr val="D9EAD3"/>
+            <a:srgbClr val="FFFFFF"/>
           </a:solidFill>
           <a:ln w="15875">
             <a:solidFill>
@@ -8318,27 +7481,27 @@
           <a:p>
             <a:pPr algn="ctr"/>
             <a:r>
-              <a:rPr sz="1100" b="1">
-                <a:solidFill>
-                  <a:srgbClr val="222222"/>
-                </a:solidFill>
-                <a:latin typeface="Noto Sans JP"/>
-              </a:rPr>
-              <a:t>テキスト（今日：SST-2 映画レビュー）</a:t>
-            </a:r>
-          </a:p>
-        </p:txBody>
-      </p:sp>
-      <p:sp>
-        <p:nvSpPr>
-          <p:cNvPr id="11" name="Rectangle 10"/>
+              <a:rPr sz="1000" b="0">
+                <a:solidFill>
+                  <a:srgbClr val="222222"/>
+                </a:solidFill>
+                <a:latin typeface="Noto Sans JP"/>
+              </a:rPr>
+              <a:t>(N, チャネル, 高さ, 幅)</a:t>
+            </a:r>
+          </a:p>
+        </p:txBody>
+      </p:sp>
+      <p:sp>
+        <p:nvSpPr>
+          <p:cNvPr id="19" name="Rectangle 18"/>
           <p:cNvSpPr/>
           <p:nvPr/>
         </p:nvSpPr>
         <p:spPr>
           <a:xfrm>
-            <a:off x="2520000" y="2214000"/>
-            <a:ext cx="3600000" cy="576000"/>
+            <a:off x="360000" y="3131999"/>
+            <a:ext cx="2160000" cy="396000"/>
           </a:xfrm>
           <a:prstGeom prst="rect">
             <a:avLst/>
@@ -8386,20 +7549,20 @@
       </p:sp>
       <p:sp>
         <p:nvSpPr>
-          <p:cNvPr id="12" name="Rectangle 11"/>
+          <p:cNvPr id="20" name="Rectangle 19"/>
           <p:cNvSpPr/>
           <p:nvPr/>
         </p:nvSpPr>
         <p:spPr>
           <a:xfrm>
-            <a:off x="6120000" y="2214000"/>
-            <a:ext cx="3240000" cy="576000"/>
+            <a:off x="2520000" y="3131999"/>
+            <a:ext cx="3240000" cy="396000"/>
           </a:xfrm>
           <a:prstGeom prst="rect">
             <a:avLst/>
           </a:prstGeom>
           <a:solidFill>
-            <a:srgbClr val="FFF9C4"/>
+            <a:srgbClr val="FFFFFF"/>
           </a:solidFill>
           <a:ln w="15875">
             <a:solidFill>
@@ -8428,27 +7591,27 @@
           <a:p>
             <a:pPr algn="ctr"/>
             <a:r>
-              <a:rPr sz="1200" b="0">
-                <a:solidFill>
-                  <a:srgbClr val="222222"/>
-                </a:solidFill>
-                <a:latin typeface="Noto Sans JP"/>
-              </a:rPr>
-              <a:t/>
-            </a:r>
-          </a:p>
-        </p:txBody>
-      </p:sp>
-      <p:sp>
-        <p:nvSpPr>
-          <p:cNvPr id="13" name="Rectangle 12"/>
+              <a:rPr sz="1000" b="0">
+                <a:solidFill>
+                  <a:srgbClr val="222222"/>
+                </a:solidFill>
+                <a:latin typeface="Noto Sans JP"/>
+              </a:rPr>
+              <a:t>フレーム抽出</a:t>
+            </a:r>
+          </a:p>
+        </p:txBody>
+      </p:sp>
+      <p:sp>
+        <p:nvSpPr>
+          <p:cNvPr id="21" name="Rectangle 20"/>
           <p:cNvSpPr/>
           <p:nvPr/>
         </p:nvSpPr>
         <p:spPr>
           <a:xfrm>
-            <a:off x="360000" y="2844000"/>
-            <a:ext cx="2160000" cy="576000"/>
+            <a:off x="5760000" y="3131999"/>
+            <a:ext cx="3600000" cy="396000"/>
           </a:xfrm>
           <a:prstGeom prst="rect">
             <a:avLst/>
@@ -8483,27 +7646,27 @@
           <a:p>
             <a:pPr algn="ctr"/>
             <a:r>
-              <a:rPr sz="1100" b="1">
-                <a:solidFill>
-                  <a:srgbClr val="222222"/>
-                </a:solidFill>
-                <a:latin typeface="Noto Sans JP"/>
-              </a:rPr>
-              <a:t>数値データ（表形式）</a:t>
-            </a:r>
-          </a:p>
-        </p:txBody>
-      </p:sp>
-      <p:sp>
-        <p:nvSpPr>
-          <p:cNvPr id="14" name="Rectangle 13"/>
+              <a:rPr sz="1000" b="0">
+                <a:solidFill>
+                  <a:srgbClr val="222222"/>
+                </a:solidFill>
+                <a:latin typeface="Noto Sans JP"/>
+              </a:rPr>
+              <a:t>(N, フレーム数, チャネル, 高さ, 幅)</a:t>
+            </a:r>
+          </a:p>
+        </p:txBody>
+      </p:sp>
+      <p:sp>
+        <p:nvSpPr>
+          <p:cNvPr id="22" name="Rectangle 21"/>
           <p:cNvSpPr/>
           <p:nvPr/>
         </p:nvSpPr>
         <p:spPr>
           <a:xfrm>
-            <a:off x="2520000" y="2844000"/>
-            <a:ext cx="3600000" cy="576000"/>
+            <a:off x="360000" y="3528000"/>
+            <a:ext cx="2160000" cy="396000"/>
           </a:xfrm>
           <a:prstGeom prst="rect">
             <a:avLst/>
@@ -8551,20 +7714,20 @@
       </p:sp>
       <p:sp>
         <p:nvSpPr>
-          <p:cNvPr id="15" name="Rectangle 14"/>
+          <p:cNvPr id="23" name="Rectangle 22"/>
           <p:cNvSpPr/>
           <p:nvPr/>
         </p:nvSpPr>
         <p:spPr>
           <a:xfrm>
-            <a:off x="6120000" y="2844000"/>
-            <a:ext cx="3240000" cy="576000"/>
+            <a:off x="2520000" y="3528000"/>
+            <a:ext cx="3240000" cy="396000"/>
           </a:xfrm>
           <a:prstGeom prst="rect">
             <a:avLst/>
           </a:prstGeom>
           <a:solidFill>
-            <a:srgbClr val="FFF9C4"/>
+            <a:srgbClr val="FFFFFF"/>
           </a:solidFill>
           <a:ln w="15875">
             <a:solidFill>
@@ -8593,27 +7756,27 @@
           <a:p>
             <a:pPr algn="ctr"/>
             <a:r>
-              <a:rPr sz="1200" b="0">
-                <a:solidFill>
-                  <a:srgbClr val="222222"/>
-                </a:solidFill>
-                <a:latin typeface="Noto Sans JP"/>
-              </a:rPr>
-              <a:t/>
-            </a:r>
-          </a:p>
-        </p:txBody>
-      </p:sp>
-      <p:sp>
-        <p:nvSpPr>
-          <p:cNvPr id="16" name="Rectangle 15"/>
+              <a:rPr sz="1000" b="0">
+                <a:solidFill>
+                  <a:srgbClr val="222222"/>
+                </a:solidFill>
+                <a:latin typeface="Noto Sans JP"/>
+              </a:rPr>
+              <a:t>座標の正規化・点の抽出</a:t>
+            </a:r>
+          </a:p>
+        </p:txBody>
+      </p:sp>
+      <p:sp>
+        <p:nvSpPr>
+          <p:cNvPr id="24" name="Rectangle 23"/>
           <p:cNvSpPr/>
           <p:nvPr/>
         </p:nvSpPr>
         <p:spPr>
           <a:xfrm>
-            <a:off x="360000" y="3474000"/>
-            <a:ext cx="2160000" cy="576000"/>
+            <a:off x="5760000" y="3528000"/>
+            <a:ext cx="3600000" cy="396000"/>
           </a:xfrm>
           <a:prstGeom prst="rect">
             <a:avLst/>
@@ -8648,27 +7811,27 @@
           <a:p>
             <a:pPr algn="ctr"/>
             <a:r>
-              <a:rPr sz="1100" b="1">
-                <a:solidFill>
-                  <a:srgbClr val="222222"/>
-                </a:solidFill>
-                <a:latin typeface="Noto Sans JP"/>
-              </a:rPr>
-              <a:t>音声</a:t>
-            </a:r>
-          </a:p>
-        </p:txBody>
-      </p:sp>
-      <p:sp>
-        <p:nvSpPr>
-          <p:cNvPr id="17" name="Rectangle 16"/>
+              <a:rPr sz="1000" b="0">
+                <a:solidFill>
+                  <a:srgbClr val="222222"/>
+                </a:solidFill>
+                <a:latin typeface="Noto Sans JP"/>
+              </a:rPr>
+              <a:t>(N, 点数, 3) ／ 頂点(V,3)+面(F,3)</a:t>
+            </a:r>
+          </a:p>
+        </p:txBody>
+      </p:sp>
+      <p:sp>
+        <p:nvSpPr>
+          <p:cNvPr id="25" name="Rectangle 24"/>
           <p:cNvSpPr/>
           <p:nvPr/>
         </p:nvSpPr>
         <p:spPr>
           <a:xfrm>
-            <a:off x="2520000" y="3474000"/>
-            <a:ext cx="3600000" cy="576000"/>
+            <a:off x="360000" y="3924000"/>
+            <a:ext cx="2160000" cy="396000"/>
           </a:xfrm>
           <a:prstGeom prst="rect">
             <a:avLst/>
@@ -8716,20 +7879,20 @@
       </p:sp>
       <p:sp>
         <p:nvSpPr>
-          <p:cNvPr id="18" name="Rectangle 17"/>
+          <p:cNvPr id="26" name="Rectangle 25"/>
           <p:cNvSpPr/>
           <p:nvPr/>
         </p:nvSpPr>
         <p:spPr>
           <a:xfrm>
-            <a:off x="6120000" y="3474000"/>
-            <a:ext cx="3240000" cy="576000"/>
+            <a:off x="2520000" y="3924000"/>
+            <a:ext cx="3240000" cy="396000"/>
           </a:xfrm>
           <a:prstGeom prst="rect">
             <a:avLst/>
           </a:prstGeom>
           <a:solidFill>
-            <a:srgbClr val="FFF9C4"/>
+            <a:srgbClr val="FFFFFF"/>
           </a:solidFill>
           <a:ln w="15875">
             <a:solidFill>
@@ -8758,27 +7921,27 @@
           <a:p>
             <a:pPr algn="ctr"/>
             <a:r>
-              <a:rPr sz="1200" b="0">
-                <a:solidFill>
-                  <a:srgbClr val="222222"/>
-                </a:solidFill>
-                <a:latin typeface="Noto Sans JP"/>
-              </a:rPr>
-              <a:t/>
-            </a:r>
-          </a:p>
-        </p:txBody>
-      </p:sp>
-      <p:sp>
-        <p:nvSpPr>
-          <p:cNvPr id="19" name="Rectangle 18"/>
+              <a:rPr sz="1000" b="0">
+                <a:solidFill>
+                  <a:srgbClr val="222222"/>
+                </a:solidFill>
+                <a:latin typeface="Noto Sans JP"/>
+              </a:rPr>
+              <a:t>ノード特徴・接続関係の数値化</a:t>
+            </a:r>
+          </a:p>
+        </p:txBody>
+      </p:sp>
+      <p:sp>
+        <p:nvSpPr>
+          <p:cNvPr id="27" name="Rectangle 26"/>
           <p:cNvSpPr/>
           <p:nvPr/>
         </p:nvSpPr>
         <p:spPr>
           <a:xfrm>
-            <a:off x="360000" y="4104000"/>
-            <a:ext cx="2160000" cy="576000"/>
+            <a:off x="5760000" y="3924000"/>
+            <a:ext cx="3600000" cy="396000"/>
           </a:xfrm>
           <a:prstGeom prst="rect">
             <a:avLst/>
@@ -8813,27 +7976,27 @@
           <a:p>
             <a:pPr algn="ctr"/>
             <a:r>
-              <a:rPr sz="1100" b="1">
-                <a:solidFill>
-                  <a:srgbClr val="222222"/>
-                </a:solidFill>
-                <a:latin typeface="Noto Sans JP"/>
-              </a:rPr>
-              <a:t>時系列（加速度センサ）</a:t>
-            </a:r>
-          </a:p>
-        </p:txBody>
-      </p:sp>
-      <p:sp>
-        <p:nvSpPr>
-          <p:cNvPr id="20" name="Rectangle 19"/>
+              <a:rPr sz="1000" b="0">
+                <a:solidFill>
+                  <a:srgbClr val="222222"/>
+                </a:solidFill>
+                <a:latin typeface="Noto Sans JP"/>
+              </a:rPr>
+              <a:t>ノード特徴(ノード数, D)+隣接行列</a:t>
+            </a:r>
+          </a:p>
+        </p:txBody>
+      </p:sp>
+      <p:sp>
+        <p:nvSpPr>
+          <p:cNvPr id="28" name="Rectangle 27"/>
           <p:cNvSpPr/>
           <p:nvPr/>
         </p:nvSpPr>
         <p:spPr>
           <a:xfrm>
-            <a:off x="2520000" y="4104000"/>
-            <a:ext cx="3600000" cy="576000"/>
+            <a:off x="360000" y="4320000"/>
+            <a:ext cx="2160000" cy="396000"/>
           </a:xfrm>
           <a:prstGeom prst="rect">
             <a:avLst/>
@@ -8881,20 +8044,20 @@
       </p:sp>
       <p:sp>
         <p:nvSpPr>
-          <p:cNvPr id="21" name="Rectangle 20"/>
+          <p:cNvPr id="29" name="Rectangle 28"/>
           <p:cNvSpPr/>
           <p:nvPr/>
         </p:nvSpPr>
         <p:spPr>
           <a:xfrm>
-            <a:off x="6120000" y="4104000"/>
-            <a:ext cx="3240000" cy="576000"/>
+            <a:off x="2520000" y="4320000"/>
+            <a:ext cx="3240000" cy="396000"/>
           </a:xfrm>
           <a:prstGeom prst="rect">
             <a:avLst/>
           </a:prstGeom>
           <a:solidFill>
-            <a:srgbClr val="FFF9C4"/>
+            <a:srgbClr val="FFFFFF"/>
           </a:solidFill>
           <a:ln w="15875">
             <a:solidFill>
@@ -8923,29 +8086,29 @@
           <a:p>
             <a:pPr algn="ctr"/>
             <a:r>
-              <a:rPr sz="1200" b="0">
-                <a:solidFill>
-                  <a:srgbClr val="222222"/>
-                </a:solidFill>
-                <a:latin typeface="Noto Sans JP"/>
-              </a:rPr>
-              <a:t/>
-            </a:r>
-          </a:p>
-        </p:txBody>
-      </p:sp>
-      <p:sp>
-        <p:nvSpPr>
-          <p:cNvPr id="22" name="Rounded Rectangle 21"/>
+              <a:rPr sz="1000" b="0">
+                <a:solidFill>
+                  <a:srgbClr val="222222"/>
+                </a:solidFill>
+                <a:latin typeface="Noto Sans JP"/>
+              </a:rPr>
+              <a:t>窓切り出し・標準化</a:t>
+            </a:r>
+          </a:p>
+        </p:txBody>
+      </p:sp>
+      <p:sp>
+        <p:nvSpPr>
+          <p:cNvPr id="30" name="Rectangle 29"/>
           <p:cNvSpPr/>
           <p:nvPr/>
         </p:nvSpPr>
         <p:spPr>
           <a:xfrm>
-            <a:off x="9576000" y="1152000"/>
-            <a:ext cx="2268000" cy="3600000"/>
-          </a:xfrm>
-          <a:prstGeom prst="roundRect">
+            <a:off x="5760000" y="4320000"/>
+            <a:ext cx="3600000" cy="396000"/>
+          </a:xfrm>
+          <a:prstGeom prst="rect">
             <a:avLst/>
           </a:prstGeom>
           <a:solidFill>
@@ -8976,7 +8139,7 @@
           <a:bodyPr rtlCol="0" anchor="ctr" wrap="square" lIns="54000" rIns="54000"/>
           <a:lstStyle/>
           <a:p>
-            <a:pPr algn="l"/>
+            <a:pPr algn="ctr"/>
             <a:r>
               <a:rPr sz="1000" b="0">
                 <a:solidFill>
@@ -8984,74 +8147,509 @@
                 </a:solidFill>
                 <a:latin typeface="Noto Sans JP"/>
               </a:rPr>
-              <a:t>ディープラーニングモデル</a:t>
-            </a:r>
-          </a:p>
-          <a:p>
-            <a:pPr algn="l"/>
-            <a:r>
-              <a:rPr sz="1000" b="0">
-                <a:solidFill>
-                  <a:srgbClr val="222222"/>
-                </a:solidFill>
-                <a:latin typeface="Noto Sans JP"/>
-              </a:rPr>
-              <a:t>（多層ニューラルネットワーク）</a:t>
-            </a:r>
-          </a:p>
-          <a:p>
-            <a:pPr algn="l"/>
-            <a:r>
-              <a:rPr sz="1000" b="0">
-                <a:solidFill>
-                  <a:srgbClr val="222222"/>
-                </a:solidFill>
-                <a:latin typeface="Noto Sans JP"/>
-              </a:rPr>
-              <a:t/>
-            </a:r>
-          </a:p>
-          <a:p>
-            <a:pPr algn="l"/>
-            <a:r>
-              <a:rPr sz="1000" b="0">
-                <a:solidFill>
-                  <a:srgbClr val="222222"/>
-                </a:solidFill>
-                <a:latin typeface="Noto Sans JP"/>
-              </a:rPr>
-              <a:t>層を重ねて，入力テンソルから特徴表現を段階的に抽出する．</a:t>
-            </a:r>
-          </a:p>
-          <a:p>
-            <a:pPr algn="l"/>
-            <a:r>
-              <a:rPr sz="1000" b="0">
-                <a:solidFill>
-                  <a:srgbClr val="222222"/>
-                </a:solidFill>
-                <a:latin typeface="Noto Sans JP"/>
-              </a:rPr>
-              <a:t/>
-            </a:r>
-          </a:p>
-          <a:p>
-            <a:pPr algn="l"/>
-            <a:r>
-              <a:rPr sz="1000" b="0">
-                <a:solidFill>
-                  <a:srgbClr val="222222"/>
-                </a:solidFill>
-                <a:latin typeface="Noto Sans JP"/>
-              </a:rPr>
-              <a:t>学習：予測と正解の誤差を損失関数で測り，誤差逆伝播で重み（パラメータ）を更新する．</a:t>
-            </a:r>
-          </a:p>
-        </p:txBody>
-      </p:sp>
-      <p:sp>
-        <p:nvSpPr>
-          <p:cNvPr id="23" name="TextBox 22"/>
+              <a:t>(N, 時間ステップ数, 変数数)</a:t>
+            </a:r>
+          </a:p>
+        </p:txBody>
+      </p:sp>
+      <p:sp>
+        <p:nvSpPr>
+          <p:cNvPr id="31" name="Rectangle 30"/>
+          <p:cNvSpPr/>
+          <p:nvPr/>
+        </p:nvSpPr>
+        <p:spPr>
+          <a:xfrm>
+            <a:off x="9576000" y="1152000"/>
+            <a:ext cx="2268000" cy="396000"/>
+          </a:xfrm>
+          <a:prstGeom prst="rect">
+            <a:avLst/>
+          </a:prstGeom>
+          <a:solidFill>
+            <a:srgbClr val="ECEE67"/>
+          </a:solidFill>
+          <a:ln w="15875">
+            <a:solidFill>
+              <a:srgbClr val="888888"/>
+            </a:solidFill>
+          </a:ln>
+          <a:effectLst/>
+        </p:spPr>
+        <p:style>
+          <a:lnRef idx="1">
+            <a:schemeClr val="accent1"/>
+          </a:lnRef>
+          <a:fillRef idx="3">
+            <a:schemeClr val="accent1"/>
+          </a:fillRef>
+          <a:effectRef idx="2">
+            <a:schemeClr val="accent1"/>
+          </a:effectRef>
+          <a:fontRef idx="minor">
+            <a:schemeClr val="lt1"/>
+          </a:fontRef>
+        </p:style>
+        <p:txBody>
+          <a:bodyPr rtlCol="0" anchor="ctr" wrap="square" lIns="54000" rIns="54000"/>
+          <a:lstStyle/>
+          <a:p>
+            <a:pPr algn="ctr"/>
+            <a:r>
+              <a:rPr sz="1200" b="1">
+                <a:solidFill>
+                  <a:srgbClr val="222222"/>
+                </a:solidFill>
+                <a:latin typeface="Noto Sans JP"/>
+              </a:rPr>
+              <a:t>入力データの候補</a:t>
+            </a:r>
+          </a:p>
+        </p:txBody>
+      </p:sp>
+      <p:sp>
+        <p:nvSpPr>
+          <p:cNvPr id="32" name="Rounded Rectangle 31"/>
+          <p:cNvSpPr/>
+          <p:nvPr/>
+        </p:nvSpPr>
+        <p:spPr>
+          <a:xfrm>
+            <a:off x="9684000" y="1602000"/>
+            <a:ext cx="2052000" cy="324000"/>
+          </a:xfrm>
+          <a:prstGeom prst="roundRect">
+            <a:avLst/>
+          </a:prstGeom>
+          <a:solidFill>
+            <a:srgbClr val="E0E0E0"/>
+          </a:solidFill>
+          <a:ln w="15875">
+            <a:solidFill>
+              <a:srgbClr val="888888"/>
+            </a:solidFill>
+          </a:ln>
+          <a:effectLst/>
+        </p:spPr>
+        <p:style>
+          <a:lnRef idx="1">
+            <a:schemeClr val="accent1"/>
+          </a:lnRef>
+          <a:fillRef idx="3">
+            <a:schemeClr val="accent1"/>
+          </a:fillRef>
+          <a:effectRef idx="2">
+            <a:schemeClr val="accent1"/>
+          </a:effectRef>
+          <a:fontRef idx="minor">
+            <a:schemeClr val="lt1"/>
+          </a:fontRef>
+        </p:style>
+        <p:txBody>
+          <a:bodyPr rtlCol="0" anchor="ctr" wrap="square" lIns="54000" rIns="54000"/>
+          <a:lstStyle/>
+          <a:p>
+            <a:pPr algn="ctr"/>
+            <a:r>
+              <a:rPr sz="1100" b="1">
+                <a:solidFill>
+                  <a:srgbClr val="222222"/>
+                </a:solidFill>
+                <a:latin typeface="Noto Sans JP"/>
+              </a:rPr>
+              <a:t>画像</a:t>
+            </a:r>
+          </a:p>
+        </p:txBody>
+      </p:sp>
+      <p:sp>
+        <p:nvSpPr>
+          <p:cNvPr id="33" name="Rounded Rectangle 32"/>
+          <p:cNvSpPr/>
+          <p:nvPr/>
+        </p:nvSpPr>
+        <p:spPr>
+          <a:xfrm>
+            <a:off x="9684000" y="1998000"/>
+            <a:ext cx="2052000" cy="324000"/>
+          </a:xfrm>
+          <a:prstGeom prst="roundRect">
+            <a:avLst/>
+          </a:prstGeom>
+          <a:solidFill>
+            <a:srgbClr val="E0E0E0"/>
+          </a:solidFill>
+          <a:ln w="15875">
+            <a:solidFill>
+              <a:srgbClr val="888888"/>
+            </a:solidFill>
+          </a:ln>
+          <a:effectLst/>
+        </p:spPr>
+        <p:style>
+          <a:lnRef idx="1">
+            <a:schemeClr val="accent1"/>
+          </a:lnRef>
+          <a:fillRef idx="3">
+            <a:schemeClr val="accent1"/>
+          </a:fillRef>
+          <a:effectRef idx="2">
+            <a:schemeClr val="accent1"/>
+          </a:effectRef>
+          <a:fontRef idx="minor">
+            <a:schemeClr val="lt1"/>
+          </a:fontRef>
+        </p:style>
+        <p:txBody>
+          <a:bodyPr rtlCol="0" anchor="ctr" wrap="square" lIns="54000" rIns="54000"/>
+          <a:lstStyle/>
+          <a:p>
+            <a:pPr algn="ctr"/>
+            <a:r>
+              <a:rPr sz="1100" b="1">
+                <a:solidFill>
+                  <a:srgbClr val="222222"/>
+                </a:solidFill>
+                <a:latin typeface="Noto Sans JP"/>
+              </a:rPr>
+              <a:t>時系列</a:t>
+            </a:r>
+          </a:p>
+        </p:txBody>
+      </p:sp>
+      <p:sp>
+        <p:nvSpPr>
+          <p:cNvPr id="34" name="Rounded Rectangle 33"/>
+          <p:cNvSpPr/>
+          <p:nvPr/>
+        </p:nvSpPr>
+        <p:spPr>
+          <a:xfrm>
+            <a:off x="9684000" y="2394000"/>
+            <a:ext cx="2052000" cy="324000"/>
+          </a:xfrm>
+          <a:prstGeom prst="roundRect">
+            <a:avLst/>
+          </a:prstGeom>
+          <a:solidFill>
+            <a:srgbClr val="E0E0E0"/>
+          </a:solidFill>
+          <a:ln w="15875">
+            <a:solidFill>
+              <a:srgbClr val="888888"/>
+            </a:solidFill>
+          </a:ln>
+          <a:effectLst/>
+        </p:spPr>
+        <p:style>
+          <a:lnRef idx="1">
+            <a:schemeClr val="accent1"/>
+          </a:lnRef>
+          <a:fillRef idx="3">
+            <a:schemeClr val="accent1"/>
+          </a:fillRef>
+          <a:effectRef idx="2">
+            <a:schemeClr val="accent1"/>
+          </a:effectRef>
+          <a:fontRef idx="minor">
+            <a:schemeClr val="lt1"/>
+          </a:fontRef>
+        </p:style>
+        <p:txBody>
+          <a:bodyPr rtlCol="0" anchor="ctr" wrap="square" lIns="54000" rIns="54000"/>
+          <a:lstStyle/>
+          <a:p>
+            <a:pPr algn="ctr"/>
+            <a:r>
+              <a:rPr sz="1100" b="1">
+                <a:solidFill>
+                  <a:srgbClr val="222222"/>
+                </a:solidFill>
+                <a:latin typeface="Noto Sans JP"/>
+              </a:rPr>
+              <a:t>テキスト</a:t>
+            </a:r>
+          </a:p>
+        </p:txBody>
+      </p:sp>
+      <p:sp>
+        <p:nvSpPr>
+          <p:cNvPr id="35" name="Rounded Rectangle 34"/>
+          <p:cNvSpPr/>
+          <p:nvPr/>
+        </p:nvSpPr>
+        <p:spPr>
+          <a:xfrm>
+            <a:off x="9684000" y="2790000"/>
+            <a:ext cx="2052000" cy="324000"/>
+          </a:xfrm>
+          <a:prstGeom prst="roundRect">
+            <a:avLst/>
+          </a:prstGeom>
+          <a:solidFill>
+            <a:srgbClr val="E0E0E0"/>
+          </a:solidFill>
+          <a:ln w="15875">
+            <a:solidFill>
+              <a:srgbClr val="888888"/>
+            </a:solidFill>
+          </a:ln>
+          <a:effectLst/>
+        </p:spPr>
+        <p:style>
+          <a:lnRef idx="1">
+            <a:schemeClr val="accent1"/>
+          </a:lnRef>
+          <a:fillRef idx="3">
+            <a:schemeClr val="accent1"/>
+          </a:fillRef>
+          <a:effectRef idx="2">
+            <a:schemeClr val="accent1"/>
+          </a:effectRef>
+          <a:fontRef idx="minor">
+            <a:schemeClr val="lt1"/>
+          </a:fontRef>
+        </p:style>
+        <p:txBody>
+          <a:bodyPr rtlCol="0" anchor="ctr" wrap="square" lIns="54000" rIns="54000"/>
+          <a:lstStyle/>
+          <a:p>
+            <a:pPr algn="ctr"/>
+            <a:r>
+              <a:rPr sz="1100" b="1">
+                <a:solidFill>
+                  <a:srgbClr val="222222"/>
+                </a:solidFill>
+                <a:latin typeface="Noto Sans JP"/>
+              </a:rPr>
+              <a:t>グラフ</a:t>
+            </a:r>
+          </a:p>
+        </p:txBody>
+      </p:sp>
+      <p:sp>
+        <p:nvSpPr>
+          <p:cNvPr id="36" name="Rounded Rectangle 35"/>
+          <p:cNvSpPr/>
+          <p:nvPr/>
+        </p:nvSpPr>
+        <p:spPr>
+          <a:xfrm>
+            <a:off x="9684000" y="3186000"/>
+            <a:ext cx="2052000" cy="324000"/>
+          </a:xfrm>
+          <a:prstGeom prst="roundRect">
+            <a:avLst/>
+          </a:prstGeom>
+          <a:solidFill>
+            <a:srgbClr val="E0E0E0"/>
+          </a:solidFill>
+          <a:ln w="15875">
+            <a:solidFill>
+              <a:srgbClr val="888888"/>
+            </a:solidFill>
+          </a:ln>
+          <a:effectLst/>
+        </p:spPr>
+        <p:style>
+          <a:lnRef idx="1">
+            <a:schemeClr val="accent1"/>
+          </a:lnRef>
+          <a:fillRef idx="3">
+            <a:schemeClr val="accent1"/>
+          </a:fillRef>
+          <a:effectRef idx="2">
+            <a:schemeClr val="accent1"/>
+          </a:effectRef>
+          <a:fontRef idx="minor">
+            <a:schemeClr val="lt1"/>
+          </a:fontRef>
+        </p:style>
+        <p:txBody>
+          <a:bodyPr rtlCol="0" anchor="ctr" wrap="square" lIns="54000" rIns="54000"/>
+          <a:lstStyle/>
+          <a:p>
+            <a:pPr algn="ctr"/>
+            <a:r>
+              <a:rPr sz="1100" b="1">
+                <a:solidFill>
+                  <a:srgbClr val="222222"/>
+                </a:solidFill>
+                <a:latin typeface="Noto Sans JP"/>
+              </a:rPr>
+              <a:t>数値データ（表形式）</a:t>
+            </a:r>
+          </a:p>
+        </p:txBody>
+      </p:sp>
+      <p:sp>
+        <p:nvSpPr>
+          <p:cNvPr id="37" name="Rounded Rectangle 36"/>
+          <p:cNvSpPr/>
+          <p:nvPr/>
+        </p:nvSpPr>
+        <p:spPr>
+          <a:xfrm>
+            <a:off x="9684000" y="3581999"/>
+            <a:ext cx="2052000" cy="324000"/>
+          </a:xfrm>
+          <a:prstGeom prst="roundRect">
+            <a:avLst/>
+          </a:prstGeom>
+          <a:solidFill>
+            <a:srgbClr val="E0E0E0"/>
+          </a:solidFill>
+          <a:ln w="15875">
+            <a:solidFill>
+              <a:srgbClr val="888888"/>
+            </a:solidFill>
+          </a:ln>
+          <a:effectLst/>
+        </p:spPr>
+        <p:style>
+          <a:lnRef idx="1">
+            <a:schemeClr val="accent1"/>
+          </a:lnRef>
+          <a:fillRef idx="3">
+            <a:schemeClr val="accent1"/>
+          </a:fillRef>
+          <a:effectRef idx="2">
+            <a:schemeClr val="accent1"/>
+          </a:effectRef>
+          <a:fontRef idx="minor">
+            <a:schemeClr val="lt1"/>
+          </a:fontRef>
+        </p:style>
+        <p:txBody>
+          <a:bodyPr rtlCol="0" anchor="ctr" wrap="square" lIns="54000" rIns="54000"/>
+          <a:lstStyle/>
+          <a:p>
+            <a:pPr algn="ctr"/>
+            <a:r>
+              <a:rPr sz="1100" b="1">
+                <a:solidFill>
+                  <a:srgbClr val="222222"/>
+                </a:solidFill>
+                <a:latin typeface="Noto Sans JP"/>
+              </a:rPr>
+              <a:t>動画</a:t>
+            </a:r>
+          </a:p>
+        </p:txBody>
+      </p:sp>
+      <p:sp>
+        <p:nvSpPr>
+          <p:cNvPr id="38" name="Rounded Rectangle 37"/>
+          <p:cNvSpPr/>
+          <p:nvPr/>
+        </p:nvSpPr>
+        <p:spPr>
+          <a:xfrm>
+            <a:off x="9684000" y="3978000"/>
+            <a:ext cx="2052000" cy="324000"/>
+          </a:xfrm>
+          <a:prstGeom prst="roundRect">
+            <a:avLst/>
+          </a:prstGeom>
+          <a:solidFill>
+            <a:srgbClr val="E0E0E0"/>
+          </a:solidFill>
+          <a:ln w="15875">
+            <a:solidFill>
+              <a:srgbClr val="888888"/>
+            </a:solidFill>
+          </a:ln>
+          <a:effectLst/>
+        </p:spPr>
+        <p:style>
+          <a:lnRef idx="1">
+            <a:schemeClr val="accent1"/>
+          </a:lnRef>
+          <a:fillRef idx="3">
+            <a:schemeClr val="accent1"/>
+          </a:fillRef>
+          <a:effectRef idx="2">
+            <a:schemeClr val="accent1"/>
+          </a:effectRef>
+          <a:fontRef idx="minor">
+            <a:schemeClr val="lt1"/>
+          </a:fontRef>
+        </p:style>
+        <p:txBody>
+          <a:bodyPr rtlCol="0" anchor="ctr" wrap="square" lIns="54000" rIns="54000"/>
+          <a:lstStyle/>
+          <a:p>
+            <a:pPr algn="ctr"/>
+            <a:r>
+              <a:rPr sz="1100" b="1">
+                <a:solidFill>
+                  <a:srgbClr val="222222"/>
+                </a:solidFill>
+                <a:latin typeface="Noto Sans JP"/>
+              </a:rPr>
+              <a:t>音声</a:t>
+            </a:r>
+          </a:p>
+        </p:txBody>
+      </p:sp>
+      <p:sp>
+        <p:nvSpPr>
+          <p:cNvPr id="39" name="Rounded Rectangle 38"/>
+          <p:cNvSpPr/>
+          <p:nvPr/>
+        </p:nvSpPr>
+        <p:spPr>
+          <a:xfrm>
+            <a:off x="9684000" y="4374000"/>
+            <a:ext cx="2052000" cy="324000"/>
+          </a:xfrm>
+          <a:prstGeom prst="roundRect">
+            <a:avLst/>
+          </a:prstGeom>
+          <a:solidFill>
+            <a:srgbClr val="E0E0E0"/>
+          </a:solidFill>
+          <a:ln w="15875">
+            <a:solidFill>
+              <a:srgbClr val="888888"/>
+            </a:solidFill>
+          </a:ln>
+          <a:effectLst/>
+        </p:spPr>
+        <p:style>
+          <a:lnRef idx="1">
+            <a:schemeClr val="accent1"/>
+          </a:lnRef>
+          <a:fillRef idx="3">
+            <a:schemeClr val="accent1"/>
+          </a:fillRef>
+          <a:effectRef idx="2">
+            <a:schemeClr val="accent1"/>
+          </a:effectRef>
+          <a:fontRef idx="minor">
+            <a:schemeClr val="lt1"/>
+          </a:fontRef>
+        </p:style>
+        <p:txBody>
+          <a:bodyPr rtlCol="0" anchor="ctr" wrap="square" lIns="54000" rIns="54000"/>
+          <a:lstStyle/>
+          <a:p>
+            <a:pPr algn="ctr"/>
+            <a:r>
+              <a:rPr sz="1100" b="1">
+                <a:solidFill>
+                  <a:srgbClr val="222222"/>
+                </a:solidFill>
+                <a:latin typeface="Noto Sans JP"/>
+              </a:rPr>
+              <a:t>3D：点群／メッシュ</a:t>
+            </a:r>
+          </a:p>
+        </p:txBody>
+      </p:sp>
+      <p:sp>
+        <p:nvSpPr>
+          <p:cNvPr id="40" name="TextBox 39"/>
           <p:cNvSpPr txBox="1"/>
           <p:nvPr/>
         </p:nvSpPr>
@@ -9098,7 +8696,7 @@
       </p:sp>
       <p:sp>
         <p:nvSpPr>
-          <p:cNvPr id="24" name="TextBox 23"/>
+          <p:cNvPr id="41" name="TextBox 40"/>
           <p:cNvSpPr txBox="1"/>
           <p:nvPr/>
         </p:nvSpPr>
@@ -9126,7 +8724,7 @@
                 </a:solidFill>
                 <a:latin typeface="Noto Sans JP"/>
               </a:rPr>
-              <a:t>GW2-2　ヒント：PyTorch の画像は (N, C, H, W)．テキストは (N, トークン数) の整数 ID 列を埋め込み層が (N, トークン数, 埋め込み次元) にする</a:t>
+              <a:t>GW2-2　ヒント：前処理の言葉（トークン，フレーム，スペクトログラム，ノード など）が手がかり．今日の FashionMNIST と SST-2 はどの行か．N はバッチサイズ</a:t>
             </a:r>
           </a:p>
         </p:txBody>

--- a/docs/slides/aitd1_week1_groupwork.pptx
+++ b/docs/slides/aitd1_week1_groupwork.pptx
@@ -6539,7 +6539,7 @@
                 </a:solidFill>
                 <a:latin typeface="Noto Sans JP"/>
               </a:rPr>
-              <a:t>　　　(2) データが画像からテキストに変わったとき，差し替えるカードはどれか．</a:t>
+              <a:t>　　　(2) データが FashionMNIST からオリジナル画像に変わったとき，差し替えるカードはどれか．</a:t>
             </a:r>
           </a:p>
         </p:txBody>
@@ -8689,7 +8689,7 @@
                 </a:solidFill>
                 <a:latin typeface="Noto Sans JP"/>
               </a:rPr>
-              <a:t>　　　(2) 画像とテキストで「モデルに入る直前の形状」はどう違うか．それでも同じ学習ループで回るのはなぜか．</a:t>
+              <a:t>　　　(2) FashionMNIST（白黒 28×28）とオリジナル画像（カラー 64×64）で「モデルに入る直前の形状」はどう違うか．</a:t>
             </a:r>
           </a:p>
         </p:txBody>
@@ -8724,7 +8724,7 @@
                 </a:solidFill>
                 <a:latin typeface="Noto Sans JP"/>
               </a:rPr>
-              <a:t>GW2-2　ヒント：前処理の言葉（トークン，フレーム，スペクトログラム，ノード など）が手がかり．今日の FashionMNIST と SST-2 はどの行か．N はバッチサイズ</a:t>
+              <a:t>GW2-2　ヒント：前処理の言葉（トークン，フレーム，スペクトログラム，ノード など）が手がかり．今日の FashionMNIST とオリジナル画像はどの行か．N はバッチサイズ</a:t>
             </a:r>
           </a:p>
         </p:txBody>

--- a/docs/slides/aitd1_week1_groupwork.pptx
+++ b/docs/slides/aitd1_week1_groupwork.pptx
@@ -8,6 +8,11 @@
     <p:sldId id="256" r:id="rId7"/>
     <p:sldId id="257" r:id="rId8"/>
     <p:sldId id="258" r:id="rId9"/>
+    <p:sldId id="259" r:id="rId10"/>
+    <p:sldId id="260" r:id="rId11"/>
+    <p:sldId id="261" r:id="rId12"/>
+    <p:sldId id="262" r:id="rId13"/>
+    <p:sldId id="263" r:id="rId14"/>
   </p:sldIdLst>
   <p:sldSz cx="12192119" cy="6858000" type="screen4x3"/>
   <p:notesSz cx="6858000" cy="9144000"/>
@@ -4960,7 +4965,7 @@
                 </a:solidFill>
                 <a:latin typeface="Noto Sans JP"/>
               </a:rPr>
-              <a:t>GW2-1　プログラミングの流れ ― カードを3つのフェーズに並べる（10分）</a:t>
+              <a:t>GW1-2　データの分割</a:t>
             </a:r>
           </a:p>
         </p:txBody>
@@ -4995,1518 +5000,45 @@
                 </a:solidFill>
                 <a:latin typeface="Noto Sans JP"/>
               </a:rPr>
-              <a:t>下の12枚のカードを，正しい順に上の枠へドラッグする．番号は書いていない．並べたあと，各フェーズの見出しも埋める．</a:t>
-            </a:r>
-          </a:p>
-        </p:txBody>
-      </p:sp>
-      <p:sp>
-        <p:nvSpPr>
-          <p:cNvPr id="4" name="Rectangle 3"/>
-          <p:cNvSpPr/>
-          <p:nvPr/>
-        </p:nvSpPr>
+              <a:t>空欄に「訓練データ」「検証データ」「テストデータ」を入れる．説明文が手がかり．</a:t>
+            </a:r>
+          </a:p>
+        </p:txBody>
+      </p:sp>
+      <p:pic>
+        <p:nvPicPr>
+          <p:cNvPr id="4" name="Picture 3" descr="data_split_blank.png"/>
+          <p:cNvPicPr>
+            <a:picLocks noChangeAspect="1"/>
+          </p:cNvPicPr>
+          <p:nvPr/>
+        </p:nvPicPr>
+        <p:blipFill>
+          <a:blip r:embed="rId2"/>
+          <a:stretch>
+            <a:fillRect/>
+          </a:stretch>
+        </p:blipFill>
         <p:spPr>
           <a:xfrm>
             <a:off x="360000" y="1080000"/>
-            <a:ext cx="3456000" cy="396000"/>
+            <a:ext cx="11448000" cy="4149900"/>
           </a:xfrm>
           <a:prstGeom prst="rect">
             <a:avLst/>
           </a:prstGeom>
-          <a:solidFill>
-            <a:srgbClr val="FFFFFF"/>
-          </a:solidFill>
-          <a:ln w="15875">
-            <a:solidFill>
-              <a:srgbClr val="888888"/>
-            </a:solidFill>
-          </a:ln>
-          <a:effectLst/>
-        </p:spPr>
-        <p:style>
-          <a:lnRef idx="1">
-            <a:schemeClr val="accent1"/>
-          </a:lnRef>
-          <a:fillRef idx="3">
-            <a:schemeClr val="accent1"/>
-          </a:fillRef>
-          <a:effectRef idx="2">
-            <a:schemeClr val="accent1"/>
-          </a:effectRef>
-          <a:fontRef idx="minor">
-            <a:schemeClr val="lt1"/>
-          </a:fontRef>
-        </p:style>
-        <p:txBody>
-          <a:bodyPr rtlCol="0" anchor="ctr" wrap="square" lIns="54000" rIns="54000"/>
-          <a:lstStyle/>
-          <a:p>
-            <a:pPr algn="ctr"/>
-            <a:r>
-              <a:rPr sz="1300" b="1">
-                <a:solidFill>
-                  <a:srgbClr val="222222"/>
-                </a:solidFill>
-                <a:latin typeface="Noto Sans JP"/>
-              </a:rPr>
-              <a:t>データ準備フェーズ</a:t>
-            </a:r>
-          </a:p>
-        </p:txBody>
-      </p:sp>
-      <p:sp>
-        <p:nvSpPr>
-          <p:cNvPr id="5" name="Rounded Rectangle 4"/>
-          <p:cNvSpPr/>
-          <p:nvPr/>
-        </p:nvSpPr>
-        <p:spPr>
-          <a:xfrm>
-            <a:off x="360000" y="1548000"/>
-            <a:ext cx="3456000" cy="468000"/>
-          </a:xfrm>
-          <a:prstGeom prst="roundRect">
-            <a:avLst/>
-          </a:prstGeom>
-          <a:solidFill>
-            <a:srgbClr val="FFF9C4"/>
-          </a:solidFill>
-          <a:ln w="15875">
-            <a:solidFill>
-              <a:srgbClr val="F9A825"/>
-            </a:solidFill>
-            <a:prstDash val="dash"/>
-          </a:ln>
-          <a:effectLst/>
-        </p:spPr>
-        <p:style>
-          <a:lnRef idx="1">
-            <a:schemeClr val="accent1"/>
-          </a:lnRef>
-          <a:fillRef idx="3">
-            <a:schemeClr val="accent1"/>
-          </a:fillRef>
-          <a:effectRef idx="2">
-            <a:schemeClr val="accent1"/>
-          </a:effectRef>
-          <a:fontRef idx="minor">
-            <a:schemeClr val="lt1"/>
-          </a:fontRef>
-        </p:style>
-        <p:txBody>
-          <a:bodyPr rtlCol="0" anchor="ctr" wrap="square" lIns="54000" rIns="54000"/>
-          <a:lstStyle/>
-          <a:p>
-            <a:pPr algn="ctr"/>
-            <a:r>
-              <a:rPr sz="1200" b="0">
-                <a:solidFill>
-                  <a:srgbClr val="222222"/>
-                </a:solidFill>
-                <a:latin typeface="Noto Sans JP"/>
-              </a:rPr>
-              <a:t/>
-            </a:r>
-          </a:p>
-        </p:txBody>
-      </p:sp>
-      <p:sp>
-        <p:nvSpPr>
-          <p:cNvPr id="6" name="Rounded Rectangle 5"/>
-          <p:cNvSpPr/>
-          <p:nvPr/>
-        </p:nvSpPr>
-        <p:spPr>
-          <a:xfrm>
-            <a:off x="360000" y="2106000"/>
-            <a:ext cx="3456000" cy="468000"/>
-          </a:xfrm>
-          <a:prstGeom prst="roundRect">
-            <a:avLst/>
-          </a:prstGeom>
-          <a:solidFill>
-            <a:srgbClr val="FFF9C4"/>
-          </a:solidFill>
-          <a:ln w="15875">
-            <a:solidFill>
-              <a:srgbClr val="F9A825"/>
-            </a:solidFill>
-            <a:prstDash val="dash"/>
-          </a:ln>
-          <a:effectLst/>
-        </p:spPr>
-        <p:style>
-          <a:lnRef idx="1">
-            <a:schemeClr val="accent1"/>
-          </a:lnRef>
-          <a:fillRef idx="3">
-            <a:schemeClr val="accent1"/>
-          </a:fillRef>
-          <a:effectRef idx="2">
-            <a:schemeClr val="accent1"/>
-          </a:effectRef>
-          <a:fontRef idx="minor">
-            <a:schemeClr val="lt1"/>
-          </a:fontRef>
-        </p:style>
-        <p:txBody>
-          <a:bodyPr rtlCol="0" anchor="ctr" wrap="square" lIns="54000" rIns="54000"/>
-          <a:lstStyle/>
-          <a:p>
-            <a:pPr algn="ctr"/>
-            <a:r>
-              <a:rPr sz="1200" b="0">
-                <a:solidFill>
-                  <a:srgbClr val="222222"/>
-                </a:solidFill>
-                <a:latin typeface="Noto Sans JP"/>
-              </a:rPr>
-              <a:t/>
-            </a:r>
-          </a:p>
-        </p:txBody>
-      </p:sp>
-      <p:sp>
-        <p:nvSpPr>
-          <p:cNvPr id="7" name="Rounded Rectangle 6"/>
-          <p:cNvSpPr/>
-          <p:nvPr/>
-        </p:nvSpPr>
-        <p:spPr>
-          <a:xfrm>
-            <a:off x="360000" y="2664000"/>
-            <a:ext cx="3456000" cy="468000"/>
-          </a:xfrm>
-          <a:prstGeom prst="roundRect">
-            <a:avLst/>
-          </a:prstGeom>
-          <a:solidFill>
-            <a:srgbClr val="FFF9C4"/>
-          </a:solidFill>
-          <a:ln w="15875">
-            <a:solidFill>
-              <a:srgbClr val="F9A825"/>
-            </a:solidFill>
-            <a:prstDash val="dash"/>
-          </a:ln>
-          <a:effectLst/>
-        </p:spPr>
-        <p:style>
-          <a:lnRef idx="1">
-            <a:schemeClr val="accent1"/>
-          </a:lnRef>
-          <a:fillRef idx="3">
-            <a:schemeClr val="accent1"/>
-          </a:fillRef>
-          <a:effectRef idx="2">
-            <a:schemeClr val="accent1"/>
-          </a:effectRef>
-          <a:fontRef idx="minor">
-            <a:schemeClr val="lt1"/>
-          </a:fontRef>
-        </p:style>
-        <p:txBody>
-          <a:bodyPr rtlCol="0" anchor="ctr" wrap="square" lIns="54000" rIns="54000"/>
-          <a:lstStyle/>
-          <a:p>
-            <a:pPr algn="ctr"/>
-            <a:r>
-              <a:rPr sz="1200" b="0">
-                <a:solidFill>
-                  <a:srgbClr val="222222"/>
-                </a:solidFill>
-                <a:latin typeface="Noto Sans JP"/>
-              </a:rPr>
-              <a:t/>
-            </a:r>
-          </a:p>
-        </p:txBody>
-      </p:sp>
-      <p:sp>
-        <p:nvSpPr>
-          <p:cNvPr id="8" name="Rounded Rectangle 7"/>
-          <p:cNvSpPr/>
-          <p:nvPr/>
-        </p:nvSpPr>
-        <p:spPr>
-          <a:xfrm>
-            <a:off x="360000" y="3221999"/>
-            <a:ext cx="3456000" cy="468000"/>
-          </a:xfrm>
-          <a:prstGeom prst="roundRect">
-            <a:avLst/>
-          </a:prstGeom>
-          <a:solidFill>
-            <a:srgbClr val="FFF9C4"/>
-          </a:solidFill>
-          <a:ln w="15875">
-            <a:solidFill>
-              <a:srgbClr val="F9A825"/>
-            </a:solidFill>
-            <a:prstDash val="dash"/>
-          </a:ln>
-          <a:effectLst/>
-        </p:spPr>
-        <p:style>
-          <a:lnRef idx="1">
-            <a:schemeClr val="accent1"/>
-          </a:lnRef>
-          <a:fillRef idx="3">
-            <a:schemeClr val="accent1"/>
-          </a:fillRef>
-          <a:effectRef idx="2">
-            <a:schemeClr val="accent1"/>
-          </a:effectRef>
-          <a:fontRef idx="minor">
-            <a:schemeClr val="lt1"/>
-          </a:fontRef>
-        </p:style>
-        <p:txBody>
-          <a:bodyPr rtlCol="0" anchor="ctr" wrap="square" lIns="54000" rIns="54000"/>
-          <a:lstStyle/>
-          <a:p>
-            <a:pPr algn="ctr"/>
-            <a:r>
-              <a:rPr sz="1200" b="0">
-                <a:solidFill>
-                  <a:srgbClr val="222222"/>
-                </a:solidFill>
-                <a:latin typeface="Noto Sans JP"/>
-              </a:rPr>
-              <a:t/>
-            </a:r>
-          </a:p>
-        </p:txBody>
-      </p:sp>
-      <p:sp>
-        <p:nvSpPr>
-          <p:cNvPr id="9" name="Rectangle 8"/>
-          <p:cNvSpPr/>
-          <p:nvPr/>
-        </p:nvSpPr>
-        <p:spPr>
-          <a:xfrm>
-            <a:off x="4356000" y="1080000"/>
-            <a:ext cx="3456000" cy="396000"/>
-          </a:xfrm>
-          <a:prstGeom prst="rect">
-            <a:avLst/>
-          </a:prstGeom>
-          <a:solidFill>
-            <a:srgbClr val="FFFFFF"/>
-          </a:solidFill>
-          <a:ln w="15875">
-            <a:solidFill>
-              <a:srgbClr val="888888"/>
-            </a:solidFill>
-          </a:ln>
-          <a:effectLst/>
-        </p:spPr>
-        <p:style>
-          <a:lnRef idx="1">
-            <a:schemeClr val="accent1"/>
-          </a:lnRef>
-          <a:fillRef idx="3">
-            <a:schemeClr val="accent1"/>
-          </a:fillRef>
-          <a:effectRef idx="2">
-            <a:schemeClr val="accent1"/>
-          </a:effectRef>
-          <a:fontRef idx="minor">
-            <a:schemeClr val="lt1"/>
-          </a:fontRef>
-        </p:style>
-        <p:txBody>
-          <a:bodyPr rtlCol="0" anchor="ctr" wrap="square" lIns="54000" rIns="54000"/>
-          <a:lstStyle/>
-          <a:p>
-            <a:pPr algn="ctr"/>
-            <a:r>
-              <a:rPr sz="1300" b="1">
-                <a:solidFill>
-                  <a:srgbClr val="222222"/>
-                </a:solidFill>
-                <a:latin typeface="Noto Sans JP"/>
-              </a:rPr>
-              <a:t>学習設定フェーズ</a:t>
-            </a:r>
-          </a:p>
-        </p:txBody>
-      </p:sp>
-      <p:sp>
-        <p:nvSpPr>
-          <p:cNvPr id="10" name="Rounded Rectangle 9"/>
-          <p:cNvSpPr/>
-          <p:nvPr/>
-        </p:nvSpPr>
-        <p:spPr>
-          <a:xfrm>
-            <a:off x="4356000" y="1548000"/>
-            <a:ext cx="3456000" cy="468000"/>
-          </a:xfrm>
-          <a:prstGeom prst="roundRect">
-            <a:avLst/>
-          </a:prstGeom>
-          <a:solidFill>
-            <a:srgbClr val="FFF9C4"/>
-          </a:solidFill>
-          <a:ln w="15875">
-            <a:solidFill>
-              <a:srgbClr val="F9A825"/>
-            </a:solidFill>
-            <a:prstDash val="dash"/>
-          </a:ln>
-          <a:effectLst/>
-        </p:spPr>
-        <p:style>
-          <a:lnRef idx="1">
-            <a:schemeClr val="accent1"/>
-          </a:lnRef>
-          <a:fillRef idx="3">
-            <a:schemeClr val="accent1"/>
-          </a:fillRef>
-          <a:effectRef idx="2">
-            <a:schemeClr val="accent1"/>
-          </a:effectRef>
-          <a:fontRef idx="minor">
-            <a:schemeClr val="lt1"/>
-          </a:fontRef>
-        </p:style>
-        <p:txBody>
-          <a:bodyPr rtlCol="0" anchor="ctr" wrap="square" lIns="54000" rIns="54000"/>
-          <a:lstStyle/>
-          <a:p>
-            <a:pPr algn="ctr"/>
-            <a:r>
-              <a:rPr sz="1200" b="0">
-                <a:solidFill>
-                  <a:srgbClr val="222222"/>
-                </a:solidFill>
-                <a:latin typeface="Noto Sans JP"/>
-              </a:rPr>
-              <a:t/>
-            </a:r>
-          </a:p>
-        </p:txBody>
-      </p:sp>
-      <p:sp>
-        <p:nvSpPr>
-          <p:cNvPr id="11" name="Rounded Rectangle 10"/>
-          <p:cNvSpPr/>
-          <p:nvPr/>
-        </p:nvSpPr>
-        <p:spPr>
-          <a:xfrm>
-            <a:off x="4356000" y="2106000"/>
-            <a:ext cx="3456000" cy="468000"/>
-          </a:xfrm>
-          <a:prstGeom prst="roundRect">
-            <a:avLst/>
-          </a:prstGeom>
-          <a:solidFill>
-            <a:srgbClr val="FFF9C4"/>
-          </a:solidFill>
-          <a:ln w="15875">
-            <a:solidFill>
-              <a:srgbClr val="F9A825"/>
-            </a:solidFill>
-            <a:prstDash val="dash"/>
-          </a:ln>
-          <a:effectLst/>
-        </p:spPr>
-        <p:style>
-          <a:lnRef idx="1">
-            <a:schemeClr val="accent1"/>
-          </a:lnRef>
-          <a:fillRef idx="3">
-            <a:schemeClr val="accent1"/>
-          </a:fillRef>
-          <a:effectRef idx="2">
-            <a:schemeClr val="accent1"/>
-          </a:effectRef>
-          <a:fontRef idx="minor">
-            <a:schemeClr val="lt1"/>
-          </a:fontRef>
-        </p:style>
-        <p:txBody>
-          <a:bodyPr rtlCol="0" anchor="ctr" wrap="square" lIns="54000" rIns="54000"/>
-          <a:lstStyle/>
-          <a:p>
-            <a:pPr algn="ctr"/>
-            <a:r>
-              <a:rPr sz="1200" b="0">
-                <a:solidFill>
-                  <a:srgbClr val="222222"/>
-                </a:solidFill>
-                <a:latin typeface="Noto Sans JP"/>
-              </a:rPr>
-              <a:t/>
-            </a:r>
-          </a:p>
-        </p:txBody>
-      </p:sp>
-      <p:sp>
-        <p:nvSpPr>
-          <p:cNvPr id="12" name="Rounded Rectangle 11"/>
-          <p:cNvSpPr/>
-          <p:nvPr/>
-        </p:nvSpPr>
-        <p:spPr>
-          <a:xfrm>
-            <a:off x="4356000" y="2664000"/>
-            <a:ext cx="3456000" cy="468000"/>
-          </a:xfrm>
-          <a:prstGeom prst="roundRect">
-            <a:avLst/>
-          </a:prstGeom>
-          <a:solidFill>
-            <a:srgbClr val="FFF9C4"/>
-          </a:solidFill>
-          <a:ln w="15875">
-            <a:solidFill>
-              <a:srgbClr val="F9A825"/>
-            </a:solidFill>
-            <a:prstDash val="dash"/>
-          </a:ln>
-          <a:effectLst/>
-        </p:spPr>
-        <p:style>
-          <a:lnRef idx="1">
-            <a:schemeClr val="accent1"/>
-          </a:lnRef>
-          <a:fillRef idx="3">
-            <a:schemeClr val="accent1"/>
-          </a:fillRef>
-          <a:effectRef idx="2">
-            <a:schemeClr val="accent1"/>
-          </a:effectRef>
-          <a:fontRef idx="minor">
-            <a:schemeClr val="lt1"/>
-          </a:fontRef>
-        </p:style>
-        <p:txBody>
-          <a:bodyPr rtlCol="0" anchor="ctr" wrap="square" lIns="54000" rIns="54000"/>
-          <a:lstStyle/>
-          <a:p>
-            <a:pPr algn="ctr"/>
-            <a:r>
-              <a:rPr sz="1200" b="0">
-                <a:solidFill>
-                  <a:srgbClr val="222222"/>
-                </a:solidFill>
-                <a:latin typeface="Noto Sans JP"/>
-              </a:rPr>
-              <a:t/>
-            </a:r>
-          </a:p>
-        </p:txBody>
-      </p:sp>
-      <p:sp>
-        <p:nvSpPr>
-          <p:cNvPr id="13" name="Rounded Rectangle 12"/>
-          <p:cNvSpPr/>
-          <p:nvPr/>
-        </p:nvSpPr>
-        <p:spPr>
-          <a:xfrm>
-            <a:off x="4356000" y="3221999"/>
-            <a:ext cx="3456000" cy="468000"/>
-          </a:xfrm>
-          <a:prstGeom prst="roundRect">
-            <a:avLst/>
-          </a:prstGeom>
-          <a:solidFill>
-            <a:srgbClr val="FFF9C4"/>
-          </a:solidFill>
-          <a:ln w="15875">
-            <a:solidFill>
-              <a:srgbClr val="F9A825"/>
-            </a:solidFill>
-            <a:prstDash val="dash"/>
-          </a:ln>
-          <a:effectLst/>
-        </p:spPr>
-        <p:style>
-          <a:lnRef idx="1">
-            <a:schemeClr val="accent1"/>
-          </a:lnRef>
-          <a:fillRef idx="3">
-            <a:schemeClr val="accent1"/>
-          </a:fillRef>
-          <a:effectRef idx="2">
-            <a:schemeClr val="accent1"/>
-          </a:effectRef>
-          <a:fontRef idx="minor">
-            <a:schemeClr val="lt1"/>
-          </a:fontRef>
-        </p:style>
-        <p:txBody>
-          <a:bodyPr rtlCol="0" anchor="ctr" wrap="square" lIns="54000" rIns="54000"/>
-          <a:lstStyle/>
-          <a:p>
-            <a:pPr algn="ctr"/>
-            <a:r>
-              <a:rPr sz="1200" b="0">
-                <a:solidFill>
-                  <a:srgbClr val="222222"/>
-                </a:solidFill>
-                <a:latin typeface="Noto Sans JP"/>
-              </a:rPr>
-              <a:t/>
-            </a:r>
-          </a:p>
-        </p:txBody>
-      </p:sp>
-      <p:sp>
-        <p:nvSpPr>
-          <p:cNvPr id="14" name="Rounded Rectangle 13"/>
-          <p:cNvSpPr/>
-          <p:nvPr/>
-        </p:nvSpPr>
-        <p:spPr>
-          <a:xfrm>
-            <a:off x="4356000" y="3780000"/>
-            <a:ext cx="3456000" cy="468000"/>
-          </a:xfrm>
-          <a:prstGeom prst="roundRect">
-            <a:avLst/>
-          </a:prstGeom>
-          <a:solidFill>
-            <a:srgbClr val="FFF9C4"/>
-          </a:solidFill>
-          <a:ln w="15875">
-            <a:solidFill>
-              <a:srgbClr val="F9A825"/>
-            </a:solidFill>
-            <a:prstDash val="dash"/>
-          </a:ln>
-          <a:effectLst/>
-        </p:spPr>
-        <p:style>
-          <a:lnRef idx="1">
-            <a:schemeClr val="accent1"/>
-          </a:lnRef>
-          <a:fillRef idx="3">
-            <a:schemeClr val="accent1"/>
-          </a:fillRef>
-          <a:effectRef idx="2">
-            <a:schemeClr val="accent1"/>
-          </a:effectRef>
-          <a:fontRef idx="minor">
-            <a:schemeClr val="lt1"/>
-          </a:fontRef>
-        </p:style>
-        <p:txBody>
-          <a:bodyPr rtlCol="0" anchor="ctr" wrap="square" lIns="54000" rIns="54000"/>
-          <a:lstStyle/>
-          <a:p>
-            <a:pPr algn="ctr"/>
-            <a:r>
-              <a:rPr sz="1200" b="0">
-                <a:solidFill>
-                  <a:srgbClr val="222222"/>
-                </a:solidFill>
-                <a:latin typeface="Noto Sans JP"/>
-              </a:rPr>
-              <a:t/>
-            </a:r>
-          </a:p>
-        </p:txBody>
-      </p:sp>
-      <p:sp>
-        <p:nvSpPr>
-          <p:cNvPr id="15" name="Rectangle 14"/>
-          <p:cNvSpPr/>
-          <p:nvPr/>
-        </p:nvSpPr>
-        <p:spPr>
-          <a:xfrm>
-            <a:off x="8352000" y="1080000"/>
-            <a:ext cx="3456000" cy="396000"/>
-          </a:xfrm>
-          <a:prstGeom prst="rect">
-            <a:avLst/>
-          </a:prstGeom>
-          <a:solidFill>
-            <a:srgbClr val="FFFFFF"/>
-          </a:solidFill>
-          <a:ln w="15875">
-            <a:solidFill>
-              <a:srgbClr val="888888"/>
-            </a:solidFill>
-          </a:ln>
-          <a:effectLst/>
-        </p:spPr>
-        <p:style>
-          <a:lnRef idx="1">
-            <a:schemeClr val="accent1"/>
-          </a:lnRef>
-          <a:fillRef idx="3">
-            <a:schemeClr val="accent1"/>
-          </a:fillRef>
-          <a:effectRef idx="2">
-            <a:schemeClr val="accent1"/>
-          </a:effectRef>
-          <a:fontRef idx="minor">
-            <a:schemeClr val="lt1"/>
-          </a:fontRef>
-        </p:style>
-        <p:txBody>
-          <a:bodyPr rtlCol="0" anchor="ctr" wrap="square" lIns="54000" rIns="54000"/>
-          <a:lstStyle/>
-          <a:p>
-            <a:pPr algn="ctr"/>
-            <a:r>
-              <a:rPr sz="1300" b="1">
-                <a:solidFill>
-                  <a:srgbClr val="222222"/>
-                </a:solidFill>
-                <a:latin typeface="Noto Sans JP"/>
-              </a:rPr>
-              <a:t>学習，評価フェーズ</a:t>
-            </a:r>
-          </a:p>
-        </p:txBody>
-      </p:sp>
-      <p:sp>
-        <p:nvSpPr>
-          <p:cNvPr id="16" name="Rounded Rectangle 15"/>
-          <p:cNvSpPr/>
-          <p:nvPr/>
-        </p:nvSpPr>
-        <p:spPr>
-          <a:xfrm>
-            <a:off x="8352000" y="1548000"/>
-            <a:ext cx="3456000" cy="468000"/>
-          </a:xfrm>
-          <a:prstGeom prst="roundRect">
-            <a:avLst/>
-          </a:prstGeom>
-          <a:solidFill>
-            <a:srgbClr val="FFF9C4"/>
-          </a:solidFill>
-          <a:ln w="15875">
-            <a:solidFill>
-              <a:srgbClr val="F9A825"/>
-            </a:solidFill>
-            <a:prstDash val="dash"/>
-          </a:ln>
-          <a:effectLst/>
-        </p:spPr>
-        <p:style>
-          <a:lnRef idx="1">
-            <a:schemeClr val="accent1"/>
-          </a:lnRef>
-          <a:fillRef idx="3">
-            <a:schemeClr val="accent1"/>
-          </a:fillRef>
-          <a:effectRef idx="2">
-            <a:schemeClr val="accent1"/>
-          </a:effectRef>
-          <a:fontRef idx="minor">
-            <a:schemeClr val="lt1"/>
-          </a:fontRef>
-        </p:style>
-        <p:txBody>
-          <a:bodyPr rtlCol="0" anchor="ctr" wrap="square" lIns="54000" rIns="54000"/>
-          <a:lstStyle/>
-          <a:p>
-            <a:pPr algn="ctr"/>
-            <a:r>
-              <a:rPr sz="1200" b="0">
-                <a:solidFill>
-                  <a:srgbClr val="222222"/>
-                </a:solidFill>
-                <a:latin typeface="Noto Sans JP"/>
-              </a:rPr>
-              <a:t/>
-            </a:r>
-          </a:p>
-        </p:txBody>
-      </p:sp>
-      <p:sp>
-        <p:nvSpPr>
-          <p:cNvPr id="17" name="Rounded Rectangle 16"/>
-          <p:cNvSpPr/>
-          <p:nvPr/>
-        </p:nvSpPr>
-        <p:spPr>
-          <a:xfrm>
-            <a:off x="8352000" y="2106000"/>
-            <a:ext cx="3456000" cy="468000"/>
-          </a:xfrm>
-          <a:prstGeom prst="roundRect">
-            <a:avLst/>
-          </a:prstGeom>
-          <a:solidFill>
-            <a:srgbClr val="FFF9C4"/>
-          </a:solidFill>
-          <a:ln w="15875">
-            <a:solidFill>
-              <a:srgbClr val="F9A825"/>
-            </a:solidFill>
-            <a:prstDash val="dash"/>
-          </a:ln>
-          <a:effectLst/>
-        </p:spPr>
-        <p:style>
-          <a:lnRef idx="1">
-            <a:schemeClr val="accent1"/>
-          </a:lnRef>
-          <a:fillRef idx="3">
-            <a:schemeClr val="accent1"/>
-          </a:fillRef>
-          <a:effectRef idx="2">
-            <a:schemeClr val="accent1"/>
-          </a:effectRef>
-          <a:fontRef idx="minor">
-            <a:schemeClr val="lt1"/>
-          </a:fontRef>
-        </p:style>
-        <p:txBody>
-          <a:bodyPr rtlCol="0" anchor="ctr" wrap="square" lIns="54000" rIns="54000"/>
-          <a:lstStyle/>
-          <a:p>
-            <a:pPr algn="ctr"/>
-            <a:r>
-              <a:rPr sz="1200" b="0">
-                <a:solidFill>
-                  <a:srgbClr val="222222"/>
-                </a:solidFill>
-                <a:latin typeface="Noto Sans JP"/>
-              </a:rPr>
-              <a:t/>
-            </a:r>
-          </a:p>
-        </p:txBody>
-      </p:sp>
-      <p:sp>
-        <p:nvSpPr>
-          <p:cNvPr id="18" name="Rounded Rectangle 17"/>
-          <p:cNvSpPr/>
-          <p:nvPr/>
-        </p:nvSpPr>
-        <p:spPr>
-          <a:xfrm>
-            <a:off x="8352000" y="2664000"/>
-            <a:ext cx="3456000" cy="468000"/>
-          </a:xfrm>
-          <a:prstGeom prst="roundRect">
-            <a:avLst/>
-          </a:prstGeom>
-          <a:solidFill>
-            <a:srgbClr val="FFF9C4"/>
-          </a:solidFill>
-          <a:ln w="15875">
-            <a:solidFill>
-              <a:srgbClr val="F9A825"/>
-            </a:solidFill>
-            <a:prstDash val="dash"/>
-          </a:ln>
-          <a:effectLst/>
-        </p:spPr>
-        <p:style>
-          <a:lnRef idx="1">
-            <a:schemeClr val="accent1"/>
-          </a:lnRef>
-          <a:fillRef idx="3">
-            <a:schemeClr val="accent1"/>
-          </a:fillRef>
-          <a:effectRef idx="2">
-            <a:schemeClr val="accent1"/>
-          </a:effectRef>
-          <a:fontRef idx="minor">
-            <a:schemeClr val="lt1"/>
-          </a:fontRef>
-        </p:style>
-        <p:txBody>
-          <a:bodyPr rtlCol="0" anchor="ctr" wrap="square" lIns="54000" rIns="54000"/>
-          <a:lstStyle/>
-          <a:p>
-            <a:pPr algn="ctr"/>
-            <a:r>
-              <a:rPr sz="1200" b="0">
-                <a:solidFill>
-                  <a:srgbClr val="222222"/>
-                </a:solidFill>
-                <a:latin typeface="Noto Sans JP"/>
-              </a:rPr>
-              <a:t/>
-            </a:r>
-          </a:p>
-        </p:txBody>
-      </p:sp>
-      <p:sp>
-        <p:nvSpPr>
-          <p:cNvPr id="19" name="Rounded Rectangle 18"/>
-          <p:cNvSpPr/>
-          <p:nvPr/>
-        </p:nvSpPr>
-        <p:spPr>
-          <a:xfrm>
-            <a:off x="360000" y="4536000"/>
-            <a:ext cx="1835999" cy="468000"/>
-          </a:xfrm>
-          <a:prstGeom prst="roundRect">
-            <a:avLst/>
-          </a:prstGeom>
-          <a:solidFill>
-            <a:srgbClr val="FFFFFF"/>
-          </a:solidFill>
-          <a:ln w="15875">
-            <a:solidFill>
-              <a:srgbClr val="222222"/>
-            </a:solidFill>
-          </a:ln>
-          <a:effectLst/>
-        </p:spPr>
-        <p:style>
-          <a:lnRef idx="1">
-            <a:schemeClr val="accent1"/>
-          </a:lnRef>
-          <a:fillRef idx="3">
-            <a:schemeClr val="accent1"/>
-          </a:fillRef>
-          <a:effectRef idx="2">
-            <a:schemeClr val="accent1"/>
-          </a:effectRef>
-          <a:fontRef idx="minor">
-            <a:schemeClr val="lt1"/>
-          </a:fontRef>
-        </p:style>
-        <p:txBody>
-          <a:bodyPr rtlCol="0" anchor="ctr" wrap="square" lIns="54000" rIns="54000"/>
-          <a:lstStyle/>
-          <a:p>
-            <a:pPr algn="ctr"/>
-            <a:r>
-              <a:rPr sz="1100" b="1">
-                <a:solidFill>
-                  <a:srgbClr val="222222"/>
-                </a:solidFill>
-                <a:latin typeface="Noto Sans JP"/>
-              </a:rPr>
-              <a:t>損失関数の定義</a:t>
-            </a:r>
-          </a:p>
-        </p:txBody>
-      </p:sp>
-      <p:sp>
-        <p:nvSpPr>
-          <p:cNvPr id="20" name="Rounded Rectangle 19"/>
-          <p:cNvSpPr/>
-          <p:nvPr/>
-        </p:nvSpPr>
-        <p:spPr>
-          <a:xfrm>
-            <a:off x="2304000" y="4536000"/>
-            <a:ext cx="1835999" cy="468000"/>
-          </a:xfrm>
-          <a:prstGeom prst="roundRect">
-            <a:avLst/>
-          </a:prstGeom>
-          <a:solidFill>
-            <a:srgbClr val="FFFFFF"/>
-          </a:solidFill>
-          <a:ln w="15875">
-            <a:solidFill>
-              <a:srgbClr val="222222"/>
-            </a:solidFill>
-          </a:ln>
-          <a:effectLst/>
-        </p:spPr>
-        <p:style>
-          <a:lnRef idx="1">
-            <a:schemeClr val="accent1"/>
-          </a:lnRef>
-          <a:fillRef idx="3">
-            <a:schemeClr val="accent1"/>
-          </a:fillRef>
-          <a:effectRef idx="2">
-            <a:schemeClr val="accent1"/>
-          </a:effectRef>
-          <a:fontRef idx="minor">
-            <a:schemeClr val="lt1"/>
-          </a:fontRef>
-        </p:style>
-        <p:txBody>
-          <a:bodyPr rtlCol="0" anchor="ctr" wrap="square" lIns="54000" rIns="54000"/>
-          <a:lstStyle/>
-          <a:p>
-            <a:pPr algn="ctr"/>
-            <a:r>
-              <a:rPr sz="1100" b="1">
-                <a:solidFill>
-                  <a:srgbClr val="222222"/>
-                </a:solidFill>
-                <a:latin typeface="Noto Sans JP"/>
-              </a:rPr>
-              <a:t>ライブラリのインポート</a:t>
-            </a:r>
-          </a:p>
-        </p:txBody>
-      </p:sp>
-      <p:sp>
-        <p:nvSpPr>
-          <p:cNvPr id="21" name="Rounded Rectangle 20"/>
-          <p:cNvSpPr/>
-          <p:nvPr/>
-        </p:nvSpPr>
-        <p:spPr>
-          <a:xfrm>
-            <a:off x="4248000" y="4536000"/>
-            <a:ext cx="1835999" cy="468000"/>
-          </a:xfrm>
-          <a:prstGeom prst="roundRect">
-            <a:avLst/>
-          </a:prstGeom>
-          <a:solidFill>
-            <a:srgbClr val="FFFFFF"/>
-          </a:solidFill>
-          <a:ln w="15875">
-            <a:solidFill>
-              <a:srgbClr val="222222"/>
-            </a:solidFill>
-          </a:ln>
-          <a:effectLst/>
-        </p:spPr>
-        <p:style>
-          <a:lnRef idx="1">
-            <a:schemeClr val="accent1"/>
-          </a:lnRef>
-          <a:fillRef idx="3">
-            <a:schemeClr val="accent1"/>
-          </a:fillRef>
-          <a:effectRef idx="2">
-            <a:schemeClr val="accent1"/>
-          </a:effectRef>
-          <a:fontRef idx="minor">
-            <a:schemeClr val="lt1"/>
-          </a:fontRef>
-        </p:style>
-        <p:txBody>
-          <a:bodyPr rtlCol="0" anchor="ctr" wrap="square" lIns="54000" rIns="54000"/>
-          <a:lstStyle/>
-          <a:p>
-            <a:pPr algn="ctr"/>
-            <a:r>
-              <a:rPr sz="1100" b="1">
-                <a:solidFill>
-                  <a:srgbClr val="222222"/>
-                </a:solidFill>
-                <a:latin typeface="Noto Sans JP"/>
-              </a:rPr>
-              <a:t>モデル学習＆検証</a:t>
-            </a:r>
-          </a:p>
-        </p:txBody>
-      </p:sp>
-      <p:sp>
-        <p:nvSpPr>
-          <p:cNvPr id="22" name="Rounded Rectangle 21"/>
-          <p:cNvSpPr/>
-          <p:nvPr/>
-        </p:nvSpPr>
-        <p:spPr>
-          <a:xfrm>
-            <a:off x="6192000" y="4536000"/>
-            <a:ext cx="1835999" cy="468000"/>
-          </a:xfrm>
-          <a:prstGeom prst="roundRect">
-            <a:avLst/>
-          </a:prstGeom>
-          <a:solidFill>
-            <a:srgbClr val="FFFFFF"/>
-          </a:solidFill>
-          <a:ln w="15875">
-            <a:solidFill>
-              <a:srgbClr val="222222"/>
-            </a:solidFill>
-          </a:ln>
-          <a:effectLst/>
-        </p:spPr>
-        <p:style>
-          <a:lnRef idx="1">
-            <a:schemeClr val="accent1"/>
-          </a:lnRef>
-          <a:fillRef idx="3">
-            <a:schemeClr val="accent1"/>
-          </a:fillRef>
-          <a:effectRef idx="2">
-            <a:schemeClr val="accent1"/>
-          </a:effectRef>
-          <a:fontRef idx="minor">
-            <a:schemeClr val="lt1"/>
-          </a:fontRef>
-        </p:style>
-        <p:txBody>
-          <a:bodyPr rtlCol="0" anchor="ctr" wrap="square" lIns="54000" rIns="54000"/>
-          <a:lstStyle/>
-          <a:p>
-            <a:pPr algn="ctr"/>
-            <a:r>
-              <a:rPr sz="1100" b="1">
-                <a:solidFill>
-                  <a:srgbClr val="222222"/>
-                </a:solidFill>
-                <a:latin typeface="Noto Sans JP"/>
-              </a:rPr>
-              <a:t>デバイスの設定</a:t>
-            </a:r>
-          </a:p>
-        </p:txBody>
-      </p:sp>
-      <p:sp>
-        <p:nvSpPr>
-          <p:cNvPr id="23" name="Rounded Rectangle 22"/>
-          <p:cNvSpPr/>
-          <p:nvPr/>
-        </p:nvSpPr>
-        <p:spPr>
-          <a:xfrm>
-            <a:off x="8136000" y="4536000"/>
-            <a:ext cx="1835999" cy="468000"/>
-          </a:xfrm>
-          <a:prstGeom prst="roundRect">
-            <a:avLst/>
-          </a:prstGeom>
-          <a:solidFill>
-            <a:srgbClr val="FFFFFF"/>
-          </a:solidFill>
-          <a:ln w="15875">
-            <a:solidFill>
-              <a:srgbClr val="222222"/>
-            </a:solidFill>
-          </a:ln>
-          <a:effectLst/>
-        </p:spPr>
-        <p:style>
-          <a:lnRef idx="1">
-            <a:schemeClr val="accent1"/>
-          </a:lnRef>
-          <a:fillRef idx="3">
-            <a:schemeClr val="accent1"/>
-          </a:fillRef>
-          <a:effectRef idx="2">
-            <a:schemeClr val="accent1"/>
-          </a:effectRef>
-          <a:fontRef idx="minor">
-            <a:schemeClr val="lt1"/>
-          </a:fontRef>
-        </p:style>
-        <p:txBody>
-          <a:bodyPr rtlCol="0" anchor="ctr" wrap="square" lIns="54000" rIns="54000"/>
-          <a:lstStyle/>
-          <a:p>
-            <a:pPr algn="ctr"/>
-            <a:r>
-              <a:rPr sz="1100" b="1">
-                <a:solidFill>
-                  <a:srgbClr val="222222"/>
-                </a:solidFill>
-                <a:latin typeface="Noto Sans JP"/>
-              </a:rPr>
-              <a:t>データセットの準備</a:t>
-            </a:r>
-          </a:p>
-        </p:txBody>
-      </p:sp>
-      <p:sp>
-        <p:nvSpPr>
-          <p:cNvPr id="24" name="Rounded Rectangle 23"/>
-          <p:cNvSpPr/>
-          <p:nvPr/>
-        </p:nvSpPr>
-        <p:spPr>
-          <a:xfrm>
-            <a:off x="10080000" y="4536000"/>
-            <a:ext cx="1835999" cy="468000"/>
-          </a:xfrm>
-          <a:prstGeom prst="roundRect">
-            <a:avLst/>
-          </a:prstGeom>
-          <a:solidFill>
-            <a:srgbClr val="FFFFFF"/>
-          </a:solidFill>
-          <a:ln w="15875">
-            <a:solidFill>
-              <a:srgbClr val="222222"/>
-            </a:solidFill>
-          </a:ln>
-          <a:effectLst/>
-        </p:spPr>
-        <p:style>
-          <a:lnRef idx="1">
-            <a:schemeClr val="accent1"/>
-          </a:lnRef>
-          <a:fillRef idx="3">
-            <a:schemeClr val="accent1"/>
-          </a:fillRef>
-          <a:effectRef idx="2">
-            <a:schemeClr val="accent1"/>
-          </a:effectRef>
-          <a:fontRef idx="minor">
-            <a:schemeClr val="lt1"/>
-          </a:fontRef>
-        </p:style>
-        <p:txBody>
-          <a:bodyPr rtlCol="0" anchor="ctr" wrap="square" lIns="54000" rIns="54000"/>
-          <a:lstStyle/>
-          <a:p>
-            <a:pPr algn="ctr"/>
-            <a:r>
-              <a:rPr sz="1100" b="1">
-                <a:solidFill>
-                  <a:srgbClr val="222222"/>
-                </a:solidFill>
-                <a:latin typeface="Noto Sans JP"/>
-              </a:rPr>
-              <a:t>モデル性能評価</a:t>
-            </a:r>
-          </a:p>
-        </p:txBody>
-      </p:sp>
-      <p:sp>
-        <p:nvSpPr>
-          <p:cNvPr id="25" name="Rounded Rectangle 24"/>
-          <p:cNvSpPr/>
-          <p:nvPr/>
-        </p:nvSpPr>
-        <p:spPr>
-          <a:xfrm>
-            <a:off x="360000" y="5112000"/>
-            <a:ext cx="1835999" cy="468000"/>
-          </a:xfrm>
-          <a:prstGeom prst="roundRect">
-            <a:avLst/>
-          </a:prstGeom>
-          <a:solidFill>
-            <a:srgbClr val="FFFFFF"/>
-          </a:solidFill>
-          <a:ln w="15875">
-            <a:solidFill>
-              <a:srgbClr val="222222"/>
-            </a:solidFill>
-          </a:ln>
-          <a:effectLst/>
-        </p:spPr>
-        <p:style>
-          <a:lnRef idx="1">
-            <a:schemeClr val="accent1"/>
-          </a:lnRef>
-          <a:fillRef idx="3">
-            <a:schemeClr val="accent1"/>
-          </a:fillRef>
-          <a:effectRef idx="2">
-            <a:schemeClr val="accent1"/>
-          </a:effectRef>
-          <a:fontRef idx="minor">
-            <a:schemeClr val="lt1"/>
-          </a:fontRef>
-        </p:style>
-        <p:txBody>
-          <a:bodyPr rtlCol="0" anchor="ctr" wrap="square" lIns="54000" rIns="54000"/>
-          <a:lstStyle/>
-          <a:p>
-            <a:pPr algn="ctr"/>
-            <a:r>
-              <a:rPr sz="1100" b="1">
-                <a:solidFill>
-                  <a:srgbClr val="222222"/>
-                </a:solidFill>
-                <a:latin typeface="Noto Sans JP"/>
-              </a:rPr>
-              <a:t>ネットワークの定義</a:t>
-            </a:r>
-          </a:p>
-        </p:txBody>
-      </p:sp>
-      <p:sp>
-        <p:nvSpPr>
-          <p:cNvPr id="26" name="Rounded Rectangle 25"/>
-          <p:cNvSpPr/>
-          <p:nvPr/>
-        </p:nvSpPr>
-        <p:spPr>
-          <a:xfrm>
-            <a:off x="2304000" y="5112000"/>
-            <a:ext cx="1835999" cy="468000"/>
-          </a:xfrm>
-          <a:prstGeom prst="roundRect">
-            <a:avLst/>
-          </a:prstGeom>
-          <a:solidFill>
-            <a:srgbClr val="FFFFFF"/>
-          </a:solidFill>
-          <a:ln w="15875">
-            <a:solidFill>
-              <a:srgbClr val="222222"/>
-            </a:solidFill>
-          </a:ln>
-          <a:effectLst/>
-        </p:spPr>
-        <p:style>
-          <a:lnRef idx="1">
-            <a:schemeClr val="accent1"/>
-          </a:lnRef>
-          <a:fillRef idx="3">
-            <a:schemeClr val="accent1"/>
-          </a:fillRef>
-          <a:effectRef idx="2">
-            <a:schemeClr val="accent1"/>
-          </a:effectRef>
-          <a:fontRef idx="minor">
-            <a:schemeClr val="lt1"/>
-          </a:fontRef>
-        </p:style>
-        <p:txBody>
-          <a:bodyPr rtlCol="0" anchor="ctr" wrap="square" lIns="54000" rIns="54000"/>
-          <a:lstStyle/>
-          <a:p>
-            <a:pPr algn="ctr"/>
-            <a:r>
-              <a:rPr sz="1100" b="1">
-                <a:solidFill>
-                  <a:srgbClr val="222222"/>
-                </a:solidFill>
-                <a:latin typeface="Noto Sans JP"/>
-              </a:rPr>
-              <a:t>データの前処理</a:t>
-            </a:r>
-          </a:p>
-        </p:txBody>
-      </p:sp>
-      <p:sp>
-        <p:nvSpPr>
-          <p:cNvPr id="27" name="Rounded Rectangle 26"/>
-          <p:cNvSpPr/>
-          <p:nvPr/>
-        </p:nvSpPr>
-        <p:spPr>
-          <a:xfrm>
-            <a:off x="4248000" y="5112000"/>
-            <a:ext cx="1835999" cy="468000"/>
-          </a:xfrm>
-          <a:prstGeom prst="roundRect">
-            <a:avLst/>
-          </a:prstGeom>
-          <a:solidFill>
-            <a:srgbClr val="FFFFFF"/>
-          </a:solidFill>
-          <a:ln w="15875">
-            <a:solidFill>
-              <a:srgbClr val="222222"/>
-            </a:solidFill>
-          </a:ln>
-          <a:effectLst/>
-        </p:spPr>
-        <p:style>
-          <a:lnRef idx="1">
-            <a:schemeClr val="accent1"/>
-          </a:lnRef>
-          <a:fillRef idx="3">
-            <a:schemeClr val="accent1"/>
-          </a:fillRef>
-          <a:effectRef idx="2">
-            <a:schemeClr val="accent1"/>
-          </a:effectRef>
-          <a:fontRef idx="minor">
-            <a:schemeClr val="lt1"/>
-          </a:fontRef>
-        </p:style>
-        <p:txBody>
-          <a:bodyPr rtlCol="0" anchor="ctr" wrap="square" lIns="54000" rIns="54000"/>
-          <a:lstStyle/>
-          <a:p>
-            <a:pPr algn="ctr"/>
-            <a:r>
-              <a:rPr sz="1100" b="1">
-                <a:solidFill>
-                  <a:srgbClr val="222222"/>
-                </a:solidFill>
-                <a:latin typeface="Noto Sans JP"/>
-              </a:rPr>
-              <a:t>学習結果の可視化</a:t>
-            </a:r>
-          </a:p>
-        </p:txBody>
-      </p:sp>
-      <p:sp>
-        <p:nvSpPr>
-          <p:cNvPr id="28" name="Rounded Rectangle 27"/>
-          <p:cNvSpPr/>
-          <p:nvPr/>
-        </p:nvSpPr>
-        <p:spPr>
-          <a:xfrm>
-            <a:off x="6192000" y="5112000"/>
-            <a:ext cx="1835999" cy="468000"/>
-          </a:xfrm>
-          <a:prstGeom prst="roundRect">
-            <a:avLst/>
-          </a:prstGeom>
-          <a:solidFill>
-            <a:srgbClr val="FFFFFF"/>
-          </a:solidFill>
-          <a:ln w="15875">
-            <a:solidFill>
-              <a:srgbClr val="222222"/>
-            </a:solidFill>
-          </a:ln>
-          <a:effectLst/>
-        </p:spPr>
-        <p:style>
-          <a:lnRef idx="1">
-            <a:schemeClr val="accent1"/>
-          </a:lnRef>
-          <a:fillRef idx="3">
-            <a:schemeClr val="accent1"/>
-          </a:fillRef>
-          <a:effectRef idx="2">
-            <a:schemeClr val="accent1"/>
-          </a:effectRef>
-          <a:fontRef idx="minor">
-            <a:schemeClr val="lt1"/>
-          </a:fontRef>
-        </p:style>
-        <p:txBody>
-          <a:bodyPr rtlCol="0" anchor="ctr" wrap="square" lIns="54000" rIns="54000"/>
-          <a:lstStyle/>
-          <a:p>
-            <a:pPr algn="ctr"/>
-            <a:r>
-              <a:rPr sz="1100" b="1">
-                <a:solidFill>
-                  <a:srgbClr val="222222"/>
-                </a:solidFill>
-                <a:latin typeface="Noto Sans JP"/>
-              </a:rPr>
-              <a:t>最適化関数の定義</a:t>
-            </a:r>
-          </a:p>
-        </p:txBody>
-      </p:sp>
-      <p:sp>
-        <p:nvSpPr>
-          <p:cNvPr id="29" name="Rounded Rectangle 28"/>
-          <p:cNvSpPr/>
-          <p:nvPr/>
-        </p:nvSpPr>
-        <p:spPr>
-          <a:xfrm>
-            <a:off x="8136000" y="5112000"/>
-            <a:ext cx="1835999" cy="468000"/>
-          </a:xfrm>
-          <a:prstGeom prst="roundRect">
-            <a:avLst/>
-          </a:prstGeom>
-          <a:solidFill>
-            <a:srgbClr val="FFFFFF"/>
-          </a:solidFill>
-          <a:ln w="15875">
-            <a:solidFill>
-              <a:srgbClr val="222222"/>
-            </a:solidFill>
-          </a:ln>
-          <a:effectLst/>
-        </p:spPr>
-        <p:style>
-          <a:lnRef idx="1">
-            <a:schemeClr val="accent1"/>
-          </a:lnRef>
-          <a:fillRef idx="3">
-            <a:schemeClr val="accent1"/>
-          </a:fillRef>
-          <a:effectRef idx="2">
-            <a:schemeClr val="accent1"/>
-          </a:effectRef>
-          <a:fontRef idx="minor">
-            <a:schemeClr val="lt1"/>
-          </a:fontRef>
-        </p:style>
-        <p:txBody>
-          <a:bodyPr rtlCol="0" anchor="ctr" wrap="square" lIns="54000" rIns="54000"/>
-          <a:lstStyle/>
-          <a:p>
-            <a:pPr algn="ctr"/>
-            <a:r>
-              <a:rPr sz="1100" b="1">
-                <a:solidFill>
-                  <a:srgbClr val="222222"/>
-                </a:solidFill>
-                <a:latin typeface="Noto Sans JP"/>
-              </a:rPr>
-              <a:t>データローダの作成</a:t>
-            </a:r>
-          </a:p>
-        </p:txBody>
-      </p:sp>
-      <p:sp>
-        <p:nvSpPr>
-          <p:cNvPr id="30" name="Rounded Rectangle 29"/>
-          <p:cNvSpPr/>
-          <p:nvPr/>
-        </p:nvSpPr>
-        <p:spPr>
-          <a:xfrm>
-            <a:off x="10080000" y="5112000"/>
-            <a:ext cx="1835999" cy="468000"/>
-          </a:xfrm>
-          <a:prstGeom prst="roundRect">
-            <a:avLst/>
-          </a:prstGeom>
-          <a:solidFill>
-            <a:srgbClr val="FFFFFF"/>
-          </a:solidFill>
-          <a:ln w="15875">
-            <a:solidFill>
-              <a:srgbClr val="222222"/>
-            </a:solidFill>
-          </a:ln>
-          <a:effectLst/>
-        </p:spPr>
-        <p:style>
-          <a:lnRef idx="1">
-            <a:schemeClr val="accent1"/>
-          </a:lnRef>
-          <a:fillRef idx="3">
-            <a:schemeClr val="accent1"/>
-          </a:fillRef>
-          <a:effectRef idx="2">
-            <a:schemeClr val="accent1"/>
-          </a:effectRef>
-          <a:fontRef idx="minor">
-            <a:schemeClr val="lt1"/>
-          </a:fontRef>
-        </p:style>
-        <p:txBody>
-          <a:bodyPr rtlCol="0" anchor="ctr" wrap="square" lIns="54000" rIns="54000"/>
-          <a:lstStyle/>
-          <a:p>
-            <a:pPr algn="ctr"/>
-            <a:r>
-              <a:rPr sz="1100" b="1">
-                <a:solidFill>
-                  <a:srgbClr val="222222"/>
-                </a:solidFill>
-                <a:latin typeface="Noto Sans JP"/>
-              </a:rPr>
-              <a:t>入力データの形状確認</a:t>
-            </a:r>
-          </a:p>
-        </p:txBody>
-      </p:sp>
-      <p:sp>
-        <p:nvSpPr>
-          <p:cNvPr id="31" name="TextBox 30"/>
+        </p:spPr>
+      </p:pic>
+      <p:sp>
+        <p:nvSpPr>
+          <p:cNvPr id="5" name="TextBox 4"/>
           <p:cNvSpPr txBox="1"/>
           <p:nvPr/>
         </p:nvSpPr>
         <p:spPr>
           <a:xfrm>
-            <a:off x="360000" y="5760000"/>
-            <a:ext cx="11448000" cy="648000"/>
+            <a:off x="360000" y="6516000"/>
+            <a:ext cx="11448000" cy="251999"/>
           </a:xfrm>
           <a:prstGeom prst="rect">
             <a:avLst/>
@@ -6521,60 +5053,13 @@
           <a:p>
             <a:pPr algn="l"/>
             <a:r>
-              <a:rPr sz="1200" b="0">
-                <a:solidFill>
-                  <a:srgbClr val="222222"/>
-                </a:solidFill>
-                <a:latin typeface="Noto Sans JP"/>
-              </a:rPr>
-              <a:t>問い　(1) 「学習」が始まるのは何番目のカードからか．それより前は何をしているか．</a:t>
-            </a:r>
-          </a:p>
-          <a:p>
-            <a:pPr algn="l"/>
-            <a:r>
-              <a:rPr sz="1200" b="0">
-                <a:solidFill>
-                  <a:srgbClr val="222222"/>
-                </a:solidFill>
-                <a:latin typeface="Noto Sans JP"/>
-              </a:rPr>
-              <a:t>　　　(2) データが FashionMNIST からオリジナル画像に変わったとき，差し替えるカードはどれか．</a:t>
-            </a:r>
-          </a:p>
-        </p:txBody>
-      </p:sp>
-      <p:sp>
-        <p:nvSpPr>
-          <p:cNvPr id="32" name="TextBox 31"/>
-          <p:cNvSpPr txBox="1"/>
-          <p:nvPr/>
-        </p:nvSpPr>
-        <p:spPr>
-          <a:xfrm>
-            <a:off x="360000" y="6516000"/>
-            <a:ext cx="11448000" cy="251999"/>
-          </a:xfrm>
-          <a:prstGeom prst="rect">
-            <a:avLst/>
-          </a:prstGeom>
-          <a:noFill/>
-        </p:spPr>
-        <p:txBody>
-          <a:bodyPr wrap="square" anchor="t" lIns="54000" rIns="54000" tIns="18000" bIns="18000">
-            <a:spAutoFit/>
-          </a:bodyPr>
-          <a:lstStyle/>
-          <a:p>
-            <a:pPr algn="l"/>
-            <a:r>
               <a:rPr sz="900" b="0">
                 <a:solidFill>
                   <a:srgbClr val="555555"/>
                 </a:solidFill>
                 <a:latin typeface="Noto Sans JP"/>
               </a:rPr>
-              <a:t>GW2-1　教科書 2.3 節のコードテンプレート①〜⑫に対応する．並べ終えたら番号を書き込む</a:t>
+              <a:t>GW1-2　黄色の欄に書き込む</a:t>
             </a:r>
           </a:p>
         </p:txBody>
@@ -6588,6 +5073,2261 @@
 </file>
 
 <file path=ppt/slides/slide3.xml><?xml version="1.0" encoding="utf-8"?>
+<p:sld xmlns:a="http://schemas.openxmlformats.org/drawingml/2006/main" xmlns:p="http://schemas.openxmlformats.org/presentationml/2006/main" xmlns:r="http://schemas.openxmlformats.org/officeDocument/2006/relationships">
+  <p:cSld>
+    <p:spTree>
+      <p:nvGrpSpPr>
+        <p:cNvPr id="1" name=""/>
+        <p:cNvGrpSpPr/>
+        <p:nvPr/>
+      </p:nvGrpSpPr>
+      <p:grpSpPr/>
+      <p:sp>
+        <p:nvSpPr>
+          <p:cNvPr id="2" name="TextBox 1"/>
+          <p:cNvSpPr txBox="1"/>
+          <p:nvPr/>
+        </p:nvSpPr>
+        <p:spPr>
+          <a:xfrm>
+            <a:off x="360000" y="180000"/>
+            <a:ext cx="11448000" cy="468000"/>
+          </a:xfrm>
+          <a:prstGeom prst="rect">
+            <a:avLst/>
+          </a:prstGeom>
+          <a:noFill/>
+        </p:spPr>
+        <p:txBody>
+          <a:bodyPr wrap="square" anchor="t" lIns="54000" rIns="54000" tIns="18000" bIns="18000">
+            <a:spAutoFit/>
+          </a:bodyPr>
+          <a:lstStyle/>
+          <a:p>
+            <a:pPr algn="l"/>
+            <a:r>
+              <a:rPr sz="2200" b="1">
+                <a:solidFill>
+                  <a:srgbClr val="222222"/>
+                </a:solidFill>
+                <a:latin typeface="Noto Sans JP"/>
+              </a:rPr>
+              <a:t>GW1-3　順伝播と誤差逆伝播</a:t>
+            </a:r>
+          </a:p>
+        </p:txBody>
+      </p:sp>
+      <p:sp>
+        <p:nvSpPr>
+          <p:cNvPr id="3" name="TextBox 2"/>
+          <p:cNvSpPr txBox="1"/>
+          <p:nvPr/>
+        </p:nvSpPr>
+        <p:spPr>
+          <a:xfrm>
+            <a:off x="360000" y="630000"/>
+            <a:ext cx="11448000" cy="324000"/>
+          </a:xfrm>
+          <a:prstGeom prst="rect">
+            <a:avLst/>
+          </a:prstGeom>
+          <a:noFill/>
+        </p:spPr>
+        <p:txBody>
+          <a:bodyPr wrap="square" anchor="t" lIns="54000" rIns="54000" tIns="18000" bIns="18000">
+            <a:spAutoFit/>
+          </a:bodyPr>
+          <a:lstStyle/>
+          <a:p>
+            <a:pPr algn="l"/>
+            <a:r>
+              <a:rPr sz="1200" b="0">
+                <a:solidFill>
+                  <a:srgbClr val="555555"/>
+                </a:solidFill>
+                <a:latin typeface="Noto Sans JP"/>
+              </a:rPr>
+              <a:t>①〜④の名前と図のタイトルを入れる．矢印の向きと説明が手がかり．</a:t>
+            </a:r>
+          </a:p>
+        </p:txBody>
+      </p:sp>
+      <p:pic>
+        <p:nvPicPr>
+          <p:cNvPr id="4" name="Picture 3" descr="forward_backward_blank.png"/>
+          <p:cNvPicPr>
+            <a:picLocks noChangeAspect="1"/>
+          </p:cNvPicPr>
+          <p:nvPr/>
+        </p:nvPicPr>
+        <p:blipFill>
+          <a:blip r:embed="rId2"/>
+          <a:stretch>
+            <a:fillRect/>
+          </a:stretch>
+        </p:blipFill>
+        <p:spPr>
+          <a:xfrm>
+            <a:off x="810345" y="1080000"/>
+            <a:ext cx="10571428" cy="5328000"/>
+          </a:xfrm>
+          <a:prstGeom prst="rect">
+            <a:avLst/>
+          </a:prstGeom>
+        </p:spPr>
+      </p:pic>
+      <p:sp>
+        <p:nvSpPr>
+          <p:cNvPr id="5" name="TextBox 4"/>
+          <p:cNvSpPr txBox="1"/>
+          <p:nvPr/>
+        </p:nvSpPr>
+        <p:spPr>
+          <a:xfrm>
+            <a:off x="360000" y="6516000"/>
+            <a:ext cx="11448000" cy="251999"/>
+          </a:xfrm>
+          <a:prstGeom prst="rect">
+            <a:avLst/>
+          </a:prstGeom>
+          <a:noFill/>
+        </p:spPr>
+        <p:txBody>
+          <a:bodyPr wrap="square" anchor="t" lIns="54000" rIns="54000" tIns="18000" bIns="18000">
+            <a:spAutoFit/>
+          </a:bodyPr>
+          <a:lstStyle/>
+          <a:p>
+            <a:pPr algn="l"/>
+            <a:r>
+              <a:rPr sz="900" b="0">
+                <a:solidFill>
+                  <a:srgbClr val="555555"/>
+                </a:solidFill>
+                <a:latin typeface="Noto Sans JP"/>
+              </a:rPr>
+              <a:t>GW1-3　黄色の欄に書き込む</a:t>
+            </a:r>
+          </a:p>
+        </p:txBody>
+      </p:sp>
+    </p:spTree>
+  </p:cSld>
+  <p:clrMapOvr>
+    <a:masterClrMapping/>
+  </p:clrMapOvr>
+</p:sld>
+</file>
+
+<file path=ppt/slides/slide4.xml><?xml version="1.0" encoding="utf-8"?>
+<p:sld xmlns:a="http://schemas.openxmlformats.org/drawingml/2006/main" xmlns:p="http://schemas.openxmlformats.org/presentationml/2006/main" xmlns:r="http://schemas.openxmlformats.org/officeDocument/2006/relationships">
+  <p:cSld>
+    <p:spTree>
+      <p:nvGrpSpPr>
+        <p:cNvPr id="1" name=""/>
+        <p:cNvGrpSpPr/>
+        <p:nvPr/>
+      </p:nvGrpSpPr>
+      <p:grpSpPr/>
+      <p:sp>
+        <p:nvSpPr>
+          <p:cNvPr id="2" name="TextBox 1"/>
+          <p:cNvSpPr txBox="1"/>
+          <p:nvPr/>
+        </p:nvSpPr>
+        <p:spPr>
+          <a:xfrm>
+            <a:off x="360000" y="180000"/>
+            <a:ext cx="11448000" cy="468000"/>
+          </a:xfrm>
+          <a:prstGeom prst="rect">
+            <a:avLst/>
+          </a:prstGeom>
+          <a:noFill/>
+        </p:spPr>
+        <p:txBody>
+          <a:bodyPr wrap="square" anchor="t" lIns="54000" rIns="54000" tIns="18000" bIns="18000">
+            <a:spAutoFit/>
+          </a:bodyPr>
+          <a:lstStyle/>
+          <a:p>
+            <a:pPr algn="l"/>
+            <a:r>
+              <a:rPr sz="2200" b="1">
+                <a:solidFill>
+                  <a:srgbClr val="222222"/>
+                </a:solidFill>
+                <a:latin typeface="Noto Sans JP"/>
+              </a:rPr>
+              <a:t>GW1-4　線形関数と非線形関数</a:t>
+            </a:r>
+          </a:p>
+        </p:txBody>
+      </p:sp>
+      <p:sp>
+        <p:nvSpPr>
+          <p:cNvPr id="3" name="TextBox 2"/>
+          <p:cNvSpPr txBox="1"/>
+          <p:nvPr/>
+        </p:nvSpPr>
+        <p:spPr>
+          <a:xfrm>
+            <a:off x="360000" y="630000"/>
+            <a:ext cx="11448000" cy="324000"/>
+          </a:xfrm>
+          <a:prstGeom prst="rect">
+            <a:avLst/>
+          </a:prstGeom>
+          <a:noFill/>
+        </p:spPr>
+        <p:txBody>
+          <a:bodyPr wrap="square" anchor="t" lIns="54000" rIns="54000" tIns="18000" bIns="18000">
+            <a:spAutoFit/>
+          </a:bodyPr>
+          <a:lstStyle/>
+          <a:p>
+            <a:pPr algn="l"/>
+            <a:r>
+              <a:rPr sz="1200" b="0">
+                <a:solidFill>
+                  <a:srgbClr val="555555"/>
+                </a:solidFill>
+                <a:latin typeface="Noto Sans JP"/>
+              </a:rPr>
+              <a:t>各グラフに「線形」か「非線形」かを入れる．③の空欄は層の中の関数の名前．</a:t>
+            </a:r>
+          </a:p>
+        </p:txBody>
+      </p:sp>
+      <p:pic>
+        <p:nvPicPr>
+          <p:cNvPr id="4" name="Picture 3" descr="linear_nonlinear_blank.png"/>
+          <p:cNvPicPr>
+            <a:picLocks noChangeAspect="1"/>
+          </p:cNvPicPr>
+          <p:nvPr/>
+        </p:nvPicPr>
+        <p:blipFill>
+          <a:blip r:embed="rId2"/>
+          <a:stretch>
+            <a:fillRect/>
+          </a:stretch>
+        </p:blipFill>
+        <p:spPr>
+          <a:xfrm>
+            <a:off x="847400" y="1080000"/>
+            <a:ext cx="10497318" cy="5328000"/>
+          </a:xfrm>
+          <a:prstGeom prst="rect">
+            <a:avLst/>
+          </a:prstGeom>
+        </p:spPr>
+      </p:pic>
+      <p:sp>
+        <p:nvSpPr>
+          <p:cNvPr id="5" name="TextBox 4"/>
+          <p:cNvSpPr txBox="1"/>
+          <p:nvPr/>
+        </p:nvSpPr>
+        <p:spPr>
+          <a:xfrm>
+            <a:off x="360000" y="6516000"/>
+            <a:ext cx="11448000" cy="251999"/>
+          </a:xfrm>
+          <a:prstGeom prst="rect">
+            <a:avLst/>
+          </a:prstGeom>
+          <a:noFill/>
+        </p:spPr>
+        <p:txBody>
+          <a:bodyPr wrap="square" anchor="t" lIns="54000" rIns="54000" tIns="18000" bIns="18000">
+            <a:spAutoFit/>
+          </a:bodyPr>
+          <a:lstStyle/>
+          <a:p>
+            <a:pPr algn="l"/>
+            <a:r>
+              <a:rPr sz="900" b="0">
+                <a:solidFill>
+                  <a:srgbClr val="555555"/>
+                </a:solidFill>
+                <a:latin typeface="Noto Sans JP"/>
+              </a:rPr>
+              <a:t>GW1-4　黄色の欄に書き込む</a:t>
+            </a:r>
+          </a:p>
+        </p:txBody>
+      </p:sp>
+    </p:spTree>
+  </p:cSld>
+  <p:clrMapOvr>
+    <a:masterClrMapping/>
+  </p:clrMapOvr>
+</p:sld>
+</file>
+
+<file path=ppt/slides/slide5.xml><?xml version="1.0" encoding="utf-8"?>
+<p:sld xmlns:a="http://schemas.openxmlformats.org/drawingml/2006/main" xmlns:p="http://schemas.openxmlformats.org/presentationml/2006/main" xmlns:r="http://schemas.openxmlformats.org/officeDocument/2006/relationships">
+  <p:cSld>
+    <p:spTree>
+      <p:nvGrpSpPr>
+        <p:cNvPr id="1" name=""/>
+        <p:cNvGrpSpPr/>
+        <p:nvPr/>
+      </p:nvGrpSpPr>
+      <p:grpSpPr/>
+      <p:sp>
+        <p:nvSpPr>
+          <p:cNvPr id="2" name="TextBox 1"/>
+          <p:cNvSpPr txBox="1"/>
+          <p:nvPr/>
+        </p:nvSpPr>
+        <p:spPr>
+          <a:xfrm>
+            <a:off x="360000" y="180000"/>
+            <a:ext cx="11448000" cy="468000"/>
+          </a:xfrm>
+          <a:prstGeom prst="rect">
+            <a:avLst/>
+          </a:prstGeom>
+          <a:noFill/>
+        </p:spPr>
+        <p:txBody>
+          <a:bodyPr wrap="square" anchor="t" lIns="54000" rIns="54000" tIns="18000" bIns="18000">
+            <a:spAutoFit/>
+          </a:bodyPr>
+          <a:lstStyle/>
+          <a:p>
+            <a:pPr algn="l"/>
+            <a:r>
+              <a:rPr sz="2200" b="1">
+                <a:solidFill>
+                  <a:srgbClr val="222222"/>
+                </a:solidFill>
+                <a:latin typeface="Noto Sans JP"/>
+              </a:rPr>
+              <a:t>GW1-5　学習と推論</a:t>
+            </a:r>
+          </a:p>
+        </p:txBody>
+      </p:sp>
+      <p:sp>
+        <p:nvSpPr>
+          <p:cNvPr id="3" name="TextBox 2"/>
+          <p:cNvSpPr txBox="1"/>
+          <p:nvPr/>
+        </p:nvSpPr>
+        <p:spPr>
+          <a:xfrm>
+            <a:off x="360000" y="630000"/>
+            <a:ext cx="11448000" cy="324000"/>
+          </a:xfrm>
+          <a:prstGeom prst="rect">
+            <a:avLst/>
+          </a:prstGeom>
+          <a:noFill/>
+        </p:spPr>
+        <p:txBody>
+          <a:bodyPr wrap="square" anchor="t" lIns="54000" rIns="54000" tIns="18000" bIns="18000">
+            <a:spAutoFit/>
+          </a:bodyPr>
+          <a:lstStyle/>
+          <a:p>
+            <a:pPr algn="l"/>
+            <a:r>
+              <a:rPr sz="1200" b="0">
+                <a:solidFill>
+                  <a:srgbClr val="555555"/>
+                </a:solidFill>
+                <a:latin typeface="Noto Sans JP"/>
+              </a:rPr>
+              <a:t>2つの段階の名前，重みの状態（更新中／固定），図のタイトルを入れる．</a:t>
+            </a:r>
+          </a:p>
+        </p:txBody>
+      </p:sp>
+      <p:pic>
+        <p:nvPicPr>
+          <p:cNvPr id="4" name="Picture 3" descr="train_vs_inference_blank.png"/>
+          <p:cNvPicPr>
+            <a:picLocks noChangeAspect="1"/>
+          </p:cNvPicPr>
+          <p:nvPr/>
+        </p:nvPicPr>
+        <p:blipFill>
+          <a:blip r:embed="rId2"/>
+          <a:stretch>
+            <a:fillRect/>
+          </a:stretch>
+        </p:blipFill>
+        <p:spPr>
+          <a:xfrm>
+            <a:off x="579860" y="1080000"/>
+            <a:ext cx="11032398" cy="5328000"/>
+          </a:xfrm>
+          <a:prstGeom prst="rect">
+            <a:avLst/>
+          </a:prstGeom>
+        </p:spPr>
+      </p:pic>
+      <p:sp>
+        <p:nvSpPr>
+          <p:cNvPr id="5" name="TextBox 4"/>
+          <p:cNvSpPr txBox="1"/>
+          <p:nvPr/>
+        </p:nvSpPr>
+        <p:spPr>
+          <a:xfrm>
+            <a:off x="360000" y="6516000"/>
+            <a:ext cx="11448000" cy="251999"/>
+          </a:xfrm>
+          <a:prstGeom prst="rect">
+            <a:avLst/>
+          </a:prstGeom>
+          <a:noFill/>
+        </p:spPr>
+        <p:txBody>
+          <a:bodyPr wrap="square" anchor="t" lIns="54000" rIns="54000" tIns="18000" bIns="18000">
+            <a:spAutoFit/>
+          </a:bodyPr>
+          <a:lstStyle/>
+          <a:p>
+            <a:pPr algn="l"/>
+            <a:r>
+              <a:rPr sz="900" b="0">
+                <a:solidFill>
+                  <a:srgbClr val="555555"/>
+                </a:solidFill>
+                <a:latin typeface="Noto Sans JP"/>
+              </a:rPr>
+              <a:t>GW1-5　黄色の欄に書き込む</a:t>
+            </a:r>
+          </a:p>
+        </p:txBody>
+      </p:sp>
+    </p:spTree>
+  </p:cSld>
+  <p:clrMapOvr>
+    <a:masterClrMapping/>
+  </p:clrMapOvr>
+</p:sld>
+</file>
+
+<file path=ppt/slides/slide6.xml><?xml version="1.0" encoding="utf-8"?>
+<p:sld xmlns:a="http://schemas.openxmlformats.org/drawingml/2006/main" xmlns:p="http://schemas.openxmlformats.org/presentationml/2006/main" xmlns:r="http://schemas.openxmlformats.org/officeDocument/2006/relationships">
+  <p:cSld>
+    <p:spTree>
+      <p:nvGrpSpPr>
+        <p:cNvPr id="1" name=""/>
+        <p:cNvGrpSpPr/>
+        <p:nvPr/>
+      </p:nvGrpSpPr>
+      <p:grpSpPr/>
+      <p:sp>
+        <p:nvSpPr>
+          <p:cNvPr id="2" name="TextBox 1"/>
+          <p:cNvSpPr txBox="1"/>
+          <p:nvPr/>
+        </p:nvSpPr>
+        <p:spPr>
+          <a:xfrm>
+            <a:off x="360000" y="180000"/>
+            <a:ext cx="11448000" cy="468000"/>
+          </a:xfrm>
+          <a:prstGeom prst="rect">
+            <a:avLst/>
+          </a:prstGeom>
+          <a:noFill/>
+        </p:spPr>
+        <p:txBody>
+          <a:bodyPr wrap="square" anchor="t" lIns="54000" rIns="54000" tIns="18000" bIns="18000">
+            <a:spAutoFit/>
+          </a:bodyPr>
+          <a:lstStyle/>
+          <a:p>
+            <a:pPr algn="l"/>
+            <a:r>
+              <a:rPr sz="2200" b="1">
+                <a:solidFill>
+                  <a:srgbClr val="222222"/>
+                </a:solidFill>
+                <a:latin typeface="Noto Sans JP"/>
+              </a:rPr>
+              <a:t>GW1-6　学習の1ステップ</a:t>
+            </a:r>
+          </a:p>
+        </p:txBody>
+      </p:sp>
+      <p:sp>
+        <p:nvSpPr>
+          <p:cNvPr id="3" name="TextBox 2"/>
+          <p:cNvSpPr txBox="1"/>
+          <p:nvPr/>
+        </p:nvSpPr>
+        <p:spPr>
+          <a:xfrm>
+            <a:off x="360000" y="630000"/>
+            <a:ext cx="11448000" cy="324000"/>
+          </a:xfrm>
+          <a:prstGeom prst="rect">
+            <a:avLst/>
+          </a:prstGeom>
+          <a:noFill/>
+        </p:spPr>
+        <p:txBody>
+          <a:bodyPr wrap="square" anchor="t" lIns="54000" rIns="54000" tIns="18000" bIns="18000">
+            <a:spAutoFit/>
+          </a:bodyPr>
+          <a:lstStyle/>
+          <a:p>
+            <a:pPr algn="l"/>
+            <a:r>
+              <a:rPr sz="1200" b="0">
+                <a:solidFill>
+                  <a:srgbClr val="555555"/>
+                </a:solidFill>
+                <a:latin typeface="Noto Sans JP"/>
+              </a:rPr>
+              <a:t>①〜④の名前と，それぞれの PyTorch のコードを入れる（GW3 のカードに同じコードがある）．</a:t>
+            </a:r>
+          </a:p>
+        </p:txBody>
+      </p:sp>
+      <p:pic>
+        <p:nvPicPr>
+          <p:cNvPr id="4" name="Picture 3" descr="training_step_cycle_blank.png"/>
+          <p:cNvPicPr>
+            <a:picLocks noChangeAspect="1"/>
+          </p:cNvPicPr>
+          <p:nvPr/>
+        </p:nvPicPr>
+        <p:blipFill>
+          <a:blip r:embed="rId2"/>
+          <a:stretch>
+            <a:fillRect/>
+          </a:stretch>
+        </p:blipFill>
+        <p:spPr>
+          <a:xfrm>
+            <a:off x="507248" y="1080000"/>
+            <a:ext cx="11177622" cy="5328000"/>
+          </a:xfrm>
+          <a:prstGeom prst="rect">
+            <a:avLst/>
+          </a:prstGeom>
+        </p:spPr>
+      </p:pic>
+      <p:sp>
+        <p:nvSpPr>
+          <p:cNvPr id="5" name="TextBox 4"/>
+          <p:cNvSpPr txBox="1"/>
+          <p:nvPr/>
+        </p:nvSpPr>
+        <p:spPr>
+          <a:xfrm>
+            <a:off x="360000" y="6516000"/>
+            <a:ext cx="11448000" cy="251999"/>
+          </a:xfrm>
+          <a:prstGeom prst="rect">
+            <a:avLst/>
+          </a:prstGeom>
+          <a:noFill/>
+        </p:spPr>
+        <p:txBody>
+          <a:bodyPr wrap="square" anchor="t" lIns="54000" rIns="54000" tIns="18000" bIns="18000">
+            <a:spAutoFit/>
+          </a:bodyPr>
+          <a:lstStyle/>
+          <a:p>
+            <a:pPr algn="l"/>
+            <a:r>
+              <a:rPr sz="900" b="0">
+                <a:solidFill>
+                  <a:srgbClr val="555555"/>
+                </a:solidFill>
+                <a:latin typeface="Noto Sans JP"/>
+              </a:rPr>
+              <a:t>GW1-6　黄色の欄に書き込む</a:t>
+            </a:r>
+          </a:p>
+        </p:txBody>
+      </p:sp>
+    </p:spTree>
+  </p:cSld>
+  <p:clrMapOvr>
+    <a:masterClrMapping/>
+  </p:clrMapOvr>
+</p:sld>
+</file>
+
+<file path=ppt/slides/slide7.xml><?xml version="1.0" encoding="utf-8"?>
+<p:sld xmlns:a="http://schemas.openxmlformats.org/drawingml/2006/main" xmlns:p="http://schemas.openxmlformats.org/presentationml/2006/main" xmlns:r="http://schemas.openxmlformats.org/officeDocument/2006/relationships">
+  <p:cSld>
+    <p:spTree>
+      <p:nvGrpSpPr>
+        <p:cNvPr id="1" name=""/>
+        <p:cNvGrpSpPr/>
+        <p:nvPr/>
+      </p:nvGrpSpPr>
+      <p:grpSpPr/>
+      <p:sp>
+        <p:nvSpPr>
+          <p:cNvPr id="2" name="TextBox 1"/>
+          <p:cNvSpPr txBox="1"/>
+          <p:nvPr/>
+        </p:nvSpPr>
+        <p:spPr>
+          <a:xfrm>
+            <a:off x="360000" y="180000"/>
+            <a:ext cx="11448000" cy="468000"/>
+          </a:xfrm>
+          <a:prstGeom prst="rect">
+            <a:avLst/>
+          </a:prstGeom>
+          <a:noFill/>
+        </p:spPr>
+        <p:txBody>
+          <a:bodyPr wrap="square" anchor="t" lIns="54000" rIns="54000" tIns="18000" bIns="18000">
+            <a:spAutoFit/>
+          </a:bodyPr>
+          <a:lstStyle/>
+          <a:p>
+            <a:pPr algn="l"/>
+            <a:r>
+              <a:rPr sz="2200" b="1">
+                <a:solidFill>
+                  <a:srgbClr val="222222"/>
+                </a:solidFill>
+                <a:latin typeface="Noto Sans JP"/>
+              </a:rPr>
+              <a:t>GW2-1　プログラミングの流れ ― カードを3つのフェーズに並べる（10分）</a:t>
+            </a:r>
+          </a:p>
+        </p:txBody>
+      </p:sp>
+      <p:sp>
+        <p:nvSpPr>
+          <p:cNvPr id="3" name="TextBox 2"/>
+          <p:cNvSpPr txBox="1"/>
+          <p:nvPr/>
+        </p:nvSpPr>
+        <p:spPr>
+          <a:xfrm>
+            <a:off x="360000" y="630000"/>
+            <a:ext cx="11448000" cy="324000"/>
+          </a:xfrm>
+          <a:prstGeom prst="rect">
+            <a:avLst/>
+          </a:prstGeom>
+          <a:noFill/>
+        </p:spPr>
+        <p:txBody>
+          <a:bodyPr wrap="square" anchor="t" lIns="54000" rIns="54000" tIns="18000" bIns="18000">
+            <a:spAutoFit/>
+          </a:bodyPr>
+          <a:lstStyle/>
+          <a:p>
+            <a:pPr algn="l"/>
+            <a:r>
+              <a:rPr sz="1200" b="0">
+                <a:solidFill>
+                  <a:srgbClr val="555555"/>
+                </a:solidFill>
+                <a:latin typeface="Noto Sans JP"/>
+              </a:rPr>
+              <a:t>下の12枚のカードを，正しい順に上の枠へドラッグする．番号は書いていない．並べたあと，各フェーズの見出しも埋める．</a:t>
+            </a:r>
+          </a:p>
+        </p:txBody>
+      </p:sp>
+      <p:sp>
+        <p:nvSpPr>
+          <p:cNvPr id="4" name="Rectangle 3"/>
+          <p:cNvSpPr/>
+          <p:nvPr/>
+        </p:nvSpPr>
+        <p:spPr>
+          <a:xfrm>
+            <a:off x="360000" y="1080000"/>
+            <a:ext cx="3456000" cy="396000"/>
+          </a:xfrm>
+          <a:prstGeom prst="rect">
+            <a:avLst/>
+          </a:prstGeom>
+          <a:solidFill>
+            <a:srgbClr val="FFFFFF"/>
+          </a:solidFill>
+          <a:ln w="15875">
+            <a:solidFill>
+              <a:srgbClr val="888888"/>
+            </a:solidFill>
+          </a:ln>
+          <a:effectLst/>
+        </p:spPr>
+        <p:style>
+          <a:lnRef idx="1">
+            <a:schemeClr val="accent1"/>
+          </a:lnRef>
+          <a:fillRef idx="3">
+            <a:schemeClr val="accent1"/>
+          </a:fillRef>
+          <a:effectRef idx="2">
+            <a:schemeClr val="accent1"/>
+          </a:effectRef>
+          <a:fontRef idx="minor">
+            <a:schemeClr val="lt1"/>
+          </a:fontRef>
+        </p:style>
+        <p:txBody>
+          <a:bodyPr rtlCol="0" anchor="ctr" wrap="square" lIns="54000" rIns="54000"/>
+          <a:lstStyle/>
+          <a:p>
+            <a:pPr algn="ctr"/>
+            <a:r>
+              <a:rPr sz="1300" b="1">
+                <a:solidFill>
+                  <a:srgbClr val="222222"/>
+                </a:solidFill>
+                <a:latin typeface="Noto Sans JP"/>
+              </a:rPr>
+              <a:t>データ準備フェーズ</a:t>
+            </a:r>
+          </a:p>
+        </p:txBody>
+      </p:sp>
+      <p:sp>
+        <p:nvSpPr>
+          <p:cNvPr id="5" name="Rounded Rectangle 4"/>
+          <p:cNvSpPr/>
+          <p:nvPr/>
+        </p:nvSpPr>
+        <p:spPr>
+          <a:xfrm>
+            <a:off x="360000" y="1548000"/>
+            <a:ext cx="3456000" cy="468000"/>
+          </a:xfrm>
+          <a:prstGeom prst="roundRect">
+            <a:avLst/>
+          </a:prstGeom>
+          <a:solidFill>
+            <a:srgbClr val="FFF9C4"/>
+          </a:solidFill>
+          <a:ln w="15875">
+            <a:solidFill>
+              <a:srgbClr val="F9A825"/>
+            </a:solidFill>
+            <a:prstDash val="dash"/>
+          </a:ln>
+          <a:effectLst/>
+        </p:spPr>
+        <p:style>
+          <a:lnRef idx="1">
+            <a:schemeClr val="accent1"/>
+          </a:lnRef>
+          <a:fillRef idx="3">
+            <a:schemeClr val="accent1"/>
+          </a:fillRef>
+          <a:effectRef idx="2">
+            <a:schemeClr val="accent1"/>
+          </a:effectRef>
+          <a:fontRef idx="minor">
+            <a:schemeClr val="lt1"/>
+          </a:fontRef>
+        </p:style>
+        <p:txBody>
+          <a:bodyPr rtlCol="0" anchor="ctr" wrap="square" lIns="54000" rIns="54000"/>
+          <a:lstStyle/>
+          <a:p>
+            <a:pPr algn="ctr"/>
+            <a:r>
+              <a:rPr sz="1200" b="0">
+                <a:solidFill>
+                  <a:srgbClr val="222222"/>
+                </a:solidFill>
+                <a:latin typeface="Noto Sans JP"/>
+              </a:rPr>
+              <a:t/>
+            </a:r>
+          </a:p>
+        </p:txBody>
+      </p:sp>
+      <p:sp>
+        <p:nvSpPr>
+          <p:cNvPr id="6" name="Rounded Rectangle 5"/>
+          <p:cNvSpPr/>
+          <p:nvPr/>
+        </p:nvSpPr>
+        <p:spPr>
+          <a:xfrm>
+            <a:off x="360000" y="2106000"/>
+            <a:ext cx="3456000" cy="468000"/>
+          </a:xfrm>
+          <a:prstGeom prst="roundRect">
+            <a:avLst/>
+          </a:prstGeom>
+          <a:solidFill>
+            <a:srgbClr val="FFF9C4"/>
+          </a:solidFill>
+          <a:ln w="15875">
+            <a:solidFill>
+              <a:srgbClr val="F9A825"/>
+            </a:solidFill>
+            <a:prstDash val="dash"/>
+          </a:ln>
+          <a:effectLst/>
+        </p:spPr>
+        <p:style>
+          <a:lnRef idx="1">
+            <a:schemeClr val="accent1"/>
+          </a:lnRef>
+          <a:fillRef idx="3">
+            <a:schemeClr val="accent1"/>
+          </a:fillRef>
+          <a:effectRef idx="2">
+            <a:schemeClr val="accent1"/>
+          </a:effectRef>
+          <a:fontRef idx="minor">
+            <a:schemeClr val="lt1"/>
+          </a:fontRef>
+        </p:style>
+        <p:txBody>
+          <a:bodyPr rtlCol="0" anchor="ctr" wrap="square" lIns="54000" rIns="54000"/>
+          <a:lstStyle/>
+          <a:p>
+            <a:pPr algn="ctr"/>
+            <a:r>
+              <a:rPr sz="1200" b="0">
+                <a:solidFill>
+                  <a:srgbClr val="222222"/>
+                </a:solidFill>
+                <a:latin typeface="Noto Sans JP"/>
+              </a:rPr>
+              <a:t/>
+            </a:r>
+          </a:p>
+        </p:txBody>
+      </p:sp>
+      <p:sp>
+        <p:nvSpPr>
+          <p:cNvPr id="7" name="Rounded Rectangle 6"/>
+          <p:cNvSpPr/>
+          <p:nvPr/>
+        </p:nvSpPr>
+        <p:spPr>
+          <a:xfrm>
+            <a:off x="360000" y="2664000"/>
+            <a:ext cx="3456000" cy="468000"/>
+          </a:xfrm>
+          <a:prstGeom prst="roundRect">
+            <a:avLst/>
+          </a:prstGeom>
+          <a:solidFill>
+            <a:srgbClr val="FFF9C4"/>
+          </a:solidFill>
+          <a:ln w="15875">
+            <a:solidFill>
+              <a:srgbClr val="F9A825"/>
+            </a:solidFill>
+            <a:prstDash val="dash"/>
+          </a:ln>
+          <a:effectLst/>
+        </p:spPr>
+        <p:style>
+          <a:lnRef idx="1">
+            <a:schemeClr val="accent1"/>
+          </a:lnRef>
+          <a:fillRef idx="3">
+            <a:schemeClr val="accent1"/>
+          </a:fillRef>
+          <a:effectRef idx="2">
+            <a:schemeClr val="accent1"/>
+          </a:effectRef>
+          <a:fontRef idx="minor">
+            <a:schemeClr val="lt1"/>
+          </a:fontRef>
+        </p:style>
+        <p:txBody>
+          <a:bodyPr rtlCol="0" anchor="ctr" wrap="square" lIns="54000" rIns="54000"/>
+          <a:lstStyle/>
+          <a:p>
+            <a:pPr algn="ctr"/>
+            <a:r>
+              <a:rPr sz="1200" b="0">
+                <a:solidFill>
+                  <a:srgbClr val="222222"/>
+                </a:solidFill>
+                <a:latin typeface="Noto Sans JP"/>
+              </a:rPr>
+              <a:t/>
+            </a:r>
+          </a:p>
+        </p:txBody>
+      </p:sp>
+      <p:sp>
+        <p:nvSpPr>
+          <p:cNvPr id="8" name="Rounded Rectangle 7"/>
+          <p:cNvSpPr/>
+          <p:nvPr/>
+        </p:nvSpPr>
+        <p:spPr>
+          <a:xfrm>
+            <a:off x="360000" y="3221999"/>
+            <a:ext cx="3456000" cy="468000"/>
+          </a:xfrm>
+          <a:prstGeom prst="roundRect">
+            <a:avLst/>
+          </a:prstGeom>
+          <a:solidFill>
+            <a:srgbClr val="FFF9C4"/>
+          </a:solidFill>
+          <a:ln w="15875">
+            <a:solidFill>
+              <a:srgbClr val="F9A825"/>
+            </a:solidFill>
+            <a:prstDash val="dash"/>
+          </a:ln>
+          <a:effectLst/>
+        </p:spPr>
+        <p:style>
+          <a:lnRef idx="1">
+            <a:schemeClr val="accent1"/>
+          </a:lnRef>
+          <a:fillRef idx="3">
+            <a:schemeClr val="accent1"/>
+          </a:fillRef>
+          <a:effectRef idx="2">
+            <a:schemeClr val="accent1"/>
+          </a:effectRef>
+          <a:fontRef idx="minor">
+            <a:schemeClr val="lt1"/>
+          </a:fontRef>
+        </p:style>
+        <p:txBody>
+          <a:bodyPr rtlCol="0" anchor="ctr" wrap="square" lIns="54000" rIns="54000"/>
+          <a:lstStyle/>
+          <a:p>
+            <a:pPr algn="ctr"/>
+            <a:r>
+              <a:rPr sz="1200" b="0">
+                <a:solidFill>
+                  <a:srgbClr val="222222"/>
+                </a:solidFill>
+                <a:latin typeface="Noto Sans JP"/>
+              </a:rPr>
+              <a:t/>
+            </a:r>
+          </a:p>
+        </p:txBody>
+      </p:sp>
+      <p:sp>
+        <p:nvSpPr>
+          <p:cNvPr id="9" name="Rectangle 8"/>
+          <p:cNvSpPr/>
+          <p:nvPr/>
+        </p:nvSpPr>
+        <p:spPr>
+          <a:xfrm>
+            <a:off x="4356000" y="1080000"/>
+            <a:ext cx="3456000" cy="396000"/>
+          </a:xfrm>
+          <a:prstGeom prst="rect">
+            <a:avLst/>
+          </a:prstGeom>
+          <a:solidFill>
+            <a:srgbClr val="FFFFFF"/>
+          </a:solidFill>
+          <a:ln w="15875">
+            <a:solidFill>
+              <a:srgbClr val="888888"/>
+            </a:solidFill>
+          </a:ln>
+          <a:effectLst/>
+        </p:spPr>
+        <p:style>
+          <a:lnRef idx="1">
+            <a:schemeClr val="accent1"/>
+          </a:lnRef>
+          <a:fillRef idx="3">
+            <a:schemeClr val="accent1"/>
+          </a:fillRef>
+          <a:effectRef idx="2">
+            <a:schemeClr val="accent1"/>
+          </a:effectRef>
+          <a:fontRef idx="minor">
+            <a:schemeClr val="lt1"/>
+          </a:fontRef>
+        </p:style>
+        <p:txBody>
+          <a:bodyPr rtlCol="0" anchor="ctr" wrap="square" lIns="54000" rIns="54000"/>
+          <a:lstStyle/>
+          <a:p>
+            <a:pPr algn="ctr"/>
+            <a:r>
+              <a:rPr sz="1300" b="1">
+                <a:solidFill>
+                  <a:srgbClr val="222222"/>
+                </a:solidFill>
+                <a:latin typeface="Noto Sans JP"/>
+              </a:rPr>
+              <a:t>学習設定フェーズ</a:t>
+            </a:r>
+          </a:p>
+        </p:txBody>
+      </p:sp>
+      <p:sp>
+        <p:nvSpPr>
+          <p:cNvPr id="10" name="Rounded Rectangle 9"/>
+          <p:cNvSpPr/>
+          <p:nvPr/>
+        </p:nvSpPr>
+        <p:spPr>
+          <a:xfrm>
+            <a:off x="4356000" y="1548000"/>
+            <a:ext cx="3456000" cy="468000"/>
+          </a:xfrm>
+          <a:prstGeom prst="roundRect">
+            <a:avLst/>
+          </a:prstGeom>
+          <a:solidFill>
+            <a:srgbClr val="FFF9C4"/>
+          </a:solidFill>
+          <a:ln w="15875">
+            <a:solidFill>
+              <a:srgbClr val="F9A825"/>
+            </a:solidFill>
+            <a:prstDash val="dash"/>
+          </a:ln>
+          <a:effectLst/>
+        </p:spPr>
+        <p:style>
+          <a:lnRef idx="1">
+            <a:schemeClr val="accent1"/>
+          </a:lnRef>
+          <a:fillRef idx="3">
+            <a:schemeClr val="accent1"/>
+          </a:fillRef>
+          <a:effectRef idx="2">
+            <a:schemeClr val="accent1"/>
+          </a:effectRef>
+          <a:fontRef idx="minor">
+            <a:schemeClr val="lt1"/>
+          </a:fontRef>
+        </p:style>
+        <p:txBody>
+          <a:bodyPr rtlCol="0" anchor="ctr" wrap="square" lIns="54000" rIns="54000"/>
+          <a:lstStyle/>
+          <a:p>
+            <a:pPr algn="ctr"/>
+            <a:r>
+              <a:rPr sz="1200" b="0">
+                <a:solidFill>
+                  <a:srgbClr val="222222"/>
+                </a:solidFill>
+                <a:latin typeface="Noto Sans JP"/>
+              </a:rPr>
+              <a:t/>
+            </a:r>
+          </a:p>
+        </p:txBody>
+      </p:sp>
+      <p:sp>
+        <p:nvSpPr>
+          <p:cNvPr id="11" name="Rounded Rectangle 10"/>
+          <p:cNvSpPr/>
+          <p:nvPr/>
+        </p:nvSpPr>
+        <p:spPr>
+          <a:xfrm>
+            <a:off x="4356000" y="2106000"/>
+            <a:ext cx="3456000" cy="468000"/>
+          </a:xfrm>
+          <a:prstGeom prst="roundRect">
+            <a:avLst/>
+          </a:prstGeom>
+          <a:solidFill>
+            <a:srgbClr val="FFF9C4"/>
+          </a:solidFill>
+          <a:ln w="15875">
+            <a:solidFill>
+              <a:srgbClr val="F9A825"/>
+            </a:solidFill>
+            <a:prstDash val="dash"/>
+          </a:ln>
+          <a:effectLst/>
+        </p:spPr>
+        <p:style>
+          <a:lnRef idx="1">
+            <a:schemeClr val="accent1"/>
+          </a:lnRef>
+          <a:fillRef idx="3">
+            <a:schemeClr val="accent1"/>
+          </a:fillRef>
+          <a:effectRef idx="2">
+            <a:schemeClr val="accent1"/>
+          </a:effectRef>
+          <a:fontRef idx="minor">
+            <a:schemeClr val="lt1"/>
+          </a:fontRef>
+        </p:style>
+        <p:txBody>
+          <a:bodyPr rtlCol="0" anchor="ctr" wrap="square" lIns="54000" rIns="54000"/>
+          <a:lstStyle/>
+          <a:p>
+            <a:pPr algn="ctr"/>
+            <a:r>
+              <a:rPr sz="1200" b="0">
+                <a:solidFill>
+                  <a:srgbClr val="222222"/>
+                </a:solidFill>
+                <a:latin typeface="Noto Sans JP"/>
+              </a:rPr>
+              <a:t/>
+            </a:r>
+          </a:p>
+        </p:txBody>
+      </p:sp>
+      <p:sp>
+        <p:nvSpPr>
+          <p:cNvPr id="12" name="Rounded Rectangle 11"/>
+          <p:cNvSpPr/>
+          <p:nvPr/>
+        </p:nvSpPr>
+        <p:spPr>
+          <a:xfrm>
+            <a:off x="4356000" y="2664000"/>
+            <a:ext cx="3456000" cy="468000"/>
+          </a:xfrm>
+          <a:prstGeom prst="roundRect">
+            <a:avLst/>
+          </a:prstGeom>
+          <a:solidFill>
+            <a:srgbClr val="FFF9C4"/>
+          </a:solidFill>
+          <a:ln w="15875">
+            <a:solidFill>
+              <a:srgbClr val="F9A825"/>
+            </a:solidFill>
+            <a:prstDash val="dash"/>
+          </a:ln>
+          <a:effectLst/>
+        </p:spPr>
+        <p:style>
+          <a:lnRef idx="1">
+            <a:schemeClr val="accent1"/>
+          </a:lnRef>
+          <a:fillRef idx="3">
+            <a:schemeClr val="accent1"/>
+          </a:fillRef>
+          <a:effectRef idx="2">
+            <a:schemeClr val="accent1"/>
+          </a:effectRef>
+          <a:fontRef idx="minor">
+            <a:schemeClr val="lt1"/>
+          </a:fontRef>
+        </p:style>
+        <p:txBody>
+          <a:bodyPr rtlCol="0" anchor="ctr" wrap="square" lIns="54000" rIns="54000"/>
+          <a:lstStyle/>
+          <a:p>
+            <a:pPr algn="ctr"/>
+            <a:r>
+              <a:rPr sz="1200" b="0">
+                <a:solidFill>
+                  <a:srgbClr val="222222"/>
+                </a:solidFill>
+                <a:latin typeface="Noto Sans JP"/>
+              </a:rPr>
+              <a:t/>
+            </a:r>
+          </a:p>
+        </p:txBody>
+      </p:sp>
+      <p:sp>
+        <p:nvSpPr>
+          <p:cNvPr id="13" name="Rounded Rectangle 12"/>
+          <p:cNvSpPr/>
+          <p:nvPr/>
+        </p:nvSpPr>
+        <p:spPr>
+          <a:xfrm>
+            <a:off x="4356000" y="3221999"/>
+            <a:ext cx="3456000" cy="468000"/>
+          </a:xfrm>
+          <a:prstGeom prst="roundRect">
+            <a:avLst/>
+          </a:prstGeom>
+          <a:solidFill>
+            <a:srgbClr val="FFF9C4"/>
+          </a:solidFill>
+          <a:ln w="15875">
+            <a:solidFill>
+              <a:srgbClr val="F9A825"/>
+            </a:solidFill>
+            <a:prstDash val="dash"/>
+          </a:ln>
+          <a:effectLst/>
+        </p:spPr>
+        <p:style>
+          <a:lnRef idx="1">
+            <a:schemeClr val="accent1"/>
+          </a:lnRef>
+          <a:fillRef idx="3">
+            <a:schemeClr val="accent1"/>
+          </a:fillRef>
+          <a:effectRef idx="2">
+            <a:schemeClr val="accent1"/>
+          </a:effectRef>
+          <a:fontRef idx="minor">
+            <a:schemeClr val="lt1"/>
+          </a:fontRef>
+        </p:style>
+        <p:txBody>
+          <a:bodyPr rtlCol="0" anchor="ctr" wrap="square" lIns="54000" rIns="54000"/>
+          <a:lstStyle/>
+          <a:p>
+            <a:pPr algn="ctr"/>
+            <a:r>
+              <a:rPr sz="1200" b="0">
+                <a:solidFill>
+                  <a:srgbClr val="222222"/>
+                </a:solidFill>
+                <a:latin typeface="Noto Sans JP"/>
+              </a:rPr>
+              <a:t/>
+            </a:r>
+          </a:p>
+        </p:txBody>
+      </p:sp>
+      <p:sp>
+        <p:nvSpPr>
+          <p:cNvPr id="14" name="Rounded Rectangle 13"/>
+          <p:cNvSpPr/>
+          <p:nvPr/>
+        </p:nvSpPr>
+        <p:spPr>
+          <a:xfrm>
+            <a:off x="4356000" y="3780000"/>
+            <a:ext cx="3456000" cy="468000"/>
+          </a:xfrm>
+          <a:prstGeom prst="roundRect">
+            <a:avLst/>
+          </a:prstGeom>
+          <a:solidFill>
+            <a:srgbClr val="FFF9C4"/>
+          </a:solidFill>
+          <a:ln w="15875">
+            <a:solidFill>
+              <a:srgbClr val="F9A825"/>
+            </a:solidFill>
+            <a:prstDash val="dash"/>
+          </a:ln>
+          <a:effectLst/>
+        </p:spPr>
+        <p:style>
+          <a:lnRef idx="1">
+            <a:schemeClr val="accent1"/>
+          </a:lnRef>
+          <a:fillRef idx="3">
+            <a:schemeClr val="accent1"/>
+          </a:fillRef>
+          <a:effectRef idx="2">
+            <a:schemeClr val="accent1"/>
+          </a:effectRef>
+          <a:fontRef idx="minor">
+            <a:schemeClr val="lt1"/>
+          </a:fontRef>
+        </p:style>
+        <p:txBody>
+          <a:bodyPr rtlCol="0" anchor="ctr" wrap="square" lIns="54000" rIns="54000"/>
+          <a:lstStyle/>
+          <a:p>
+            <a:pPr algn="ctr"/>
+            <a:r>
+              <a:rPr sz="1200" b="0">
+                <a:solidFill>
+                  <a:srgbClr val="222222"/>
+                </a:solidFill>
+                <a:latin typeface="Noto Sans JP"/>
+              </a:rPr>
+              <a:t/>
+            </a:r>
+          </a:p>
+        </p:txBody>
+      </p:sp>
+      <p:sp>
+        <p:nvSpPr>
+          <p:cNvPr id="15" name="Rectangle 14"/>
+          <p:cNvSpPr/>
+          <p:nvPr/>
+        </p:nvSpPr>
+        <p:spPr>
+          <a:xfrm>
+            <a:off x="8352000" y="1080000"/>
+            <a:ext cx="3456000" cy="396000"/>
+          </a:xfrm>
+          <a:prstGeom prst="rect">
+            <a:avLst/>
+          </a:prstGeom>
+          <a:solidFill>
+            <a:srgbClr val="FFFFFF"/>
+          </a:solidFill>
+          <a:ln w="15875">
+            <a:solidFill>
+              <a:srgbClr val="888888"/>
+            </a:solidFill>
+          </a:ln>
+          <a:effectLst/>
+        </p:spPr>
+        <p:style>
+          <a:lnRef idx="1">
+            <a:schemeClr val="accent1"/>
+          </a:lnRef>
+          <a:fillRef idx="3">
+            <a:schemeClr val="accent1"/>
+          </a:fillRef>
+          <a:effectRef idx="2">
+            <a:schemeClr val="accent1"/>
+          </a:effectRef>
+          <a:fontRef idx="minor">
+            <a:schemeClr val="lt1"/>
+          </a:fontRef>
+        </p:style>
+        <p:txBody>
+          <a:bodyPr rtlCol="0" anchor="ctr" wrap="square" lIns="54000" rIns="54000"/>
+          <a:lstStyle/>
+          <a:p>
+            <a:pPr algn="ctr"/>
+            <a:r>
+              <a:rPr sz="1300" b="1">
+                <a:solidFill>
+                  <a:srgbClr val="222222"/>
+                </a:solidFill>
+                <a:latin typeface="Noto Sans JP"/>
+              </a:rPr>
+              <a:t>学習，評価フェーズ</a:t>
+            </a:r>
+          </a:p>
+        </p:txBody>
+      </p:sp>
+      <p:sp>
+        <p:nvSpPr>
+          <p:cNvPr id="16" name="Rounded Rectangle 15"/>
+          <p:cNvSpPr/>
+          <p:nvPr/>
+        </p:nvSpPr>
+        <p:spPr>
+          <a:xfrm>
+            <a:off x="8352000" y="1548000"/>
+            <a:ext cx="3456000" cy="468000"/>
+          </a:xfrm>
+          <a:prstGeom prst="roundRect">
+            <a:avLst/>
+          </a:prstGeom>
+          <a:solidFill>
+            <a:srgbClr val="FFF9C4"/>
+          </a:solidFill>
+          <a:ln w="15875">
+            <a:solidFill>
+              <a:srgbClr val="F9A825"/>
+            </a:solidFill>
+            <a:prstDash val="dash"/>
+          </a:ln>
+          <a:effectLst/>
+        </p:spPr>
+        <p:style>
+          <a:lnRef idx="1">
+            <a:schemeClr val="accent1"/>
+          </a:lnRef>
+          <a:fillRef idx="3">
+            <a:schemeClr val="accent1"/>
+          </a:fillRef>
+          <a:effectRef idx="2">
+            <a:schemeClr val="accent1"/>
+          </a:effectRef>
+          <a:fontRef idx="minor">
+            <a:schemeClr val="lt1"/>
+          </a:fontRef>
+        </p:style>
+        <p:txBody>
+          <a:bodyPr rtlCol="0" anchor="ctr" wrap="square" lIns="54000" rIns="54000"/>
+          <a:lstStyle/>
+          <a:p>
+            <a:pPr algn="ctr"/>
+            <a:r>
+              <a:rPr sz="1200" b="0">
+                <a:solidFill>
+                  <a:srgbClr val="222222"/>
+                </a:solidFill>
+                <a:latin typeface="Noto Sans JP"/>
+              </a:rPr>
+              <a:t/>
+            </a:r>
+          </a:p>
+        </p:txBody>
+      </p:sp>
+      <p:sp>
+        <p:nvSpPr>
+          <p:cNvPr id="17" name="Rounded Rectangle 16"/>
+          <p:cNvSpPr/>
+          <p:nvPr/>
+        </p:nvSpPr>
+        <p:spPr>
+          <a:xfrm>
+            <a:off x="8352000" y="2106000"/>
+            <a:ext cx="3456000" cy="468000"/>
+          </a:xfrm>
+          <a:prstGeom prst="roundRect">
+            <a:avLst/>
+          </a:prstGeom>
+          <a:solidFill>
+            <a:srgbClr val="FFF9C4"/>
+          </a:solidFill>
+          <a:ln w="15875">
+            <a:solidFill>
+              <a:srgbClr val="F9A825"/>
+            </a:solidFill>
+            <a:prstDash val="dash"/>
+          </a:ln>
+          <a:effectLst/>
+        </p:spPr>
+        <p:style>
+          <a:lnRef idx="1">
+            <a:schemeClr val="accent1"/>
+          </a:lnRef>
+          <a:fillRef idx="3">
+            <a:schemeClr val="accent1"/>
+          </a:fillRef>
+          <a:effectRef idx="2">
+            <a:schemeClr val="accent1"/>
+          </a:effectRef>
+          <a:fontRef idx="minor">
+            <a:schemeClr val="lt1"/>
+          </a:fontRef>
+        </p:style>
+        <p:txBody>
+          <a:bodyPr rtlCol="0" anchor="ctr" wrap="square" lIns="54000" rIns="54000"/>
+          <a:lstStyle/>
+          <a:p>
+            <a:pPr algn="ctr"/>
+            <a:r>
+              <a:rPr sz="1200" b="0">
+                <a:solidFill>
+                  <a:srgbClr val="222222"/>
+                </a:solidFill>
+                <a:latin typeface="Noto Sans JP"/>
+              </a:rPr>
+              <a:t/>
+            </a:r>
+          </a:p>
+        </p:txBody>
+      </p:sp>
+      <p:sp>
+        <p:nvSpPr>
+          <p:cNvPr id="18" name="Rounded Rectangle 17"/>
+          <p:cNvSpPr/>
+          <p:nvPr/>
+        </p:nvSpPr>
+        <p:spPr>
+          <a:xfrm>
+            <a:off x="8352000" y="2664000"/>
+            <a:ext cx="3456000" cy="468000"/>
+          </a:xfrm>
+          <a:prstGeom prst="roundRect">
+            <a:avLst/>
+          </a:prstGeom>
+          <a:solidFill>
+            <a:srgbClr val="FFF9C4"/>
+          </a:solidFill>
+          <a:ln w="15875">
+            <a:solidFill>
+              <a:srgbClr val="F9A825"/>
+            </a:solidFill>
+            <a:prstDash val="dash"/>
+          </a:ln>
+          <a:effectLst/>
+        </p:spPr>
+        <p:style>
+          <a:lnRef idx="1">
+            <a:schemeClr val="accent1"/>
+          </a:lnRef>
+          <a:fillRef idx="3">
+            <a:schemeClr val="accent1"/>
+          </a:fillRef>
+          <a:effectRef idx="2">
+            <a:schemeClr val="accent1"/>
+          </a:effectRef>
+          <a:fontRef idx="minor">
+            <a:schemeClr val="lt1"/>
+          </a:fontRef>
+        </p:style>
+        <p:txBody>
+          <a:bodyPr rtlCol="0" anchor="ctr" wrap="square" lIns="54000" rIns="54000"/>
+          <a:lstStyle/>
+          <a:p>
+            <a:pPr algn="ctr"/>
+            <a:r>
+              <a:rPr sz="1200" b="0">
+                <a:solidFill>
+                  <a:srgbClr val="222222"/>
+                </a:solidFill>
+                <a:latin typeface="Noto Sans JP"/>
+              </a:rPr>
+              <a:t/>
+            </a:r>
+          </a:p>
+        </p:txBody>
+      </p:sp>
+      <p:sp>
+        <p:nvSpPr>
+          <p:cNvPr id="19" name="Rounded Rectangle 18"/>
+          <p:cNvSpPr/>
+          <p:nvPr/>
+        </p:nvSpPr>
+        <p:spPr>
+          <a:xfrm>
+            <a:off x="360000" y="4536000"/>
+            <a:ext cx="1835999" cy="468000"/>
+          </a:xfrm>
+          <a:prstGeom prst="roundRect">
+            <a:avLst/>
+          </a:prstGeom>
+          <a:solidFill>
+            <a:srgbClr val="FFFFFF"/>
+          </a:solidFill>
+          <a:ln w="15875">
+            <a:solidFill>
+              <a:srgbClr val="222222"/>
+            </a:solidFill>
+          </a:ln>
+          <a:effectLst/>
+        </p:spPr>
+        <p:style>
+          <a:lnRef idx="1">
+            <a:schemeClr val="accent1"/>
+          </a:lnRef>
+          <a:fillRef idx="3">
+            <a:schemeClr val="accent1"/>
+          </a:fillRef>
+          <a:effectRef idx="2">
+            <a:schemeClr val="accent1"/>
+          </a:effectRef>
+          <a:fontRef idx="minor">
+            <a:schemeClr val="lt1"/>
+          </a:fontRef>
+        </p:style>
+        <p:txBody>
+          <a:bodyPr rtlCol="0" anchor="ctr" wrap="square" lIns="54000" rIns="54000"/>
+          <a:lstStyle/>
+          <a:p>
+            <a:pPr algn="ctr"/>
+            <a:r>
+              <a:rPr sz="1100" b="1">
+                <a:solidFill>
+                  <a:srgbClr val="222222"/>
+                </a:solidFill>
+                <a:latin typeface="Noto Sans JP"/>
+              </a:rPr>
+              <a:t>損失関数の定義</a:t>
+            </a:r>
+          </a:p>
+        </p:txBody>
+      </p:sp>
+      <p:sp>
+        <p:nvSpPr>
+          <p:cNvPr id="20" name="Rounded Rectangle 19"/>
+          <p:cNvSpPr/>
+          <p:nvPr/>
+        </p:nvSpPr>
+        <p:spPr>
+          <a:xfrm>
+            <a:off x="2304000" y="4536000"/>
+            <a:ext cx="1835999" cy="468000"/>
+          </a:xfrm>
+          <a:prstGeom prst="roundRect">
+            <a:avLst/>
+          </a:prstGeom>
+          <a:solidFill>
+            <a:srgbClr val="FFFFFF"/>
+          </a:solidFill>
+          <a:ln w="15875">
+            <a:solidFill>
+              <a:srgbClr val="222222"/>
+            </a:solidFill>
+          </a:ln>
+          <a:effectLst/>
+        </p:spPr>
+        <p:style>
+          <a:lnRef idx="1">
+            <a:schemeClr val="accent1"/>
+          </a:lnRef>
+          <a:fillRef idx="3">
+            <a:schemeClr val="accent1"/>
+          </a:fillRef>
+          <a:effectRef idx="2">
+            <a:schemeClr val="accent1"/>
+          </a:effectRef>
+          <a:fontRef idx="minor">
+            <a:schemeClr val="lt1"/>
+          </a:fontRef>
+        </p:style>
+        <p:txBody>
+          <a:bodyPr rtlCol="0" anchor="ctr" wrap="square" lIns="54000" rIns="54000"/>
+          <a:lstStyle/>
+          <a:p>
+            <a:pPr algn="ctr"/>
+            <a:r>
+              <a:rPr sz="1100" b="1">
+                <a:solidFill>
+                  <a:srgbClr val="222222"/>
+                </a:solidFill>
+                <a:latin typeface="Noto Sans JP"/>
+              </a:rPr>
+              <a:t>ライブラリのインポート</a:t>
+            </a:r>
+          </a:p>
+        </p:txBody>
+      </p:sp>
+      <p:sp>
+        <p:nvSpPr>
+          <p:cNvPr id="21" name="Rounded Rectangle 20"/>
+          <p:cNvSpPr/>
+          <p:nvPr/>
+        </p:nvSpPr>
+        <p:spPr>
+          <a:xfrm>
+            <a:off x="4248000" y="4536000"/>
+            <a:ext cx="1835999" cy="468000"/>
+          </a:xfrm>
+          <a:prstGeom prst="roundRect">
+            <a:avLst/>
+          </a:prstGeom>
+          <a:solidFill>
+            <a:srgbClr val="FFFFFF"/>
+          </a:solidFill>
+          <a:ln w="15875">
+            <a:solidFill>
+              <a:srgbClr val="222222"/>
+            </a:solidFill>
+          </a:ln>
+          <a:effectLst/>
+        </p:spPr>
+        <p:style>
+          <a:lnRef idx="1">
+            <a:schemeClr val="accent1"/>
+          </a:lnRef>
+          <a:fillRef idx="3">
+            <a:schemeClr val="accent1"/>
+          </a:fillRef>
+          <a:effectRef idx="2">
+            <a:schemeClr val="accent1"/>
+          </a:effectRef>
+          <a:fontRef idx="minor">
+            <a:schemeClr val="lt1"/>
+          </a:fontRef>
+        </p:style>
+        <p:txBody>
+          <a:bodyPr rtlCol="0" anchor="ctr" wrap="square" lIns="54000" rIns="54000"/>
+          <a:lstStyle/>
+          <a:p>
+            <a:pPr algn="ctr"/>
+            <a:r>
+              <a:rPr sz="1100" b="1">
+                <a:solidFill>
+                  <a:srgbClr val="222222"/>
+                </a:solidFill>
+                <a:latin typeface="Noto Sans JP"/>
+              </a:rPr>
+              <a:t>モデル学習＆検証</a:t>
+            </a:r>
+          </a:p>
+        </p:txBody>
+      </p:sp>
+      <p:sp>
+        <p:nvSpPr>
+          <p:cNvPr id="22" name="Rounded Rectangle 21"/>
+          <p:cNvSpPr/>
+          <p:nvPr/>
+        </p:nvSpPr>
+        <p:spPr>
+          <a:xfrm>
+            <a:off x="6192000" y="4536000"/>
+            <a:ext cx="1835999" cy="468000"/>
+          </a:xfrm>
+          <a:prstGeom prst="roundRect">
+            <a:avLst/>
+          </a:prstGeom>
+          <a:solidFill>
+            <a:srgbClr val="FFFFFF"/>
+          </a:solidFill>
+          <a:ln w="15875">
+            <a:solidFill>
+              <a:srgbClr val="222222"/>
+            </a:solidFill>
+          </a:ln>
+          <a:effectLst/>
+        </p:spPr>
+        <p:style>
+          <a:lnRef idx="1">
+            <a:schemeClr val="accent1"/>
+          </a:lnRef>
+          <a:fillRef idx="3">
+            <a:schemeClr val="accent1"/>
+          </a:fillRef>
+          <a:effectRef idx="2">
+            <a:schemeClr val="accent1"/>
+          </a:effectRef>
+          <a:fontRef idx="minor">
+            <a:schemeClr val="lt1"/>
+          </a:fontRef>
+        </p:style>
+        <p:txBody>
+          <a:bodyPr rtlCol="0" anchor="ctr" wrap="square" lIns="54000" rIns="54000"/>
+          <a:lstStyle/>
+          <a:p>
+            <a:pPr algn="ctr"/>
+            <a:r>
+              <a:rPr sz="1100" b="1">
+                <a:solidFill>
+                  <a:srgbClr val="222222"/>
+                </a:solidFill>
+                <a:latin typeface="Noto Sans JP"/>
+              </a:rPr>
+              <a:t>デバイスの設定</a:t>
+            </a:r>
+          </a:p>
+        </p:txBody>
+      </p:sp>
+      <p:sp>
+        <p:nvSpPr>
+          <p:cNvPr id="23" name="Rounded Rectangle 22"/>
+          <p:cNvSpPr/>
+          <p:nvPr/>
+        </p:nvSpPr>
+        <p:spPr>
+          <a:xfrm>
+            <a:off x="8136000" y="4536000"/>
+            <a:ext cx="1835999" cy="468000"/>
+          </a:xfrm>
+          <a:prstGeom prst="roundRect">
+            <a:avLst/>
+          </a:prstGeom>
+          <a:solidFill>
+            <a:srgbClr val="FFFFFF"/>
+          </a:solidFill>
+          <a:ln w="15875">
+            <a:solidFill>
+              <a:srgbClr val="222222"/>
+            </a:solidFill>
+          </a:ln>
+          <a:effectLst/>
+        </p:spPr>
+        <p:style>
+          <a:lnRef idx="1">
+            <a:schemeClr val="accent1"/>
+          </a:lnRef>
+          <a:fillRef idx="3">
+            <a:schemeClr val="accent1"/>
+          </a:fillRef>
+          <a:effectRef idx="2">
+            <a:schemeClr val="accent1"/>
+          </a:effectRef>
+          <a:fontRef idx="minor">
+            <a:schemeClr val="lt1"/>
+          </a:fontRef>
+        </p:style>
+        <p:txBody>
+          <a:bodyPr rtlCol="0" anchor="ctr" wrap="square" lIns="54000" rIns="54000"/>
+          <a:lstStyle/>
+          <a:p>
+            <a:pPr algn="ctr"/>
+            <a:r>
+              <a:rPr sz="1100" b="1">
+                <a:solidFill>
+                  <a:srgbClr val="222222"/>
+                </a:solidFill>
+                <a:latin typeface="Noto Sans JP"/>
+              </a:rPr>
+              <a:t>データセットの準備</a:t>
+            </a:r>
+          </a:p>
+        </p:txBody>
+      </p:sp>
+      <p:sp>
+        <p:nvSpPr>
+          <p:cNvPr id="24" name="Rounded Rectangle 23"/>
+          <p:cNvSpPr/>
+          <p:nvPr/>
+        </p:nvSpPr>
+        <p:spPr>
+          <a:xfrm>
+            <a:off x="10080000" y="4536000"/>
+            <a:ext cx="1835999" cy="468000"/>
+          </a:xfrm>
+          <a:prstGeom prst="roundRect">
+            <a:avLst/>
+          </a:prstGeom>
+          <a:solidFill>
+            <a:srgbClr val="FFFFFF"/>
+          </a:solidFill>
+          <a:ln w="15875">
+            <a:solidFill>
+              <a:srgbClr val="222222"/>
+            </a:solidFill>
+          </a:ln>
+          <a:effectLst/>
+        </p:spPr>
+        <p:style>
+          <a:lnRef idx="1">
+            <a:schemeClr val="accent1"/>
+          </a:lnRef>
+          <a:fillRef idx="3">
+            <a:schemeClr val="accent1"/>
+          </a:fillRef>
+          <a:effectRef idx="2">
+            <a:schemeClr val="accent1"/>
+          </a:effectRef>
+          <a:fontRef idx="minor">
+            <a:schemeClr val="lt1"/>
+          </a:fontRef>
+        </p:style>
+        <p:txBody>
+          <a:bodyPr rtlCol="0" anchor="ctr" wrap="square" lIns="54000" rIns="54000"/>
+          <a:lstStyle/>
+          <a:p>
+            <a:pPr algn="ctr"/>
+            <a:r>
+              <a:rPr sz="1100" b="1">
+                <a:solidFill>
+                  <a:srgbClr val="222222"/>
+                </a:solidFill>
+                <a:latin typeface="Noto Sans JP"/>
+              </a:rPr>
+              <a:t>モデル性能評価</a:t>
+            </a:r>
+          </a:p>
+        </p:txBody>
+      </p:sp>
+      <p:sp>
+        <p:nvSpPr>
+          <p:cNvPr id="25" name="Rounded Rectangle 24"/>
+          <p:cNvSpPr/>
+          <p:nvPr/>
+        </p:nvSpPr>
+        <p:spPr>
+          <a:xfrm>
+            <a:off x="360000" y="5112000"/>
+            <a:ext cx="1835999" cy="468000"/>
+          </a:xfrm>
+          <a:prstGeom prst="roundRect">
+            <a:avLst/>
+          </a:prstGeom>
+          <a:solidFill>
+            <a:srgbClr val="FFFFFF"/>
+          </a:solidFill>
+          <a:ln w="15875">
+            <a:solidFill>
+              <a:srgbClr val="222222"/>
+            </a:solidFill>
+          </a:ln>
+          <a:effectLst/>
+        </p:spPr>
+        <p:style>
+          <a:lnRef idx="1">
+            <a:schemeClr val="accent1"/>
+          </a:lnRef>
+          <a:fillRef idx="3">
+            <a:schemeClr val="accent1"/>
+          </a:fillRef>
+          <a:effectRef idx="2">
+            <a:schemeClr val="accent1"/>
+          </a:effectRef>
+          <a:fontRef idx="minor">
+            <a:schemeClr val="lt1"/>
+          </a:fontRef>
+        </p:style>
+        <p:txBody>
+          <a:bodyPr rtlCol="0" anchor="ctr" wrap="square" lIns="54000" rIns="54000"/>
+          <a:lstStyle/>
+          <a:p>
+            <a:pPr algn="ctr"/>
+            <a:r>
+              <a:rPr sz="1100" b="1">
+                <a:solidFill>
+                  <a:srgbClr val="222222"/>
+                </a:solidFill>
+                <a:latin typeface="Noto Sans JP"/>
+              </a:rPr>
+              <a:t>ネットワークの定義</a:t>
+            </a:r>
+          </a:p>
+        </p:txBody>
+      </p:sp>
+      <p:sp>
+        <p:nvSpPr>
+          <p:cNvPr id="26" name="Rounded Rectangle 25"/>
+          <p:cNvSpPr/>
+          <p:nvPr/>
+        </p:nvSpPr>
+        <p:spPr>
+          <a:xfrm>
+            <a:off x="2304000" y="5112000"/>
+            <a:ext cx="1835999" cy="468000"/>
+          </a:xfrm>
+          <a:prstGeom prst="roundRect">
+            <a:avLst/>
+          </a:prstGeom>
+          <a:solidFill>
+            <a:srgbClr val="FFFFFF"/>
+          </a:solidFill>
+          <a:ln w="15875">
+            <a:solidFill>
+              <a:srgbClr val="222222"/>
+            </a:solidFill>
+          </a:ln>
+          <a:effectLst/>
+        </p:spPr>
+        <p:style>
+          <a:lnRef idx="1">
+            <a:schemeClr val="accent1"/>
+          </a:lnRef>
+          <a:fillRef idx="3">
+            <a:schemeClr val="accent1"/>
+          </a:fillRef>
+          <a:effectRef idx="2">
+            <a:schemeClr val="accent1"/>
+          </a:effectRef>
+          <a:fontRef idx="minor">
+            <a:schemeClr val="lt1"/>
+          </a:fontRef>
+        </p:style>
+        <p:txBody>
+          <a:bodyPr rtlCol="0" anchor="ctr" wrap="square" lIns="54000" rIns="54000"/>
+          <a:lstStyle/>
+          <a:p>
+            <a:pPr algn="ctr"/>
+            <a:r>
+              <a:rPr sz="1100" b="1">
+                <a:solidFill>
+                  <a:srgbClr val="222222"/>
+                </a:solidFill>
+                <a:latin typeface="Noto Sans JP"/>
+              </a:rPr>
+              <a:t>データの前処理</a:t>
+            </a:r>
+          </a:p>
+        </p:txBody>
+      </p:sp>
+      <p:sp>
+        <p:nvSpPr>
+          <p:cNvPr id="27" name="Rounded Rectangle 26"/>
+          <p:cNvSpPr/>
+          <p:nvPr/>
+        </p:nvSpPr>
+        <p:spPr>
+          <a:xfrm>
+            <a:off x="4248000" y="5112000"/>
+            <a:ext cx="1835999" cy="468000"/>
+          </a:xfrm>
+          <a:prstGeom prst="roundRect">
+            <a:avLst/>
+          </a:prstGeom>
+          <a:solidFill>
+            <a:srgbClr val="FFFFFF"/>
+          </a:solidFill>
+          <a:ln w="15875">
+            <a:solidFill>
+              <a:srgbClr val="222222"/>
+            </a:solidFill>
+          </a:ln>
+          <a:effectLst/>
+        </p:spPr>
+        <p:style>
+          <a:lnRef idx="1">
+            <a:schemeClr val="accent1"/>
+          </a:lnRef>
+          <a:fillRef idx="3">
+            <a:schemeClr val="accent1"/>
+          </a:fillRef>
+          <a:effectRef idx="2">
+            <a:schemeClr val="accent1"/>
+          </a:effectRef>
+          <a:fontRef idx="minor">
+            <a:schemeClr val="lt1"/>
+          </a:fontRef>
+        </p:style>
+        <p:txBody>
+          <a:bodyPr rtlCol="0" anchor="ctr" wrap="square" lIns="54000" rIns="54000"/>
+          <a:lstStyle/>
+          <a:p>
+            <a:pPr algn="ctr"/>
+            <a:r>
+              <a:rPr sz="1100" b="1">
+                <a:solidFill>
+                  <a:srgbClr val="222222"/>
+                </a:solidFill>
+                <a:latin typeface="Noto Sans JP"/>
+              </a:rPr>
+              <a:t>学習結果の可視化</a:t>
+            </a:r>
+          </a:p>
+        </p:txBody>
+      </p:sp>
+      <p:sp>
+        <p:nvSpPr>
+          <p:cNvPr id="28" name="Rounded Rectangle 27"/>
+          <p:cNvSpPr/>
+          <p:nvPr/>
+        </p:nvSpPr>
+        <p:spPr>
+          <a:xfrm>
+            <a:off x="6192000" y="5112000"/>
+            <a:ext cx="1835999" cy="468000"/>
+          </a:xfrm>
+          <a:prstGeom prst="roundRect">
+            <a:avLst/>
+          </a:prstGeom>
+          <a:solidFill>
+            <a:srgbClr val="FFFFFF"/>
+          </a:solidFill>
+          <a:ln w="15875">
+            <a:solidFill>
+              <a:srgbClr val="222222"/>
+            </a:solidFill>
+          </a:ln>
+          <a:effectLst/>
+        </p:spPr>
+        <p:style>
+          <a:lnRef idx="1">
+            <a:schemeClr val="accent1"/>
+          </a:lnRef>
+          <a:fillRef idx="3">
+            <a:schemeClr val="accent1"/>
+          </a:fillRef>
+          <a:effectRef idx="2">
+            <a:schemeClr val="accent1"/>
+          </a:effectRef>
+          <a:fontRef idx="minor">
+            <a:schemeClr val="lt1"/>
+          </a:fontRef>
+        </p:style>
+        <p:txBody>
+          <a:bodyPr rtlCol="0" anchor="ctr" wrap="square" lIns="54000" rIns="54000"/>
+          <a:lstStyle/>
+          <a:p>
+            <a:pPr algn="ctr"/>
+            <a:r>
+              <a:rPr sz="1100" b="1">
+                <a:solidFill>
+                  <a:srgbClr val="222222"/>
+                </a:solidFill>
+                <a:latin typeface="Noto Sans JP"/>
+              </a:rPr>
+              <a:t>最適化関数の定義</a:t>
+            </a:r>
+          </a:p>
+        </p:txBody>
+      </p:sp>
+      <p:sp>
+        <p:nvSpPr>
+          <p:cNvPr id="29" name="Rounded Rectangle 28"/>
+          <p:cNvSpPr/>
+          <p:nvPr/>
+        </p:nvSpPr>
+        <p:spPr>
+          <a:xfrm>
+            <a:off x="8136000" y="5112000"/>
+            <a:ext cx="1835999" cy="468000"/>
+          </a:xfrm>
+          <a:prstGeom prst="roundRect">
+            <a:avLst/>
+          </a:prstGeom>
+          <a:solidFill>
+            <a:srgbClr val="FFFFFF"/>
+          </a:solidFill>
+          <a:ln w="15875">
+            <a:solidFill>
+              <a:srgbClr val="222222"/>
+            </a:solidFill>
+          </a:ln>
+          <a:effectLst/>
+        </p:spPr>
+        <p:style>
+          <a:lnRef idx="1">
+            <a:schemeClr val="accent1"/>
+          </a:lnRef>
+          <a:fillRef idx="3">
+            <a:schemeClr val="accent1"/>
+          </a:fillRef>
+          <a:effectRef idx="2">
+            <a:schemeClr val="accent1"/>
+          </a:effectRef>
+          <a:fontRef idx="minor">
+            <a:schemeClr val="lt1"/>
+          </a:fontRef>
+        </p:style>
+        <p:txBody>
+          <a:bodyPr rtlCol="0" anchor="ctr" wrap="square" lIns="54000" rIns="54000"/>
+          <a:lstStyle/>
+          <a:p>
+            <a:pPr algn="ctr"/>
+            <a:r>
+              <a:rPr sz="1100" b="1">
+                <a:solidFill>
+                  <a:srgbClr val="222222"/>
+                </a:solidFill>
+                <a:latin typeface="Noto Sans JP"/>
+              </a:rPr>
+              <a:t>データローダの作成</a:t>
+            </a:r>
+          </a:p>
+        </p:txBody>
+      </p:sp>
+      <p:sp>
+        <p:nvSpPr>
+          <p:cNvPr id="30" name="Rounded Rectangle 29"/>
+          <p:cNvSpPr/>
+          <p:nvPr/>
+        </p:nvSpPr>
+        <p:spPr>
+          <a:xfrm>
+            <a:off x="10080000" y="5112000"/>
+            <a:ext cx="1835999" cy="468000"/>
+          </a:xfrm>
+          <a:prstGeom prst="roundRect">
+            <a:avLst/>
+          </a:prstGeom>
+          <a:solidFill>
+            <a:srgbClr val="FFFFFF"/>
+          </a:solidFill>
+          <a:ln w="15875">
+            <a:solidFill>
+              <a:srgbClr val="222222"/>
+            </a:solidFill>
+          </a:ln>
+          <a:effectLst/>
+        </p:spPr>
+        <p:style>
+          <a:lnRef idx="1">
+            <a:schemeClr val="accent1"/>
+          </a:lnRef>
+          <a:fillRef idx="3">
+            <a:schemeClr val="accent1"/>
+          </a:fillRef>
+          <a:effectRef idx="2">
+            <a:schemeClr val="accent1"/>
+          </a:effectRef>
+          <a:fontRef idx="minor">
+            <a:schemeClr val="lt1"/>
+          </a:fontRef>
+        </p:style>
+        <p:txBody>
+          <a:bodyPr rtlCol="0" anchor="ctr" wrap="square" lIns="54000" rIns="54000"/>
+          <a:lstStyle/>
+          <a:p>
+            <a:pPr algn="ctr"/>
+            <a:r>
+              <a:rPr sz="1100" b="1">
+                <a:solidFill>
+                  <a:srgbClr val="222222"/>
+                </a:solidFill>
+                <a:latin typeface="Noto Sans JP"/>
+              </a:rPr>
+              <a:t>入力データの形状確認</a:t>
+            </a:r>
+          </a:p>
+        </p:txBody>
+      </p:sp>
+      <p:sp>
+        <p:nvSpPr>
+          <p:cNvPr id="31" name="TextBox 30"/>
+          <p:cNvSpPr txBox="1"/>
+          <p:nvPr/>
+        </p:nvSpPr>
+        <p:spPr>
+          <a:xfrm>
+            <a:off x="360000" y="5760000"/>
+            <a:ext cx="11448000" cy="648000"/>
+          </a:xfrm>
+          <a:prstGeom prst="rect">
+            <a:avLst/>
+          </a:prstGeom>
+          <a:noFill/>
+        </p:spPr>
+        <p:txBody>
+          <a:bodyPr wrap="square" anchor="t" lIns="54000" rIns="54000" tIns="18000" bIns="18000">
+            <a:spAutoFit/>
+          </a:bodyPr>
+          <a:lstStyle/>
+          <a:p>
+            <a:pPr algn="l"/>
+            <a:r>
+              <a:rPr sz="1200" b="0">
+                <a:solidFill>
+                  <a:srgbClr val="222222"/>
+                </a:solidFill>
+                <a:latin typeface="Noto Sans JP"/>
+              </a:rPr>
+              <a:t>問い　(1) 「学習」が始まるのは何番目のカードからか．それより前は何をしているか．</a:t>
+            </a:r>
+          </a:p>
+          <a:p>
+            <a:pPr algn="l"/>
+            <a:r>
+              <a:rPr sz="1200" b="0">
+                <a:solidFill>
+                  <a:srgbClr val="222222"/>
+                </a:solidFill>
+                <a:latin typeface="Noto Sans JP"/>
+              </a:rPr>
+              <a:t>　　　(2) データが FashionMNIST からオリジナル画像に変わったとき，差し替えるカードはどれか．</a:t>
+            </a:r>
+          </a:p>
+        </p:txBody>
+      </p:sp>
+      <p:sp>
+        <p:nvSpPr>
+          <p:cNvPr id="32" name="TextBox 31"/>
+          <p:cNvSpPr txBox="1"/>
+          <p:nvPr/>
+        </p:nvSpPr>
+        <p:spPr>
+          <a:xfrm>
+            <a:off x="360000" y="6516000"/>
+            <a:ext cx="11448000" cy="251999"/>
+          </a:xfrm>
+          <a:prstGeom prst="rect">
+            <a:avLst/>
+          </a:prstGeom>
+          <a:noFill/>
+        </p:spPr>
+        <p:txBody>
+          <a:bodyPr wrap="square" anchor="t" lIns="54000" rIns="54000" tIns="18000" bIns="18000">
+            <a:spAutoFit/>
+          </a:bodyPr>
+          <a:lstStyle/>
+          <a:p>
+            <a:pPr algn="l"/>
+            <a:r>
+              <a:rPr sz="900" b="0">
+                <a:solidFill>
+                  <a:srgbClr val="555555"/>
+                </a:solidFill>
+                <a:latin typeface="Noto Sans JP"/>
+              </a:rPr>
+              <a:t>GW2-1　教科書 2.3 節のコードテンプレート①〜⑫に対応する．並べ終えたら番号を書き込む</a:t>
+            </a:r>
+          </a:p>
+        </p:txBody>
+      </p:sp>
+    </p:spTree>
+  </p:cSld>
+  <p:clrMapOvr>
+    <a:masterClrMapping/>
+  </p:clrMapOvr>
+</p:sld>
+</file>
+
+<file path=ppt/slides/slide8.xml><?xml version="1.0" encoding="utf-8"?>
 <p:sld xmlns:a="http://schemas.openxmlformats.org/drawingml/2006/main" xmlns:p="http://schemas.openxmlformats.org/presentationml/2006/main" xmlns:r="http://schemas.openxmlformats.org/officeDocument/2006/relationships">
   <p:cSld>
     <p:spTree>

--- a/docs/slides/aitd1_week1_groupwork.pptx
+++ b/docs/slides/aitd1_week1_groupwork.pptx
@@ -5147,7 +5147,7 @@
                 </a:solidFill>
                 <a:latin typeface="Noto Sans JP"/>
               </a:rPr>
-              <a:t>①〜④の名前と図のタイトルを入れる．矢印の向きと説明が手がかり．</a:t>
+              <a:t>①〜④の名前，予測値・正解値・損失，重み・バイアス，図のタイトルを入れる．同じ言葉は同じ欄に入る．</a:t>
             </a:r>
           </a:p>
         </p:txBody>
@@ -5588,7 +5588,7 @@
                 </a:solidFill>
                 <a:latin typeface="Noto Sans JP"/>
               </a:rPr>
-              <a:t>①〜④の名前と，それぞれの PyTorch のコードを入れる（GW3 のカードに同じコードがある）．</a:t>
+              <a:t>①〜④の名前を入れる．右の表の PyTorch のコードが手がかり（GW3 のカードにも同じコードがある）．</a:t>
             </a:r>
           </a:p>
         </p:txBody>
